--- a/Java/Java #3/EN/Java #3.pptx
+++ b/Java/Java #3/EN/Java #3.pptx
@@ -72,7 +72,7 @@
         <p:txBody>
           <a:bodyPr/>
           <a:p>
-            <a:fld id="{E179993B-9E70-4CC4-B3DC-F786D2149402}" type="slidenum">
+            <a:fld id="{5C215A0C-A718-457B-BF37-1880E3309548}" type="slidenum">
               <a:t>&lt;#&gt;</a:t>
             </a:fld>
           </a:p>
@@ -281,7 +281,7 @@
         <p:txBody>
           <a:bodyPr/>
           <a:p>
-            <a:fld id="{5A24A396-2578-4AC8-98DE-4AFF8BFA98FD}" type="slidenum">
+            <a:fld id="{AE85BCF6-295E-4292-A615-BD24A8DDDDBE}" type="slidenum">
               <a:t>&lt;#&gt;</a:t>
             </a:fld>
           </a:p>
@@ -576,7 +576,7 @@
         <p:txBody>
           <a:bodyPr/>
           <a:p>
-            <a:fld id="{CB7834FC-3BD4-4531-AACD-B3B8A7E9D39F}" type="slidenum">
+            <a:fld id="{FFCC8DF8-C3D9-4FD7-AB7E-C714A8BE2035}" type="slidenum">
               <a:t>&lt;#&gt;</a:t>
             </a:fld>
           </a:p>
@@ -957,7 +957,7 @@
         <p:txBody>
           <a:bodyPr/>
           <a:p>
-            <a:fld id="{6A6ABB42-2E85-4442-94D9-1EDF25BD4033}" type="slidenum">
+            <a:fld id="{305C7CC0-CABC-4DAA-A3A6-2322B1C16209}" type="slidenum">
               <a:t>&lt;#&gt;</a:t>
             </a:fld>
           </a:p>
@@ -1040,7 +1040,7 @@
         <p:txBody>
           <a:bodyPr/>
           <a:p>
-            <a:fld id="{5E60696D-A7EF-48EC-B799-2FCFF3FDFDE5}" type="slidenum">
+            <a:fld id="{15B53005-3BCB-4289-88B5-7FD89F09356D}" type="slidenum">
               <a:t>&lt;#&gt;</a:t>
             </a:fld>
           </a:p>
@@ -1203,7 +1203,7 @@
         <p:txBody>
           <a:bodyPr/>
           <a:p>
-            <a:fld id="{33EBC0FD-1D44-4D03-8786-2D6FFC53919F}" type="slidenum">
+            <a:fld id="{1E644947-2ACC-449B-8B50-4030C0699393}" type="slidenum">
               <a:t>&lt;#&gt;</a:t>
             </a:fld>
           </a:p>
@@ -1369,7 +1369,7 @@
         <p:txBody>
           <a:bodyPr/>
           <a:p>
-            <a:fld id="{F7E0C0BB-463B-4C4A-80A6-33C267E9FACB}" type="slidenum">
+            <a:fld id="{8C546E87-25E9-4453-A4CE-1D8A8B1C978E}" type="slidenum">
               <a:t>&lt;#&gt;</a:t>
             </a:fld>
           </a:p>
@@ -1578,7 +1578,7 @@
         <p:txBody>
           <a:bodyPr/>
           <a:p>
-            <a:fld id="{4D1AD1EF-3B5E-40EB-98EC-E76112443303}" type="slidenum">
+            <a:fld id="{0CD4E03B-C402-4B04-A41B-F4E6D0B8BA3A}" type="slidenum">
               <a:t>&lt;#&gt;</a:t>
             </a:fld>
           </a:p>
@@ -1701,7 +1701,7 @@
         <p:txBody>
           <a:bodyPr/>
           <a:p>
-            <a:fld id="{E9EBA579-C1F1-44D4-94F6-F3ADD6D05A4E}" type="slidenum">
+            <a:fld id="{C9C27530-887D-489B-B979-636614F391D8}" type="slidenum">
               <a:t>&lt;#&gt;</a:t>
             </a:fld>
           </a:p>
@@ -1822,7 +1822,7 @@
         <p:txBody>
           <a:bodyPr/>
           <a:p>
-            <a:fld id="{87BE64DB-52B2-4F7B-A168-04BBED252249}" type="slidenum">
+            <a:fld id="{4D5F5F38-F932-4D8E-AFA5-10BF54C58DD0}" type="slidenum">
               <a:t>&lt;#&gt;</a:t>
             </a:fld>
           </a:p>
@@ -2074,7 +2074,7 @@
         <p:txBody>
           <a:bodyPr/>
           <a:p>
-            <a:fld id="{D65A138A-4491-44A1-967A-5DE8435CABA5}" type="slidenum">
+            <a:fld id="{C2807947-9E56-40FD-B48C-424073FA4E77}" type="slidenum">
               <a:t>&lt;#&gt;</a:t>
             </a:fld>
           </a:p>
@@ -2237,7 +2237,7 @@
         <p:txBody>
           <a:bodyPr/>
           <a:p>
-            <a:fld id="{CE66861D-5482-49E3-8ECD-446363936328}" type="slidenum">
+            <a:fld id="{49BD4547-569E-4612-B04B-994DD86F44C6}" type="slidenum">
               <a:t>&lt;#&gt;</a:t>
             </a:fld>
           </a:p>
@@ -2489,7 +2489,7 @@
         <p:txBody>
           <a:bodyPr/>
           <a:p>
-            <a:fld id="{AC967601-C355-4BB1-85D7-D5CEDE618023}" type="slidenum">
+            <a:fld id="{EB40C941-10DE-4E04-A33D-3A599666E471}" type="slidenum">
               <a:t>&lt;#&gt;</a:t>
             </a:fld>
           </a:p>
@@ -2741,7 +2741,7 @@
         <p:txBody>
           <a:bodyPr/>
           <a:p>
-            <a:fld id="{258ECDD8-18DE-430C-B585-A785E6F2FB2E}" type="slidenum">
+            <a:fld id="{D249DD29-CDC8-4121-9DD4-90B7D3974119}" type="slidenum">
               <a:t>&lt;#&gt;</a:t>
             </a:fld>
           </a:p>
@@ -2950,7 +2950,7 @@
         <p:txBody>
           <a:bodyPr/>
           <a:p>
-            <a:fld id="{7E538CDE-7571-4BBF-B5D3-1F3FAAF17F99}" type="slidenum">
+            <a:fld id="{95053264-D791-45E5-B55E-67AFF8EF818C}" type="slidenum">
               <a:t>&lt;#&gt;</a:t>
             </a:fld>
           </a:p>
@@ -3245,7 +3245,7 @@
         <p:txBody>
           <a:bodyPr/>
           <a:p>
-            <a:fld id="{E73AA5E6-F269-49B0-9B97-4AEED9E52953}" type="slidenum">
+            <a:fld id="{CB6CD64A-F919-4080-B099-24137933E6C1}" type="slidenum">
               <a:t>&lt;#&gt;</a:t>
             </a:fld>
           </a:p>
@@ -3626,7 +3626,7 @@
         <p:txBody>
           <a:bodyPr/>
           <a:p>
-            <a:fld id="{17ECB92A-5FA2-45B8-86AB-5E1FE442C366}" type="slidenum">
+            <a:fld id="{B643E947-6D97-472C-BB98-D1BB81F55E11}" type="slidenum">
               <a:t>&lt;#&gt;</a:t>
             </a:fld>
           </a:p>
@@ -3709,7 +3709,7 @@
         <p:txBody>
           <a:bodyPr/>
           <a:p>
-            <a:fld id="{693F9A5F-ED47-495B-8948-ECA57F87E8E3}" type="slidenum">
+            <a:fld id="{D97DFCDB-86BD-4766-8E3C-F85F81391EA3}" type="slidenum">
               <a:t>&lt;#&gt;</a:t>
             </a:fld>
           </a:p>
@@ -3872,7 +3872,7 @@
         <p:txBody>
           <a:bodyPr/>
           <a:p>
-            <a:fld id="{E59C4DEB-BCDD-4B41-A039-4C6334DEA82F}" type="slidenum">
+            <a:fld id="{2E9DAD3F-A8A7-4FCD-92FF-2351FDC4158E}" type="slidenum">
               <a:t>&lt;#&gt;</a:t>
             </a:fld>
           </a:p>
@@ -4038,7 +4038,7 @@
         <p:txBody>
           <a:bodyPr/>
           <a:p>
-            <a:fld id="{9B63DF99-3E95-4D34-9A49-26D876889CCF}" type="slidenum">
+            <a:fld id="{9294A7ED-7D4E-4322-8C5D-FDDA14617462}" type="slidenum">
               <a:t>&lt;#&gt;</a:t>
             </a:fld>
           </a:p>
@@ -4247,7 +4247,7 @@
         <p:txBody>
           <a:bodyPr/>
           <a:p>
-            <a:fld id="{BE351146-C93F-4A66-BBF2-77B0590ED142}" type="slidenum">
+            <a:fld id="{B570380F-9644-4180-A928-625CD595DF93}" type="slidenum">
               <a:t>&lt;#&gt;</a:t>
             </a:fld>
           </a:p>
@@ -4370,7 +4370,7 @@
         <p:txBody>
           <a:bodyPr/>
           <a:p>
-            <a:fld id="{825D1737-ABA5-4BA7-97AE-1CE77249EAAC}" type="slidenum">
+            <a:fld id="{47334071-8D87-4A9F-BD2B-CDC8FF3D32FF}" type="slidenum">
               <a:t>&lt;#&gt;</a:t>
             </a:fld>
           </a:p>
@@ -4536,7 +4536,7 @@
         <p:txBody>
           <a:bodyPr/>
           <a:p>
-            <a:fld id="{7C0F61F9-035E-47B5-A320-C510BCC51F46}" type="slidenum">
+            <a:fld id="{1C84A6D9-DA40-40B4-A488-E2A933E2C9BA}" type="slidenum">
               <a:t>&lt;#&gt;</a:t>
             </a:fld>
           </a:p>
@@ -4657,7 +4657,7 @@
         <p:txBody>
           <a:bodyPr/>
           <a:p>
-            <a:fld id="{19224ACB-7B4C-427D-AD92-6B431259FC14}" type="slidenum">
+            <a:fld id="{7203B896-3099-4B7B-A616-8A5B399CF58D}" type="slidenum">
               <a:t>&lt;#&gt;</a:t>
             </a:fld>
           </a:p>
@@ -4909,7 +4909,7 @@
         <p:txBody>
           <a:bodyPr/>
           <a:p>
-            <a:fld id="{55781799-9E86-4416-9E07-6493F0F725CF}" type="slidenum">
+            <a:fld id="{D2FB7526-8DCD-4027-A23A-6A7AD50691BA}" type="slidenum">
               <a:t>&lt;#&gt;</a:t>
             </a:fld>
           </a:p>
@@ -5161,7 +5161,7 @@
         <p:txBody>
           <a:bodyPr/>
           <a:p>
-            <a:fld id="{BBA75AB9-F5AC-4397-8C56-E2CBA00B81BA}" type="slidenum">
+            <a:fld id="{10173B5A-1777-4C57-B18A-EF4AD13731EC}" type="slidenum">
               <a:t>&lt;#&gt;</a:t>
             </a:fld>
           </a:p>
@@ -5413,7 +5413,7 @@
         <p:txBody>
           <a:bodyPr/>
           <a:p>
-            <a:fld id="{60E2C801-85E4-4025-B184-5C63FC6DA50F}" type="slidenum">
+            <a:fld id="{FB730700-CC77-47E1-AA54-3B0FAB295EC6}" type="slidenum">
               <a:t>&lt;#&gt;</a:t>
             </a:fld>
           </a:p>
@@ -5622,7 +5622,7 @@
         <p:txBody>
           <a:bodyPr/>
           <a:p>
-            <a:fld id="{9099B12A-65EA-4CF8-A0B0-1A8708114B8A}" type="slidenum">
+            <a:fld id="{FBEE9429-C7BF-42B0-9E25-6A992AA89197}" type="slidenum">
               <a:t>&lt;#&gt;</a:t>
             </a:fld>
           </a:p>
@@ -5917,7 +5917,7 @@
         <p:txBody>
           <a:bodyPr/>
           <a:p>
-            <a:fld id="{DC0296C0-2EC2-4B42-A725-694A1FABAF3A}" type="slidenum">
+            <a:fld id="{13460C90-3A8A-48DB-B63D-A98F0C338519}" type="slidenum">
               <a:t>&lt;#&gt;</a:t>
             </a:fld>
           </a:p>
@@ -6298,7 +6298,7 @@
         <p:txBody>
           <a:bodyPr/>
           <a:p>
-            <a:fld id="{E7263FC2-4028-4466-88CC-1866D89707FE}" type="slidenum">
+            <a:fld id="{5DF65984-4310-4849-A238-2B8867C58CFD}" type="slidenum">
               <a:t>&lt;#&gt;</a:t>
             </a:fld>
           </a:p>
@@ -6381,7 +6381,7 @@
         <p:txBody>
           <a:bodyPr/>
           <a:p>
-            <a:fld id="{571D7FA7-5096-4723-9333-508AF5BC516B}" type="slidenum">
+            <a:fld id="{2C5BC07B-1FE2-481F-A892-57135E70B093}" type="slidenum">
               <a:t>&lt;#&gt;</a:t>
             </a:fld>
           </a:p>
@@ -6544,7 +6544,7 @@
         <p:txBody>
           <a:bodyPr/>
           <a:p>
-            <a:fld id="{53DEF8DC-C9E1-4A29-8D4A-8B155307F024}" type="slidenum">
+            <a:fld id="{02975408-530E-4AE9-81B4-22D77220DF1A}" type="slidenum">
               <a:t>&lt;#&gt;</a:t>
             </a:fld>
           </a:p>
@@ -6710,7 +6710,7 @@
         <p:txBody>
           <a:bodyPr/>
           <a:p>
-            <a:fld id="{540E1ED5-DEAE-4DCA-B29A-3FCD01E999EB}" type="slidenum">
+            <a:fld id="{C8A5AC6D-1F89-43A8-87E7-2EB564F1ED67}" type="slidenum">
               <a:t>&lt;#&gt;</a:t>
             </a:fld>
           </a:p>
@@ -6919,7 +6919,7 @@
         <p:txBody>
           <a:bodyPr/>
           <a:p>
-            <a:fld id="{76E8C603-0B75-4056-AE39-F53EBF6B65E3}" type="slidenum">
+            <a:fld id="{2E509831-1708-4C77-AF4F-A80E426AB01A}" type="slidenum">
               <a:t>&lt;#&gt;</a:t>
             </a:fld>
           </a:p>
@@ -7128,7 +7128,7 @@
         <p:txBody>
           <a:bodyPr/>
           <a:p>
-            <a:fld id="{A83A1DD4-0EE7-4EFE-A38D-A290006D4437}" type="slidenum">
+            <a:fld id="{B516604D-C8FB-4821-9E06-54C4CC880F32}" type="slidenum">
               <a:t>&lt;#&gt;</a:t>
             </a:fld>
           </a:p>
@@ -7251,7 +7251,7 @@
         <p:txBody>
           <a:bodyPr/>
           <a:p>
-            <a:fld id="{4AB57E6E-38E4-441C-9274-B04A11262631}" type="slidenum">
+            <a:fld id="{1719B2F6-026B-4422-AD96-2487F50737A9}" type="slidenum">
               <a:t>&lt;#&gt;</a:t>
             </a:fld>
           </a:p>
@@ -7372,7 +7372,7 @@
         <p:txBody>
           <a:bodyPr/>
           <a:p>
-            <a:fld id="{223AA6C1-F693-4956-AAFF-B776E4A8AE8A}" type="slidenum">
+            <a:fld id="{670E7F4B-FF0E-41E3-BA91-F42D58A26F26}" type="slidenum">
               <a:t>&lt;#&gt;</a:t>
             </a:fld>
           </a:p>
@@ -7624,7 +7624,7 @@
         <p:txBody>
           <a:bodyPr/>
           <a:p>
-            <a:fld id="{AAEE36A7-B8FD-4A90-810F-A6242CB61254}" type="slidenum">
+            <a:fld id="{AB6CC599-D38C-4B7A-BE56-D66F1D2FFC7B}" type="slidenum">
               <a:t>&lt;#&gt;</a:t>
             </a:fld>
           </a:p>
@@ -7876,7 +7876,7 @@
         <p:txBody>
           <a:bodyPr/>
           <a:p>
-            <a:fld id="{1DE0C311-6275-46F8-9859-9BD653CAA2B7}" type="slidenum">
+            <a:fld id="{540C0919-C172-48DF-8CED-27262BA42BB0}" type="slidenum">
               <a:t>&lt;#&gt;</a:t>
             </a:fld>
           </a:p>
@@ -8128,7 +8128,7 @@
         <p:txBody>
           <a:bodyPr/>
           <a:p>
-            <a:fld id="{92DCC085-879F-44B5-9E9E-194617D1722B}" type="slidenum">
+            <a:fld id="{AA41883C-9F6F-40EC-9401-C8E9828A422A}" type="slidenum">
               <a:t>&lt;#&gt;</a:t>
             </a:fld>
           </a:p>
@@ -8337,7 +8337,7 @@
         <p:txBody>
           <a:bodyPr/>
           <a:p>
-            <a:fld id="{2F667D3B-0BC2-4798-8927-52D8EAB8C5E8}" type="slidenum">
+            <a:fld id="{05A583CD-DC6C-46D6-AFD8-DBEBD8303A08}" type="slidenum">
               <a:t>&lt;#&gt;</a:t>
             </a:fld>
           </a:p>
@@ -8632,7 +8632,7 @@
         <p:txBody>
           <a:bodyPr/>
           <a:p>
-            <a:fld id="{59C5F803-F22B-45F4-AEFF-E7723D78DC85}" type="slidenum">
+            <a:fld id="{7855ED21-19CF-488C-B2B7-7B7D1B7A7E7F}" type="slidenum">
               <a:t>&lt;#&gt;</a:t>
             </a:fld>
           </a:p>
@@ -9013,7 +9013,7 @@
         <p:txBody>
           <a:bodyPr/>
           <a:p>
-            <a:fld id="{2546222A-5C19-4DE4-A0C2-4E0BFE6A3623}" type="slidenum">
+            <a:fld id="{66C7C114-B761-4F70-A240-E3CDF16E0B20}" type="slidenum">
               <a:t>&lt;#&gt;</a:t>
             </a:fld>
           </a:p>
@@ -9136,7 +9136,7 @@
         <p:txBody>
           <a:bodyPr/>
           <a:p>
-            <a:fld id="{2A70B610-8613-43CF-AAE3-366888A4846B}" type="slidenum">
+            <a:fld id="{329DD725-3BC3-4A17-8DD2-59113BE476F0}" type="slidenum">
               <a:t>&lt;#&gt;</a:t>
             </a:fld>
           </a:p>
@@ -9257,7 +9257,7 @@
         <p:txBody>
           <a:bodyPr/>
           <a:p>
-            <a:fld id="{07EC7C3F-ECA7-464C-A5CD-A021663F4424}" type="slidenum">
+            <a:fld id="{64875671-9376-450E-9BF8-59FF514BD279}" type="slidenum">
               <a:t>&lt;#&gt;</a:t>
             </a:fld>
           </a:p>
@@ -9509,7 +9509,7 @@
         <p:txBody>
           <a:bodyPr/>
           <a:p>
-            <a:fld id="{13D8C837-5D10-411C-B53C-D5D623832118}" type="slidenum">
+            <a:fld id="{DDC48A70-2A32-4080-B312-C3D098D3917E}" type="slidenum">
               <a:t>&lt;#&gt;</a:t>
             </a:fld>
           </a:p>
@@ -9761,7 +9761,7 @@
         <p:txBody>
           <a:bodyPr/>
           <a:p>
-            <a:fld id="{42043237-073A-4C44-8058-2668F7C70AB2}" type="slidenum">
+            <a:fld id="{29FE537E-5019-458D-8435-CA9E9D40FF13}" type="slidenum">
               <a:t>&lt;#&gt;</a:t>
             </a:fld>
           </a:p>
@@ -10013,7 +10013,7 @@
         <p:txBody>
           <a:bodyPr/>
           <a:p>
-            <a:fld id="{C9CF137D-79AB-4B71-93CD-4B49E2534CA8}" type="slidenum">
+            <a:fld id="{B787DA41-7DA1-47F7-A2BB-B21B3D9A96C9}" type="slidenum">
               <a:t>&lt;#&gt;</a:t>
             </a:fld>
           </a:p>
@@ -10082,7 +10082,7 @@
         <p:spPr>
           <a:xfrm>
             <a:off x="3124080" y="6356520"/>
-            <a:ext cx="2893680" cy="363240"/>
+            <a:ext cx="2893320" cy="362880"/>
           </a:xfrm>
           <a:prstGeom prst="rect">
             <a:avLst/>
@@ -10154,7 +10154,7 @@
         <p:spPr>
           <a:xfrm>
             <a:off x="6553080" y="6356520"/>
-            <a:ext cx="2131920" cy="363240"/>
+            <a:ext cx="2131560" cy="362880"/>
           </a:xfrm>
           <a:prstGeom prst="rect">
             <a:avLst/>
@@ -10195,7 +10195,7 @@
                 <a:tab algn="l" pos="0"/>
               </a:tabLst>
             </a:pPr>
-            <a:fld id="{4E9F73D4-DC99-47DA-B1C5-8CB655B0927F}" type="slidenum">
+            <a:fld id="{50072634-F9D3-4B19-B20E-3B3A009A0BD8}" type="slidenum">
               <a:rPr b="0" lang="en-US" sz="1200" spc="-1" strike="noStrike">
                 <a:solidFill>
                   <a:srgbClr val="8b8b8b"/>
@@ -10226,7 +10226,7 @@
         <p:spPr>
           <a:xfrm>
             <a:off x="457200" y="6356520"/>
-            <a:ext cx="2131920" cy="363240"/>
+            <a:ext cx="2131560" cy="362880"/>
           </a:xfrm>
           <a:prstGeom prst="rect">
             <a:avLst/>
@@ -10604,7 +10604,7 @@
         <p:spPr>
           <a:xfrm>
             <a:off x="3124080" y="6356520"/>
-            <a:ext cx="2893680" cy="363240"/>
+            <a:ext cx="2893320" cy="362880"/>
           </a:xfrm>
           <a:prstGeom prst="rect">
             <a:avLst/>
@@ -10676,7 +10676,7 @@
         <p:spPr>
           <a:xfrm>
             <a:off x="6553080" y="6356520"/>
-            <a:ext cx="2131920" cy="363240"/>
+            <a:ext cx="2131560" cy="362880"/>
           </a:xfrm>
           <a:prstGeom prst="rect">
             <a:avLst/>
@@ -10717,7 +10717,7 @@
                 <a:tab algn="l" pos="0"/>
               </a:tabLst>
             </a:pPr>
-            <a:fld id="{DAF331D6-37DF-42A7-8925-65049B26FD44}" type="slidenum">
+            <a:fld id="{B0C82354-8072-4394-B344-EC3A5CA7EAA3}" type="slidenum">
               <a:rPr b="0" lang="en-US" sz="1200" spc="-1" strike="noStrike">
                 <a:solidFill>
                   <a:srgbClr val="8b8b8b"/>
@@ -10748,7 +10748,7 @@
         <p:spPr>
           <a:xfrm>
             <a:off x="457200" y="6356520"/>
-            <a:ext cx="2131920" cy="363240"/>
+            <a:ext cx="2131560" cy="362880"/>
           </a:xfrm>
           <a:prstGeom prst="rect">
             <a:avLst/>
@@ -11126,7 +11126,7 @@
         <p:spPr>
           <a:xfrm>
             <a:off x="3124080" y="6356520"/>
-            <a:ext cx="2894040" cy="363600"/>
+            <a:ext cx="2893680" cy="363240"/>
           </a:xfrm>
           <a:prstGeom prst="rect">
             <a:avLst/>
@@ -11198,7 +11198,7 @@
         <p:spPr>
           <a:xfrm>
             <a:off x="6553080" y="6356520"/>
-            <a:ext cx="2132280" cy="363600"/>
+            <a:ext cx="2131920" cy="363240"/>
           </a:xfrm>
           <a:prstGeom prst="rect">
             <a:avLst/>
@@ -11239,7 +11239,7 @@
                 <a:tab algn="l" pos="0"/>
               </a:tabLst>
             </a:pPr>
-            <a:fld id="{283E87B9-2113-4426-B433-7B62FA4085F9}" type="slidenum">
+            <a:fld id="{960A3333-1ADB-4168-BB60-879FFA82D6A0}" type="slidenum">
               <a:rPr b="0" lang="en-US" sz="1200" spc="-1" strike="noStrike">
                 <a:solidFill>
                   <a:srgbClr val="8b8b8b"/>
@@ -11270,7 +11270,7 @@
         <p:spPr>
           <a:xfrm>
             <a:off x="457200" y="6356520"/>
-            <a:ext cx="2132280" cy="363600"/>
+            <a:ext cx="2131920" cy="363240"/>
           </a:xfrm>
           <a:prstGeom prst="rect">
             <a:avLst/>
@@ -11648,7 +11648,7 @@
         <p:spPr>
           <a:xfrm>
             <a:off x="3124080" y="6356520"/>
-            <a:ext cx="2894400" cy="363960"/>
+            <a:ext cx="2894040" cy="363600"/>
           </a:xfrm>
           <a:prstGeom prst="rect">
             <a:avLst/>
@@ -11720,7 +11720,7 @@
         <p:spPr>
           <a:xfrm>
             <a:off x="6553080" y="6356520"/>
-            <a:ext cx="2132640" cy="363960"/>
+            <a:ext cx="2132280" cy="363600"/>
           </a:xfrm>
           <a:prstGeom prst="rect">
             <a:avLst/>
@@ -11761,7 +11761,7 @@
                 <a:tab algn="l" pos="0"/>
               </a:tabLst>
             </a:pPr>
-            <a:fld id="{B2F00229-771B-4958-88AC-705DF9E6D5DD}" type="slidenum">
+            <a:fld id="{C0070983-A9B1-4F91-ACC9-ACA684BE83C8}" type="slidenum">
               <a:rPr b="0" lang="en-US" sz="1200" spc="-1" strike="noStrike">
                 <a:solidFill>
                   <a:srgbClr val="8b8b8b"/>
@@ -11792,7 +11792,7 @@
         <p:spPr>
           <a:xfrm>
             <a:off x="457200" y="6356520"/>
-            <a:ext cx="2132640" cy="363960"/>
+            <a:ext cx="2132280" cy="363600"/>
           </a:xfrm>
           <a:prstGeom prst="rect">
             <a:avLst/>
@@ -12159,7 +12159,7 @@
         <p:spPr>
           <a:xfrm>
             <a:off x="0" y="0"/>
-            <a:ext cx="12187080" cy="6856200"/>
+            <a:ext cx="12186720" cy="6855840"/>
           </a:xfrm>
           <a:prstGeom prst="rect">
             <a:avLst/>
@@ -12219,7 +12219,7 @@
         <p:spPr>
           <a:xfrm>
             <a:off x="0" y="0"/>
-            <a:ext cx="16560" cy="6856200"/>
+            <a:ext cx="16200" cy="6855840"/>
           </a:xfrm>
           <a:prstGeom prst="rect">
             <a:avLst/>
@@ -12279,7 +12279,7 @@
         <p:spPr>
           <a:xfrm>
             <a:off x="914400" y="0"/>
-            <a:ext cx="16560" cy="6856200"/>
+            <a:ext cx="16200" cy="6855840"/>
           </a:xfrm>
           <a:prstGeom prst="rect">
             <a:avLst/>
@@ -12339,7 +12339,7 @@
         <p:spPr>
           <a:xfrm>
             <a:off x="1828800" y="0"/>
-            <a:ext cx="16560" cy="6856200"/>
+            <a:ext cx="16200" cy="6855840"/>
           </a:xfrm>
           <a:prstGeom prst="rect">
             <a:avLst/>
@@ -12399,7 +12399,7 @@
         <p:spPr>
           <a:xfrm>
             <a:off x="2743200" y="0"/>
-            <a:ext cx="16560" cy="6856200"/>
+            <a:ext cx="16200" cy="6855840"/>
           </a:xfrm>
           <a:prstGeom prst="rect">
             <a:avLst/>
@@ -12459,7 +12459,7 @@
         <p:spPr>
           <a:xfrm>
             <a:off x="3657600" y="0"/>
-            <a:ext cx="16560" cy="6856200"/>
+            <a:ext cx="16200" cy="6855840"/>
           </a:xfrm>
           <a:prstGeom prst="rect">
             <a:avLst/>
@@ -12519,7 +12519,7 @@
         <p:spPr>
           <a:xfrm>
             <a:off x="4572000" y="0"/>
-            <a:ext cx="16560" cy="6856200"/>
+            <a:ext cx="16200" cy="6855840"/>
           </a:xfrm>
           <a:prstGeom prst="rect">
             <a:avLst/>
@@ -12579,7 +12579,7 @@
         <p:spPr>
           <a:xfrm>
             <a:off x="5486400" y="0"/>
-            <a:ext cx="16560" cy="6856200"/>
+            <a:ext cx="16200" cy="6855840"/>
           </a:xfrm>
           <a:prstGeom prst="rect">
             <a:avLst/>
@@ -12639,7 +12639,7 @@
         <p:spPr>
           <a:xfrm>
             <a:off x="6400800" y="0"/>
-            <a:ext cx="16560" cy="6856200"/>
+            <a:ext cx="16200" cy="6855840"/>
           </a:xfrm>
           <a:prstGeom prst="rect">
             <a:avLst/>
@@ -12699,7 +12699,7 @@
         <p:spPr>
           <a:xfrm>
             <a:off x="7315200" y="0"/>
-            <a:ext cx="16560" cy="6856200"/>
+            <a:ext cx="16200" cy="6855840"/>
           </a:xfrm>
           <a:prstGeom prst="rect">
             <a:avLst/>
@@ -12759,7 +12759,7 @@
         <p:spPr>
           <a:xfrm>
             <a:off x="8229600" y="0"/>
-            <a:ext cx="16560" cy="6856200"/>
+            <a:ext cx="16200" cy="6855840"/>
           </a:xfrm>
           <a:prstGeom prst="rect">
             <a:avLst/>
@@ -12819,7 +12819,7 @@
         <p:spPr>
           <a:xfrm>
             <a:off x="9144000" y="0"/>
-            <a:ext cx="16560" cy="6856200"/>
+            <a:ext cx="16200" cy="6855840"/>
           </a:xfrm>
           <a:prstGeom prst="rect">
             <a:avLst/>
@@ -12879,7 +12879,7 @@
         <p:spPr>
           <a:xfrm>
             <a:off x="10058400" y="0"/>
-            <a:ext cx="16560" cy="6856200"/>
+            <a:ext cx="16200" cy="6855840"/>
           </a:xfrm>
           <a:prstGeom prst="rect">
             <a:avLst/>
@@ -12939,7 +12939,7 @@
         <p:spPr>
           <a:xfrm>
             <a:off x="10972800" y="0"/>
-            <a:ext cx="16560" cy="6856200"/>
+            <a:ext cx="16200" cy="6855840"/>
           </a:xfrm>
           <a:prstGeom prst="rect">
             <a:avLst/>
@@ -12999,7 +12999,7 @@
         <p:spPr>
           <a:xfrm>
             <a:off x="11887200" y="0"/>
-            <a:ext cx="16560" cy="6856200"/>
+            <a:ext cx="16200" cy="6855840"/>
           </a:xfrm>
           <a:prstGeom prst="rect">
             <a:avLst/>
@@ -13059,7 +13059,7 @@
         <p:spPr>
           <a:xfrm>
             <a:off x="0" y="0"/>
-            <a:ext cx="318240" cy="6856200"/>
+            <a:ext cx="317880" cy="6855840"/>
           </a:xfrm>
           <a:prstGeom prst="rect">
             <a:avLst/>
@@ -13119,7 +13119,7 @@
         <p:spPr>
           <a:xfrm>
             <a:off x="9875520" y="365760"/>
-            <a:ext cx="2009880" cy="501120"/>
+            <a:ext cx="2009520" cy="500760"/>
           </a:xfrm>
           <a:prstGeom prst="roundRect">
             <a:avLst>
@@ -13324,7 +13324,7 @@
         <p:spPr>
           <a:xfrm>
             <a:off x="987480" y="3182040"/>
-            <a:ext cx="3290040" cy="2741400"/>
+            <a:ext cx="3289680" cy="2741040"/>
           </a:xfrm>
           <a:prstGeom prst="roundRect">
             <a:avLst>
@@ -13386,7 +13386,7 @@
         <p:spPr>
           <a:xfrm>
             <a:off x="914400" y="3108960"/>
-            <a:ext cx="3290040" cy="3291120"/>
+            <a:ext cx="3289680" cy="3290760"/>
           </a:xfrm>
           <a:prstGeom prst="roundRect">
             <a:avLst>
@@ -13719,7 +13719,7 @@
         <p:spPr>
           <a:xfrm>
             <a:off x="4507920" y="3182040"/>
-            <a:ext cx="3290040" cy="2741400"/>
+            <a:ext cx="3289680" cy="2741040"/>
           </a:xfrm>
           <a:prstGeom prst="roundRect">
             <a:avLst>
@@ -13781,7 +13781,7 @@
         <p:spPr>
           <a:xfrm>
             <a:off x="4434840" y="3108960"/>
-            <a:ext cx="3290040" cy="2741400"/>
+            <a:ext cx="3289680" cy="2741040"/>
           </a:xfrm>
           <a:prstGeom prst="roundRect">
             <a:avLst>
@@ -14039,7 +14039,7 @@
         <p:spPr>
           <a:xfrm>
             <a:off x="8028360" y="3182040"/>
-            <a:ext cx="3290040" cy="2741400"/>
+            <a:ext cx="3289680" cy="2741040"/>
           </a:xfrm>
           <a:prstGeom prst="roundRect">
             <a:avLst>
@@ -14101,7 +14101,7 @@
         <p:spPr>
           <a:xfrm>
             <a:off x="7955280" y="3108960"/>
-            <a:ext cx="3474000" cy="3291120"/>
+            <a:ext cx="3473640" cy="3290760"/>
           </a:xfrm>
           <a:prstGeom prst="roundRect">
             <a:avLst>
@@ -14545,7 +14545,7 @@
         <p:spPr>
           <a:xfrm>
             <a:off x="0" y="0"/>
-            <a:ext cx="12187080" cy="6856200"/>
+            <a:ext cx="12186720" cy="6855840"/>
           </a:xfrm>
           <a:prstGeom prst="rect">
             <a:avLst/>
@@ -14605,7 +14605,7 @@
         <p:spPr>
           <a:xfrm>
             <a:off x="0" y="0"/>
-            <a:ext cx="16560" cy="6856200"/>
+            <a:ext cx="16200" cy="6855840"/>
           </a:xfrm>
           <a:prstGeom prst="rect">
             <a:avLst/>
@@ -14665,7 +14665,7 @@
         <p:spPr>
           <a:xfrm>
             <a:off x="914400" y="0"/>
-            <a:ext cx="16560" cy="6856200"/>
+            <a:ext cx="16200" cy="6855840"/>
           </a:xfrm>
           <a:prstGeom prst="rect">
             <a:avLst/>
@@ -14725,7 +14725,7 @@
         <p:spPr>
           <a:xfrm>
             <a:off x="1828800" y="0"/>
-            <a:ext cx="16560" cy="6856200"/>
+            <a:ext cx="16200" cy="6855840"/>
           </a:xfrm>
           <a:prstGeom prst="rect">
             <a:avLst/>
@@ -14785,7 +14785,7 @@
         <p:spPr>
           <a:xfrm>
             <a:off x="2743200" y="0"/>
-            <a:ext cx="16560" cy="6856200"/>
+            <a:ext cx="16200" cy="6855840"/>
           </a:xfrm>
           <a:prstGeom prst="rect">
             <a:avLst/>
@@ -14845,7 +14845,7 @@
         <p:spPr>
           <a:xfrm>
             <a:off x="3657600" y="0"/>
-            <a:ext cx="16560" cy="6856200"/>
+            <a:ext cx="16200" cy="6855840"/>
           </a:xfrm>
           <a:prstGeom prst="rect">
             <a:avLst/>
@@ -14905,7 +14905,7 @@
         <p:spPr>
           <a:xfrm>
             <a:off x="4572000" y="0"/>
-            <a:ext cx="16560" cy="6856200"/>
+            <a:ext cx="16200" cy="6855840"/>
           </a:xfrm>
           <a:prstGeom prst="rect">
             <a:avLst/>
@@ -14965,7 +14965,7 @@
         <p:spPr>
           <a:xfrm>
             <a:off x="5486400" y="0"/>
-            <a:ext cx="16560" cy="6856200"/>
+            <a:ext cx="16200" cy="6855840"/>
           </a:xfrm>
           <a:prstGeom prst="rect">
             <a:avLst/>
@@ -15025,7 +15025,7 @@
         <p:spPr>
           <a:xfrm>
             <a:off x="6400800" y="0"/>
-            <a:ext cx="16560" cy="6856200"/>
+            <a:ext cx="16200" cy="6855840"/>
           </a:xfrm>
           <a:prstGeom prst="rect">
             <a:avLst/>
@@ -15085,7 +15085,7 @@
         <p:spPr>
           <a:xfrm>
             <a:off x="7315200" y="0"/>
-            <a:ext cx="16560" cy="6856200"/>
+            <a:ext cx="16200" cy="6855840"/>
           </a:xfrm>
           <a:prstGeom prst="rect">
             <a:avLst/>
@@ -15145,7 +15145,7 @@
         <p:spPr>
           <a:xfrm>
             <a:off x="8229600" y="0"/>
-            <a:ext cx="16560" cy="6856200"/>
+            <a:ext cx="16200" cy="6855840"/>
           </a:xfrm>
           <a:prstGeom prst="rect">
             <a:avLst/>
@@ -15205,7 +15205,7 @@
         <p:spPr>
           <a:xfrm>
             <a:off x="9144000" y="0"/>
-            <a:ext cx="16560" cy="6856200"/>
+            <a:ext cx="16200" cy="6855840"/>
           </a:xfrm>
           <a:prstGeom prst="rect">
             <a:avLst/>
@@ -15265,7 +15265,7 @@
         <p:spPr>
           <a:xfrm>
             <a:off x="10058400" y="0"/>
-            <a:ext cx="16560" cy="6856200"/>
+            <a:ext cx="16200" cy="6855840"/>
           </a:xfrm>
           <a:prstGeom prst="rect">
             <a:avLst/>
@@ -15325,7 +15325,7 @@
         <p:spPr>
           <a:xfrm>
             <a:off x="10972800" y="0"/>
-            <a:ext cx="16560" cy="6856200"/>
+            <a:ext cx="16200" cy="6855840"/>
           </a:xfrm>
           <a:prstGeom prst="rect">
             <a:avLst/>
@@ -15385,7 +15385,7 @@
         <p:spPr>
           <a:xfrm>
             <a:off x="11887200" y="0"/>
-            <a:ext cx="16560" cy="6856200"/>
+            <a:ext cx="16200" cy="6855840"/>
           </a:xfrm>
           <a:prstGeom prst="rect">
             <a:avLst/>
@@ -15445,7 +15445,7 @@
         <p:spPr>
           <a:xfrm>
             <a:off x="0" y="0"/>
-            <a:ext cx="318240" cy="6856200"/>
+            <a:ext cx="317880" cy="6855840"/>
           </a:xfrm>
           <a:prstGeom prst="rect">
             <a:avLst/>
@@ -15505,7 +15505,7 @@
         <p:spPr>
           <a:xfrm>
             <a:off x="9875520" y="365760"/>
-            <a:ext cx="2009880" cy="501120"/>
+            <a:ext cx="2009520" cy="500760"/>
           </a:xfrm>
           <a:prstGeom prst="roundRect">
             <a:avLst>
@@ -15687,7 +15687,7 @@
         <p:spPr>
           <a:xfrm>
             <a:off x="987480" y="3182040"/>
-            <a:ext cx="3290040" cy="2741400"/>
+            <a:ext cx="3289680" cy="2741040"/>
           </a:xfrm>
           <a:prstGeom prst="roundRect">
             <a:avLst>
@@ -15749,7 +15749,7 @@
         <p:spPr>
           <a:xfrm>
             <a:off x="931680" y="2925720"/>
-            <a:ext cx="3182400" cy="3474360"/>
+            <a:ext cx="3182040" cy="3474000"/>
           </a:xfrm>
           <a:prstGeom prst="roundRect">
             <a:avLst>
@@ -15964,7 +15964,7 @@
         <p:spPr>
           <a:xfrm>
             <a:off x="4507920" y="3182040"/>
-            <a:ext cx="3290040" cy="2741400"/>
+            <a:ext cx="3289680" cy="2741040"/>
           </a:xfrm>
           <a:prstGeom prst="roundRect">
             <a:avLst>
@@ -16026,7 +16026,7 @@
         <p:spPr>
           <a:xfrm>
             <a:off x="4434840" y="3108960"/>
-            <a:ext cx="3290040" cy="3062520"/>
+            <a:ext cx="3289680" cy="3062160"/>
           </a:xfrm>
           <a:prstGeom prst="roundRect">
             <a:avLst>
@@ -16324,7 +16324,7 @@
         <p:spPr>
           <a:xfrm>
             <a:off x="8028360" y="3182040"/>
-            <a:ext cx="3290040" cy="2741400"/>
+            <a:ext cx="3289680" cy="2741040"/>
           </a:xfrm>
           <a:prstGeom prst="roundRect">
             <a:avLst>
@@ -16386,7 +16386,7 @@
         <p:spPr>
           <a:xfrm>
             <a:off x="7955280" y="3108960"/>
-            <a:ext cx="3474000" cy="3291120"/>
+            <a:ext cx="3473640" cy="3290760"/>
           </a:xfrm>
           <a:prstGeom prst="roundRect">
             <a:avLst>
@@ -16817,7 +16817,7 @@
         <p:spPr>
           <a:xfrm>
             <a:off x="0" y="0"/>
-            <a:ext cx="12187080" cy="6856200"/>
+            <a:ext cx="12186720" cy="6855840"/>
           </a:xfrm>
           <a:prstGeom prst="rect">
             <a:avLst/>
@@ -16877,7 +16877,7 @@
         <p:spPr>
           <a:xfrm>
             <a:off x="0" y="0"/>
-            <a:ext cx="16560" cy="6856200"/>
+            <a:ext cx="16200" cy="6855840"/>
           </a:xfrm>
           <a:prstGeom prst="rect">
             <a:avLst/>
@@ -16937,7 +16937,7 @@
         <p:spPr>
           <a:xfrm>
             <a:off x="914400" y="0"/>
-            <a:ext cx="16560" cy="6856200"/>
+            <a:ext cx="16200" cy="6855840"/>
           </a:xfrm>
           <a:prstGeom prst="rect">
             <a:avLst/>
@@ -16997,7 +16997,7 @@
         <p:spPr>
           <a:xfrm>
             <a:off x="1828800" y="0"/>
-            <a:ext cx="16560" cy="6856200"/>
+            <a:ext cx="16200" cy="6855840"/>
           </a:xfrm>
           <a:prstGeom prst="rect">
             <a:avLst/>
@@ -17057,7 +17057,7 @@
         <p:spPr>
           <a:xfrm>
             <a:off x="2743200" y="0"/>
-            <a:ext cx="16560" cy="6856200"/>
+            <a:ext cx="16200" cy="6855840"/>
           </a:xfrm>
           <a:prstGeom prst="rect">
             <a:avLst/>
@@ -17117,7 +17117,7 @@
         <p:spPr>
           <a:xfrm>
             <a:off x="3657600" y="0"/>
-            <a:ext cx="16560" cy="6856200"/>
+            <a:ext cx="16200" cy="6855840"/>
           </a:xfrm>
           <a:prstGeom prst="rect">
             <a:avLst/>
@@ -17177,7 +17177,7 @@
         <p:spPr>
           <a:xfrm>
             <a:off x="4572000" y="0"/>
-            <a:ext cx="16560" cy="6856200"/>
+            <a:ext cx="16200" cy="6855840"/>
           </a:xfrm>
           <a:prstGeom prst="rect">
             <a:avLst/>
@@ -17237,7 +17237,7 @@
         <p:spPr>
           <a:xfrm>
             <a:off x="5486400" y="0"/>
-            <a:ext cx="16560" cy="6856200"/>
+            <a:ext cx="16200" cy="6855840"/>
           </a:xfrm>
           <a:prstGeom prst="rect">
             <a:avLst/>
@@ -17297,7 +17297,7 @@
         <p:spPr>
           <a:xfrm>
             <a:off x="6400800" y="0"/>
-            <a:ext cx="16560" cy="6856200"/>
+            <a:ext cx="16200" cy="6855840"/>
           </a:xfrm>
           <a:prstGeom prst="rect">
             <a:avLst/>
@@ -17357,7 +17357,7 @@
         <p:spPr>
           <a:xfrm>
             <a:off x="7315200" y="0"/>
-            <a:ext cx="16560" cy="6856200"/>
+            <a:ext cx="16200" cy="6855840"/>
           </a:xfrm>
           <a:prstGeom prst="rect">
             <a:avLst/>
@@ -17417,7 +17417,7 @@
         <p:spPr>
           <a:xfrm>
             <a:off x="8229600" y="0"/>
-            <a:ext cx="16560" cy="6856200"/>
+            <a:ext cx="16200" cy="6855840"/>
           </a:xfrm>
           <a:prstGeom prst="rect">
             <a:avLst/>
@@ -17477,7 +17477,7 @@
         <p:spPr>
           <a:xfrm>
             <a:off x="9144000" y="0"/>
-            <a:ext cx="16560" cy="6856200"/>
+            <a:ext cx="16200" cy="6855840"/>
           </a:xfrm>
           <a:prstGeom prst="rect">
             <a:avLst/>
@@ -17537,7 +17537,7 @@
         <p:spPr>
           <a:xfrm>
             <a:off x="10058400" y="0"/>
-            <a:ext cx="16560" cy="6856200"/>
+            <a:ext cx="16200" cy="6855840"/>
           </a:xfrm>
           <a:prstGeom prst="rect">
             <a:avLst/>
@@ -17597,7 +17597,7 @@
         <p:spPr>
           <a:xfrm>
             <a:off x="10972800" y="0"/>
-            <a:ext cx="16560" cy="6856200"/>
+            <a:ext cx="16200" cy="6855840"/>
           </a:xfrm>
           <a:prstGeom prst="rect">
             <a:avLst/>
@@ -17657,7 +17657,7 @@
         <p:spPr>
           <a:xfrm>
             <a:off x="11887200" y="0"/>
-            <a:ext cx="16560" cy="6856200"/>
+            <a:ext cx="16200" cy="6855840"/>
           </a:xfrm>
           <a:prstGeom prst="rect">
             <a:avLst/>
@@ -17717,7 +17717,7 @@
         <p:spPr>
           <a:xfrm>
             <a:off x="0" y="0"/>
-            <a:ext cx="318240" cy="6856200"/>
+            <a:ext cx="317880" cy="6855840"/>
           </a:xfrm>
           <a:prstGeom prst="rect">
             <a:avLst/>
@@ -17777,7 +17777,7 @@
         <p:spPr>
           <a:xfrm>
             <a:off x="9875520" y="365760"/>
-            <a:ext cx="2009880" cy="501120"/>
+            <a:ext cx="2009520" cy="500760"/>
           </a:xfrm>
           <a:prstGeom prst="roundRect">
             <a:avLst>
@@ -17915,7 +17915,7 @@
         <p:spPr>
           <a:xfrm>
             <a:off x="1870560" y="1846080"/>
-            <a:ext cx="7290000" cy="668520"/>
+            <a:ext cx="7289640" cy="668520"/>
           </a:xfrm>
           <a:prstGeom prst="rect">
             <a:avLst/>
@@ -17992,7 +17992,7 @@
         <p:spPr>
           <a:xfrm>
             <a:off x="987480" y="3182040"/>
-            <a:ext cx="3290040" cy="2741400"/>
+            <a:ext cx="3289680" cy="2741040"/>
           </a:xfrm>
           <a:prstGeom prst="roundRect">
             <a:avLst>
@@ -18054,7 +18054,7 @@
         <p:spPr>
           <a:xfrm>
             <a:off x="685800" y="2743200"/>
-            <a:ext cx="3518640" cy="3428280"/>
+            <a:ext cx="3518280" cy="3427920"/>
           </a:xfrm>
           <a:prstGeom prst="roundRect">
             <a:avLst>
@@ -18328,7 +18328,7 @@
         <p:spPr>
           <a:xfrm>
             <a:off x="4507920" y="3182040"/>
-            <a:ext cx="3290040" cy="2741400"/>
+            <a:ext cx="3289680" cy="2741040"/>
           </a:xfrm>
           <a:prstGeom prst="roundRect">
             <a:avLst>
@@ -18390,7 +18390,7 @@
         <p:spPr>
           <a:xfrm>
             <a:off x="4343400" y="2743200"/>
-            <a:ext cx="3381480" cy="3656880"/>
+            <a:ext cx="3381120" cy="3656520"/>
           </a:xfrm>
           <a:prstGeom prst="roundRect">
             <a:avLst>
@@ -18896,7 +18896,7 @@
         <p:spPr>
           <a:xfrm>
             <a:off x="8028360" y="3182040"/>
-            <a:ext cx="3290040" cy="2741400"/>
+            <a:ext cx="3289680" cy="2741040"/>
           </a:xfrm>
           <a:prstGeom prst="roundRect">
             <a:avLst>
@@ -18958,7 +18958,7 @@
         <p:spPr>
           <a:xfrm>
             <a:off x="7955280" y="2971800"/>
-            <a:ext cx="3702600" cy="3199680"/>
+            <a:ext cx="3702240" cy="3199320"/>
           </a:xfrm>
           <a:prstGeom prst="roundRect">
             <a:avLst>
@@ -19442,7 +19442,7 @@
         <p:spPr>
           <a:xfrm>
             <a:off x="0" y="0"/>
-            <a:ext cx="12187440" cy="6856560"/>
+            <a:ext cx="12187080" cy="6856200"/>
           </a:xfrm>
           <a:prstGeom prst="rect">
             <a:avLst/>
@@ -19502,7 +19502,7 @@
         <p:spPr>
           <a:xfrm>
             <a:off x="0" y="0"/>
-            <a:ext cx="16920" cy="6856560"/>
+            <a:ext cx="16560" cy="6856200"/>
           </a:xfrm>
           <a:prstGeom prst="rect">
             <a:avLst/>
@@ -19562,7 +19562,7 @@
         <p:spPr>
           <a:xfrm>
             <a:off x="914400" y="0"/>
-            <a:ext cx="16920" cy="6856560"/>
+            <a:ext cx="16560" cy="6856200"/>
           </a:xfrm>
           <a:prstGeom prst="rect">
             <a:avLst/>
@@ -19622,7 +19622,7 @@
         <p:spPr>
           <a:xfrm>
             <a:off x="1828800" y="0"/>
-            <a:ext cx="16920" cy="6856560"/>
+            <a:ext cx="16560" cy="6856200"/>
           </a:xfrm>
           <a:prstGeom prst="rect">
             <a:avLst/>
@@ -19682,7 +19682,7 @@
         <p:spPr>
           <a:xfrm>
             <a:off x="2743200" y="0"/>
-            <a:ext cx="16920" cy="6856560"/>
+            <a:ext cx="16560" cy="6856200"/>
           </a:xfrm>
           <a:prstGeom prst="rect">
             <a:avLst/>
@@ -19742,7 +19742,7 @@
         <p:spPr>
           <a:xfrm>
             <a:off x="3657600" y="0"/>
-            <a:ext cx="16920" cy="6856560"/>
+            <a:ext cx="16560" cy="6856200"/>
           </a:xfrm>
           <a:prstGeom prst="rect">
             <a:avLst/>
@@ -19802,7 +19802,7 @@
         <p:spPr>
           <a:xfrm>
             <a:off x="4572000" y="0"/>
-            <a:ext cx="16920" cy="6856560"/>
+            <a:ext cx="16560" cy="6856200"/>
           </a:xfrm>
           <a:prstGeom prst="rect">
             <a:avLst/>
@@ -19862,7 +19862,7 @@
         <p:spPr>
           <a:xfrm>
             <a:off x="5486400" y="0"/>
-            <a:ext cx="16920" cy="6856560"/>
+            <a:ext cx="16560" cy="6856200"/>
           </a:xfrm>
           <a:prstGeom prst="rect">
             <a:avLst/>
@@ -19922,7 +19922,7 @@
         <p:spPr>
           <a:xfrm>
             <a:off x="6400800" y="0"/>
-            <a:ext cx="16920" cy="6856560"/>
+            <a:ext cx="16560" cy="6856200"/>
           </a:xfrm>
           <a:prstGeom prst="rect">
             <a:avLst/>
@@ -19982,7 +19982,7 @@
         <p:spPr>
           <a:xfrm>
             <a:off x="7315200" y="0"/>
-            <a:ext cx="16920" cy="6856560"/>
+            <a:ext cx="16560" cy="6856200"/>
           </a:xfrm>
           <a:prstGeom prst="rect">
             <a:avLst/>
@@ -20042,7 +20042,7 @@
         <p:spPr>
           <a:xfrm>
             <a:off x="8229600" y="0"/>
-            <a:ext cx="16920" cy="6856560"/>
+            <a:ext cx="16560" cy="6856200"/>
           </a:xfrm>
           <a:prstGeom prst="rect">
             <a:avLst/>
@@ -20102,7 +20102,7 @@
         <p:spPr>
           <a:xfrm>
             <a:off x="9144000" y="0"/>
-            <a:ext cx="16920" cy="6856560"/>
+            <a:ext cx="16560" cy="6856200"/>
           </a:xfrm>
           <a:prstGeom prst="rect">
             <a:avLst/>
@@ -20162,7 +20162,7 @@
         <p:spPr>
           <a:xfrm>
             <a:off x="10058400" y="0"/>
-            <a:ext cx="16920" cy="6856560"/>
+            <a:ext cx="16560" cy="6856200"/>
           </a:xfrm>
           <a:prstGeom prst="rect">
             <a:avLst/>
@@ -20222,7 +20222,7 @@
         <p:spPr>
           <a:xfrm>
             <a:off x="10972800" y="0"/>
-            <a:ext cx="16920" cy="6856560"/>
+            <a:ext cx="16560" cy="6856200"/>
           </a:xfrm>
           <a:prstGeom prst="rect">
             <a:avLst/>
@@ -20282,7 +20282,7 @@
         <p:spPr>
           <a:xfrm>
             <a:off x="11887200" y="0"/>
-            <a:ext cx="16920" cy="6856560"/>
+            <a:ext cx="16560" cy="6856200"/>
           </a:xfrm>
           <a:prstGeom prst="rect">
             <a:avLst/>
@@ -20342,7 +20342,7 @@
         <p:spPr>
           <a:xfrm>
             <a:off x="0" y="0"/>
-            <a:ext cx="318600" cy="6856560"/>
+            <a:ext cx="318240" cy="6856200"/>
           </a:xfrm>
           <a:prstGeom prst="rect">
             <a:avLst/>
@@ -20402,7 +20402,7 @@
         <p:spPr>
           <a:xfrm>
             <a:off x="9875520" y="365760"/>
-            <a:ext cx="2010240" cy="501480"/>
+            <a:ext cx="2009880" cy="501120"/>
           </a:xfrm>
           <a:prstGeom prst="roundRect">
             <a:avLst>
@@ -20530,7 +20530,7 @@
         <p:spPr>
           <a:xfrm>
             <a:off x="2493720" y="2194560"/>
-            <a:ext cx="5984280" cy="668520"/>
+            <a:ext cx="5983920" cy="668520"/>
           </a:xfrm>
           <a:prstGeom prst="rect">
             <a:avLst/>
@@ -20607,7 +20607,7 @@
         <p:spPr>
           <a:xfrm>
             <a:off x="987480" y="3182040"/>
-            <a:ext cx="3290400" cy="2741760"/>
+            <a:ext cx="3290040" cy="2741400"/>
           </a:xfrm>
           <a:prstGeom prst="roundRect">
             <a:avLst>
@@ -20669,7 +20669,7 @@
         <p:spPr>
           <a:xfrm>
             <a:off x="685800" y="3108960"/>
-            <a:ext cx="3519000" cy="3291480"/>
+            <a:ext cx="3518640" cy="3291120"/>
           </a:xfrm>
           <a:prstGeom prst="roundRect">
             <a:avLst>
@@ -20983,7 +20983,7 @@
         <p:spPr>
           <a:xfrm>
             <a:off x="4507920" y="3182040"/>
-            <a:ext cx="3290400" cy="2741760"/>
+            <a:ext cx="3290040" cy="2741400"/>
           </a:xfrm>
           <a:prstGeom prst="roundRect">
             <a:avLst>
@@ -21045,7 +21045,7 @@
         <p:spPr>
           <a:xfrm>
             <a:off x="4434840" y="3108960"/>
-            <a:ext cx="3290400" cy="2741760"/>
+            <a:ext cx="3290040" cy="2741400"/>
           </a:xfrm>
           <a:prstGeom prst="roundRect">
             <a:avLst>
@@ -21274,7 +21274,7 @@
         <p:spPr>
           <a:xfrm>
             <a:off x="8028360" y="3182040"/>
-            <a:ext cx="3290400" cy="2741760"/>
+            <a:ext cx="3290040" cy="2741400"/>
           </a:xfrm>
           <a:prstGeom prst="roundRect">
             <a:avLst>
@@ -21336,7 +21336,7 @@
         <p:spPr>
           <a:xfrm>
             <a:off x="7955280" y="3108960"/>
-            <a:ext cx="3702960" cy="3062880"/>
+            <a:ext cx="3702600" cy="3062520"/>
           </a:xfrm>
           <a:prstGeom prst="roundRect">
             <a:avLst>
@@ -21644,7 +21644,7 @@
         <p:spPr>
           <a:xfrm>
             <a:off x="4600080" y="6446520"/>
-            <a:ext cx="3051360" cy="363960"/>
+            <a:ext cx="3051000" cy="363960"/>
           </a:xfrm>
           <a:prstGeom prst="rect">
             <a:avLst/>
@@ -21728,7 +21728,7 @@
         <p:spPr>
           <a:xfrm>
             <a:off x="0" y="0"/>
-            <a:ext cx="12187440" cy="6856560"/>
+            <a:ext cx="12187080" cy="6856200"/>
           </a:xfrm>
           <a:prstGeom prst="rect">
             <a:avLst/>
@@ -21788,7 +21788,7 @@
         <p:spPr>
           <a:xfrm>
             <a:off x="0" y="0"/>
-            <a:ext cx="16920" cy="6856560"/>
+            <a:ext cx="16560" cy="6856200"/>
           </a:xfrm>
           <a:prstGeom prst="rect">
             <a:avLst/>
@@ -21848,7 +21848,7 @@
         <p:spPr>
           <a:xfrm>
             <a:off x="914400" y="0"/>
-            <a:ext cx="16920" cy="6856560"/>
+            <a:ext cx="16560" cy="6856200"/>
           </a:xfrm>
           <a:prstGeom prst="rect">
             <a:avLst/>
@@ -21908,7 +21908,7 @@
         <p:spPr>
           <a:xfrm>
             <a:off x="1828800" y="0"/>
-            <a:ext cx="16920" cy="6856560"/>
+            <a:ext cx="16560" cy="6856200"/>
           </a:xfrm>
           <a:prstGeom prst="rect">
             <a:avLst/>
@@ -21968,7 +21968,7 @@
         <p:spPr>
           <a:xfrm>
             <a:off x="2743200" y="0"/>
-            <a:ext cx="16920" cy="6856560"/>
+            <a:ext cx="16560" cy="6856200"/>
           </a:xfrm>
           <a:prstGeom prst="rect">
             <a:avLst/>
@@ -22028,7 +22028,7 @@
         <p:spPr>
           <a:xfrm>
             <a:off x="3657600" y="0"/>
-            <a:ext cx="16920" cy="6856560"/>
+            <a:ext cx="16560" cy="6856200"/>
           </a:xfrm>
           <a:prstGeom prst="rect">
             <a:avLst/>
@@ -22088,7 +22088,7 @@
         <p:spPr>
           <a:xfrm>
             <a:off x="4572000" y="0"/>
-            <a:ext cx="16920" cy="6856560"/>
+            <a:ext cx="16560" cy="6856200"/>
           </a:xfrm>
           <a:prstGeom prst="rect">
             <a:avLst/>
@@ -22148,7 +22148,7 @@
         <p:spPr>
           <a:xfrm>
             <a:off x="5486400" y="0"/>
-            <a:ext cx="16920" cy="6856560"/>
+            <a:ext cx="16560" cy="6856200"/>
           </a:xfrm>
           <a:prstGeom prst="rect">
             <a:avLst/>
@@ -22208,7 +22208,7 @@
         <p:spPr>
           <a:xfrm>
             <a:off x="6400800" y="0"/>
-            <a:ext cx="16920" cy="6856560"/>
+            <a:ext cx="16560" cy="6856200"/>
           </a:xfrm>
           <a:prstGeom prst="rect">
             <a:avLst/>
@@ -22268,7 +22268,7 @@
         <p:spPr>
           <a:xfrm>
             <a:off x="7315200" y="0"/>
-            <a:ext cx="16920" cy="6856560"/>
+            <a:ext cx="16560" cy="6856200"/>
           </a:xfrm>
           <a:prstGeom prst="rect">
             <a:avLst/>
@@ -22328,7 +22328,7 @@
         <p:spPr>
           <a:xfrm>
             <a:off x="8229600" y="0"/>
-            <a:ext cx="16920" cy="6856560"/>
+            <a:ext cx="16560" cy="6856200"/>
           </a:xfrm>
           <a:prstGeom prst="rect">
             <a:avLst/>
@@ -22388,7 +22388,7 @@
         <p:spPr>
           <a:xfrm>
             <a:off x="9144000" y="0"/>
-            <a:ext cx="16920" cy="6856560"/>
+            <a:ext cx="16560" cy="6856200"/>
           </a:xfrm>
           <a:prstGeom prst="rect">
             <a:avLst/>
@@ -22448,7 +22448,7 @@
         <p:spPr>
           <a:xfrm>
             <a:off x="10058400" y="0"/>
-            <a:ext cx="16920" cy="6856560"/>
+            <a:ext cx="16560" cy="6856200"/>
           </a:xfrm>
           <a:prstGeom prst="rect">
             <a:avLst/>
@@ -22508,7 +22508,7 @@
         <p:spPr>
           <a:xfrm>
             <a:off x="10972800" y="0"/>
-            <a:ext cx="16920" cy="6856560"/>
+            <a:ext cx="16560" cy="6856200"/>
           </a:xfrm>
           <a:prstGeom prst="rect">
             <a:avLst/>
@@ -22568,7 +22568,7 @@
         <p:spPr>
           <a:xfrm>
             <a:off x="11887200" y="0"/>
-            <a:ext cx="16920" cy="6856560"/>
+            <a:ext cx="16560" cy="6856200"/>
           </a:xfrm>
           <a:prstGeom prst="rect">
             <a:avLst/>
@@ -22628,7 +22628,7 @@
         <p:spPr>
           <a:xfrm>
             <a:off x="0" y="0"/>
-            <a:ext cx="318600" cy="6856560"/>
+            <a:ext cx="318240" cy="6856200"/>
           </a:xfrm>
           <a:prstGeom prst="rect">
             <a:avLst/>
@@ -22688,7 +22688,7 @@
         <p:spPr>
           <a:xfrm>
             <a:off x="9875520" y="365760"/>
-            <a:ext cx="2010240" cy="501480"/>
+            <a:ext cx="2009880" cy="501120"/>
           </a:xfrm>
           <a:prstGeom prst="roundRect">
             <a:avLst>
@@ -22893,7 +22893,7 @@
         <p:spPr>
           <a:xfrm>
             <a:off x="987480" y="3182040"/>
-            <a:ext cx="3290400" cy="2741760"/>
+            <a:ext cx="3290040" cy="2741400"/>
           </a:xfrm>
           <a:prstGeom prst="roundRect">
             <a:avLst>
@@ -22955,7 +22955,7 @@
         <p:spPr>
           <a:xfrm>
             <a:off x="457200" y="2971800"/>
-            <a:ext cx="3747600" cy="3428640"/>
+            <a:ext cx="3747240" cy="3428280"/>
           </a:xfrm>
           <a:prstGeom prst="roundRect">
             <a:avLst>
@@ -23229,7 +23229,7 @@
         <p:spPr>
           <a:xfrm>
             <a:off x="4507920" y="3182040"/>
-            <a:ext cx="3290400" cy="2741760"/>
+            <a:ext cx="3290040" cy="2741400"/>
           </a:xfrm>
           <a:prstGeom prst="roundRect">
             <a:avLst>
@@ -23291,7 +23291,7 @@
         <p:spPr>
           <a:xfrm>
             <a:off x="4343400" y="2971800"/>
-            <a:ext cx="3428640" cy="3291480"/>
+            <a:ext cx="3428280" cy="3291120"/>
           </a:xfrm>
           <a:prstGeom prst="roundRect">
             <a:avLst>
@@ -23708,7 +23708,7 @@
         <p:spPr>
           <a:xfrm>
             <a:off x="8028360" y="3182040"/>
-            <a:ext cx="3290400" cy="2741760"/>
+            <a:ext cx="3290040" cy="2741400"/>
           </a:xfrm>
           <a:prstGeom prst="roundRect">
             <a:avLst>
@@ -23770,7 +23770,7 @@
         <p:spPr>
           <a:xfrm>
             <a:off x="7955280" y="3108960"/>
-            <a:ext cx="3702960" cy="3062880"/>
+            <a:ext cx="3702600" cy="3062520"/>
           </a:xfrm>
           <a:prstGeom prst="roundRect">
             <a:avLst>
@@ -24210,7 +24210,7 @@
         <p:spPr>
           <a:xfrm>
             <a:off x="4600080" y="6446520"/>
-            <a:ext cx="3051360" cy="363960"/>
+            <a:ext cx="3051000" cy="363960"/>
           </a:xfrm>
           <a:prstGeom prst="rect">
             <a:avLst/>
@@ -24294,7 +24294,7 @@
         <p:spPr>
           <a:xfrm>
             <a:off x="0" y="0"/>
-            <a:ext cx="12187800" cy="6856920"/>
+            <a:ext cx="12187440" cy="6856560"/>
           </a:xfrm>
           <a:prstGeom prst="rect">
             <a:avLst/>
@@ -24330,6 +24330,11 @@
             <a:noAutofit/>
           </a:bodyPr>
           <a:p>
+            <a:pPr>
+              <a:lnSpc>
+                <a:spcPct val="100000"/>
+              </a:lnSpc>
+            </a:pPr>
             <a:endParaRPr b="0" lang="en-US" sz="1800" spc="-1" strike="noStrike">
               <a:solidFill>
                 <a:schemeClr val="lt1"/>
@@ -24349,7 +24354,7 @@
         <p:spPr>
           <a:xfrm>
             <a:off x="0" y="0"/>
-            <a:ext cx="17280" cy="6856920"/>
+            <a:ext cx="16920" cy="6856560"/>
           </a:xfrm>
           <a:prstGeom prst="rect">
             <a:avLst/>
@@ -24385,6 +24390,11 @@
             <a:noAutofit/>
           </a:bodyPr>
           <a:p>
+            <a:pPr>
+              <a:lnSpc>
+                <a:spcPct val="100000"/>
+              </a:lnSpc>
+            </a:pPr>
             <a:endParaRPr b="0" lang="en-US" sz="1800" spc="-1" strike="noStrike">
               <a:solidFill>
                 <a:schemeClr val="lt1"/>
@@ -24404,7 +24414,7 @@
         <p:spPr>
           <a:xfrm>
             <a:off x="914400" y="0"/>
-            <a:ext cx="17280" cy="6856920"/>
+            <a:ext cx="16920" cy="6856560"/>
           </a:xfrm>
           <a:prstGeom prst="rect">
             <a:avLst/>
@@ -24440,6 +24450,11 @@
             <a:noAutofit/>
           </a:bodyPr>
           <a:p>
+            <a:pPr>
+              <a:lnSpc>
+                <a:spcPct val="100000"/>
+              </a:lnSpc>
+            </a:pPr>
             <a:endParaRPr b="0" lang="en-US" sz="1800" spc="-1" strike="noStrike">
               <a:solidFill>
                 <a:schemeClr val="lt1"/>
@@ -24459,7 +24474,7 @@
         <p:spPr>
           <a:xfrm>
             <a:off x="1828800" y="0"/>
-            <a:ext cx="17280" cy="6856920"/>
+            <a:ext cx="16920" cy="6856560"/>
           </a:xfrm>
           <a:prstGeom prst="rect">
             <a:avLst/>
@@ -24495,6 +24510,11 @@
             <a:noAutofit/>
           </a:bodyPr>
           <a:p>
+            <a:pPr>
+              <a:lnSpc>
+                <a:spcPct val="100000"/>
+              </a:lnSpc>
+            </a:pPr>
             <a:endParaRPr b="0" lang="en-US" sz="1800" spc="-1" strike="noStrike">
               <a:solidFill>
                 <a:schemeClr val="lt1"/>
@@ -24514,7 +24534,7 @@
         <p:spPr>
           <a:xfrm>
             <a:off x="2743200" y="0"/>
-            <a:ext cx="17280" cy="6856920"/>
+            <a:ext cx="16920" cy="6856560"/>
           </a:xfrm>
           <a:prstGeom prst="rect">
             <a:avLst/>
@@ -24550,6 +24570,11 @@
             <a:noAutofit/>
           </a:bodyPr>
           <a:p>
+            <a:pPr>
+              <a:lnSpc>
+                <a:spcPct val="100000"/>
+              </a:lnSpc>
+            </a:pPr>
             <a:endParaRPr b="0" lang="en-US" sz="1800" spc="-1" strike="noStrike">
               <a:solidFill>
                 <a:schemeClr val="lt1"/>
@@ -24569,7 +24594,7 @@
         <p:spPr>
           <a:xfrm>
             <a:off x="3657600" y="0"/>
-            <a:ext cx="17280" cy="6856920"/>
+            <a:ext cx="16920" cy="6856560"/>
           </a:xfrm>
           <a:prstGeom prst="rect">
             <a:avLst/>
@@ -24605,6 +24630,11 @@
             <a:noAutofit/>
           </a:bodyPr>
           <a:p>
+            <a:pPr>
+              <a:lnSpc>
+                <a:spcPct val="100000"/>
+              </a:lnSpc>
+            </a:pPr>
             <a:endParaRPr b="0" lang="en-US" sz="1800" spc="-1" strike="noStrike">
               <a:solidFill>
                 <a:schemeClr val="lt1"/>
@@ -24624,7 +24654,7 @@
         <p:spPr>
           <a:xfrm>
             <a:off x="4572000" y="0"/>
-            <a:ext cx="17280" cy="6856920"/>
+            <a:ext cx="16920" cy="6856560"/>
           </a:xfrm>
           <a:prstGeom prst="rect">
             <a:avLst/>
@@ -24660,6 +24690,11 @@
             <a:noAutofit/>
           </a:bodyPr>
           <a:p>
+            <a:pPr>
+              <a:lnSpc>
+                <a:spcPct val="100000"/>
+              </a:lnSpc>
+            </a:pPr>
             <a:endParaRPr b="0" lang="en-US" sz="1800" spc="-1" strike="noStrike">
               <a:solidFill>
                 <a:schemeClr val="lt1"/>
@@ -24679,7 +24714,7 @@
         <p:spPr>
           <a:xfrm>
             <a:off x="5486400" y="0"/>
-            <a:ext cx="17280" cy="6856920"/>
+            <a:ext cx="16920" cy="6856560"/>
           </a:xfrm>
           <a:prstGeom prst="rect">
             <a:avLst/>
@@ -24715,6 +24750,11 @@
             <a:noAutofit/>
           </a:bodyPr>
           <a:p>
+            <a:pPr>
+              <a:lnSpc>
+                <a:spcPct val="100000"/>
+              </a:lnSpc>
+            </a:pPr>
             <a:endParaRPr b="0" lang="en-US" sz="1800" spc="-1" strike="noStrike">
               <a:solidFill>
                 <a:schemeClr val="lt1"/>
@@ -24734,7 +24774,7 @@
         <p:spPr>
           <a:xfrm>
             <a:off x="6400800" y="0"/>
-            <a:ext cx="17280" cy="6856920"/>
+            <a:ext cx="16920" cy="6856560"/>
           </a:xfrm>
           <a:prstGeom prst="rect">
             <a:avLst/>
@@ -24770,6 +24810,11 @@
             <a:noAutofit/>
           </a:bodyPr>
           <a:p>
+            <a:pPr>
+              <a:lnSpc>
+                <a:spcPct val="100000"/>
+              </a:lnSpc>
+            </a:pPr>
             <a:endParaRPr b="0" lang="en-US" sz="1800" spc="-1" strike="noStrike">
               <a:solidFill>
                 <a:schemeClr val="lt1"/>
@@ -24789,7 +24834,7 @@
         <p:spPr>
           <a:xfrm>
             <a:off x="7315200" y="0"/>
-            <a:ext cx="17280" cy="6856920"/>
+            <a:ext cx="16920" cy="6856560"/>
           </a:xfrm>
           <a:prstGeom prst="rect">
             <a:avLst/>
@@ -24825,6 +24870,11 @@
             <a:noAutofit/>
           </a:bodyPr>
           <a:p>
+            <a:pPr>
+              <a:lnSpc>
+                <a:spcPct val="100000"/>
+              </a:lnSpc>
+            </a:pPr>
             <a:endParaRPr b="0" lang="en-US" sz="1800" spc="-1" strike="noStrike">
               <a:solidFill>
                 <a:schemeClr val="lt1"/>
@@ -24844,7 +24894,7 @@
         <p:spPr>
           <a:xfrm>
             <a:off x="8229600" y="0"/>
-            <a:ext cx="17280" cy="6856920"/>
+            <a:ext cx="16920" cy="6856560"/>
           </a:xfrm>
           <a:prstGeom prst="rect">
             <a:avLst/>
@@ -24880,6 +24930,11 @@
             <a:noAutofit/>
           </a:bodyPr>
           <a:p>
+            <a:pPr>
+              <a:lnSpc>
+                <a:spcPct val="100000"/>
+              </a:lnSpc>
+            </a:pPr>
             <a:endParaRPr b="0" lang="en-US" sz="1800" spc="-1" strike="noStrike">
               <a:solidFill>
                 <a:schemeClr val="lt1"/>
@@ -24899,7 +24954,7 @@
         <p:spPr>
           <a:xfrm>
             <a:off x="9144000" y="0"/>
-            <a:ext cx="17280" cy="6856920"/>
+            <a:ext cx="16920" cy="6856560"/>
           </a:xfrm>
           <a:prstGeom prst="rect">
             <a:avLst/>
@@ -24935,6 +24990,11 @@
             <a:noAutofit/>
           </a:bodyPr>
           <a:p>
+            <a:pPr>
+              <a:lnSpc>
+                <a:spcPct val="100000"/>
+              </a:lnSpc>
+            </a:pPr>
             <a:endParaRPr b="0" lang="en-US" sz="1800" spc="-1" strike="noStrike">
               <a:solidFill>
                 <a:schemeClr val="lt1"/>
@@ -24954,7 +25014,7 @@
         <p:spPr>
           <a:xfrm>
             <a:off x="10058400" y="0"/>
-            <a:ext cx="17280" cy="6856920"/>
+            <a:ext cx="16920" cy="6856560"/>
           </a:xfrm>
           <a:prstGeom prst="rect">
             <a:avLst/>
@@ -24990,6 +25050,11 @@
             <a:noAutofit/>
           </a:bodyPr>
           <a:p>
+            <a:pPr>
+              <a:lnSpc>
+                <a:spcPct val="100000"/>
+              </a:lnSpc>
+            </a:pPr>
             <a:endParaRPr b="0" lang="en-US" sz="1800" spc="-1" strike="noStrike">
               <a:solidFill>
                 <a:schemeClr val="lt1"/>
@@ -25009,7 +25074,7 @@
         <p:spPr>
           <a:xfrm>
             <a:off x="10972800" y="0"/>
-            <a:ext cx="17280" cy="6856920"/>
+            <a:ext cx="16920" cy="6856560"/>
           </a:xfrm>
           <a:prstGeom prst="rect">
             <a:avLst/>
@@ -25045,6 +25110,11 @@
             <a:noAutofit/>
           </a:bodyPr>
           <a:p>
+            <a:pPr>
+              <a:lnSpc>
+                <a:spcPct val="100000"/>
+              </a:lnSpc>
+            </a:pPr>
             <a:endParaRPr b="0" lang="en-US" sz="1800" spc="-1" strike="noStrike">
               <a:solidFill>
                 <a:schemeClr val="lt1"/>
@@ -25064,7 +25134,7 @@
         <p:spPr>
           <a:xfrm>
             <a:off x="11887200" y="0"/>
-            <a:ext cx="17280" cy="6856920"/>
+            <a:ext cx="16920" cy="6856560"/>
           </a:xfrm>
           <a:prstGeom prst="rect">
             <a:avLst/>
@@ -25100,6 +25170,11 @@
             <a:noAutofit/>
           </a:bodyPr>
           <a:p>
+            <a:pPr>
+              <a:lnSpc>
+                <a:spcPct val="100000"/>
+              </a:lnSpc>
+            </a:pPr>
             <a:endParaRPr b="0" lang="en-US" sz="1800" spc="-1" strike="noStrike">
               <a:solidFill>
                 <a:schemeClr val="lt1"/>
@@ -25119,7 +25194,7 @@
         <p:spPr>
           <a:xfrm>
             <a:off x="0" y="0"/>
-            <a:ext cx="318960" cy="6856920"/>
+            <a:ext cx="318600" cy="6856560"/>
           </a:xfrm>
           <a:prstGeom prst="rect">
             <a:avLst/>
@@ -25155,6 +25230,11 @@
             <a:noAutofit/>
           </a:bodyPr>
           <a:p>
+            <a:pPr>
+              <a:lnSpc>
+                <a:spcPct val="100000"/>
+              </a:lnSpc>
+            </a:pPr>
             <a:endParaRPr b="0" lang="en-US" sz="1800" spc="-1" strike="noStrike">
               <a:solidFill>
                 <a:schemeClr val="lt1"/>
@@ -25174,7 +25254,7 @@
         <p:spPr>
           <a:xfrm>
             <a:off x="9875520" y="365760"/>
-            <a:ext cx="2010600" cy="501840"/>
+            <a:ext cx="2010240" cy="501480"/>
           </a:xfrm>
           <a:prstGeom prst="roundRect">
             <a:avLst>
@@ -25301,8 +25381,8 @@
         </p:nvSpPr>
         <p:spPr>
           <a:xfrm>
-            <a:off x="4318200" y="2194560"/>
-            <a:ext cx="2335320" cy="379080"/>
+            <a:off x="2305080" y="1826640"/>
+            <a:ext cx="6505560" cy="668520"/>
           </a:xfrm>
           <a:prstGeom prst="rect">
             <a:avLst/>
@@ -25336,7 +25416,30 @@
                 <a:latin typeface="Calibri"/>
                 <a:ea typeface="DejaVu Sans"/>
               </a:rPr>
-              <a:t>Concept / explanation</a:t>
+              <a:t>Variable naming rules specify how variables should be written in </a:t>
+            </a:r>
+            <a:endParaRPr b="0" lang="en-US" sz="1900" spc="-1" strike="noStrike">
+              <a:solidFill>
+                <a:srgbClr val="000000"/>
+              </a:solidFill>
+              <a:latin typeface="Arial"/>
+            </a:endParaRPr>
+          </a:p>
+          <a:p>
+            <a:pPr>
+              <a:lnSpc>
+                <a:spcPct val="100000"/>
+              </a:lnSpc>
+            </a:pPr>
+            <a:r>
+              <a:rPr b="0" lang="en-US" sz="1900" spc="-1" strike="noStrike">
+                <a:solidFill>
+                  <a:srgbClr val="aaaaaa"/>
+                </a:solidFill>
+                <a:latin typeface="Calibri"/>
+                <a:ea typeface="DejaVu Sans"/>
+              </a:rPr>
+              <a:t>Java to ensure valid and readable code.</a:t>
             </a:r>
             <a:endParaRPr b="0" lang="en-US" sz="1900" spc="-1" strike="noStrike">
               <a:solidFill>
@@ -25356,7 +25459,7 @@
         <p:spPr>
           <a:xfrm>
             <a:off x="987480" y="3182040"/>
-            <a:ext cx="3290760" cy="2742120"/>
+            <a:ext cx="3290400" cy="2741760"/>
           </a:xfrm>
           <a:prstGeom prst="roundRect">
             <a:avLst>
@@ -25394,6 +25497,11 @@
             <a:noAutofit/>
           </a:bodyPr>
           <a:p>
+            <a:pPr>
+              <a:lnSpc>
+                <a:spcPct val="100000"/>
+              </a:lnSpc>
+            </a:pPr>
             <a:endParaRPr b="0" lang="en-US" sz="1800" spc="-1" strike="noStrike">
               <a:solidFill>
                 <a:schemeClr val="lt1"/>
@@ -25413,7 +25521,7 @@
         <p:spPr>
           <a:xfrm>
             <a:off x="475560" y="2514600"/>
-            <a:ext cx="3729600" cy="3886200"/>
+            <a:ext cx="3729240" cy="3885840"/>
           </a:xfrm>
           <a:prstGeom prst="roundRect">
             <a:avLst>
@@ -25746,7 +25854,7 @@
         <p:spPr>
           <a:xfrm>
             <a:off x="4507920" y="3182040"/>
-            <a:ext cx="3290760" cy="2742120"/>
+            <a:ext cx="3290400" cy="2741760"/>
           </a:xfrm>
           <a:prstGeom prst="roundRect">
             <a:avLst>
@@ -25784,6 +25892,11 @@
             <a:noAutofit/>
           </a:bodyPr>
           <a:p>
+            <a:pPr>
+              <a:lnSpc>
+                <a:spcPct val="100000"/>
+              </a:lnSpc>
+            </a:pPr>
             <a:endParaRPr b="0" lang="en-US" sz="1800" spc="-1" strike="noStrike">
               <a:solidFill>
                 <a:schemeClr val="lt1"/>
@@ -25803,7 +25916,7 @@
         <p:spPr>
           <a:xfrm>
             <a:off x="4434840" y="3108960"/>
-            <a:ext cx="3290760" cy="2742120"/>
+            <a:ext cx="3290400" cy="2741760"/>
           </a:xfrm>
           <a:prstGeom prst="roundRect">
             <a:avLst>
@@ -26065,7 +26178,7 @@
         <p:spPr>
           <a:xfrm>
             <a:off x="8028360" y="3182040"/>
-            <a:ext cx="3290760" cy="2742120"/>
+            <a:ext cx="3290400" cy="2741760"/>
           </a:xfrm>
           <a:prstGeom prst="roundRect">
             <a:avLst>
@@ -26103,6 +26216,11 @@
             <a:noAutofit/>
           </a:bodyPr>
           <a:p>
+            <a:pPr>
+              <a:lnSpc>
+                <a:spcPct val="100000"/>
+              </a:lnSpc>
+            </a:pPr>
             <a:endParaRPr b="0" lang="en-US" sz="1800" spc="-1" strike="noStrike">
               <a:solidFill>
                 <a:schemeClr val="lt1"/>
@@ -26122,7 +26240,7 @@
         <p:spPr>
           <a:xfrm>
             <a:off x="7955280" y="2514600"/>
-            <a:ext cx="3703320" cy="3409560"/>
+            <a:ext cx="3702960" cy="3409200"/>
           </a:xfrm>
           <a:prstGeom prst="roundRect">
             <a:avLst>
@@ -26496,7 +26614,7 @@
         <p:spPr>
           <a:xfrm>
             <a:off x="4600080" y="6446520"/>
-            <a:ext cx="3051720" cy="363960"/>
+            <a:ext cx="3051360" cy="363960"/>
           </a:xfrm>
           <a:prstGeom prst="rect">
             <a:avLst/>
@@ -26580,7 +26698,7 @@
         <p:spPr>
           <a:xfrm>
             <a:off x="0" y="0"/>
-            <a:ext cx="12187800" cy="6856920"/>
+            <a:ext cx="12187440" cy="6856560"/>
           </a:xfrm>
           <a:prstGeom prst="rect">
             <a:avLst/>
@@ -26616,6 +26734,11 @@
             <a:noAutofit/>
           </a:bodyPr>
           <a:p>
+            <a:pPr>
+              <a:lnSpc>
+                <a:spcPct val="100000"/>
+              </a:lnSpc>
+            </a:pPr>
             <a:endParaRPr b="0" lang="en-US" sz="1800" spc="-1" strike="noStrike">
               <a:solidFill>
                 <a:schemeClr val="lt1"/>
@@ -26635,7 +26758,7 @@
         <p:spPr>
           <a:xfrm>
             <a:off x="0" y="0"/>
-            <a:ext cx="17280" cy="6856920"/>
+            <a:ext cx="16920" cy="6856560"/>
           </a:xfrm>
           <a:prstGeom prst="rect">
             <a:avLst/>
@@ -26671,6 +26794,11 @@
             <a:noAutofit/>
           </a:bodyPr>
           <a:p>
+            <a:pPr>
+              <a:lnSpc>
+                <a:spcPct val="100000"/>
+              </a:lnSpc>
+            </a:pPr>
             <a:endParaRPr b="0" lang="en-US" sz="1800" spc="-1" strike="noStrike">
               <a:solidFill>
                 <a:schemeClr val="lt1"/>
@@ -26690,7 +26818,7 @@
         <p:spPr>
           <a:xfrm>
             <a:off x="914400" y="0"/>
-            <a:ext cx="17280" cy="6856920"/>
+            <a:ext cx="16920" cy="6856560"/>
           </a:xfrm>
           <a:prstGeom prst="rect">
             <a:avLst/>
@@ -26726,6 +26854,11 @@
             <a:noAutofit/>
           </a:bodyPr>
           <a:p>
+            <a:pPr>
+              <a:lnSpc>
+                <a:spcPct val="100000"/>
+              </a:lnSpc>
+            </a:pPr>
             <a:endParaRPr b="0" lang="en-US" sz="1800" spc="-1" strike="noStrike">
               <a:solidFill>
                 <a:schemeClr val="lt1"/>
@@ -26745,7 +26878,7 @@
         <p:spPr>
           <a:xfrm>
             <a:off x="1828800" y="0"/>
-            <a:ext cx="17280" cy="6856920"/>
+            <a:ext cx="16920" cy="6856560"/>
           </a:xfrm>
           <a:prstGeom prst="rect">
             <a:avLst/>
@@ -26781,6 +26914,11 @@
             <a:noAutofit/>
           </a:bodyPr>
           <a:p>
+            <a:pPr>
+              <a:lnSpc>
+                <a:spcPct val="100000"/>
+              </a:lnSpc>
+            </a:pPr>
             <a:endParaRPr b="0" lang="en-US" sz="1800" spc="-1" strike="noStrike">
               <a:solidFill>
                 <a:schemeClr val="lt1"/>
@@ -26800,7 +26938,7 @@
         <p:spPr>
           <a:xfrm>
             <a:off x="2743200" y="0"/>
-            <a:ext cx="17280" cy="6856920"/>
+            <a:ext cx="16920" cy="6856560"/>
           </a:xfrm>
           <a:prstGeom prst="rect">
             <a:avLst/>
@@ -26836,6 +26974,11 @@
             <a:noAutofit/>
           </a:bodyPr>
           <a:p>
+            <a:pPr>
+              <a:lnSpc>
+                <a:spcPct val="100000"/>
+              </a:lnSpc>
+            </a:pPr>
             <a:endParaRPr b="0" lang="en-US" sz="1800" spc="-1" strike="noStrike">
               <a:solidFill>
                 <a:schemeClr val="lt1"/>
@@ -26855,7 +26998,7 @@
         <p:spPr>
           <a:xfrm>
             <a:off x="3657600" y="0"/>
-            <a:ext cx="17280" cy="6856920"/>
+            <a:ext cx="16920" cy="6856560"/>
           </a:xfrm>
           <a:prstGeom prst="rect">
             <a:avLst/>
@@ -26891,6 +27034,11 @@
             <a:noAutofit/>
           </a:bodyPr>
           <a:p>
+            <a:pPr>
+              <a:lnSpc>
+                <a:spcPct val="100000"/>
+              </a:lnSpc>
+            </a:pPr>
             <a:endParaRPr b="0" lang="en-US" sz="1800" spc="-1" strike="noStrike">
               <a:solidFill>
                 <a:schemeClr val="lt1"/>
@@ -26910,7 +27058,7 @@
         <p:spPr>
           <a:xfrm>
             <a:off x="4572000" y="0"/>
-            <a:ext cx="17280" cy="6856920"/>
+            <a:ext cx="16920" cy="6856560"/>
           </a:xfrm>
           <a:prstGeom prst="rect">
             <a:avLst/>
@@ -26946,6 +27094,11 @@
             <a:noAutofit/>
           </a:bodyPr>
           <a:p>
+            <a:pPr>
+              <a:lnSpc>
+                <a:spcPct val="100000"/>
+              </a:lnSpc>
+            </a:pPr>
             <a:endParaRPr b="0" lang="en-US" sz="1800" spc="-1" strike="noStrike">
               <a:solidFill>
                 <a:schemeClr val="lt1"/>
@@ -26965,7 +27118,7 @@
         <p:spPr>
           <a:xfrm>
             <a:off x="5486400" y="0"/>
-            <a:ext cx="17280" cy="6856920"/>
+            <a:ext cx="16920" cy="6856560"/>
           </a:xfrm>
           <a:prstGeom prst="rect">
             <a:avLst/>
@@ -27001,6 +27154,11 @@
             <a:noAutofit/>
           </a:bodyPr>
           <a:p>
+            <a:pPr>
+              <a:lnSpc>
+                <a:spcPct val="100000"/>
+              </a:lnSpc>
+            </a:pPr>
             <a:endParaRPr b="0" lang="en-US" sz="1800" spc="-1" strike="noStrike">
               <a:solidFill>
                 <a:schemeClr val="lt1"/>
@@ -27020,7 +27178,7 @@
         <p:spPr>
           <a:xfrm>
             <a:off x="6400800" y="0"/>
-            <a:ext cx="17280" cy="6856920"/>
+            <a:ext cx="16920" cy="6856560"/>
           </a:xfrm>
           <a:prstGeom prst="rect">
             <a:avLst/>
@@ -27056,6 +27214,11 @@
             <a:noAutofit/>
           </a:bodyPr>
           <a:p>
+            <a:pPr>
+              <a:lnSpc>
+                <a:spcPct val="100000"/>
+              </a:lnSpc>
+            </a:pPr>
             <a:endParaRPr b="0" lang="en-US" sz="1800" spc="-1" strike="noStrike">
               <a:solidFill>
                 <a:schemeClr val="lt1"/>
@@ -27075,7 +27238,7 @@
         <p:spPr>
           <a:xfrm>
             <a:off x="7315200" y="0"/>
-            <a:ext cx="17280" cy="6856920"/>
+            <a:ext cx="16920" cy="6856560"/>
           </a:xfrm>
           <a:prstGeom prst="rect">
             <a:avLst/>
@@ -27111,6 +27274,11 @@
             <a:noAutofit/>
           </a:bodyPr>
           <a:p>
+            <a:pPr>
+              <a:lnSpc>
+                <a:spcPct val="100000"/>
+              </a:lnSpc>
+            </a:pPr>
             <a:endParaRPr b="0" lang="en-US" sz="1800" spc="-1" strike="noStrike">
               <a:solidFill>
                 <a:schemeClr val="lt1"/>
@@ -27130,7 +27298,7 @@
         <p:spPr>
           <a:xfrm>
             <a:off x="8229600" y="0"/>
-            <a:ext cx="17280" cy="6856920"/>
+            <a:ext cx="16920" cy="6856560"/>
           </a:xfrm>
           <a:prstGeom prst="rect">
             <a:avLst/>
@@ -27166,6 +27334,11 @@
             <a:noAutofit/>
           </a:bodyPr>
           <a:p>
+            <a:pPr>
+              <a:lnSpc>
+                <a:spcPct val="100000"/>
+              </a:lnSpc>
+            </a:pPr>
             <a:endParaRPr b="0" lang="en-US" sz="1800" spc="-1" strike="noStrike">
               <a:solidFill>
                 <a:schemeClr val="lt1"/>
@@ -27185,7 +27358,7 @@
         <p:spPr>
           <a:xfrm>
             <a:off x="9144000" y="0"/>
-            <a:ext cx="17280" cy="6856920"/>
+            <a:ext cx="16920" cy="6856560"/>
           </a:xfrm>
           <a:prstGeom prst="rect">
             <a:avLst/>
@@ -27221,6 +27394,11 @@
             <a:noAutofit/>
           </a:bodyPr>
           <a:p>
+            <a:pPr>
+              <a:lnSpc>
+                <a:spcPct val="100000"/>
+              </a:lnSpc>
+            </a:pPr>
             <a:endParaRPr b="0" lang="en-US" sz="1800" spc="-1" strike="noStrike">
               <a:solidFill>
                 <a:schemeClr val="lt1"/>
@@ -27240,7 +27418,7 @@
         <p:spPr>
           <a:xfrm>
             <a:off x="10058400" y="0"/>
-            <a:ext cx="17280" cy="6856920"/>
+            <a:ext cx="16920" cy="6856560"/>
           </a:xfrm>
           <a:prstGeom prst="rect">
             <a:avLst/>
@@ -27276,6 +27454,11 @@
             <a:noAutofit/>
           </a:bodyPr>
           <a:p>
+            <a:pPr>
+              <a:lnSpc>
+                <a:spcPct val="100000"/>
+              </a:lnSpc>
+            </a:pPr>
             <a:endParaRPr b="0" lang="en-US" sz="1800" spc="-1" strike="noStrike">
               <a:solidFill>
                 <a:schemeClr val="lt1"/>
@@ -27295,7 +27478,7 @@
         <p:spPr>
           <a:xfrm>
             <a:off x="10972800" y="0"/>
-            <a:ext cx="17280" cy="6856920"/>
+            <a:ext cx="16920" cy="6856560"/>
           </a:xfrm>
           <a:prstGeom prst="rect">
             <a:avLst/>
@@ -27331,6 +27514,11 @@
             <a:noAutofit/>
           </a:bodyPr>
           <a:p>
+            <a:pPr>
+              <a:lnSpc>
+                <a:spcPct val="100000"/>
+              </a:lnSpc>
+            </a:pPr>
             <a:endParaRPr b="0" lang="en-US" sz="1800" spc="-1" strike="noStrike">
               <a:solidFill>
                 <a:schemeClr val="lt1"/>
@@ -27350,7 +27538,7 @@
         <p:spPr>
           <a:xfrm>
             <a:off x="11887200" y="0"/>
-            <a:ext cx="17280" cy="6856920"/>
+            <a:ext cx="16920" cy="6856560"/>
           </a:xfrm>
           <a:prstGeom prst="rect">
             <a:avLst/>
@@ -27386,6 +27574,11 @@
             <a:noAutofit/>
           </a:bodyPr>
           <a:p>
+            <a:pPr>
+              <a:lnSpc>
+                <a:spcPct val="100000"/>
+              </a:lnSpc>
+            </a:pPr>
             <a:endParaRPr b="0" lang="en-US" sz="1800" spc="-1" strike="noStrike">
               <a:solidFill>
                 <a:schemeClr val="lt1"/>
@@ -27405,7 +27598,7 @@
         <p:spPr>
           <a:xfrm>
             <a:off x="0" y="0"/>
-            <a:ext cx="318960" cy="6856920"/>
+            <a:ext cx="318600" cy="6856560"/>
           </a:xfrm>
           <a:prstGeom prst="rect">
             <a:avLst/>
@@ -27441,6 +27634,11 @@
             <a:noAutofit/>
           </a:bodyPr>
           <a:p>
+            <a:pPr>
+              <a:lnSpc>
+                <a:spcPct val="100000"/>
+              </a:lnSpc>
+            </a:pPr>
             <a:endParaRPr b="0" lang="en-US" sz="1800" spc="-1" strike="noStrike">
               <a:solidFill>
                 <a:schemeClr val="lt1"/>
@@ -27460,7 +27658,7 @@
         <p:spPr>
           <a:xfrm>
             <a:off x="9875520" y="365760"/>
-            <a:ext cx="2010600" cy="501840"/>
+            <a:ext cx="2010240" cy="501480"/>
           </a:xfrm>
           <a:prstGeom prst="roundRect">
             <a:avLst>
@@ -27588,7 +27786,7 @@
         <p:spPr>
           <a:xfrm>
             <a:off x="2057400" y="2074680"/>
-            <a:ext cx="6873120" cy="668520"/>
+            <a:ext cx="6872760" cy="668520"/>
           </a:xfrm>
           <a:prstGeom prst="rect">
             <a:avLst/>
@@ -27665,7 +27863,7 @@
         <p:spPr>
           <a:xfrm>
             <a:off x="987480" y="3182040"/>
-            <a:ext cx="3290760" cy="2742120"/>
+            <a:ext cx="3290400" cy="2741760"/>
           </a:xfrm>
           <a:prstGeom prst="roundRect">
             <a:avLst>
@@ -27703,6 +27901,11 @@
             <a:noAutofit/>
           </a:bodyPr>
           <a:p>
+            <a:pPr>
+              <a:lnSpc>
+                <a:spcPct val="100000"/>
+              </a:lnSpc>
+            </a:pPr>
             <a:endParaRPr b="0" lang="en-US" sz="1800" spc="-1" strike="noStrike">
               <a:solidFill>
                 <a:schemeClr val="lt1"/>
@@ -27722,7 +27925,7 @@
         <p:spPr>
           <a:xfrm>
             <a:off x="685800" y="2971800"/>
-            <a:ext cx="3519360" cy="3200400"/>
+            <a:ext cx="3519000" cy="3200040"/>
           </a:xfrm>
           <a:prstGeom prst="roundRect">
             <a:avLst>
@@ -27996,7 +28199,7 @@
         <p:spPr>
           <a:xfrm>
             <a:off x="4507920" y="3182040"/>
-            <a:ext cx="3290760" cy="2742120"/>
+            <a:ext cx="3290400" cy="2741760"/>
           </a:xfrm>
           <a:prstGeom prst="roundRect">
             <a:avLst>
@@ -28034,6 +28237,11 @@
             <a:noAutofit/>
           </a:bodyPr>
           <a:p>
+            <a:pPr>
+              <a:lnSpc>
+                <a:spcPct val="100000"/>
+              </a:lnSpc>
+            </a:pPr>
             <a:endParaRPr b="0" lang="en-US" sz="1800" spc="-1" strike="noStrike">
               <a:solidFill>
                 <a:schemeClr val="lt1"/>
@@ -28053,7 +28261,7 @@
         <p:spPr>
           <a:xfrm>
             <a:off x="4434840" y="3108960"/>
-            <a:ext cx="3290760" cy="2742120"/>
+            <a:ext cx="3290400" cy="2741760"/>
           </a:xfrm>
           <a:prstGeom prst="roundRect">
             <a:avLst>
@@ -28394,7 +28602,7 @@
         <p:spPr>
           <a:xfrm>
             <a:off x="8028360" y="3182040"/>
-            <a:ext cx="3290760" cy="2742120"/>
+            <a:ext cx="3290400" cy="2741760"/>
           </a:xfrm>
           <a:prstGeom prst="roundRect">
             <a:avLst>
@@ -28432,6 +28640,11 @@
             <a:noAutofit/>
           </a:bodyPr>
           <a:p>
+            <a:pPr>
+              <a:lnSpc>
+                <a:spcPct val="100000"/>
+              </a:lnSpc>
+            </a:pPr>
             <a:endParaRPr b="0" lang="en-US" sz="1800" spc="-1" strike="noStrike">
               <a:solidFill>
                 <a:schemeClr val="lt1"/>
@@ -28451,7 +28664,7 @@
         <p:spPr>
           <a:xfrm>
             <a:off x="7955280" y="2971800"/>
-            <a:ext cx="3474720" cy="2971800"/>
+            <a:ext cx="3474360" cy="2971440"/>
           </a:xfrm>
           <a:prstGeom prst="roundRect">
             <a:avLst>
@@ -28779,7 +28992,7 @@
         <p:spPr>
           <a:xfrm>
             <a:off x="4600080" y="6446520"/>
-            <a:ext cx="3051720" cy="363960"/>
+            <a:ext cx="3051360" cy="363960"/>
           </a:xfrm>
           <a:prstGeom prst="rect">
             <a:avLst/>
@@ -29520,10 +29733,10 @@
   <a:themeElements>
     <a:clrScheme name="Office">
       <a:dk1>
-        <a:sysClr val="windowText" lastClr="000000"/>
+        <a:srgbClr val="000000"/>
       </a:dk1>
       <a:lt1>
-        <a:sysClr val="window" lastClr="FFFFFF"/>
+        <a:srgbClr val="ffffff"/>
       </a:lt1>
       <a:dk2>
         <a:srgbClr val="1f497d"/>

--- a/Java/Java #3/EN/Java #3.pptx
+++ b/Java/Java #3/EN/Java #3.pptx
@@ -6,15 +6,17 @@
     <p:sldMasterId id="2147483661" r:id="rId3"/>
     <p:sldMasterId id="2147483674" r:id="rId4"/>
     <p:sldMasterId id="2147483687" r:id="rId5"/>
+    <p:sldMasterId id="2147483700" r:id="rId6"/>
   </p:sldMasterIdLst>
   <p:sldIdLst>
-    <p:sldId id="256" r:id="rId6"/>
-    <p:sldId id="257" r:id="rId7"/>
-    <p:sldId id="258" r:id="rId8"/>
-    <p:sldId id="259" r:id="rId9"/>
-    <p:sldId id="260" r:id="rId10"/>
-    <p:sldId id="261" r:id="rId11"/>
-    <p:sldId id="262" r:id="rId12"/>
+    <p:sldId id="256" r:id="rId7"/>
+    <p:sldId id="257" r:id="rId8"/>
+    <p:sldId id="258" r:id="rId9"/>
+    <p:sldId id="259" r:id="rId10"/>
+    <p:sldId id="260" r:id="rId11"/>
+    <p:sldId id="261" r:id="rId12"/>
+    <p:sldId id="262" r:id="rId13"/>
+    <p:sldId id="263" r:id="rId14"/>
   </p:sldIdLst>
   <p:sldSz cx="9144000" cy="6858000"/>
   <p:notesSz cx="7772400" cy="10058400"/>
@@ -72,7 +74,7 @@
         <p:txBody>
           <a:bodyPr/>
           <a:p>
-            <a:fld id="{5C215A0C-A718-457B-BF37-1880E3309548}" type="slidenum">
+            <a:fld id="{20A38027-2AB6-44FC-BC6F-9AEB43EEE6D1}" type="slidenum">
               <a:t>&lt;#&gt;</a:t>
             </a:fld>
           </a:p>
@@ -281,7 +283,7 @@
         <p:txBody>
           <a:bodyPr/>
           <a:p>
-            <a:fld id="{AE85BCF6-295E-4292-A615-BD24A8DDDDBE}" type="slidenum">
+            <a:fld id="{10E22E2D-3C28-495D-8D3E-7810386D237E}" type="slidenum">
               <a:t>&lt;#&gt;</a:t>
             </a:fld>
           </a:p>
@@ -576,7 +578,7 @@
         <p:txBody>
           <a:bodyPr/>
           <a:p>
-            <a:fld id="{FFCC8DF8-C3D9-4FD7-AB7E-C714A8BE2035}" type="slidenum">
+            <a:fld id="{6A5C4806-487D-488E-BF6F-C972AC1A976A}" type="slidenum">
               <a:t>&lt;#&gt;</a:t>
             </a:fld>
           </a:p>
@@ -957,7 +959,7 @@
         <p:txBody>
           <a:bodyPr/>
           <a:p>
-            <a:fld id="{305C7CC0-CABC-4DAA-A3A6-2322B1C16209}" type="slidenum">
+            <a:fld id="{5B052F07-C319-42DC-9C29-F63EA58C058D}" type="slidenum">
               <a:t>&lt;#&gt;</a:t>
             </a:fld>
           </a:p>
@@ -1040,7 +1042,7 @@
         <p:txBody>
           <a:bodyPr/>
           <a:p>
-            <a:fld id="{15B53005-3BCB-4289-88B5-7FD89F09356D}" type="slidenum">
+            <a:fld id="{FF048CEC-79AA-43BC-8C5E-5D4BB5697E6B}" type="slidenum">
               <a:t>&lt;#&gt;</a:t>
             </a:fld>
           </a:p>
@@ -1203,7 +1205,7 @@
         <p:txBody>
           <a:bodyPr/>
           <a:p>
-            <a:fld id="{1E644947-2ACC-449B-8B50-4030C0699393}" type="slidenum">
+            <a:fld id="{C4741F23-678F-4DDF-A19A-2E1037AFC5E8}" type="slidenum">
               <a:t>&lt;#&gt;</a:t>
             </a:fld>
           </a:p>
@@ -1369,7 +1371,7 @@
         <p:txBody>
           <a:bodyPr/>
           <a:p>
-            <a:fld id="{8C546E87-25E9-4453-A4CE-1D8A8B1C978E}" type="slidenum">
+            <a:fld id="{D7C59E37-A180-4933-9B79-EFD9EC782A14}" type="slidenum">
               <a:t>&lt;#&gt;</a:t>
             </a:fld>
           </a:p>
@@ -1578,7 +1580,7 @@
         <p:txBody>
           <a:bodyPr/>
           <a:p>
-            <a:fld id="{0CD4E03B-C402-4B04-A41B-F4E6D0B8BA3A}" type="slidenum">
+            <a:fld id="{B3485D97-C1B1-4DDF-8C86-0CCA625D816B}" type="slidenum">
               <a:t>&lt;#&gt;</a:t>
             </a:fld>
           </a:p>
@@ -1701,7 +1703,7 @@
         <p:txBody>
           <a:bodyPr/>
           <a:p>
-            <a:fld id="{C9C27530-887D-489B-B979-636614F391D8}" type="slidenum">
+            <a:fld id="{05EAC9CF-B775-4B70-8E58-88CA6E551E75}" type="slidenum">
               <a:t>&lt;#&gt;</a:t>
             </a:fld>
           </a:p>
@@ -1822,7 +1824,7 @@
         <p:txBody>
           <a:bodyPr/>
           <a:p>
-            <a:fld id="{4D5F5F38-F932-4D8E-AFA5-10BF54C58DD0}" type="slidenum">
+            <a:fld id="{608EBBBD-C9EC-48B9-AB05-5DE37E5CDB07}" type="slidenum">
               <a:t>&lt;#&gt;</a:t>
             </a:fld>
           </a:p>
@@ -2074,7 +2076,7 @@
         <p:txBody>
           <a:bodyPr/>
           <a:p>
-            <a:fld id="{C2807947-9E56-40FD-B48C-424073FA4E77}" type="slidenum">
+            <a:fld id="{8347118F-7EB9-46ED-8F4E-A35D1FD27DE6}" type="slidenum">
               <a:t>&lt;#&gt;</a:t>
             </a:fld>
           </a:p>
@@ -2237,7 +2239,7 @@
         <p:txBody>
           <a:bodyPr/>
           <a:p>
-            <a:fld id="{49BD4547-569E-4612-B04B-994DD86F44C6}" type="slidenum">
+            <a:fld id="{3FEE2B5E-02BF-4053-93CF-D0416ECFFBF6}" type="slidenum">
               <a:t>&lt;#&gt;</a:t>
             </a:fld>
           </a:p>
@@ -2489,7 +2491,7 @@
         <p:txBody>
           <a:bodyPr/>
           <a:p>
-            <a:fld id="{EB40C941-10DE-4E04-A33D-3A599666E471}" type="slidenum">
+            <a:fld id="{80AA2D80-7F29-4C39-965B-51C24BAD6FE5}" type="slidenum">
               <a:t>&lt;#&gt;</a:t>
             </a:fld>
           </a:p>
@@ -2741,7 +2743,7 @@
         <p:txBody>
           <a:bodyPr/>
           <a:p>
-            <a:fld id="{D249DD29-CDC8-4121-9DD4-90B7D3974119}" type="slidenum">
+            <a:fld id="{0583D3C2-2207-49BC-A29D-72F29DDD875E}" type="slidenum">
               <a:t>&lt;#&gt;</a:t>
             </a:fld>
           </a:p>
@@ -2950,7 +2952,7 @@
         <p:txBody>
           <a:bodyPr/>
           <a:p>
-            <a:fld id="{95053264-D791-45E5-B55E-67AFF8EF818C}" type="slidenum">
+            <a:fld id="{42580BB0-22F3-48E8-900F-9F52F1C80BD1}" type="slidenum">
               <a:t>&lt;#&gt;</a:t>
             </a:fld>
           </a:p>
@@ -3245,7 +3247,7 @@
         <p:txBody>
           <a:bodyPr/>
           <a:p>
-            <a:fld id="{CB6CD64A-F919-4080-B099-24137933E6C1}" type="slidenum">
+            <a:fld id="{FAFC2B73-7CA3-4B2E-B0CC-562AE04D1277}" type="slidenum">
               <a:t>&lt;#&gt;</a:t>
             </a:fld>
           </a:p>
@@ -3626,7 +3628,7 @@
         <p:txBody>
           <a:bodyPr/>
           <a:p>
-            <a:fld id="{B643E947-6D97-472C-BB98-D1BB81F55E11}" type="slidenum">
+            <a:fld id="{F48F5340-654C-4496-BC14-0AB00893E483}" type="slidenum">
               <a:t>&lt;#&gt;</a:t>
             </a:fld>
           </a:p>
@@ -3709,7 +3711,7 @@
         <p:txBody>
           <a:bodyPr/>
           <a:p>
-            <a:fld id="{D97DFCDB-86BD-4766-8E3C-F85F81391EA3}" type="slidenum">
+            <a:fld id="{43C1941E-66EB-4383-9B12-F6612C54A816}" type="slidenum">
               <a:t>&lt;#&gt;</a:t>
             </a:fld>
           </a:p>
@@ -3872,7 +3874,7 @@
         <p:txBody>
           <a:bodyPr/>
           <a:p>
-            <a:fld id="{2E9DAD3F-A8A7-4FCD-92FF-2351FDC4158E}" type="slidenum">
+            <a:fld id="{48E850B4-13C2-429B-99DF-5080D361BC8F}" type="slidenum">
               <a:t>&lt;#&gt;</a:t>
             </a:fld>
           </a:p>
@@ -4038,7 +4040,7 @@
         <p:txBody>
           <a:bodyPr/>
           <a:p>
-            <a:fld id="{9294A7ED-7D4E-4322-8C5D-FDDA14617462}" type="slidenum">
+            <a:fld id="{5A0EFCBF-12DB-4597-B322-FB9F68BD9EDB}" type="slidenum">
               <a:t>&lt;#&gt;</a:t>
             </a:fld>
           </a:p>
@@ -4247,7 +4249,7 @@
         <p:txBody>
           <a:bodyPr/>
           <a:p>
-            <a:fld id="{B570380F-9644-4180-A928-625CD595DF93}" type="slidenum">
+            <a:fld id="{987B4C23-C252-40D8-B7D2-5CF6C570429F}" type="slidenum">
               <a:t>&lt;#&gt;</a:t>
             </a:fld>
           </a:p>
@@ -4370,7 +4372,7 @@
         <p:txBody>
           <a:bodyPr/>
           <a:p>
-            <a:fld id="{47334071-8D87-4A9F-BD2B-CDC8FF3D32FF}" type="slidenum">
+            <a:fld id="{178105E3-6617-459B-8DE2-C63DA7A542F0}" type="slidenum">
               <a:t>&lt;#&gt;</a:t>
             </a:fld>
           </a:p>
@@ -4536,7 +4538,7 @@
         <p:txBody>
           <a:bodyPr/>
           <a:p>
-            <a:fld id="{1C84A6D9-DA40-40B4-A488-E2A933E2C9BA}" type="slidenum">
+            <a:fld id="{0B248F49-474D-4205-9826-9A457CACD4C9}" type="slidenum">
               <a:t>&lt;#&gt;</a:t>
             </a:fld>
           </a:p>
@@ -4657,7 +4659,7 @@
         <p:txBody>
           <a:bodyPr/>
           <a:p>
-            <a:fld id="{7203B896-3099-4B7B-A616-8A5B399CF58D}" type="slidenum">
+            <a:fld id="{1A7140A2-4683-4EC0-980E-3DB83A485DA9}" type="slidenum">
               <a:t>&lt;#&gt;</a:t>
             </a:fld>
           </a:p>
@@ -4909,7 +4911,7 @@
         <p:txBody>
           <a:bodyPr/>
           <a:p>
-            <a:fld id="{D2FB7526-8DCD-4027-A23A-6A7AD50691BA}" type="slidenum">
+            <a:fld id="{CFC3FDEE-18EC-4D20-8DBC-A0AC1935128D}" type="slidenum">
               <a:t>&lt;#&gt;</a:t>
             </a:fld>
           </a:p>
@@ -5161,7 +5163,7 @@
         <p:txBody>
           <a:bodyPr/>
           <a:p>
-            <a:fld id="{10173B5A-1777-4C57-B18A-EF4AD13731EC}" type="slidenum">
+            <a:fld id="{B9B156F5-F553-448F-9912-743D9E7432C1}" type="slidenum">
               <a:t>&lt;#&gt;</a:t>
             </a:fld>
           </a:p>
@@ -5413,7 +5415,7 @@
         <p:txBody>
           <a:bodyPr/>
           <a:p>
-            <a:fld id="{FB730700-CC77-47E1-AA54-3B0FAB295EC6}" type="slidenum">
+            <a:fld id="{D62D9B68-CAD4-44BB-9033-1963D52EBD43}" type="slidenum">
               <a:t>&lt;#&gt;</a:t>
             </a:fld>
           </a:p>
@@ -5622,7 +5624,7 @@
         <p:txBody>
           <a:bodyPr/>
           <a:p>
-            <a:fld id="{FBEE9429-C7BF-42B0-9E25-6A992AA89197}" type="slidenum">
+            <a:fld id="{E0D21EF1-A25D-4F90-AB39-A5DEDE093774}" type="slidenum">
               <a:t>&lt;#&gt;</a:t>
             </a:fld>
           </a:p>
@@ -5917,7 +5919,7 @@
         <p:txBody>
           <a:bodyPr/>
           <a:p>
-            <a:fld id="{13460C90-3A8A-48DB-B63D-A98F0C338519}" type="slidenum">
+            <a:fld id="{566F895B-B0C0-4900-8462-AC7D04EA3FC1}" type="slidenum">
               <a:t>&lt;#&gt;</a:t>
             </a:fld>
           </a:p>
@@ -6298,7 +6300,7 @@
         <p:txBody>
           <a:bodyPr/>
           <a:p>
-            <a:fld id="{5DF65984-4310-4849-A238-2B8867C58CFD}" type="slidenum">
+            <a:fld id="{C5BA99B6-ADD9-4077-80FC-B8DB113A8F67}" type="slidenum">
               <a:t>&lt;#&gt;</a:t>
             </a:fld>
           </a:p>
@@ -6381,7 +6383,7 @@
         <p:txBody>
           <a:bodyPr/>
           <a:p>
-            <a:fld id="{2C5BC07B-1FE2-481F-A892-57135E70B093}" type="slidenum">
+            <a:fld id="{067C0EF6-DA89-456E-BBE2-27650F539A00}" type="slidenum">
               <a:t>&lt;#&gt;</a:t>
             </a:fld>
           </a:p>
@@ -6544,7 +6546,7 @@
         <p:txBody>
           <a:bodyPr/>
           <a:p>
-            <a:fld id="{02975408-530E-4AE9-81B4-22D77220DF1A}" type="slidenum">
+            <a:fld id="{CB8B587F-FE65-4B5D-834D-0C5EBD8A5A08}" type="slidenum">
               <a:t>&lt;#&gt;</a:t>
             </a:fld>
           </a:p>
@@ -6710,7 +6712,7 @@
         <p:txBody>
           <a:bodyPr/>
           <a:p>
-            <a:fld id="{C8A5AC6D-1F89-43A8-87E7-2EB564F1ED67}" type="slidenum">
+            <a:fld id="{6851D75A-AB88-40BE-89AB-330636C92EA3}" type="slidenum">
               <a:t>&lt;#&gt;</a:t>
             </a:fld>
           </a:p>
@@ -6919,7 +6921,7 @@
         <p:txBody>
           <a:bodyPr/>
           <a:p>
-            <a:fld id="{2E509831-1708-4C77-AF4F-A80E426AB01A}" type="slidenum">
+            <a:fld id="{AF035550-6D69-4FD0-B01E-E83E8548A40D}" type="slidenum">
               <a:t>&lt;#&gt;</a:t>
             </a:fld>
           </a:p>
@@ -7128,7 +7130,7 @@
         <p:txBody>
           <a:bodyPr/>
           <a:p>
-            <a:fld id="{B516604D-C8FB-4821-9E06-54C4CC880F32}" type="slidenum">
+            <a:fld id="{4F87CC12-52C0-4D82-B32E-67F035EAB072}" type="slidenum">
               <a:t>&lt;#&gt;</a:t>
             </a:fld>
           </a:p>
@@ -7251,7 +7253,7 @@
         <p:txBody>
           <a:bodyPr/>
           <a:p>
-            <a:fld id="{1719B2F6-026B-4422-AD96-2487F50737A9}" type="slidenum">
+            <a:fld id="{CBECE65A-0F40-47C5-8C38-D98F975484C9}" type="slidenum">
               <a:t>&lt;#&gt;</a:t>
             </a:fld>
           </a:p>
@@ -7372,7 +7374,7 @@
         <p:txBody>
           <a:bodyPr/>
           <a:p>
-            <a:fld id="{670E7F4B-FF0E-41E3-BA91-F42D58A26F26}" type="slidenum">
+            <a:fld id="{76E9C8AE-47E5-4222-B44D-15FD8FD2785F}" type="slidenum">
               <a:t>&lt;#&gt;</a:t>
             </a:fld>
           </a:p>
@@ -7624,7 +7626,7 @@
         <p:txBody>
           <a:bodyPr/>
           <a:p>
-            <a:fld id="{AB6CC599-D38C-4B7A-BE56-D66F1D2FFC7B}" type="slidenum">
+            <a:fld id="{E9EFBD2A-FBC5-477E-B2A0-E4CD9B791DE4}" type="slidenum">
               <a:t>&lt;#&gt;</a:t>
             </a:fld>
           </a:p>
@@ -7876,7 +7878,7 @@
         <p:txBody>
           <a:bodyPr/>
           <a:p>
-            <a:fld id="{540C0919-C172-48DF-8CED-27262BA42BB0}" type="slidenum">
+            <a:fld id="{AF64FBAA-8556-4A5B-A3B7-841452691F41}" type="slidenum">
               <a:t>&lt;#&gt;</a:t>
             </a:fld>
           </a:p>
@@ -8128,7 +8130,7 @@
         <p:txBody>
           <a:bodyPr/>
           <a:p>
-            <a:fld id="{AA41883C-9F6F-40EC-9401-C8E9828A422A}" type="slidenum">
+            <a:fld id="{BF2EBA39-DE6B-4410-8998-50D1492DA5EF}" type="slidenum">
               <a:t>&lt;#&gt;</a:t>
             </a:fld>
           </a:p>
@@ -8337,7 +8339,7 @@
         <p:txBody>
           <a:bodyPr/>
           <a:p>
-            <a:fld id="{05A583CD-DC6C-46D6-AFD8-DBEBD8303A08}" type="slidenum">
+            <a:fld id="{04A5E6F9-5DDA-4CFA-B486-EBD5AC10268A}" type="slidenum">
               <a:t>&lt;#&gt;</a:t>
             </a:fld>
           </a:p>
@@ -8632,7 +8634,7 @@
         <p:txBody>
           <a:bodyPr/>
           <a:p>
-            <a:fld id="{7855ED21-19CF-488C-B2B7-7B7D1B7A7E7F}" type="slidenum">
+            <a:fld id="{4459130F-0C36-44E0-990A-FEF1EAD3A93D}" type="slidenum">
               <a:t>&lt;#&gt;</a:t>
             </a:fld>
           </a:p>
@@ -9013,7 +9015,7 @@
         <p:txBody>
           <a:bodyPr/>
           <a:p>
-            <a:fld id="{66C7C114-B761-4F70-A240-E3CDF16E0B20}" type="slidenum">
+            <a:fld id="{7E0013BD-4A94-412B-848C-35F4A8B83B2A}" type="slidenum">
               <a:t>&lt;#&gt;</a:t>
             </a:fld>
           </a:p>
@@ -9027,6 +9029,89 @@
           </p:cNvSpPr>
           <p:nvPr>
             <p:ph type="dt" idx="12"/>
+          </p:nvPr>
+        </p:nvSpPr>
+        <p:spPr/>
+        <p:txBody>
+          <a:bodyPr/>
+          <a:p>
+            <a:r>
+              <a:rPr lang="en-US"/>
+              <a:t/>
+            </a:r>
+          </a:p>
+        </p:txBody>
+      </p:sp>
+    </p:spTree>
+  </p:cSld>
+</p:sldLayout>
+</file>
+
+<file path=ppt/slideLayouts/slideLayout49.xml><?xml version="1.0" encoding="utf-8"?>
+<p:sldLayout xmlns:a="http://schemas.openxmlformats.org/drawingml/2006/main" xmlns:p="http://schemas.openxmlformats.org/presentationml/2006/main" xmlns:r="http://schemas.openxmlformats.org/officeDocument/2006/relationships" xmlns:p14="http://schemas.microsoft.com/office/powerpoint/2010/main" xmlns:p15="http://schemas.microsoft.com/office/powerpoint/2012/main" xmlns:mc="http://schemas.openxmlformats.org/markup-compatibility/2006" type="blank" preserve="1">
+  <p:cSld name="Blank Slide">
+    <p:spTree>
+      <p:nvGrpSpPr>
+        <p:cNvPr id="1" name=""/>
+        <p:cNvGrpSpPr/>
+        <p:nvPr/>
+      </p:nvGrpSpPr>
+      <p:grpSpPr>
+        <a:xfrm>
+          <a:off x="0" y="0"/>
+          <a:ext cx="0" cy="0"/>
+          <a:chOff x="0" y="0"/>
+          <a:chExt cx="0" cy="0"/>
+        </a:xfrm>
+      </p:grpSpPr>
+      <p:sp>
+        <p:nvSpPr>
+          <p:cNvPr id="2" name="PlaceHolder 1"/>
+          <p:cNvSpPr>
+            <a:spLocks noGrp="1"/>
+          </p:cNvSpPr>
+          <p:nvPr>
+            <p:ph type="ftr" idx="13"/>
+          </p:nvPr>
+        </p:nvSpPr>
+        <p:spPr/>
+        <p:txBody>
+          <a:bodyPr/>
+          <a:p>
+            <a:r>
+              <a:t>Footer</a:t>
+            </a:r>
+          </a:p>
+        </p:txBody>
+      </p:sp>
+      <p:sp>
+        <p:nvSpPr>
+          <p:cNvPr id="3" name="PlaceHolder 2"/>
+          <p:cNvSpPr>
+            <a:spLocks noGrp="1"/>
+          </p:cNvSpPr>
+          <p:nvPr>
+            <p:ph type="sldNum" idx="14"/>
+          </p:nvPr>
+        </p:nvSpPr>
+        <p:spPr/>
+        <p:txBody>
+          <a:bodyPr/>
+          <a:p>
+            <a:fld id="{8BB7EC6E-6080-40DA-AD0F-350678D23FF2}" type="slidenum">
+              <a:t>&lt;#&gt;</a:t>
+            </a:fld>
+          </a:p>
+        </p:txBody>
+      </p:sp>
+      <p:sp>
+        <p:nvSpPr>
+          <p:cNvPr id="4" name="PlaceHolder 3"/>
+          <p:cNvSpPr>
+            <a:spLocks noGrp="1"/>
+          </p:cNvSpPr>
+          <p:nvPr>
+            <p:ph type="dt" idx="15"/>
           </p:nvPr>
         </p:nvSpPr>
         <p:spPr/>
@@ -9136,7 +9221,7 @@
         <p:txBody>
           <a:bodyPr/>
           <a:p>
-            <a:fld id="{329DD725-3BC3-4A17-8DD2-59113BE476F0}" type="slidenum">
+            <a:fld id="{AA38B024-732E-4169-80F3-6C10CBE9C0E9}" type="slidenum">
               <a:t>&lt;#&gt;</a:t>
             </a:fld>
           </a:p>
@@ -9150,6 +9235,2048 @@
           </p:cNvSpPr>
           <p:nvPr>
             <p:ph type="dt" idx="3"/>
+          </p:nvPr>
+        </p:nvSpPr>
+        <p:spPr/>
+        <p:txBody>
+          <a:bodyPr/>
+          <a:p>
+            <a:r>
+              <a:rPr lang="en-US"/>
+              <a:t/>
+            </a:r>
+          </a:p>
+        </p:txBody>
+      </p:sp>
+    </p:spTree>
+  </p:cSld>
+</p:sldLayout>
+</file>
+
+<file path=ppt/slideLayouts/slideLayout50.xml><?xml version="1.0" encoding="utf-8"?>
+<p:sldLayout xmlns:a="http://schemas.openxmlformats.org/drawingml/2006/main" xmlns:p="http://schemas.openxmlformats.org/presentationml/2006/main" xmlns:r="http://schemas.openxmlformats.org/officeDocument/2006/relationships" xmlns:p14="http://schemas.microsoft.com/office/powerpoint/2010/main" xmlns:p15="http://schemas.microsoft.com/office/powerpoint/2012/main" xmlns:mc="http://schemas.openxmlformats.org/markup-compatibility/2006" type="tx" preserve="1">
+  <p:cSld name="Title Slide">
+    <p:spTree>
+      <p:nvGrpSpPr>
+        <p:cNvPr id="1" name=""/>
+        <p:cNvGrpSpPr/>
+        <p:nvPr/>
+      </p:nvGrpSpPr>
+      <p:grpSpPr>
+        <a:xfrm>
+          <a:off x="0" y="0"/>
+          <a:ext cx="0" cy="0"/>
+          <a:chOff x="0" y="0"/>
+          <a:chExt cx="0" cy="0"/>
+        </a:xfrm>
+      </p:grpSpPr>
+      <p:sp>
+        <p:nvSpPr>
+          <p:cNvPr id="169" name="PlaceHolder 1"/>
+          <p:cNvSpPr>
+            <a:spLocks noGrp="1"/>
+          </p:cNvSpPr>
+          <p:nvPr>
+            <p:ph type="title"/>
+          </p:nvPr>
+        </p:nvSpPr>
+        <p:spPr>
+          <a:xfrm>
+            <a:off x="457200" y="273600"/>
+            <a:ext cx="8229240" cy="1144800"/>
+          </a:xfrm>
+          <a:prstGeom prst="rect">
+            <a:avLst/>
+          </a:prstGeom>
+          <a:noFill/>
+          <a:ln w="0">
+            <a:noFill/>
+          </a:ln>
+        </p:spPr>
+        <p:txBody>
+          <a:bodyPr lIns="0" rIns="0" tIns="0" bIns="0" anchor="ctr">
+            <a:noAutofit/>
+          </a:bodyPr>
+          <a:p>
+            <a:pPr indent="0" algn="ctr">
+              <a:buNone/>
+            </a:pPr>
+            <a:endParaRPr b="0" lang="en-US" sz="4400" spc="-1" strike="noStrike">
+              <a:solidFill>
+                <a:srgbClr val="000000"/>
+              </a:solidFill>
+              <a:latin typeface="Arial"/>
+            </a:endParaRPr>
+          </a:p>
+        </p:txBody>
+      </p:sp>
+      <p:sp>
+        <p:nvSpPr>
+          <p:cNvPr id="170" name="PlaceHolder 2"/>
+          <p:cNvSpPr>
+            <a:spLocks noGrp="1"/>
+          </p:cNvSpPr>
+          <p:nvPr>
+            <p:ph type="subTitle"/>
+          </p:nvPr>
+        </p:nvSpPr>
+        <p:spPr>
+          <a:xfrm>
+            <a:off x="457200" y="1604520"/>
+            <a:ext cx="8229240" cy="3977280"/>
+          </a:xfrm>
+          <a:prstGeom prst="rect">
+            <a:avLst/>
+          </a:prstGeom>
+          <a:noFill/>
+          <a:ln w="0">
+            <a:noFill/>
+          </a:ln>
+        </p:spPr>
+        <p:txBody>
+          <a:bodyPr lIns="0" rIns="0" tIns="0" bIns="0" anchor="ctr">
+            <a:noAutofit/>
+          </a:bodyPr>
+          <a:p>
+            <a:pPr indent="0" algn="ctr">
+              <a:buNone/>
+            </a:pPr>
+            <a:endParaRPr b="0" lang="en-US" sz="3200" spc="-1" strike="noStrike">
+              <a:solidFill>
+                <a:srgbClr val="000000"/>
+              </a:solidFill>
+              <a:latin typeface="Arial"/>
+            </a:endParaRPr>
+          </a:p>
+        </p:txBody>
+      </p:sp>
+      <p:sp>
+        <p:nvSpPr>
+          <p:cNvPr id="4" name="PlaceHolder 3"/>
+          <p:cNvSpPr>
+            <a:spLocks noGrp="1"/>
+          </p:cNvSpPr>
+          <p:nvPr>
+            <p:ph type="ftr" idx="13"/>
+          </p:nvPr>
+        </p:nvSpPr>
+        <p:spPr/>
+        <p:txBody>
+          <a:bodyPr/>
+          <a:p>
+            <a:r>
+              <a:t>Footer</a:t>
+            </a:r>
+          </a:p>
+        </p:txBody>
+      </p:sp>
+      <p:sp>
+        <p:nvSpPr>
+          <p:cNvPr id="5" name="PlaceHolder 4"/>
+          <p:cNvSpPr>
+            <a:spLocks noGrp="1"/>
+          </p:cNvSpPr>
+          <p:nvPr>
+            <p:ph type="sldNum" idx="14"/>
+          </p:nvPr>
+        </p:nvSpPr>
+        <p:spPr/>
+        <p:txBody>
+          <a:bodyPr/>
+          <a:p>
+            <a:fld id="{D400BD7F-A80C-4527-A38C-503CBAF21E34}" type="slidenum">
+              <a:t>&lt;#&gt;</a:t>
+            </a:fld>
+          </a:p>
+        </p:txBody>
+      </p:sp>
+      <p:sp>
+        <p:nvSpPr>
+          <p:cNvPr id="6" name="PlaceHolder 5"/>
+          <p:cNvSpPr>
+            <a:spLocks noGrp="1"/>
+          </p:cNvSpPr>
+          <p:nvPr>
+            <p:ph type="dt" idx="15"/>
+          </p:nvPr>
+        </p:nvSpPr>
+        <p:spPr/>
+        <p:txBody>
+          <a:bodyPr/>
+          <a:p>
+            <a:r>
+              <a:rPr lang="en-US"/>
+              <a:t/>
+            </a:r>
+          </a:p>
+        </p:txBody>
+      </p:sp>
+    </p:spTree>
+  </p:cSld>
+</p:sldLayout>
+</file>
+
+<file path=ppt/slideLayouts/slideLayout51.xml><?xml version="1.0" encoding="utf-8"?>
+<p:sldLayout xmlns:a="http://schemas.openxmlformats.org/drawingml/2006/main" xmlns:p="http://schemas.openxmlformats.org/presentationml/2006/main" xmlns:r="http://schemas.openxmlformats.org/officeDocument/2006/relationships" xmlns:p14="http://schemas.microsoft.com/office/powerpoint/2010/main" xmlns:p15="http://schemas.microsoft.com/office/powerpoint/2012/main" xmlns:mc="http://schemas.openxmlformats.org/markup-compatibility/2006" type="obj" preserve="1">
+  <p:cSld name="Title, Content">
+    <p:spTree>
+      <p:nvGrpSpPr>
+        <p:cNvPr id="1" name=""/>
+        <p:cNvGrpSpPr/>
+        <p:nvPr/>
+      </p:nvGrpSpPr>
+      <p:grpSpPr>
+        <a:xfrm>
+          <a:off x="0" y="0"/>
+          <a:ext cx="0" cy="0"/>
+          <a:chOff x="0" y="0"/>
+          <a:chExt cx="0" cy="0"/>
+        </a:xfrm>
+      </p:grpSpPr>
+      <p:sp>
+        <p:nvSpPr>
+          <p:cNvPr id="171" name="PlaceHolder 1"/>
+          <p:cNvSpPr>
+            <a:spLocks noGrp="1"/>
+          </p:cNvSpPr>
+          <p:nvPr>
+            <p:ph type="title"/>
+          </p:nvPr>
+        </p:nvSpPr>
+        <p:spPr>
+          <a:xfrm>
+            <a:off x="457200" y="273600"/>
+            <a:ext cx="8229240" cy="1144800"/>
+          </a:xfrm>
+          <a:prstGeom prst="rect">
+            <a:avLst/>
+          </a:prstGeom>
+          <a:noFill/>
+          <a:ln w="0">
+            <a:noFill/>
+          </a:ln>
+        </p:spPr>
+        <p:txBody>
+          <a:bodyPr lIns="0" rIns="0" tIns="0" bIns="0" anchor="ctr">
+            <a:noAutofit/>
+          </a:bodyPr>
+          <a:p>
+            <a:pPr indent="0" algn="ctr">
+              <a:buNone/>
+            </a:pPr>
+            <a:endParaRPr b="0" lang="en-US" sz="4400" spc="-1" strike="noStrike">
+              <a:solidFill>
+                <a:srgbClr val="000000"/>
+              </a:solidFill>
+              <a:latin typeface="Arial"/>
+            </a:endParaRPr>
+          </a:p>
+        </p:txBody>
+      </p:sp>
+      <p:sp>
+        <p:nvSpPr>
+          <p:cNvPr id="172" name="PlaceHolder 2"/>
+          <p:cNvSpPr>
+            <a:spLocks noGrp="1"/>
+          </p:cNvSpPr>
+          <p:nvPr>
+            <p:ph/>
+          </p:nvPr>
+        </p:nvSpPr>
+        <p:spPr>
+          <a:xfrm>
+            <a:off x="457200" y="1604520"/>
+            <a:ext cx="8229240" cy="3977280"/>
+          </a:xfrm>
+          <a:prstGeom prst="rect">
+            <a:avLst/>
+          </a:prstGeom>
+          <a:noFill/>
+          <a:ln w="0">
+            <a:noFill/>
+          </a:ln>
+        </p:spPr>
+        <p:txBody>
+          <a:bodyPr lIns="0" rIns="0" tIns="0" bIns="0" anchor="t">
+            <a:normAutofit/>
+          </a:bodyPr>
+          <a:p>
+            <a:pPr indent="0">
+              <a:spcBef>
+                <a:spcPts val="1417"/>
+              </a:spcBef>
+              <a:buNone/>
+            </a:pPr>
+            <a:endParaRPr b="0" lang="en-US" sz="3200" spc="-1" strike="noStrike">
+              <a:solidFill>
+                <a:srgbClr val="000000"/>
+              </a:solidFill>
+              <a:latin typeface="Arial"/>
+            </a:endParaRPr>
+          </a:p>
+        </p:txBody>
+      </p:sp>
+      <p:sp>
+        <p:nvSpPr>
+          <p:cNvPr id="4" name="PlaceHolder 3"/>
+          <p:cNvSpPr>
+            <a:spLocks noGrp="1"/>
+          </p:cNvSpPr>
+          <p:nvPr>
+            <p:ph type="ftr" idx="13"/>
+          </p:nvPr>
+        </p:nvSpPr>
+        <p:spPr/>
+        <p:txBody>
+          <a:bodyPr/>
+          <a:p>
+            <a:r>
+              <a:t>Footer</a:t>
+            </a:r>
+          </a:p>
+        </p:txBody>
+      </p:sp>
+      <p:sp>
+        <p:nvSpPr>
+          <p:cNvPr id="5" name="PlaceHolder 4"/>
+          <p:cNvSpPr>
+            <a:spLocks noGrp="1"/>
+          </p:cNvSpPr>
+          <p:nvPr>
+            <p:ph type="sldNum" idx="14"/>
+          </p:nvPr>
+        </p:nvSpPr>
+        <p:spPr/>
+        <p:txBody>
+          <a:bodyPr/>
+          <a:p>
+            <a:fld id="{A0A780D2-AA36-4C80-9327-34F2C7BCB904}" type="slidenum">
+              <a:t>&lt;#&gt;</a:t>
+            </a:fld>
+          </a:p>
+        </p:txBody>
+      </p:sp>
+      <p:sp>
+        <p:nvSpPr>
+          <p:cNvPr id="6" name="PlaceHolder 5"/>
+          <p:cNvSpPr>
+            <a:spLocks noGrp="1"/>
+          </p:cNvSpPr>
+          <p:nvPr>
+            <p:ph type="dt" idx="15"/>
+          </p:nvPr>
+        </p:nvSpPr>
+        <p:spPr/>
+        <p:txBody>
+          <a:bodyPr/>
+          <a:p>
+            <a:r>
+              <a:rPr lang="en-US"/>
+              <a:t/>
+            </a:r>
+          </a:p>
+        </p:txBody>
+      </p:sp>
+    </p:spTree>
+  </p:cSld>
+</p:sldLayout>
+</file>
+
+<file path=ppt/slideLayouts/slideLayout52.xml><?xml version="1.0" encoding="utf-8"?>
+<p:sldLayout xmlns:a="http://schemas.openxmlformats.org/drawingml/2006/main" xmlns:p="http://schemas.openxmlformats.org/presentationml/2006/main" xmlns:r="http://schemas.openxmlformats.org/officeDocument/2006/relationships" xmlns:p14="http://schemas.microsoft.com/office/powerpoint/2010/main" xmlns:p15="http://schemas.microsoft.com/office/powerpoint/2012/main" xmlns:mc="http://schemas.openxmlformats.org/markup-compatibility/2006" type="twoObj" preserve="1">
+  <p:cSld name="Title, 2 Content">
+    <p:spTree>
+      <p:nvGrpSpPr>
+        <p:cNvPr id="1" name=""/>
+        <p:cNvGrpSpPr/>
+        <p:nvPr/>
+      </p:nvGrpSpPr>
+      <p:grpSpPr>
+        <a:xfrm>
+          <a:off x="0" y="0"/>
+          <a:ext cx="0" cy="0"/>
+          <a:chOff x="0" y="0"/>
+          <a:chExt cx="0" cy="0"/>
+        </a:xfrm>
+      </p:grpSpPr>
+      <p:sp>
+        <p:nvSpPr>
+          <p:cNvPr id="173" name="PlaceHolder 1"/>
+          <p:cNvSpPr>
+            <a:spLocks noGrp="1"/>
+          </p:cNvSpPr>
+          <p:nvPr>
+            <p:ph type="title"/>
+          </p:nvPr>
+        </p:nvSpPr>
+        <p:spPr>
+          <a:xfrm>
+            <a:off x="457200" y="273600"/>
+            <a:ext cx="8229240" cy="1144800"/>
+          </a:xfrm>
+          <a:prstGeom prst="rect">
+            <a:avLst/>
+          </a:prstGeom>
+          <a:noFill/>
+          <a:ln w="0">
+            <a:noFill/>
+          </a:ln>
+        </p:spPr>
+        <p:txBody>
+          <a:bodyPr lIns="0" rIns="0" tIns="0" bIns="0" anchor="ctr">
+            <a:noAutofit/>
+          </a:bodyPr>
+          <a:p>
+            <a:pPr indent="0" algn="ctr">
+              <a:buNone/>
+            </a:pPr>
+            <a:endParaRPr b="0" lang="en-US" sz="4400" spc="-1" strike="noStrike">
+              <a:solidFill>
+                <a:srgbClr val="000000"/>
+              </a:solidFill>
+              <a:latin typeface="Arial"/>
+            </a:endParaRPr>
+          </a:p>
+        </p:txBody>
+      </p:sp>
+      <p:sp>
+        <p:nvSpPr>
+          <p:cNvPr id="174" name="PlaceHolder 2"/>
+          <p:cNvSpPr>
+            <a:spLocks noGrp="1"/>
+          </p:cNvSpPr>
+          <p:nvPr>
+            <p:ph/>
+          </p:nvPr>
+        </p:nvSpPr>
+        <p:spPr>
+          <a:xfrm>
+            <a:off x="457200" y="1604520"/>
+            <a:ext cx="4015800" cy="3977280"/>
+          </a:xfrm>
+          <a:prstGeom prst="rect">
+            <a:avLst/>
+          </a:prstGeom>
+          <a:noFill/>
+          <a:ln w="0">
+            <a:noFill/>
+          </a:ln>
+        </p:spPr>
+        <p:txBody>
+          <a:bodyPr lIns="0" rIns="0" tIns="0" bIns="0" anchor="t">
+            <a:normAutofit/>
+          </a:bodyPr>
+          <a:p>
+            <a:pPr indent="0">
+              <a:spcBef>
+                <a:spcPts val="1417"/>
+              </a:spcBef>
+              <a:buNone/>
+            </a:pPr>
+            <a:endParaRPr b="0" lang="en-US" sz="3200" spc="-1" strike="noStrike">
+              <a:solidFill>
+                <a:srgbClr val="000000"/>
+              </a:solidFill>
+              <a:latin typeface="Arial"/>
+            </a:endParaRPr>
+          </a:p>
+        </p:txBody>
+      </p:sp>
+      <p:sp>
+        <p:nvSpPr>
+          <p:cNvPr id="175" name="PlaceHolder 3"/>
+          <p:cNvSpPr>
+            <a:spLocks noGrp="1"/>
+          </p:cNvSpPr>
+          <p:nvPr>
+            <p:ph/>
+          </p:nvPr>
+        </p:nvSpPr>
+        <p:spPr>
+          <a:xfrm>
+            <a:off x="4674240" y="1604520"/>
+            <a:ext cx="4015800" cy="3977280"/>
+          </a:xfrm>
+          <a:prstGeom prst="rect">
+            <a:avLst/>
+          </a:prstGeom>
+          <a:noFill/>
+          <a:ln w="0">
+            <a:noFill/>
+          </a:ln>
+        </p:spPr>
+        <p:txBody>
+          <a:bodyPr lIns="0" rIns="0" tIns="0" bIns="0" anchor="t">
+            <a:normAutofit/>
+          </a:bodyPr>
+          <a:p>
+            <a:pPr indent="0">
+              <a:spcBef>
+                <a:spcPts val="1417"/>
+              </a:spcBef>
+              <a:buNone/>
+            </a:pPr>
+            <a:endParaRPr b="0" lang="en-US" sz="3200" spc="-1" strike="noStrike">
+              <a:solidFill>
+                <a:srgbClr val="000000"/>
+              </a:solidFill>
+              <a:latin typeface="Arial"/>
+            </a:endParaRPr>
+          </a:p>
+        </p:txBody>
+      </p:sp>
+      <p:sp>
+        <p:nvSpPr>
+          <p:cNvPr id="5" name="PlaceHolder 4"/>
+          <p:cNvSpPr>
+            <a:spLocks noGrp="1"/>
+          </p:cNvSpPr>
+          <p:nvPr>
+            <p:ph type="ftr" idx="13"/>
+          </p:nvPr>
+        </p:nvSpPr>
+        <p:spPr/>
+        <p:txBody>
+          <a:bodyPr/>
+          <a:p>
+            <a:r>
+              <a:t>Footer</a:t>
+            </a:r>
+          </a:p>
+        </p:txBody>
+      </p:sp>
+      <p:sp>
+        <p:nvSpPr>
+          <p:cNvPr id="6" name="PlaceHolder 5"/>
+          <p:cNvSpPr>
+            <a:spLocks noGrp="1"/>
+          </p:cNvSpPr>
+          <p:nvPr>
+            <p:ph type="sldNum" idx="14"/>
+          </p:nvPr>
+        </p:nvSpPr>
+        <p:spPr/>
+        <p:txBody>
+          <a:bodyPr/>
+          <a:p>
+            <a:fld id="{3363A9EC-C0A9-4DC6-807A-09FE08D97384}" type="slidenum">
+              <a:t>&lt;#&gt;</a:t>
+            </a:fld>
+          </a:p>
+        </p:txBody>
+      </p:sp>
+      <p:sp>
+        <p:nvSpPr>
+          <p:cNvPr id="7" name="PlaceHolder 6"/>
+          <p:cNvSpPr>
+            <a:spLocks noGrp="1"/>
+          </p:cNvSpPr>
+          <p:nvPr>
+            <p:ph type="dt" idx="15"/>
+          </p:nvPr>
+        </p:nvSpPr>
+        <p:spPr/>
+        <p:txBody>
+          <a:bodyPr/>
+          <a:p>
+            <a:r>
+              <a:rPr lang="en-US"/>
+              <a:t/>
+            </a:r>
+          </a:p>
+        </p:txBody>
+      </p:sp>
+    </p:spTree>
+  </p:cSld>
+</p:sldLayout>
+</file>
+
+<file path=ppt/slideLayouts/slideLayout53.xml><?xml version="1.0" encoding="utf-8"?>
+<p:sldLayout xmlns:a="http://schemas.openxmlformats.org/drawingml/2006/main" xmlns:p="http://schemas.openxmlformats.org/presentationml/2006/main" xmlns:r="http://schemas.openxmlformats.org/officeDocument/2006/relationships" xmlns:p14="http://schemas.microsoft.com/office/powerpoint/2010/main" xmlns:p15="http://schemas.microsoft.com/office/powerpoint/2012/main" xmlns:mc="http://schemas.openxmlformats.org/markup-compatibility/2006" type="titleOnly" preserve="1">
+  <p:cSld name="Title Only">
+    <p:spTree>
+      <p:nvGrpSpPr>
+        <p:cNvPr id="1" name=""/>
+        <p:cNvGrpSpPr/>
+        <p:nvPr/>
+      </p:nvGrpSpPr>
+      <p:grpSpPr>
+        <a:xfrm>
+          <a:off x="0" y="0"/>
+          <a:ext cx="0" cy="0"/>
+          <a:chOff x="0" y="0"/>
+          <a:chExt cx="0" cy="0"/>
+        </a:xfrm>
+      </p:grpSpPr>
+      <p:sp>
+        <p:nvSpPr>
+          <p:cNvPr id="176" name="PlaceHolder 1"/>
+          <p:cNvSpPr>
+            <a:spLocks noGrp="1"/>
+          </p:cNvSpPr>
+          <p:nvPr>
+            <p:ph type="title"/>
+          </p:nvPr>
+        </p:nvSpPr>
+        <p:spPr>
+          <a:xfrm>
+            <a:off x="457200" y="273600"/>
+            <a:ext cx="8229240" cy="1144800"/>
+          </a:xfrm>
+          <a:prstGeom prst="rect">
+            <a:avLst/>
+          </a:prstGeom>
+          <a:noFill/>
+          <a:ln w="0">
+            <a:noFill/>
+          </a:ln>
+        </p:spPr>
+        <p:txBody>
+          <a:bodyPr lIns="0" rIns="0" tIns="0" bIns="0" anchor="ctr">
+            <a:noAutofit/>
+          </a:bodyPr>
+          <a:p>
+            <a:pPr indent="0" algn="ctr">
+              <a:buNone/>
+            </a:pPr>
+            <a:endParaRPr b="0" lang="en-US" sz="4400" spc="-1" strike="noStrike">
+              <a:solidFill>
+                <a:srgbClr val="000000"/>
+              </a:solidFill>
+              <a:latin typeface="Arial"/>
+            </a:endParaRPr>
+          </a:p>
+        </p:txBody>
+      </p:sp>
+      <p:sp>
+        <p:nvSpPr>
+          <p:cNvPr id="3" name="PlaceHolder 2"/>
+          <p:cNvSpPr>
+            <a:spLocks noGrp="1"/>
+          </p:cNvSpPr>
+          <p:nvPr>
+            <p:ph type="ftr" idx="13"/>
+          </p:nvPr>
+        </p:nvSpPr>
+        <p:spPr/>
+        <p:txBody>
+          <a:bodyPr/>
+          <a:p>
+            <a:r>
+              <a:t>Footer</a:t>
+            </a:r>
+          </a:p>
+        </p:txBody>
+      </p:sp>
+      <p:sp>
+        <p:nvSpPr>
+          <p:cNvPr id="4" name="PlaceHolder 3"/>
+          <p:cNvSpPr>
+            <a:spLocks noGrp="1"/>
+          </p:cNvSpPr>
+          <p:nvPr>
+            <p:ph type="sldNum" idx="14"/>
+          </p:nvPr>
+        </p:nvSpPr>
+        <p:spPr/>
+        <p:txBody>
+          <a:bodyPr/>
+          <a:p>
+            <a:fld id="{83251B01-C289-4971-96D7-437C606EA317}" type="slidenum">
+              <a:t>&lt;#&gt;</a:t>
+            </a:fld>
+          </a:p>
+        </p:txBody>
+      </p:sp>
+      <p:sp>
+        <p:nvSpPr>
+          <p:cNvPr id="5" name="PlaceHolder 4"/>
+          <p:cNvSpPr>
+            <a:spLocks noGrp="1"/>
+          </p:cNvSpPr>
+          <p:nvPr>
+            <p:ph type="dt" idx="15"/>
+          </p:nvPr>
+        </p:nvSpPr>
+        <p:spPr/>
+        <p:txBody>
+          <a:bodyPr/>
+          <a:p>
+            <a:r>
+              <a:rPr lang="en-US"/>
+              <a:t/>
+            </a:r>
+          </a:p>
+        </p:txBody>
+      </p:sp>
+    </p:spTree>
+  </p:cSld>
+</p:sldLayout>
+</file>
+
+<file path=ppt/slideLayouts/slideLayout54.xml><?xml version="1.0" encoding="utf-8"?>
+<p:sldLayout xmlns:a="http://schemas.openxmlformats.org/drawingml/2006/main" xmlns:p="http://schemas.openxmlformats.org/presentationml/2006/main" xmlns:r="http://schemas.openxmlformats.org/officeDocument/2006/relationships" xmlns:p14="http://schemas.microsoft.com/office/powerpoint/2010/main" xmlns:p15="http://schemas.microsoft.com/office/powerpoint/2012/main" xmlns:mc="http://schemas.openxmlformats.org/markup-compatibility/2006" type="objOnly" preserve="1">
+  <p:cSld name="Centered Text">
+    <p:spTree>
+      <p:nvGrpSpPr>
+        <p:cNvPr id="1" name=""/>
+        <p:cNvGrpSpPr/>
+        <p:nvPr/>
+      </p:nvGrpSpPr>
+      <p:grpSpPr>
+        <a:xfrm>
+          <a:off x="0" y="0"/>
+          <a:ext cx="0" cy="0"/>
+          <a:chOff x="0" y="0"/>
+          <a:chExt cx="0" cy="0"/>
+        </a:xfrm>
+      </p:grpSpPr>
+      <p:sp>
+        <p:nvSpPr>
+          <p:cNvPr id="177" name="PlaceHolder 1"/>
+          <p:cNvSpPr>
+            <a:spLocks noGrp="1"/>
+          </p:cNvSpPr>
+          <p:nvPr>
+            <p:ph type="subTitle"/>
+          </p:nvPr>
+        </p:nvSpPr>
+        <p:spPr>
+          <a:xfrm>
+            <a:off x="457200" y="273600"/>
+            <a:ext cx="8229240" cy="5307840"/>
+          </a:xfrm>
+          <a:prstGeom prst="rect">
+            <a:avLst/>
+          </a:prstGeom>
+          <a:noFill/>
+          <a:ln w="0">
+            <a:noFill/>
+          </a:ln>
+        </p:spPr>
+        <p:txBody>
+          <a:bodyPr lIns="0" rIns="0" tIns="0" bIns="0" anchor="ctr">
+            <a:noAutofit/>
+          </a:bodyPr>
+          <a:p>
+            <a:pPr algn="ctr"/>
+            <a:endParaRPr b="0" lang="en-US" sz="3200" spc="-1" strike="noStrike">
+              <a:solidFill>
+                <a:srgbClr val="000000"/>
+              </a:solidFill>
+              <a:latin typeface="Arial"/>
+            </a:endParaRPr>
+          </a:p>
+        </p:txBody>
+      </p:sp>
+      <p:sp>
+        <p:nvSpPr>
+          <p:cNvPr id="3" name="PlaceHolder 2"/>
+          <p:cNvSpPr>
+            <a:spLocks noGrp="1"/>
+          </p:cNvSpPr>
+          <p:nvPr>
+            <p:ph type="ftr" idx="13"/>
+          </p:nvPr>
+        </p:nvSpPr>
+        <p:spPr/>
+        <p:txBody>
+          <a:bodyPr/>
+          <a:p>
+            <a:r>
+              <a:t>Footer</a:t>
+            </a:r>
+          </a:p>
+        </p:txBody>
+      </p:sp>
+      <p:sp>
+        <p:nvSpPr>
+          <p:cNvPr id="4" name="PlaceHolder 3"/>
+          <p:cNvSpPr>
+            <a:spLocks noGrp="1"/>
+          </p:cNvSpPr>
+          <p:nvPr>
+            <p:ph type="sldNum" idx="14"/>
+          </p:nvPr>
+        </p:nvSpPr>
+        <p:spPr/>
+        <p:txBody>
+          <a:bodyPr/>
+          <a:p>
+            <a:fld id="{43A33D4F-1324-491D-8840-A503837E7C24}" type="slidenum">
+              <a:t>&lt;#&gt;</a:t>
+            </a:fld>
+          </a:p>
+        </p:txBody>
+      </p:sp>
+      <p:sp>
+        <p:nvSpPr>
+          <p:cNvPr id="5" name="PlaceHolder 4"/>
+          <p:cNvSpPr>
+            <a:spLocks noGrp="1"/>
+          </p:cNvSpPr>
+          <p:nvPr>
+            <p:ph type="dt" idx="15"/>
+          </p:nvPr>
+        </p:nvSpPr>
+        <p:spPr/>
+        <p:txBody>
+          <a:bodyPr/>
+          <a:p>
+            <a:r>
+              <a:rPr lang="en-US"/>
+              <a:t/>
+            </a:r>
+          </a:p>
+        </p:txBody>
+      </p:sp>
+    </p:spTree>
+  </p:cSld>
+</p:sldLayout>
+</file>
+
+<file path=ppt/slideLayouts/slideLayout55.xml><?xml version="1.0" encoding="utf-8"?>
+<p:sldLayout xmlns:a="http://schemas.openxmlformats.org/drawingml/2006/main" xmlns:p="http://schemas.openxmlformats.org/presentationml/2006/main" xmlns:r="http://schemas.openxmlformats.org/officeDocument/2006/relationships" xmlns:p14="http://schemas.microsoft.com/office/powerpoint/2010/main" xmlns:p15="http://schemas.microsoft.com/office/powerpoint/2012/main" xmlns:mc="http://schemas.openxmlformats.org/markup-compatibility/2006" type="twoObjAndObj" preserve="1">
+  <p:cSld name="Title, 2 Content and Content">
+    <p:spTree>
+      <p:nvGrpSpPr>
+        <p:cNvPr id="1" name=""/>
+        <p:cNvGrpSpPr/>
+        <p:nvPr/>
+      </p:nvGrpSpPr>
+      <p:grpSpPr>
+        <a:xfrm>
+          <a:off x="0" y="0"/>
+          <a:ext cx="0" cy="0"/>
+          <a:chOff x="0" y="0"/>
+          <a:chExt cx="0" cy="0"/>
+        </a:xfrm>
+      </p:grpSpPr>
+      <p:sp>
+        <p:nvSpPr>
+          <p:cNvPr id="178" name="PlaceHolder 1"/>
+          <p:cNvSpPr>
+            <a:spLocks noGrp="1"/>
+          </p:cNvSpPr>
+          <p:nvPr>
+            <p:ph type="title"/>
+          </p:nvPr>
+        </p:nvSpPr>
+        <p:spPr>
+          <a:xfrm>
+            <a:off x="457200" y="273600"/>
+            <a:ext cx="8229240" cy="1144800"/>
+          </a:xfrm>
+          <a:prstGeom prst="rect">
+            <a:avLst/>
+          </a:prstGeom>
+          <a:noFill/>
+          <a:ln w="0">
+            <a:noFill/>
+          </a:ln>
+        </p:spPr>
+        <p:txBody>
+          <a:bodyPr lIns="0" rIns="0" tIns="0" bIns="0" anchor="ctr">
+            <a:noAutofit/>
+          </a:bodyPr>
+          <a:p>
+            <a:pPr indent="0" algn="ctr">
+              <a:buNone/>
+            </a:pPr>
+            <a:endParaRPr b="0" lang="en-US" sz="4400" spc="-1" strike="noStrike">
+              <a:solidFill>
+                <a:srgbClr val="000000"/>
+              </a:solidFill>
+              <a:latin typeface="Arial"/>
+            </a:endParaRPr>
+          </a:p>
+        </p:txBody>
+      </p:sp>
+      <p:sp>
+        <p:nvSpPr>
+          <p:cNvPr id="179" name="PlaceHolder 2"/>
+          <p:cNvSpPr>
+            <a:spLocks noGrp="1"/>
+          </p:cNvSpPr>
+          <p:nvPr>
+            <p:ph/>
+          </p:nvPr>
+        </p:nvSpPr>
+        <p:spPr>
+          <a:xfrm>
+            <a:off x="457200" y="1604520"/>
+            <a:ext cx="4015800" cy="1896840"/>
+          </a:xfrm>
+          <a:prstGeom prst="rect">
+            <a:avLst/>
+          </a:prstGeom>
+          <a:noFill/>
+          <a:ln w="0">
+            <a:noFill/>
+          </a:ln>
+        </p:spPr>
+        <p:txBody>
+          <a:bodyPr lIns="0" rIns="0" tIns="0" bIns="0" anchor="t">
+            <a:normAutofit/>
+          </a:bodyPr>
+          <a:p>
+            <a:pPr indent="0">
+              <a:spcBef>
+                <a:spcPts val="1417"/>
+              </a:spcBef>
+              <a:buNone/>
+            </a:pPr>
+            <a:endParaRPr b="0" lang="en-US" sz="3200" spc="-1" strike="noStrike">
+              <a:solidFill>
+                <a:srgbClr val="000000"/>
+              </a:solidFill>
+              <a:latin typeface="Arial"/>
+            </a:endParaRPr>
+          </a:p>
+        </p:txBody>
+      </p:sp>
+      <p:sp>
+        <p:nvSpPr>
+          <p:cNvPr id="180" name="PlaceHolder 3"/>
+          <p:cNvSpPr>
+            <a:spLocks noGrp="1"/>
+          </p:cNvSpPr>
+          <p:nvPr>
+            <p:ph/>
+          </p:nvPr>
+        </p:nvSpPr>
+        <p:spPr>
+          <a:xfrm>
+            <a:off x="4674240" y="1604520"/>
+            <a:ext cx="4015800" cy="3977280"/>
+          </a:xfrm>
+          <a:prstGeom prst="rect">
+            <a:avLst/>
+          </a:prstGeom>
+          <a:noFill/>
+          <a:ln w="0">
+            <a:noFill/>
+          </a:ln>
+        </p:spPr>
+        <p:txBody>
+          <a:bodyPr lIns="0" rIns="0" tIns="0" bIns="0" anchor="t">
+            <a:normAutofit/>
+          </a:bodyPr>
+          <a:p>
+            <a:pPr indent="0">
+              <a:spcBef>
+                <a:spcPts val="1417"/>
+              </a:spcBef>
+              <a:buNone/>
+            </a:pPr>
+            <a:endParaRPr b="0" lang="en-US" sz="3200" spc="-1" strike="noStrike">
+              <a:solidFill>
+                <a:srgbClr val="000000"/>
+              </a:solidFill>
+              <a:latin typeface="Arial"/>
+            </a:endParaRPr>
+          </a:p>
+        </p:txBody>
+      </p:sp>
+      <p:sp>
+        <p:nvSpPr>
+          <p:cNvPr id="181" name="PlaceHolder 4"/>
+          <p:cNvSpPr>
+            <a:spLocks noGrp="1"/>
+          </p:cNvSpPr>
+          <p:nvPr>
+            <p:ph/>
+          </p:nvPr>
+        </p:nvSpPr>
+        <p:spPr>
+          <a:xfrm>
+            <a:off x="457200" y="3682080"/>
+            <a:ext cx="4015800" cy="1896840"/>
+          </a:xfrm>
+          <a:prstGeom prst="rect">
+            <a:avLst/>
+          </a:prstGeom>
+          <a:noFill/>
+          <a:ln w="0">
+            <a:noFill/>
+          </a:ln>
+        </p:spPr>
+        <p:txBody>
+          <a:bodyPr lIns="0" rIns="0" tIns="0" bIns="0" anchor="t">
+            <a:normAutofit/>
+          </a:bodyPr>
+          <a:p>
+            <a:pPr indent="0">
+              <a:spcBef>
+                <a:spcPts val="1417"/>
+              </a:spcBef>
+              <a:buNone/>
+            </a:pPr>
+            <a:endParaRPr b="0" lang="en-US" sz="3200" spc="-1" strike="noStrike">
+              <a:solidFill>
+                <a:srgbClr val="000000"/>
+              </a:solidFill>
+              <a:latin typeface="Arial"/>
+            </a:endParaRPr>
+          </a:p>
+        </p:txBody>
+      </p:sp>
+      <p:sp>
+        <p:nvSpPr>
+          <p:cNvPr id="6" name="PlaceHolder 5"/>
+          <p:cNvSpPr>
+            <a:spLocks noGrp="1"/>
+          </p:cNvSpPr>
+          <p:nvPr>
+            <p:ph type="ftr" idx="13"/>
+          </p:nvPr>
+        </p:nvSpPr>
+        <p:spPr/>
+        <p:txBody>
+          <a:bodyPr/>
+          <a:p>
+            <a:r>
+              <a:t>Footer</a:t>
+            </a:r>
+          </a:p>
+        </p:txBody>
+      </p:sp>
+      <p:sp>
+        <p:nvSpPr>
+          <p:cNvPr id="7" name="PlaceHolder 6"/>
+          <p:cNvSpPr>
+            <a:spLocks noGrp="1"/>
+          </p:cNvSpPr>
+          <p:nvPr>
+            <p:ph type="sldNum" idx="14"/>
+          </p:nvPr>
+        </p:nvSpPr>
+        <p:spPr/>
+        <p:txBody>
+          <a:bodyPr/>
+          <a:p>
+            <a:fld id="{E9550C11-81AA-49B4-8373-48BFD29185F8}" type="slidenum">
+              <a:t>&lt;#&gt;</a:t>
+            </a:fld>
+          </a:p>
+        </p:txBody>
+      </p:sp>
+      <p:sp>
+        <p:nvSpPr>
+          <p:cNvPr id="8" name="PlaceHolder 7"/>
+          <p:cNvSpPr>
+            <a:spLocks noGrp="1"/>
+          </p:cNvSpPr>
+          <p:nvPr>
+            <p:ph type="dt" idx="15"/>
+          </p:nvPr>
+        </p:nvSpPr>
+        <p:spPr/>
+        <p:txBody>
+          <a:bodyPr/>
+          <a:p>
+            <a:r>
+              <a:rPr lang="en-US"/>
+              <a:t/>
+            </a:r>
+          </a:p>
+        </p:txBody>
+      </p:sp>
+    </p:spTree>
+  </p:cSld>
+</p:sldLayout>
+</file>
+
+<file path=ppt/slideLayouts/slideLayout56.xml><?xml version="1.0" encoding="utf-8"?>
+<p:sldLayout xmlns:a="http://schemas.openxmlformats.org/drawingml/2006/main" xmlns:p="http://schemas.openxmlformats.org/presentationml/2006/main" xmlns:r="http://schemas.openxmlformats.org/officeDocument/2006/relationships" xmlns:p14="http://schemas.microsoft.com/office/powerpoint/2010/main" xmlns:p15="http://schemas.microsoft.com/office/powerpoint/2012/main" xmlns:mc="http://schemas.openxmlformats.org/markup-compatibility/2006" type="objAndTwoObj" preserve="1">
+  <p:cSld name="Title Content and 2 Content">
+    <p:spTree>
+      <p:nvGrpSpPr>
+        <p:cNvPr id="1" name=""/>
+        <p:cNvGrpSpPr/>
+        <p:nvPr/>
+      </p:nvGrpSpPr>
+      <p:grpSpPr>
+        <a:xfrm>
+          <a:off x="0" y="0"/>
+          <a:ext cx="0" cy="0"/>
+          <a:chOff x="0" y="0"/>
+          <a:chExt cx="0" cy="0"/>
+        </a:xfrm>
+      </p:grpSpPr>
+      <p:sp>
+        <p:nvSpPr>
+          <p:cNvPr id="182" name="PlaceHolder 1"/>
+          <p:cNvSpPr>
+            <a:spLocks noGrp="1"/>
+          </p:cNvSpPr>
+          <p:nvPr>
+            <p:ph type="title"/>
+          </p:nvPr>
+        </p:nvSpPr>
+        <p:spPr>
+          <a:xfrm>
+            <a:off x="457200" y="273600"/>
+            <a:ext cx="8229240" cy="1144800"/>
+          </a:xfrm>
+          <a:prstGeom prst="rect">
+            <a:avLst/>
+          </a:prstGeom>
+          <a:noFill/>
+          <a:ln w="0">
+            <a:noFill/>
+          </a:ln>
+        </p:spPr>
+        <p:txBody>
+          <a:bodyPr lIns="0" rIns="0" tIns="0" bIns="0" anchor="ctr">
+            <a:noAutofit/>
+          </a:bodyPr>
+          <a:p>
+            <a:pPr indent="0" algn="ctr">
+              <a:buNone/>
+            </a:pPr>
+            <a:endParaRPr b="0" lang="en-US" sz="4400" spc="-1" strike="noStrike">
+              <a:solidFill>
+                <a:srgbClr val="000000"/>
+              </a:solidFill>
+              <a:latin typeface="Arial"/>
+            </a:endParaRPr>
+          </a:p>
+        </p:txBody>
+      </p:sp>
+      <p:sp>
+        <p:nvSpPr>
+          <p:cNvPr id="183" name="PlaceHolder 2"/>
+          <p:cNvSpPr>
+            <a:spLocks noGrp="1"/>
+          </p:cNvSpPr>
+          <p:nvPr>
+            <p:ph/>
+          </p:nvPr>
+        </p:nvSpPr>
+        <p:spPr>
+          <a:xfrm>
+            <a:off x="457200" y="1604520"/>
+            <a:ext cx="4015800" cy="3977280"/>
+          </a:xfrm>
+          <a:prstGeom prst="rect">
+            <a:avLst/>
+          </a:prstGeom>
+          <a:noFill/>
+          <a:ln w="0">
+            <a:noFill/>
+          </a:ln>
+        </p:spPr>
+        <p:txBody>
+          <a:bodyPr lIns="0" rIns="0" tIns="0" bIns="0" anchor="t">
+            <a:normAutofit/>
+          </a:bodyPr>
+          <a:p>
+            <a:pPr indent="0">
+              <a:spcBef>
+                <a:spcPts val="1417"/>
+              </a:spcBef>
+              <a:buNone/>
+            </a:pPr>
+            <a:endParaRPr b="0" lang="en-US" sz="3200" spc="-1" strike="noStrike">
+              <a:solidFill>
+                <a:srgbClr val="000000"/>
+              </a:solidFill>
+              <a:latin typeface="Arial"/>
+            </a:endParaRPr>
+          </a:p>
+        </p:txBody>
+      </p:sp>
+      <p:sp>
+        <p:nvSpPr>
+          <p:cNvPr id="184" name="PlaceHolder 3"/>
+          <p:cNvSpPr>
+            <a:spLocks noGrp="1"/>
+          </p:cNvSpPr>
+          <p:nvPr>
+            <p:ph/>
+          </p:nvPr>
+        </p:nvSpPr>
+        <p:spPr>
+          <a:xfrm>
+            <a:off x="4674240" y="1604520"/>
+            <a:ext cx="4015800" cy="1896840"/>
+          </a:xfrm>
+          <a:prstGeom prst="rect">
+            <a:avLst/>
+          </a:prstGeom>
+          <a:noFill/>
+          <a:ln w="0">
+            <a:noFill/>
+          </a:ln>
+        </p:spPr>
+        <p:txBody>
+          <a:bodyPr lIns="0" rIns="0" tIns="0" bIns="0" anchor="t">
+            <a:normAutofit/>
+          </a:bodyPr>
+          <a:p>
+            <a:pPr indent="0">
+              <a:spcBef>
+                <a:spcPts val="1417"/>
+              </a:spcBef>
+              <a:buNone/>
+            </a:pPr>
+            <a:endParaRPr b="0" lang="en-US" sz="3200" spc="-1" strike="noStrike">
+              <a:solidFill>
+                <a:srgbClr val="000000"/>
+              </a:solidFill>
+              <a:latin typeface="Arial"/>
+            </a:endParaRPr>
+          </a:p>
+        </p:txBody>
+      </p:sp>
+      <p:sp>
+        <p:nvSpPr>
+          <p:cNvPr id="185" name="PlaceHolder 4"/>
+          <p:cNvSpPr>
+            <a:spLocks noGrp="1"/>
+          </p:cNvSpPr>
+          <p:nvPr>
+            <p:ph/>
+          </p:nvPr>
+        </p:nvSpPr>
+        <p:spPr>
+          <a:xfrm>
+            <a:off x="4674240" y="3682080"/>
+            <a:ext cx="4015800" cy="1896840"/>
+          </a:xfrm>
+          <a:prstGeom prst="rect">
+            <a:avLst/>
+          </a:prstGeom>
+          <a:noFill/>
+          <a:ln w="0">
+            <a:noFill/>
+          </a:ln>
+        </p:spPr>
+        <p:txBody>
+          <a:bodyPr lIns="0" rIns="0" tIns="0" bIns="0" anchor="t">
+            <a:normAutofit/>
+          </a:bodyPr>
+          <a:p>
+            <a:pPr indent="0">
+              <a:spcBef>
+                <a:spcPts val="1417"/>
+              </a:spcBef>
+              <a:buNone/>
+            </a:pPr>
+            <a:endParaRPr b="0" lang="en-US" sz="3200" spc="-1" strike="noStrike">
+              <a:solidFill>
+                <a:srgbClr val="000000"/>
+              </a:solidFill>
+              <a:latin typeface="Arial"/>
+            </a:endParaRPr>
+          </a:p>
+        </p:txBody>
+      </p:sp>
+      <p:sp>
+        <p:nvSpPr>
+          <p:cNvPr id="6" name="PlaceHolder 5"/>
+          <p:cNvSpPr>
+            <a:spLocks noGrp="1"/>
+          </p:cNvSpPr>
+          <p:nvPr>
+            <p:ph type="ftr" idx="13"/>
+          </p:nvPr>
+        </p:nvSpPr>
+        <p:spPr/>
+        <p:txBody>
+          <a:bodyPr/>
+          <a:p>
+            <a:r>
+              <a:t>Footer</a:t>
+            </a:r>
+          </a:p>
+        </p:txBody>
+      </p:sp>
+      <p:sp>
+        <p:nvSpPr>
+          <p:cNvPr id="7" name="PlaceHolder 6"/>
+          <p:cNvSpPr>
+            <a:spLocks noGrp="1"/>
+          </p:cNvSpPr>
+          <p:nvPr>
+            <p:ph type="sldNum" idx="14"/>
+          </p:nvPr>
+        </p:nvSpPr>
+        <p:spPr/>
+        <p:txBody>
+          <a:bodyPr/>
+          <a:p>
+            <a:fld id="{FC5F8D8A-2439-4E1F-BC0E-FC8CF1143A9A}" type="slidenum">
+              <a:t>&lt;#&gt;</a:t>
+            </a:fld>
+          </a:p>
+        </p:txBody>
+      </p:sp>
+      <p:sp>
+        <p:nvSpPr>
+          <p:cNvPr id="8" name="PlaceHolder 7"/>
+          <p:cNvSpPr>
+            <a:spLocks noGrp="1"/>
+          </p:cNvSpPr>
+          <p:nvPr>
+            <p:ph type="dt" idx="15"/>
+          </p:nvPr>
+        </p:nvSpPr>
+        <p:spPr/>
+        <p:txBody>
+          <a:bodyPr/>
+          <a:p>
+            <a:r>
+              <a:rPr lang="en-US"/>
+              <a:t/>
+            </a:r>
+          </a:p>
+        </p:txBody>
+      </p:sp>
+    </p:spTree>
+  </p:cSld>
+</p:sldLayout>
+</file>
+
+<file path=ppt/slideLayouts/slideLayout57.xml><?xml version="1.0" encoding="utf-8"?>
+<p:sldLayout xmlns:a="http://schemas.openxmlformats.org/drawingml/2006/main" xmlns:p="http://schemas.openxmlformats.org/presentationml/2006/main" xmlns:r="http://schemas.openxmlformats.org/officeDocument/2006/relationships" xmlns:p14="http://schemas.microsoft.com/office/powerpoint/2010/main" xmlns:p15="http://schemas.microsoft.com/office/powerpoint/2012/main" xmlns:mc="http://schemas.openxmlformats.org/markup-compatibility/2006" type="twoObjOverTx" preserve="1">
+  <p:cSld name="Title, 2 Content over Content">
+    <p:spTree>
+      <p:nvGrpSpPr>
+        <p:cNvPr id="1" name=""/>
+        <p:cNvGrpSpPr/>
+        <p:nvPr/>
+      </p:nvGrpSpPr>
+      <p:grpSpPr>
+        <a:xfrm>
+          <a:off x="0" y="0"/>
+          <a:ext cx="0" cy="0"/>
+          <a:chOff x="0" y="0"/>
+          <a:chExt cx="0" cy="0"/>
+        </a:xfrm>
+      </p:grpSpPr>
+      <p:sp>
+        <p:nvSpPr>
+          <p:cNvPr id="186" name="PlaceHolder 1"/>
+          <p:cNvSpPr>
+            <a:spLocks noGrp="1"/>
+          </p:cNvSpPr>
+          <p:nvPr>
+            <p:ph type="title"/>
+          </p:nvPr>
+        </p:nvSpPr>
+        <p:spPr>
+          <a:xfrm>
+            <a:off x="457200" y="273600"/>
+            <a:ext cx="8229240" cy="1144800"/>
+          </a:xfrm>
+          <a:prstGeom prst="rect">
+            <a:avLst/>
+          </a:prstGeom>
+          <a:noFill/>
+          <a:ln w="0">
+            <a:noFill/>
+          </a:ln>
+        </p:spPr>
+        <p:txBody>
+          <a:bodyPr lIns="0" rIns="0" tIns="0" bIns="0" anchor="ctr">
+            <a:noAutofit/>
+          </a:bodyPr>
+          <a:p>
+            <a:pPr indent="0" algn="ctr">
+              <a:buNone/>
+            </a:pPr>
+            <a:endParaRPr b="0" lang="en-US" sz="4400" spc="-1" strike="noStrike">
+              <a:solidFill>
+                <a:srgbClr val="000000"/>
+              </a:solidFill>
+              <a:latin typeface="Arial"/>
+            </a:endParaRPr>
+          </a:p>
+        </p:txBody>
+      </p:sp>
+      <p:sp>
+        <p:nvSpPr>
+          <p:cNvPr id="187" name="PlaceHolder 2"/>
+          <p:cNvSpPr>
+            <a:spLocks noGrp="1"/>
+          </p:cNvSpPr>
+          <p:nvPr>
+            <p:ph/>
+          </p:nvPr>
+        </p:nvSpPr>
+        <p:spPr>
+          <a:xfrm>
+            <a:off x="457200" y="1604520"/>
+            <a:ext cx="4015800" cy="1896840"/>
+          </a:xfrm>
+          <a:prstGeom prst="rect">
+            <a:avLst/>
+          </a:prstGeom>
+          <a:noFill/>
+          <a:ln w="0">
+            <a:noFill/>
+          </a:ln>
+        </p:spPr>
+        <p:txBody>
+          <a:bodyPr lIns="0" rIns="0" tIns="0" bIns="0" anchor="t">
+            <a:normAutofit/>
+          </a:bodyPr>
+          <a:p>
+            <a:pPr indent="0">
+              <a:spcBef>
+                <a:spcPts val="1417"/>
+              </a:spcBef>
+              <a:buNone/>
+            </a:pPr>
+            <a:endParaRPr b="0" lang="en-US" sz="3200" spc="-1" strike="noStrike">
+              <a:solidFill>
+                <a:srgbClr val="000000"/>
+              </a:solidFill>
+              <a:latin typeface="Arial"/>
+            </a:endParaRPr>
+          </a:p>
+        </p:txBody>
+      </p:sp>
+      <p:sp>
+        <p:nvSpPr>
+          <p:cNvPr id="188" name="PlaceHolder 3"/>
+          <p:cNvSpPr>
+            <a:spLocks noGrp="1"/>
+          </p:cNvSpPr>
+          <p:nvPr>
+            <p:ph/>
+          </p:nvPr>
+        </p:nvSpPr>
+        <p:spPr>
+          <a:xfrm>
+            <a:off x="4674240" y="1604520"/>
+            <a:ext cx="4015800" cy="1896840"/>
+          </a:xfrm>
+          <a:prstGeom prst="rect">
+            <a:avLst/>
+          </a:prstGeom>
+          <a:noFill/>
+          <a:ln w="0">
+            <a:noFill/>
+          </a:ln>
+        </p:spPr>
+        <p:txBody>
+          <a:bodyPr lIns="0" rIns="0" tIns="0" bIns="0" anchor="t">
+            <a:normAutofit/>
+          </a:bodyPr>
+          <a:p>
+            <a:pPr indent="0">
+              <a:spcBef>
+                <a:spcPts val="1417"/>
+              </a:spcBef>
+              <a:buNone/>
+            </a:pPr>
+            <a:endParaRPr b="0" lang="en-US" sz="3200" spc="-1" strike="noStrike">
+              <a:solidFill>
+                <a:srgbClr val="000000"/>
+              </a:solidFill>
+              <a:latin typeface="Arial"/>
+            </a:endParaRPr>
+          </a:p>
+        </p:txBody>
+      </p:sp>
+      <p:sp>
+        <p:nvSpPr>
+          <p:cNvPr id="189" name="PlaceHolder 4"/>
+          <p:cNvSpPr>
+            <a:spLocks noGrp="1"/>
+          </p:cNvSpPr>
+          <p:nvPr>
+            <p:ph/>
+          </p:nvPr>
+        </p:nvSpPr>
+        <p:spPr>
+          <a:xfrm>
+            <a:off x="457200" y="3682080"/>
+            <a:ext cx="8229240" cy="1896840"/>
+          </a:xfrm>
+          <a:prstGeom prst="rect">
+            <a:avLst/>
+          </a:prstGeom>
+          <a:noFill/>
+          <a:ln w="0">
+            <a:noFill/>
+          </a:ln>
+        </p:spPr>
+        <p:txBody>
+          <a:bodyPr lIns="0" rIns="0" tIns="0" bIns="0" anchor="t">
+            <a:normAutofit/>
+          </a:bodyPr>
+          <a:p>
+            <a:pPr indent="0">
+              <a:spcBef>
+                <a:spcPts val="1417"/>
+              </a:spcBef>
+              <a:buNone/>
+            </a:pPr>
+            <a:endParaRPr b="0" lang="en-US" sz="3200" spc="-1" strike="noStrike">
+              <a:solidFill>
+                <a:srgbClr val="000000"/>
+              </a:solidFill>
+              <a:latin typeface="Arial"/>
+            </a:endParaRPr>
+          </a:p>
+        </p:txBody>
+      </p:sp>
+      <p:sp>
+        <p:nvSpPr>
+          <p:cNvPr id="6" name="PlaceHolder 5"/>
+          <p:cNvSpPr>
+            <a:spLocks noGrp="1"/>
+          </p:cNvSpPr>
+          <p:nvPr>
+            <p:ph type="ftr" idx="13"/>
+          </p:nvPr>
+        </p:nvSpPr>
+        <p:spPr/>
+        <p:txBody>
+          <a:bodyPr/>
+          <a:p>
+            <a:r>
+              <a:t>Footer</a:t>
+            </a:r>
+          </a:p>
+        </p:txBody>
+      </p:sp>
+      <p:sp>
+        <p:nvSpPr>
+          <p:cNvPr id="7" name="PlaceHolder 6"/>
+          <p:cNvSpPr>
+            <a:spLocks noGrp="1"/>
+          </p:cNvSpPr>
+          <p:nvPr>
+            <p:ph type="sldNum" idx="14"/>
+          </p:nvPr>
+        </p:nvSpPr>
+        <p:spPr/>
+        <p:txBody>
+          <a:bodyPr/>
+          <a:p>
+            <a:fld id="{F84CD3DD-D5C5-4715-8C4A-F20FAB85304C}" type="slidenum">
+              <a:t>&lt;#&gt;</a:t>
+            </a:fld>
+          </a:p>
+        </p:txBody>
+      </p:sp>
+      <p:sp>
+        <p:nvSpPr>
+          <p:cNvPr id="8" name="PlaceHolder 7"/>
+          <p:cNvSpPr>
+            <a:spLocks noGrp="1"/>
+          </p:cNvSpPr>
+          <p:nvPr>
+            <p:ph type="dt" idx="15"/>
+          </p:nvPr>
+        </p:nvSpPr>
+        <p:spPr/>
+        <p:txBody>
+          <a:bodyPr/>
+          <a:p>
+            <a:r>
+              <a:rPr lang="en-US"/>
+              <a:t/>
+            </a:r>
+          </a:p>
+        </p:txBody>
+      </p:sp>
+    </p:spTree>
+  </p:cSld>
+</p:sldLayout>
+</file>
+
+<file path=ppt/slideLayouts/slideLayout58.xml><?xml version="1.0" encoding="utf-8"?>
+<p:sldLayout xmlns:a="http://schemas.openxmlformats.org/drawingml/2006/main" xmlns:p="http://schemas.openxmlformats.org/presentationml/2006/main" xmlns:r="http://schemas.openxmlformats.org/officeDocument/2006/relationships" xmlns:p14="http://schemas.microsoft.com/office/powerpoint/2010/main" xmlns:p15="http://schemas.microsoft.com/office/powerpoint/2012/main" xmlns:mc="http://schemas.openxmlformats.org/markup-compatibility/2006" type="objOverTx" preserve="1">
+  <p:cSld name="Title, Content over Content">
+    <p:spTree>
+      <p:nvGrpSpPr>
+        <p:cNvPr id="1" name=""/>
+        <p:cNvGrpSpPr/>
+        <p:nvPr/>
+      </p:nvGrpSpPr>
+      <p:grpSpPr>
+        <a:xfrm>
+          <a:off x="0" y="0"/>
+          <a:ext cx="0" cy="0"/>
+          <a:chOff x="0" y="0"/>
+          <a:chExt cx="0" cy="0"/>
+        </a:xfrm>
+      </p:grpSpPr>
+      <p:sp>
+        <p:nvSpPr>
+          <p:cNvPr id="190" name="PlaceHolder 1"/>
+          <p:cNvSpPr>
+            <a:spLocks noGrp="1"/>
+          </p:cNvSpPr>
+          <p:nvPr>
+            <p:ph type="title"/>
+          </p:nvPr>
+        </p:nvSpPr>
+        <p:spPr>
+          <a:xfrm>
+            <a:off x="457200" y="273600"/>
+            <a:ext cx="8229240" cy="1144800"/>
+          </a:xfrm>
+          <a:prstGeom prst="rect">
+            <a:avLst/>
+          </a:prstGeom>
+          <a:noFill/>
+          <a:ln w="0">
+            <a:noFill/>
+          </a:ln>
+        </p:spPr>
+        <p:txBody>
+          <a:bodyPr lIns="0" rIns="0" tIns="0" bIns="0" anchor="ctr">
+            <a:noAutofit/>
+          </a:bodyPr>
+          <a:p>
+            <a:pPr indent="0" algn="ctr">
+              <a:buNone/>
+            </a:pPr>
+            <a:endParaRPr b="0" lang="en-US" sz="4400" spc="-1" strike="noStrike">
+              <a:solidFill>
+                <a:srgbClr val="000000"/>
+              </a:solidFill>
+              <a:latin typeface="Arial"/>
+            </a:endParaRPr>
+          </a:p>
+        </p:txBody>
+      </p:sp>
+      <p:sp>
+        <p:nvSpPr>
+          <p:cNvPr id="191" name="PlaceHolder 2"/>
+          <p:cNvSpPr>
+            <a:spLocks noGrp="1"/>
+          </p:cNvSpPr>
+          <p:nvPr>
+            <p:ph/>
+          </p:nvPr>
+        </p:nvSpPr>
+        <p:spPr>
+          <a:xfrm>
+            <a:off x="457200" y="1604520"/>
+            <a:ext cx="8229240" cy="1896840"/>
+          </a:xfrm>
+          <a:prstGeom prst="rect">
+            <a:avLst/>
+          </a:prstGeom>
+          <a:noFill/>
+          <a:ln w="0">
+            <a:noFill/>
+          </a:ln>
+        </p:spPr>
+        <p:txBody>
+          <a:bodyPr lIns="0" rIns="0" tIns="0" bIns="0" anchor="t">
+            <a:normAutofit/>
+          </a:bodyPr>
+          <a:p>
+            <a:pPr indent="0">
+              <a:spcBef>
+                <a:spcPts val="1417"/>
+              </a:spcBef>
+              <a:buNone/>
+            </a:pPr>
+            <a:endParaRPr b="0" lang="en-US" sz="3200" spc="-1" strike="noStrike">
+              <a:solidFill>
+                <a:srgbClr val="000000"/>
+              </a:solidFill>
+              <a:latin typeface="Arial"/>
+            </a:endParaRPr>
+          </a:p>
+        </p:txBody>
+      </p:sp>
+      <p:sp>
+        <p:nvSpPr>
+          <p:cNvPr id="192" name="PlaceHolder 3"/>
+          <p:cNvSpPr>
+            <a:spLocks noGrp="1"/>
+          </p:cNvSpPr>
+          <p:nvPr>
+            <p:ph/>
+          </p:nvPr>
+        </p:nvSpPr>
+        <p:spPr>
+          <a:xfrm>
+            <a:off x="457200" y="3682080"/>
+            <a:ext cx="8229240" cy="1896840"/>
+          </a:xfrm>
+          <a:prstGeom prst="rect">
+            <a:avLst/>
+          </a:prstGeom>
+          <a:noFill/>
+          <a:ln w="0">
+            <a:noFill/>
+          </a:ln>
+        </p:spPr>
+        <p:txBody>
+          <a:bodyPr lIns="0" rIns="0" tIns="0" bIns="0" anchor="t">
+            <a:normAutofit/>
+          </a:bodyPr>
+          <a:p>
+            <a:pPr indent="0">
+              <a:spcBef>
+                <a:spcPts val="1417"/>
+              </a:spcBef>
+              <a:buNone/>
+            </a:pPr>
+            <a:endParaRPr b="0" lang="en-US" sz="3200" spc="-1" strike="noStrike">
+              <a:solidFill>
+                <a:srgbClr val="000000"/>
+              </a:solidFill>
+              <a:latin typeface="Arial"/>
+            </a:endParaRPr>
+          </a:p>
+        </p:txBody>
+      </p:sp>
+      <p:sp>
+        <p:nvSpPr>
+          <p:cNvPr id="5" name="PlaceHolder 4"/>
+          <p:cNvSpPr>
+            <a:spLocks noGrp="1"/>
+          </p:cNvSpPr>
+          <p:nvPr>
+            <p:ph type="ftr" idx="13"/>
+          </p:nvPr>
+        </p:nvSpPr>
+        <p:spPr/>
+        <p:txBody>
+          <a:bodyPr/>
+          <a:p>
+            <a:r>
+              <a:t>Footer</a:t>
+            </a:r>
+          </a:p>
+        </p:txBody>
+      </p:sp>
+      <p:sp>
+        <p:nvSpPr>
+          <p:cNvPr id="6" name="PlaceHolder 5"/>
+          <p:cNvSpPr>
+            <a:spLocks noGrp="1"/>
+          </p:cNvSpPr>
+          <p:nvPr>
+            <p:ph type="sldNum" idx="14"/>
+          </p:nvPr>
+        </p:nvSpPr>
+        <p:spPr/>
+        <p:txBody>
+          <a:bodyPr/>
+          <a:p>
+            <a:fld id="{DAAFF1D3-0F9B-4C9C-A867-70D84F325A77}" type="slidenum">
+              <a:t>&lt;#&gt;</a:t>
+            </a:fld>
+          </a:p>
+        </p:txBody>
+      </p:sp>
+      <p:sp>
+        <p:nvSpPr>
+          <p:cNvPr id="7" name="PlaceHolder 6"/>
+          <p:cNvSpPr>
+            <a:spLocks noGrp="1"/>
+          </p:cNvSpPr>
+          <p:nvPr>
+            <p:ph type="dt" idx="15"/>
+          </p:nvPr>
+        </p:nvSpPr>
+        <p:spPr/>
+        <p:txBody>
+          <a:bodyPr/>
+          <a:p>
+            <a:r>
+              <a:rPr lang="en-US"/>
+              <a:t/>
+            </a:r>
+          </a:p>
+        </p:txBody>
+      </p:sp>
+    </p:spTree>
+  </p:cSld>
+</p:sldLayout>
+</file>
+
+<file path=ppt/slideLayouts/slideLayout59.xml><?xml version="1.0" encoding="utf-8"?>
+<p:sldLayout xmlns:a="http://schemas.openxmlformats.org/drawingml/2006/main" xmlns:p="http://schemas.openxmlformats.org/presentationml/2006/main" xmlns:r="http://schemas.openxmlformats.org/officeDocument/2006/relationships" xmlns:p14="http://schemas.microsoft.com/office/powerpoint/2010/main" xmlns:p15="http://schemas.microsoft.com/office/powerpoint/2012/main" xmlns:mc="http://schemas.openxmlformats.org/markup-compatibility/2006" type="fourObj" preserve="1">
+  <p:cSld name="Title, 4 Content">
+    <p:spTree>
+      <p:nvGrpSpPr>
+        <p:cNvPr id="1" name=""/>
+        <p:cNvGrpSpPr/>
+        <p:nvPr/>
+      </p:nvGrpSpPr>
+      <p:grpSpPr>
+        <a:xfrm>
+          <a:off x="0" y="0"/>
+          <a:ext cx="0" cy="0"/>
+          <a:chOff x="0" y="0"/>
+          <a:chExt cx="0" cy="0"/>
+        </a:xfrm>
+      </p:grpSpPr>
+      <p:sp>
+        <p:nvSpPr>
+          <p:cNvPr id="193" name="PlaceHolder 1"/>
+          <p:cNvSpPr>
+            <a:spLocks noGrp="1"/>
+          </p:cNvSpPr>
+          <p:nvPr>
+            <p:ph type="title"/>
+          </p:nvPr>
+        </p:nvSpPr>
+        <p:spPr>
+          <a:xfrm>
+            <a:off x="457200" y="273600"/>
+            <a:ext cx="8229240" cy="1144800"/>
+          </a:xfrm>
+          <a:prstGeom prst="rect">
+            <a:avLst/>
+          </a:prstGeom>
+          <a:noFill/>
+          <a:ln w="0">
+            <a:noFill/>
+          </a:ln>
+        </p:spPr>
+        <p:txBody>
+          <a:bodyPr lIns="0" rIns="0" tIns="0" bIns="0" anchor="ctr">
+            <a:noAutofit/>
+          </a:bodyPr>
+          <a:p>
+            <a:pPr indent="0" algn="ctr">
+              <a:buNone/>
+            </a:pPr>
+            <a:endParaRPr b="0" lang="en-US" sz="4400" spc="-1" strike="noStrike">
+              <a:solidFill>
+                <a:srgbClr val="000000"/>
+              </a:solidFill>
+              <a:latin typeface="Arial"/>
+            </a:endParaRPr>
+          </a:p>
+        </p:txBody>
+      </p:sp>
+      <p:sp>
+        <p:nvSpPr>
+          <p:cNvPr id="194" name="PlaceHolder 2"/>
+          <p:cNvSpPr>
+            <a:spLocks noGrp="1"/>
+          </p:cNvSpPr>
+          <p:nvPr>
+            <p:ph/>
+          </p:nvPr>
+        </p:nvSpPr>
+        <p:spPr>
+          <a:xfrm>
+            <a:off x="457200" y="1604520"/>
+            <a:ext cx="4015800" cy="1896840"/>
+          </a:xfrm>
+          <a:prstGeom prst="rect">
+            <a:avLst/>
+          </a:prstGeom>
+          <a:noFill/>
+          <a:ln w="0">
+            <a:noFill/>
+          </a:ln>
+        </p:spPr>
+        <p:txBody>
+          <a:bodyPr lIns="0" rIns="0" tIns="0" bIns="0" anchor="t">
+            <a:normAutofit/>
+          </a:bodyPr>
+          <a:p>
+            <a:pPr indent="0">
+              <a:spcBef>
+                <a:spcPts val="1417"/>
+              </a:spcBef>
+              <a:buNone/>
+            </a:pPr>
+            <a:endParaRPr b="0" lang="en-US" sz="3200" spc="-1" strike="noStrike">
+              <a:solidFill>
+                <a:srgbClr val="000000"/>
+              </a:solidFill>
+              <a:latin typeface="Arial"/>
+            </a:endParaRPr>
+          </a:p>
+        </p:txBody>
+      </p:sp>
+      <p:sp>
+        <p:nvSpPr>
+          <p:cNvPr id="195" name="PlaceHolder 3"/>
+          <p:cNvSpPr>
+            <a:spLocks noGrp="1"/>
+          </p:cNvSpPr>
+          <p:nvPr>
+            <p:ph/>
+          </p:nvPr>
+        </p:nvSpPr>
+        <p:spPr>
+          <a:xfrm>
+            <a:off x="4674240" y="1604520"/>
+            <a:ext cx="4015800" cy="1896840"/>
+          </a:xfrm>
+          <a:prstGeom prst="rect">
+            <a:avLst/>
+          </a:prstGeom>
+          <a:noFill/>
+          <a:ln w="0">
+            <a:noFill/>
+          </a:ln>
+        </p:spPr>
+        <p:txBody>
+          <a:bodyPr lIns="0" rIns="0" tIns="0" bIns="0" anchor="t">
+            <a:normAutofit/>
+          </a:bodyPr>
+          <a:p>
+            <a:pPr indent="0">
+              <a:spcBef>
+                <a:spcPts val="1417"/>
+              </a:spcBef>
+              <a:buNone/>
+            </a:pPr>
+            <a:endParaRPr b="0" lang="en-US" sz="3200" spc="-1" strike="noStrike">
+              <a:solidFill>
+                <a:srgbClr val="000000"/>
+              </a:solidFill>
+              <a:latin typeface="Arial"/>
+            </a:endParaRPr>
+          </a:p>
+        </p:txBody>
+      </p:sp>
+      <p:sp>
+        <p:nvSpPr>
+          <p:cNvPr id="196" name="PlaceHolder 4"/>
+          <p:cNvSpPr>
+            <a:spLocks noGrp="1"/>
+          </p:cNvSpPr>
+          <p:nvPr>
+            <p:ph/>
+          </p:nvPr>
+        </p:nvSpPr>
+        <p:spPr>
+          <a:xfrm>
+            <a:off x="457200" y="3682080"/>
+            <a:ext cx="4015800" cy="1896840"/>
+          </a:xfrm>
+          <a:prstGeom prst="rect">
+            <a:avLst/>
+          </a:prstGeom>
+          <a:noFill/>
+          <a:ln w="0">
+            <a:noFill/>
+          </a:ln>
+        </p:spPr>
+        <p:txBody>
+          <a:bodyPr lIns="0" rIns="0" tIns="0" bIns="0" anchor="t">
+            <a:normAutofit/>
+          </a:bodyPr>
+          <a:p>
+            <a:pPr indent="0">
+              <a:spcBef>
+                <a:spcPts val="1417"/>
+              </a:spcBef>
+              <a:buNone/>
+            </a:pPr>
+            <a:endParaRPr b="0" lang="en-US" sz="3200" spc="-1" strike="noStrike">
+              <a:solidFill>
+                <a:srgbClr val="000000"/>
+              </a:solidFill>
+              <a:latin typeface="Arial"/>
+            </a:endParaRPr>
+          </a:p>
+        </p:txBody>
+      </p:sp>
+      <p:sp>
+        <p:nvSpPr>
+          <p:cNvPr id="197" name="PlaceHolder 5"/>
+          <p:cNvSpPr>
+            <a:spLocks noGrp="1"/>
+          </p:cNvSpPr>
+          <p:nvPr>
+            <p:ph/>
+          </p:nvPr>
+        </p:nvSpPr>
+        <p:spPr>
+          <a:xfrm>
+            <a:off x="4674240" y="3682080"/>
+            <a:ext cx="4015800" cy="1896840"/>
+          </a:xfrm>
+          <a:prstGeom prst="rect">
+            <a:avLst/>
+          </a:prstGeom>
+          <a:noFill/>
+          <a:ln w="0">
+            <a:noFill/>
+          </a:ln>
+        </p:spPr>
+        <p:txBody>
+          <a:bodyPr lIns="0" rIns="0" tIns="0" bIns="0" anchor="t">
+            <a:normAutofit/>
+          </a:bodyPr>
+          <a:p>
+            <a:pPr indent="0">
+              <a:spcBef>
+                <a:spcPts val="1417"/>
+              </a:spcBef>
+              <a:buNone/>
+            </a:pPr>
+            <a:endParaRPr b="0" lang="en-US" sz="3200" spc="-1" strike="noStrike">
+              <a:solidFill>
+                <a:srgbClr val="000000"/>
+              </a:solidFill>
+              <a:latin typeface="Arial"/>
+            </a:endParaRPr>
+          </a:p>
+        </p:txBody>
+      </p:sp>
+      <p:sp>
+        <p:nvSpPr>
+          <p:cNvPr id="7" name="PlaceHolder 6"/>
+          <p:cNvSpPr>
+            <a:spLocks noGrp="1"/>
+          </p:cNvSpPr>
+          <p:nvPr>
+            <p:ph type="ftr" idx="13"/>
+          </p:nvPr>
+        </p:nvSpPr>
+        <p:spPr/>
+        <p:txBody>
+          <a:bodyPr/>
+          <a:p>
+            <a:r>
+              <a:t>Footer</a:t>
+            </a:r>
+          </a:p>
+        </p:txBody>
+      </p:sp>
+      <p:sp>
+        <p:nvSpPr>
+          <p:cNvPr id="8" name="PlaceHolder 7"/>
+          <p:cNvSpPr>
+            <a:spLocks noGrp="1"/>
+          </p:cNvSpPr>
+          <p:nvPr>
+            <p:ph type="sldNum" idx="14"/>
+          </p:nvPr>
+        </p:nvSpPr>
+        <p:spPr/>
+        <p:txBody>
+          <a:bodyPr/>
+          <a:p>
+            <a:fld id="{BDACC21F-8198-410B-8C9E-9A53E2D2CD86}" type="slidenum">
+              <a:t>&lt;#&gt;</a:t>
+            </a:fld>
+          </a:p>
+        </p:txBody>
+      </p:sp>
+      <p:sp>
+        <p:nvSpPr>
+          <p:cNvPr id="9" name="PlaceHolder 8"/>
+          <p:cNvSpPr>
+            <a:spLocks noGrp="1"/>
+          </p:cNvSpPr>
+          <p:nvPr>
+            <p:ph type="dt" idx="15"/>
           </p:nvPr>
         </p:nvSpPr>
         <p:spPr/>
@@ -9257,7 +11384,7 @@
         <p:txBody>
           <a:bodyPr/>
           <a:p>
-            <a:fld id="{64875671-9376-450E-9BF8-59FF514BD279}" type="slidenum">
+            <a:fld id="{997E120A-106B-4C44-88F7-106A7D9EE141}" type="slidenum">
               <a:t>&lt;#&gt;</a:t>
             </a:fld>
           </a:p>
@@ -9271,6 +11398,387 @@
           </p:cNvSpPr>
           <p:nvPr>
             <p:ph type="dt" idx="3"/>
+          </p:nvPr>
+        </p:nvSpPr>
+        <p:spPr/>
+        <p:txBody>
+          <a:bodyPr/>
+          <a:p>
+            <a:r>
+              <a:rPr lang="en-US"/>
+              <a:t/>
+            </a:r>
+          </a:p>
+        </p:txBody>
+      </p:sp>
+    </p:spTree>
+  </p:cSld>
+</p:sldLayout>
+</file>
+
+<file path=ppt/slideLayouts/slideLayout60.xml><?xml version="1.0" encoding="utf-8"?>
+<p:sldLayout xmlns:a="http://schemas.openxmlformats.org/drawingml/2006/main" xmlns:p="http://schemas.openxmlformats.org/presentationml/2006/main" xmlns:r="http://schemas.openxmlformats.org/officeDocument/2006/relationships" xmlns:p14="http://schemas.microsoft.com/office/powerpoint/2010/main" xmlns:p15="http://schemas.microsoft.com/office/powerpoint/2012/main" xmlns:mc="http://schemas.openxmlformats.org/markup-compatibility/2006" type="blank" preserve="1">
+  <p:cSld name="Title, 6 Content">
+    <p:spTree>
+      <p:nvGrpSpPr>
+        <p:cNvPr id="1" name=""/>
+        <p:cNvGrpSpPr/>
+        <p:nvPr/>
+      </p:nvGrpSpPr>
+      <p:grpSpPr>
+        <a:xfrm>
+          <a:off x="0" y="0"/>
+          <a:ext cx="0" cy="0"/>
+          <a:chOff x="0" y="0"/>
+          <a:chExt cx="0" cy="0"/>
+        </a:xfrm>
+      </p:grpSpPr>
+      <p:sp>
+        <p:nvSpPr>
+          <p:cNvPr id="198" name="PlaceHolder 1"/>
+          <p:cNvSpPr>
+            <a:spLocks noGrp="1"/>
+          </p:cNvSpPr>
+          <p:nvPr>
+            <p:ph type="title"/>
+          </p:nvPr>
+        </p:nvSpPr>
+        <p:spPr>
+          <a:xfrm>
+            <a:off x="457200" y="273600"/>
+            <a:ext cx="8229240" cy="1144800"/>
+          </a:xfrm>
+          <a:prstGeom prst="rect">
+            <a:avLst/>
+          </a:prstGeom>
+          <a:noFill/>
+          <a:ln w="0">
+            <a:noFill/>
+          </a:ln>
+        </p:spPr>
+        <p:txBody>
+          <a:bodyPr lIns="0" rIns="0" tIns="0" bIns="0" anchor="ctr">
+            <a:noAutofit/>
+          </a:bodyPr>
+          <a:p>
+            <a:pPr indent="0" algn="ctr">
+              <a:buNone/>
+            </a:pPr>
+            <a:endParaRPr b="0" lang="en-US" sz="4400" spc="-1" strike="noStrike">
+              <a:solidFill>
+                <a:srgbClr val="000000"/>
+              </a:solidFill>
+              <a:latin typeface="Arial"/>
+            </a:endParaRPr>
+          </a:p>
+        </p:txBody>
+      </p:sp>
+      <p:sp>
+        <p:nvSpPr>
+          <p:cNvPr id="199" name="PlaceHolder 2"/>
+          <p:cNvSpPr>
+            <a:spLocks noGrp="1"/>
+          </p:cNvSpPr>
+          <p:nvPr>
+            <p:ph/>
+          </p:nvPr>
+        </p:nvSpPr>
+        <p:spPr>
+          <a:xfrm>
+            <a:off x="457200" y="1604520"/>
+            <a:ext cx="2649600" cy="1896840"/>
+          </a:xfrm>
+          <a:prstGeom prst="rect">
+            <a:avLst/>
+          </a:prstGeom>
+          <a:noFill/>
+          <a:ln w="0">
+            <a:noFill/>
+          </a:ln>
+        </p:spPr>
+        <p:txBody>
+          <a:bodyPr lIns="0" rIns="0" tIns="0" bIns="0" anchor="t">
+            <a:normAutofit/>
+          </a:bodyPr>
+          <a:p>
+            <a:pPr indent="0">
+              <a:spcBef>
+                <a:spcPts val="1417"/>
+              </a:spcBef>
+              <a:buNone/>
+            </a:pPr>
+            <a:endParaRPr b="0" lang="en-US" sz="3200" spc="-1" strike="noStrike">
+              <a:solidFill>
+                <a:srgbClr val="000000"/>
+              </a:solidFill>
+              <a:latin typeface="Arial"/>
+            </a:endParaRPr>
+          </a:p>
+        </p:txBody>
+      </p:sp>
+      <p:sp>
+        <p:nvSpPr>
+          <p:cNvPr id="200" name="PlaceHolder 3"/>
+          <p:cNvSpPr>
+            <a:spLocks noGrp="1"/>
+          </p:cNvSpPr>
+          <p:nvPr>
+            <p:ph/>
+          </p:nvPr>
+        </p:nvSpPr>
+        <p:spPr>
+          <a:xfrm>
+            <a:off x="3239640" y="1604520"/>
+            <a:ext cx="2649600" cy="1896840"/>
+          </a:xfrm>
+          <a:prstGeom prst="rect">
+            <a:avLst/>
+          </a:prstGeom>
+          <a:noFill/>
+          <a:ln w="0">
+            <a:noFill/>
+          </a:ln>
+        </p:spPr>
+        <p:txBody>
+          <a:bodyPr lIns="0" rIns="0" tIns="0" bIns="0" anchor="t">
+            <a:normAutofit/>
+          </a:bodyPr>
+          <a:p>
+            <a:pPr indent="0">
+              <a:spcBef>
+                <a:spcPts val="1417"/>
+              </a:spcBef>
+              <a:buNone/>
+            </a:pPr>
+            <a:endParaRPr b="0" lang="en-US" sz="3200" spc="-1" strike="noStrike">
+              <a:solidFill>
+                <a:srgbClr val="000000"/>
+              </a:solidFill>
+              <a:latin typeface="Arial"/>
+            </a:endParaRPr>
+          </a:p>
+        </p:txBody>
+      </p:sp>
+      <p:sp>
+        <p:nvSpPr>
+          <p:cNvPr id="201" name="PlaceHolder 4"/>
+          <p:cNvSpPr>
+            <a:spLocks noGrp="1"/>
+          </p:cNvSpPr>
+          <p:nvPr>
+            <p:ph/>
+          </p:nvPr>
+        </p:nvSpPr>
+        <p:spPr>
+          <a:xfrm>
+            <a:off x="6022080" y="1604520"/>
+            <a:ext cx="2649600" cy="1896840"/>
+          </a:xfrm>
+          <a:prstGeom prst="rect">
+            <a:avLst/>
+          </a:prstGeom>
+          <a:noFill/>
+          <a:ln w="0">
+            <a:noFill/>
+          </a:ln>
+        </p:spPr>
+        <p:txBody>
+          <a:bodyPr lIns="0" rIns="0" tIns="0" bIns="0" anchor="t">
+            <a:normAutofit/>
+          </a:bodyPr>
+          <a:p>
+            <a:pPr indent="0">
+              <a:spcBef>
+                <a:spcPts val="1417"/>
+              </a:spcBef>
+              <a:buNone/>
+            </a:pPr>
+            <a:endParaRPr b="0" lang="en-US" sz="3200" spc="-1" strike="noStrike">
+              <a:solidFill>
+                <a:srgbClr val="000000"/>
+              </a:solidFill>
+              <a:latin typeface="Arial"/>
+            </a:endParaRPr>
+          </a:p>
+        </p:txBody>
+      </p:sp>
+      <p:sp>
+        <p:nvSpPr>
+          <p:cNvPr id="202" name="PlaceHolder 5"/>
+          <p:cNvSpPr>
+            <a:spLocks noGrp="1"/>
+          </p:cNvSpPr>
+          <p:nvPr>
+            <p:ph/>
+          </p:nvPr>
+        </p:nvSpPr>
+        <p:spPr>
+          <a:xfrm>
+            <a:off x="457200" y="3682080"/>
+            <a:ext cx="2649600" cy="1896840"/>
+          </a:xfrm>
+          <a:prstGeom prst="rect">
+            <a:avLst/>
+          </a:prstGeom>
+          <a:noFill/>
+          <a:ln w="0">
+            <a:noFill/>
+          </a:ln>
+        </p:spPr>
+        <p:txBody>
+          <a:bodyPr lIns="0" rIns="0" tIns="0" bIns="0" anchor="t">
+            <a:normAutofit/>
+          </a:bodyPr>
+          <a:p>
+            <a:pPr indent="0">
+              <a:spcBef>
+                <a:spcPts val="1417"/>
+              </a:spcBef>
+              <a:buNone/>
+            </a:pPr>
+            <a:endParaRPr b="0" lang="en-US" sz="3200" spc="-1" strike="noStrike">
+              <a:solidFill>
+                <a:srgbClr val="000000"/>
+              </a:solidFill>
+              <a:latin typeface="Arial"/>
+            </a:endParaRPr>
+          </a:p>
+        </p:txBody>
+      </p:sp>
+      <p:sp>
+        <p:nvSpPr>
+          <p:cNvPr id="203" name="PlaceHolder 6"/>
+          <p:cNvSpPr>
+            <a:spLocks noGrp="1"/>
+          </p:cNvSpPr>
+          <p:nvPr>
+            <p:ph/>
+          </p:nvPr>
+        </p:nvSpPr>
+        <p:spPr>
+          <a:xfrm>
+            <a:off x="3239640" y="3682080"/>
+            <a:ext cx="2649600" cy="1896840"/>
+          </a:xfrm>
+          <a:prstGeom prst="rect">
+            <a:avLst/>
+          </a:prstGeom>
+          <a:noFill/>
+          <a:ln w="0">
+            <a:noFill/>
+          </a:ln>
+        </p:spPr>
+        <p:txBody>
+          <a:bodyPr lIns="0" rIns="0" tIns="0" bIns="0" anchor="t">
+            <a:normAutofit/>
+          </a:bodyPr>
+          <a:p>
+            <a:pPr indent="0">
+              <a:spcBef>
+                <a:spcPts val="1417"/>
+              </a:spcBef>
+              <a:buNone/>
+            </a:pPr>
+            <a:endParaRPr b="0" lang="en-US" sz="3200" spc="-1" strike="noStrike">
+              <a:solidFill>
+                <a:srgbClr val="000000"/>
+              </a:solidFill>
+              <a:latin typeface="Arial"/>
+            </a:endParaRPr>
+          </a:p>
+        </p:txBody>
+      </p:sp>
+      <p:sp>
+        <p:nvSpPr>
+          <p:cNvPr id="204" name="PlaceHolder 7"/>
+          <p:cNvSpPr>
+            <a:spLocks noGrp="1"/>
+          </p:cNvSpPr>
+          <p:nvPr>
+            <p:ph/>
+          </p:nvPr>
+        </p:nvSpPr>
+        <p:spPr>
+          <a:xfrm>
+            <a:off x="6022080" y="3682080"/>
+            <a:ext cx="2649600" cy="1896840"/>
+          </a:xfrm>
+          <a:prstGeom prst="rect">
+            <a:avLst/>
+          </a:prstGeom>
+          <a:noFill/>
+          <a:ln w="0">
+            <a:noFill/>
+          </a:ln>
+        </p:spPr>
+        <p:txBody>
+          <a:bodyPr lIns="0" rIns="0" tIns="0" bIns="0" anchor="t">
+            <a:normAutofit/>
+          </a:bodyPr>
+          <a:p>
+            <a:pPr indent="0">
+              <a:spcBef>
+                <a:spcPts val="1417"/>
+              </a:spcBef>
+              <a:buNone/>
+            </a:pPr>
+            <a:endParaRPr b="0" lang="en-US" sz="3200" spc="-1" strike="noStrike">
+              <a:solidFill>
+                <a:srgbClr val="000000"/>
+              </a:solidFill>
+              <a:latin typeface="Arial"/>
+            </a:endParaRPr>
+          </a:p>
+        </p:txBody>
+      </p:sp>
+      <p:sp>
+        <p:nvSpPr>
+          <p:cNvPr id="9" name="PlaceHolder 8"/>
+          <p:cNvSpPr>
+            <a:spLocks noGrp="1"/>
+          </p:cNvSpPr>
+          <p:nvPr>
+            <p:ph type="ftr" idx="13"/>
+          </p:nvPr>
+        </p:nvSpPr>
+        <p:spPr/>
+        <p:txBody>
+          <a:bodyPr/>
+          <a:p>
+            <a:r>
+              <a:t>Footer</a:t>
+            </a:r>
+          </a:p>
+        </p:txBody>
+      </p:sp>
+      <p:sp>
+        <p:nvSpPr>
+          <p:cNvPr id="10" name="PlaceHolder 9"/>
+          <p:cNvSpPr>
+            <a:spLocks noGrp="1"/>
+          </p:cNvSpPr>
+          <p:nvPr>
+            <p:ph type="sldNum" idx="14"/>
+          </p:nvPr>
+        </p:nvSpPr>
+        <p:spPr/>
+        <p:txBody>
+          <a:bodyPr/>
+          <a:p>
+            <a:fld id="{261D0A3E-E820-4BA1-82E4-1C5D04F94D49}" type="slidenum">
+              <a:t>&lt;#&gt;</a:t>
+            </a:fld>
+          </a:p>
+        </p:txBody>
+      </p:sp>
+      <p:sp>
+        <p:nvSpPr>
+          <p:cNvPr id="11" name="PlaceHolder 10"/>
+          <p:cNvSpPr>
+            <a:spLocks noGrp="1"/>
+          </p:cNvSpPr>
+          <p:nvPr>
+            <p:ph type="dt" idx="15"/>
           </p:nvPr>
         </p:nvSpPr>
         <p:spPr/>
@@ -9509,7 +12017,7 @@
         <p:txBody>
           <a:bodyPr/>
           <a:p>
-            <a:fld id="{DDC48A70-2A32-4080-B312-C3D098D3917E}" type="slidenum">
+            <a:fld id="{2E6B5B0C-787A-4D6F-BE67-B311B756A8BE}" type="slidenum">
               <a:t>&lt;#&gt;</a:t>
             </a:fld>
           </a:p>
@@ -9761,7 +12269,7 @@
         <p:txBody>
           <a:bodyPr/>
           <a:p>
-            <a:fld id="{29FE537E-5019-458D-8435-CA9E9D40FF13}" type="slidenum">
+            <a:fld id="{B53A3D66-6CA8-433D-8365-B3752B6EA1AF}" type="slidenum">
               <a:t>&lt;#&gt;</a:t>
             </a:fld>
           </a:p>
@@ -10013,7 +12521,7 @@
         <p:txBody>
           <a:bodyPr/>
           <a:p>
-            <a:fld id="{B787DA41-7DA1-47F7-A2BB-B21B3D9A96C9}" type="slidenum">
+            <a:fld id="{B52E544E-E01F-4E78-AF50-C3A428CDE585}" type="slidenum">
               <a:t>&lt;#&gt;</a:t>
             </a:fld>
           </a:p>
@@ -10082,7 +12590,7 @@
         <p:spPr>
           <a:xfrm>
             <a:off x="3124080" y="6356520"/>
-            <a:ext cx="2893320" cy="362880"/>
+            <a:ext cx="2892960" cy="362520"/>
           </a:xfrm>
           <a:prstGeom prst="rect">
             <a:avLst/>
@@ -10154,7 +12662,7 @@
         <p:spPr>
           <a:xfrm>
             <a:off x="6553080" y="6356520"/>
-            <a:ext cx="2131560" cy="362880"/>
+            <a:ext cx="2131200" cy="362520"/>
           </a:xfrm>
           <a:prstGeom prst="rect">
             <a:avLst/>
@@ -10195,7 +12703,7 @@
                 <a:tab algn="l" pos="0"/>
               </a:tabLst>
             </a:pPr>
-            <a:fld id="{50072634-F9D3-4B19-B20E-3B3A009A0BD8}" type="slidenum">
+            <a:fld id="{E1ABDE87-2BE5-4E65-93A6-32B962B9B853}" type="slidenum">
               <a:rPr b="0" lang="en-US" sz="1200" spc="-1" strike="noStrike">
                 <a:solidFill>
                   <a:srgbClr val="8b8b8b"/>
@@ -10226,7 +12734,7 @@
         <p:spPr>
           <a:xfrm>
             <a:off x="457200" y="6356520"/>
-            <a:ext cx="2131560" cy="362880"/>
+            <a:ext cx="2131200" cy="362520"/>
           </a:xfrm>
           <a:prstGeom prst="rect">
             <a:avLst/>
@@ -10604,7 +13112,7 @@
         <p:spPr>
           <a:xfrm>
             <a:off x="3124080" y="6356520"/>
-            <a:ext cx="2893320" cy="362880"/>
+            <a:ext cx="2892960" cy="362520"/>
           </a:xfrm>
           <a:prstGeom prst="rect">
             <a:avLst/>
@@ -10676,7 +13184,7 @@
         <p:spPr>
           <a:xfrm>
             <a:off x="6553080" y="6356520"/>
-            <a:ext cx="2131560" cy="362880"/>
+            <a:ext cx="2131200" cy="362520"/>
           </a:xfrm>
           <a:prstGeom prst="rect">
             <a:avLst/>
@@ -10717,7 +13225,7 @@
                 <a:tab algn="l" pos="0"/>
               </a:tabLst>
             </a:pPr>
-            <a:fld id="{B0C82354-8072-4394-B344-EC3A5CA7EAA3}" type="slidenum">
+            <a:fld id="{3B1575C6-0B5F-479C-A5CD-456D4EA20B59}" type="slidenum">
               <a:rPr b="0" lang="en-US" sz="1200" spc="-1" strike="noStrike">
                 <a:solidFill>
                   <a:srgbClr val="8b8b8b"/>
@@ -10748,7 +13256,7 @@
         <p:spPr>
           <a:xfrm>
             <a:off x="457200" y="6356520"/>
-            <a:ext cx="2131560" cy="362880"/>
+            <a:ext cx="2131200" cy="362520"/>
           </a:xfrm>
           <a:prstGeom prst="rect">
             <a:avLst/>
@@ -11126,7 +13634,7 @@
         <p:spPr>
           <a:xfrm>
             <a:off x="3124080" y="6356520"/>
-            <a:ext cx="2893680" cy="363240"/>
+            <a:ext cx="2893320" cy="362880"/>
           </a:xfrm>
           <a:prstGeom prst="rect">
             <a:avLst/>
@@ -11198,7 +13706,7 @@
         <p:spPr>
           <a:xfrm>
             <a:off x="6553080" y="6356520"/>
-            <a:ext cx="2131920" cy="363240"/>
+            <a:ext cx="2131560" cy="362880"/>
           </a:xfrm>
           <a:prstGeom prst="rect">
             <a:avLst/>
@@ -11239,7 +13747,7 @@
                 <a:tab algn="l" pos="0"/>
               </a:tabLst>
             </a:pPr>
-            <a:fld id="{960A3333-1ADB-4168-BB60-879FFA82D6A0}" type="slidenum">
+            <a:fld id="{BD426AD3-1A3B-46B0-9408-DBB3DDDB6615}" type="slidenum">
               <a:rPr b="0" lang="en-US" sz="1200" spc="-1" strike="noStrike">
                 <a:solidFill>
                   <a:srgbClr val="8b8b8b"/>
@@ -11270,7 +13778,7 @@
         <p:spPr>
           <a:xfrm>
             <a:off x="457200" y="6356520"/>
-            <a:ext cx="2131920" cy="363240"/>
+            <a:ext cx="2131560" cy="362880"/>
           </a:xfrm>
           <a:prstGeom prst="rect">
             <a:avLst/>
@@ -11648,7 +14156,7 @@
         <p:spPr>
           <a:xfrm>
             <a:off x="3124080" y="6356520"/>
-            <a:ext cx="2894040" cy="363600"/>
+            <a:ext cx="2893680" cy="363240"/>
           </a:xfrm>
           <a:prstGeom prst="rect">
             <a:avLst/>
@@ -11720,7 +14228,7 @@
         <p:spPr>
           <a:xfrm>
             <a:off x="6553080" y="6356520"/>
-            <a:ext cx="2132280" cy="363600"/>
+            <a:ext cx="2131920" cy="363240"/>
           </a:xfrm>
           <a:prstGeom prst="rect">
             <a:avLst/>
@@ -11761,7 +14269,7 @@
                 <a:tab algn="l" pos="0"/>
               </a:tabLst>
             </a:pPr>
-            <a:fld id="{C0070983-A9B1-4F91-ACC9-ACA684BE83C8}" type="slidenum">
+            <a:fld id="{0EBA8058-4CCD-4AA4-912F-CE494A6144D2}" type="slidenum">
               <a:rPr b="0" lang="en-US" sz="1200" spc="-1" strike="noStrike">
                 <a:solidFill>
                   <a:srgbClr val="8b8b8b"/>
@@ -11792,7 +14300,7 @@
         <p:spPr>
           <a:xfrm>
             <a:off x="457200" y="6356520"/>
-            <a:ext cx="2132280" cy="363600"/>
+            <a:ext cx="2131920" cy="363240"/>
           </a:xfrm>
           <a:prstGeom prst="rect">
             <a:avLst/>
@@ -12129,6 +14637,528 @@
     <p:sldLayoutId id="2147483697" r:id="rId11"/>
     <p:sldLayoutId id="2147483698" r:id="rId12"/>
     <p:sldLayoutId id="2147483699" r:id="rId13"/>
+  </p:sldLayoutIdLst>
+</p:sldMaster>
+</file>
+
+<file path=ppt/slideMasters/slideMaster5.xml><?xml version="1.0" encoding="utf-8"?>
+<p:sldMaster xmlns:a="http://schemas.openxmlformats.org/drawingml/2006/main" xmlns:p="http://schemas.openxmlformats.org/presentationml/2006/main" xmlns:r="http://schemas.openxmlformats.org/officeDocument/2006/relationships" xmlns:p14="http://schemas.microsoft.com/office/powerpoint/2010/main" xmlns:p15="http://schemas.microsoft.com/office/powerpoint/2012/main" xmlns:mc="http://schemas.openxmlformats.org/markup-compatibility/2006">
+  <p:cSld>
+    <p:bg>
+      <p:bgPr>
+        <a:solidFill>
+          <a:srgbClr val="ffffff"/>
+        </a:solidFill>
+      </p:bgPr>
+    </p:bg>
+    <p:spTree>
+      <p:nvGrpSpPr>
+        <p:cNvPr id="1" name=""/>
+        <p:cNvGrpSpPr/>
+        <p:nvPr/>
+      </p:nvGrpSpPr>
+      <p:grpSpPr>
+        <a:xfrm>
+          <a:off x="0" y="0"/>
+          <a:ext cx="0" cy="0"/>
+          <a:chOff x="0" y="0"/>
+          <a:chExt cx="0" cy="0"/>
+        </a:xfrm>
+      </p:grpSpPr>
+      <p:sp>
+        <p:nvSpPr>
+          <p:cNvPr id="164" name="PlaceHolder 1"/>
+          <p:cNvSpPr>
+            <a:spLocks noGrp="1"/>
+          </p:cNvSpPr>
+          <p:nvPr>
+            <p:ph type="ftr" idx="13"/>
+          </p:nvPr>
+        </p:nvSpPr>
+        <p:spPr>
+          <a:xfrm>
+            <a:off x="3124080" y="6356520"/>
+            <a:ext cx="2894400" cy="363960"/>
+          </a:xfrm>
+          <a:prstGeom prst="rect">
+            <a:avLst/>
+          </a:prstGeom>
+          <a:noFill/>
+          <a:ln w="0">
+            <a:noFill/>
+          </a:ln>
+        </p:spPr>
+        <p:txBody>
+          <a:bodyPr lIns="90000" rIns="90000" tIns="45000" bIns="45000" anchor="ctr">
+            <a:noAutofit/>
+          </a:bodyPr>
+          <a:lstStyle>
+            <a:lvl1pPr indent="0" algn="ctr">
+              <a:lnSpc>
+                <a:spcPct val="100000"/>
+              </a:lnSpc>
+              <a:buNone/>
+              <a:tabLst>
+                <a:tab algn="l" pos="0"/>
+              </a:tabLst>
+              <a:defRPr b="0" lang="en-US" sz="1400" spc="-1" strike="noStrike">
+                <a:solidFill>
+                  <a:srgbClr val="000000"/>
+                </a:solidFill>
+                <a:latin typeface="Times New Roman"/>
+              </a:defRPr>
+            </a:lvl1pPr>
+          </a:lstStyle>
+          <a:p>
+            <a:pPr indent="0" algn="ctr">
+              <a:lnSpc>
+                <a:spcPct val="100000"/>
+              </a:lnSpc>
+              <a:buNone/>
+              <a:tabLst>
+                <a:tab algn="l" pos="0"/>
+              </a:tabLst>
+            </a:pPr>
+            <a:r>
+              <a:rPr b="0" lang="en-US" sz="1400" spc="-1" strike="noStrike">
+                <a:solidFill>
+                  <a:srgbClr val="000000"/>
+                </a:solidFill>
+                <a:latin typeface="Times New Roman"/>
+              </a:rPr>
+              <a:t>&lt;footer&gt;</a:t>
+            </a:r>
+            <a:endParaRPr b="0" lang="en-US" sz="1400" spc="-1" strike="noStrike">
+              <a:solidFill>
+                <a:srgbClr val="000000"/>
+              </a:solidFill>
+              <a:latin typeface="Times New Roman"/>
+            </a:endParaRPr>
+          </a:p>
+        </p:txBody>
+      </p:sp>
+      <p:sp>
+        <p:nvSpPr>
+          <p:cNvPr id="165" name="PlaceHolder 2"/>
+          <p:cNvSpPr>
+            <a:spLocks noGrp="1"/>
+          </p:cNvSpPr>
+          <p:nvPr>
+            <p:ph type="sldNum" idx="14"/>
+          </p:nvPr>
+        </p:nvSpPr>
+        <p:spPr>
+          <a:xfrm>
+            <a:off x="6553080" y="6356520"/>
+            <a:ext cx="2132640" cy="363960"/>
+          </a:xfrm>
+          <a:prstGeom prst="rect">
+            <a:avLst/>
+          </a:prstGeom>
+          <a:noFill/>
+          <a:ln w="0">
+            <a:noFill/>
+          </a:ln>
+        </p:spPr>
+        <p:txBody>
+          <a:bodyPr lIns="90000" rIns="90000" tIns="45000" bIns="45000" anchor="ctr">
+            <a:noAutofit/>
+          </a:bodyPr>
+          <a:lstStyle>
+            <a:lvl1pPr indent="0" algn="r">
+              <a:lnSpc>
+                <a:spcPct val="100000"/>
+              </a:lnSpc>
+              <a:buNone/>
+              <a:tabLst>
+                <a:tab algn="l" pos="0"/>
+              </a:tabLst>
+              <a:defRPr b="0" lang="en-US" sz="1200" spc="-1" strike="noStrike">
+                <a:solidFill>
+                  <a:srgbClr val="8b8b8b"/>
+                </a:solidFill>
+                <a:latin typeface="Calibri"/>
+              </a:defRPr>
+            </a:lvl1pPr>
+          </a:lstStyle>
+          <a:p>
+            <a:pPr indent="0" algn="r">
+              <a:lnSpc>
+                <a:spcPct val="100000"/>
+              </a:lnSpc>
+              <a:buNone/>
+              <a:tabLst>
+                <a:tab algn="l" pos="0"/>
+              </a:tabLst>
+            </a:pPr>
+            <a:fld id="{70F0B056-61A6-40FD-AFB1-4E5A0E0AA100}" type="slidenum">
+              <a:rPr b="0" lang="en-US" sz="1200" spc="-1" strike="noStrike">
+                <a:solidFill>
+                  <a:srgbClr val="8b8b8b"/>
+                </a:solidFill>
+                <a:latin typeface="Calibri"/>
+              </a:rPr>
+              <a:t>&lt;number&gt;</a:t>
+            </a:fld>
+            <a:endParaRPr b="0" lang="en-US" sz="1200" spc="-1" strike="noStrike">
+              <a:solidFill>
+                <a:srgbClr val="000000"/>
+              </a:solidFill>
+              <a:latin typeface="Times New Roman"/>
+            </a:endParaRPr>
+          </a:p>
+        </p:txBody>
+      </p:sp>
+      <p:sp>
+        <p:nvSpPr>
+          <p:cNvPr id="166" name="PlaceHolder 3"/>
+          <p:cNvSpPr>
+            <a:spLocks noGrp="1"/>
+          </p:cNvSpPr>
+          <p:nvPr>
+            <p:ph type="dt" idx="15"/>
+          </p:nvPr>
+        </p:nvSpPr>
+        <p:spPr>
+          <a:xfrm>
+            <a:off x="457200" y="6356520"/>
+            <a:ext cx="2132640" cy="363960"/>
+          </a:xfrm>
+          <a:prstGeom prst="rect">
+            <a:avLst/>
+          </a:prstGeom>
+          <a:noFill/>
+          <a:ln w="0">
+            <a:noFill/>
+          </a:ln>
+        </p:spPr>
+        <p:txBody>
+          <a:bodyPr lIns="90000" rIns="90000" tIns="45000" bIns="45000" anchor="ctr">
+            <a:noAutofit/>
+          </a:bodyPr>
+          <a:lstStyle>
+            <a:lvl1pPr indent="0">
+              <a:buNone/>
+              <a:defRPr b="0" lang="en-US" sz="1400" spc="-1" strike="noStrike">
+                <a:solidFill>
+                  <a:srgbClr val="000000"/>
+                </a:solidFill>
+                <a:latin typeface="Times New Roman"/>
+              </a:defRPr>
+            </a:lvl1pPr>
+          </a:lstStyle>
+          <a:p>
+            <a:pPr indent="0">
+              <a:buNone/>
+            </a:pPr>
+            <a:r>
+              <a:rPr b="0" lang="en-US" sz="1400" spc="-1" strike="noStrike">
+                <a:solidFill>
+                  <a:srgbClr val="000000"/>
+                </a:solidFill>
+                <a:latin typeface="Times New Roman"/>
+              </a:rPr>
+              <a:t>&lt;date/time&gt;</a:t>
+            </a:r>
+            <a:endParaRPr b="0" lang="en-US" sz="1400" spc="-1" strike="noStrike">
+              <a:solidFill>
+                <a:srgbClr val="000000"/>
+              </a:solidFill>
+              <a:latin typeface="Times New Roman"/>
+            </a:endParaRPr>
+          </a:p>
+        </p:txBody>
+      </p:sp>
+      <p:sp>
+        <p:nvSpPr>
+          <p:cNvPr id="167" name="PlaceHolder 4"/>
+          <p:cNvSpPr>
+            <a:spLocks noGrp="1"/>
+          </p:cNvSpPr>
+          <p:nvPr>
+            <p:ph type="title"/>
+          </p:nvPr>
+        </p:nvSpPr>
+        <p:spPr>
+          <a:xfrm>
+            <a:off x="457200" y="273600"/>
+            <a:ext cx="8229240" cy="1144800"/>
+          </a:xfrm>
+          <a:prstGeom prst="rect">
+            <a:avLst/>
+          </a:prstGeom>
+          <a:noFill/>
+          <a:ln w="0">
+            <a:noFill/>
+          </a:ln>
+        </p:spPr>
+        <p:txBody>
+          <a:bodyPr lIns="0" rIns="0" tIns="0" bIns="0" anchor="ctr">
+            <a:noAutofit/>
+          </a:bodyPr>
+          <a:p>
+            <a:pPr indent="0" algn="ctr">
+              <a:buNone/>
+            </a:pPr>
+            <a:r>
+              <a:rPr b="0" lang="en-US" sz="4400" spc="-1" strike="noStrike">
+                <a:solidFill>
+                  <a:srgbClr val="000000"/>
+                </a:solidFill>
+                <a:latin typeface="Arial"/>
+              </a:rPr>
+              <a:t>Click to edit the title text format</a:t>
+            </a:r>
+            <a:endParaRPr b="0" lang="en-US" sz="4400" spc="-1" strike="noStrike">
+              <a:solidFill>
+                <a:srgbClr val="000000"/>
+              </a:solidFill>
+              <a:latin typeface="Arial"/>
+            </a:endParaRPr>
+          </a:p>
+        </p:txBody>
+      </p:sp>
+      <p:sp>
+        <p:nvSpPr>
+          <p:cNvPr id="168" name="PlaceHolder 5"/>
+          <p:cNvSpPr>
+            <a:spLocks noGrp="1"/>
+          </p:cNvSpPr>
+          <p:nvPr>
+            <p:ph type="body"/>
+          </p:nvPr>
+        </p:nvSpPr>
+        <p:spPr>
+          <a:xfrm>
+            <a:off x="457200" y="1604520"/>
+            <a:ext cx="8229240" cy="3977280"/>
+          </a:xfrm>
+          <a:prstGeom prst="rect">
+            <a:avLst/>
+          </a:prstGeom>
+          <a:noFill/>
+          <a:ln w="0">
+            <a:noFill/>
+          </a:ln>
+        </p:spPr>
+        <p:txBody>
+          <a:bodyPr lIns="0" rIns="0" tIns="0" bIns="0" anchor="t">
+            <a:normAutofit/>
+          </a:bodyPr>
+          <a:p>
+            <a:pPr marL="432000" indent="-324000">
+              <a:spcBef>
+                <a:spcPts val="1417"/>
+              </a:spcBef>
+              <a:buClr>
+                <a:srgbClr val="000000"/>
+              </a:buClr>
+              <a:buSzPct val="45000"/>
+              <a:buFont typeface="Wingdings" charset="2"/>
+              <a:buChar char=""/>
+            </a:pPr>
+            <a:r>
+              <a:rPr b="0" lang="en-US" sz="3200" spc="-1" strike="noStrike">
+                <a:solidFill>
+                  <a:srgbClr val="000000"/>
+                </a:solidFill>
+                <a:latin typeface="Arial"/>
+              </a:rPr>
+              <a:t>Click to edit the outline text format</a:t>
+            </a:r>
+            <a:endParaRPr b="0" lang="en-US" sz="3200" spc="-1" strike="noStrike">
+              <a:solidFill>
+                <a:srgbClr val="000000"/>
+              </a:solidFill>
+              <a:latin typeface="Arial"/>
+            </a:endParaRPr>
+          </a:p>
+          <a:p>
+            <a:pPr lvl="1" marL="864000" indent="-324000">
+              <a:spcBef>
+                <a:spcPts val="1134"/>
+              </a:spcBef>
+              <a:buClr>
+                <a:srgbClr val="000000"/>
+              </a:buClr>
+              <a:buSzPct val="75000"/>
+              <a:buFont typeface="Symbol" charset="2"/>
+              <a:buChar char=""/>
+            </a:pPr>
+            <a:r>
+              <a:rPr b="0" lang="en-US" sz="2800" spc="-1" strike="noStrike">
+                <a:solidFill>
+                  <a:srgbClr val="000000"/>
+                </a:solidFill>
+                <a:latin typeface="Arial"/>
+              </a:rPr>
+              <a:t>Second Outline Level</a:t>
+            </a:r>
+            <a:endParaRPr b="0" lang="en-US" sz="2800" spc="-1" strike="noStrike">
+              <a:solidFill>
+                <a:srgbClr val="000000"/>
+              </a:solidFill>
+              <a:latin typeface="Arial"/>
+            </a:endParaRPr>
+          </a:p>
+          <a:p>
+            <a:pPr lvl="2" marL="1296000" indent="-288000">
+              <a:spcBef>
+                <a:spcPts val="850"/>
+              </a:spcBef>
+              <a:buClr>
+                <a:srgbClr val="000000"/>
+              </a:buClr>
+              <a:buSzPct val="45000"/>
+              <a:buFont typeface="Wingdings" charset="2"/>
+              <a:buChar char=""/>
+            </a:pPr>
+            <a:r>
+              <a:rPr b="0" lang="en-US" sz="2400" spc="-1" strike="noStrike">
+                <a:solidFill>
+                  <a:srgbClr val="000000"/>
+                </a:solidFill>
+                <a:latin typeface="Arial"/>
+              </a:rPr>
+              <a:t>Third Outline Level</a:t>
+            </a:r>
+            <a:endParaRPr b="0" lang="en-US" sz="2400" spc="-1" strike="noStrike">
+              <a:solidFill>
+                <a:srgbClr val="000000"/>
+              </a:solidFill>
+              <a:latin typeface="Arial"/>
+            </a:endParaRPr>
+          </a:p>
+          <a:p>
+            <a:pPr lvl="3" marL="1728000" indent="-216000">
+              <a:spcBef>
+                <a:spcPts val="567"/>
+              </a:spcBef>
+              <a:buClr>
+                <a:srgbClr val="000000"/>
+              </a:buClr>
+              <a:buSzPct val="75000"/>
+              <a:buFont typeface="Symbol" charset="2"/>
+              <a:buChar char=""/>
+            </a:pPr>
+            <a:r>
+              <a:rPr b="0" lang="en-US" sz="2000" spc="-1" strike="noStrike">
+                <a:solidFill>
+                  <a:srgbClr val="000000"/>
+                </a:solidFill>
+                <a:latin typeface="Arial"/>
+              </a:rPr>
+              <a:t>Fourth Outline Level</a:t>
+            </a:r>
+            <a:endParaRPr b="0" lang="en-US" sz="2000" spc="-1" strike="noStrike">
+              <a:solidFill>
+                <a:srgbClr val="000000"/>
+              </a:solidFill>
+              <a:latin typeface="Arial"/>
+            </a:endParaRPr>
+          </a:p>
+          <a:p>
+            <a:pPr lvl="4" marL="2160000" indent="-216000">
+              <a:spcBef>
+                <a:spcPts val="283"/>
+              </a:spcBef>
+              <a:buClr>
+                <a:srgbClr val="000000"/>
+              </a:buClr>
+              <a:buSzPct val="45000"/>
+              <a:buFont typeface="Wingdings" charset="2"/>
+              <a:buChar char=""/>
+            </a:pPr>
+            <a:r>
+              <a:rPr b="0" lang="en-US" sz="2000" spc="-1" strike="noStrike">
+                <a:solidFill>
+                  <a:srgbClr val="000000"/>
+                </a:solidFill>
+                <a:latin typeface="Arial"/>
+              </a:rPr>
+              <a:t>Fifth Outline Level</a:t>
+            </a:r>
+            <a:endParaRPr b="0" lang="en-US" sz="2000" spc="-1" strike="noStrike">
+              <a:solidFill>
+                <a:srgbClr val="000000"/>
+              </a:solidFill>
+              <a:latin typeface="Arial"/>
+            </a:endParaRPr>
+          </a:p>
+          <a:p>
+            <a:pPr lvl="5" marL="2592000" indent="-216000">
+              <a:spcBef>
+                <a:spcPts val="283"/>
+              </a:spcBef>
+              <a:buClr>
+                <a:srgbClr val="000000"/>
+              </a:buClr>
+              <a:buSzPct val="45000"/>
+              <a:buFont typeface="Wingdings" charset="2"/>
+              <a:buChar char=""/>
+            </a:pPr>
+            <a:r>
+              <a:rPr b="0" lang="en-US" sz="2000" spc="-1" strike="noStrike">
+                <a:solidFill>
+                  <a:srgbClr val="000000"/>
+                </a:solidFill>
+                <a:latin typeface="Arial"/>
+              </a:rPr>
+              <a:t>Sixth Outline Level</a:t>
+            </a:r>
+            <a:endParaRPr b="0" lang="en-US" sz="2000" spc="-1" strike="noStrike">
+              <a:solidFill>
+                <a:srgbClr val="000000"/>
+              </a:solidFill>
+              <a:latin typeface="Arial"/>
+            </a:endParaRPr>
+          </a:p>
+          <a:p>
+            <a:pPr lvl="6" marL="3024000" indent="-216000">
+              <a:spcBef>
+                <a:spcPts val="283"/>
+              </a:spcBef>
+              <a:buClr>
+                <a:srgbClr val="000000"/>
+              </a:buClr>
+              <a:buSzPct val="45000"/>
+              <a:buFont typeface="Wingdings" charset="2"/>
+              <a:buChar char=""/>
+            </a:pPr>
+            <a:r>
+              <a:rPr b="0" lang="en-US" sz="2000" spc="-1" strike="noStrike">
+                <a:solidFill>
+                  <a:srgbClr val="000000"/>
+                </a:solidFill>
+                <a:latin typeface="Arial"/>
+              </a:rPr>
+              <a:t>Seventh Outline Level</a:t>
+            </a:r>
+            <a:endParaRPr b="0" lang="en-US" sz="2000" spc="-1" strike="noStrike">
+              <a:solidFill>
+                <a:srgbClr val="000000"/>
+              </a:solidFill>
+              <a:latin typeface="Arial"/>
+            </a:endParaRPr>
+          </a:p>
+        </p:txBody>
+      </p:sp>
+    </p:spTree>
+  </p:cSld>
+  <p:clrMap bg1="lt1" bg2="lt2" tx1="dk1" tx2="dk2" accent1="accent1" accent2="accent2" accent3="accent3" accent4="accent4" accent5="accent5" accent6="accent6" hlink="hlink" folHlink="folHlink"/>
+  <p:sldLayoutIdLst>
+    <p:sldLayoutId id="2147483701" r:id="rId2"/>
+    <p:sldLayoutId id="2147483702" r:id="rId3"/>
+    <p:sldLayoutId id="2147483703" r:id="rId4"/>
+    <p:sldLayoutId id="2147483704" r:id="rId5"/>
+    <p:sldLayoutId id="2147483705" r:id="rId6"/>
+    <p:sldLayoutId id="2147483706" r:id="rId7"/>
+    <p:sldLayoutId id="2147483707" r:id="rId8"/>
+    <p:sldLayoutId id="2147483708" r:id="rId9"/>
+    <p:sldLayoutId id="2147483709" r:id="rId10"/>
+    <p:sldLayoutId id="2147483710" r:id="rId11"/>
+    <p:sldLayoutId id="2147483711" r:id="rId12"/>
+    <p:sldLayoutId id="2147483712" r:id="rId13"/>
   </p:sldLayoutIdLst>
 </p:sldMaster>
 </file>
@@ -12152,14 +15182,14 @@
       </p:grpSpPr>
       <p:sp>
         <p:nvSpPr>
-          <p:cNvPr id="164" name="Rectangle 1"/>
+          <p:cNvPr id="205" name="Rectangle 1"/>
           <p:cNvSpPr/>
           <p:nvPr/>
         </p:nvSpPr>
         <p:spPr>
           <a:xfrm>
             <a:off x="0" y="0"/>
-            <a:ext cx="12186720" cy="6855840"/>
+            <a:ext cx="12186360" cy="6855480"/>
           </a:xfrm>
           <a:prstGeom prst="rect">
             <a:avLst/>
@@ -12212,14 +15242,14 @@
       </p:sp>
       <p:sp>
         <p:nvSpPr>
-          <p:cNvPr id="165" name="Rectangle 2"/>
+          <p:cNvPr id="206" name="Rectangle 2"/>
           <p:cNvSpPr/>
           <p:nvPr/>
         </p:nvSpPr>
         <p:spPr>
           <a:xfrm>
             <a:off x="0" y="0"/>
-            <a:ext cx="16200" cy="6855840"/>
+            <a:ext cx="15840" cy="6855480"/>
           </a:xfrm>
           <a:prstGeom prst="rect">
             <a:avLst/>
@@ -12272,14 +15302,14 @@
       </p:sp>
       <p:sp>
         <p:nvSpPr>
-          <p:cNvPr id="166" name="Rectangle 3"/>
+          <p:cNvPr id="207" name="Rectangle 3"/>
           <p:cNvSpPr/>
           <p:nvPr/>
         </p:nvSpPr>
         <p:spPr>
           <a:xfrm>
             <a:off x="914400" y="0"/>
-            <a:ext cx="16200" cy="6855840"/>
+            <a:ext cx="15840" cy="6855480"/>
           </a:xfrm>
           <a:prstGeom prst="rect">
             <a:avLst/>
@@ -12332,14 +15362,14 @@
       </p:sp>
       <p:sp>
         <p:nvSpPr>
-          <p:cNvPr id="167" name="Rectangle 4"/>
+          <p:cNvPr id="208" name="Rectangle 4"/>
           <p:cNvSpPr/>
           <p:nvPr/>
         </p:nvSpPr>
         <p:spPr>
           <a:xfrm>
             <a:off x="1828800" y="0"/>
-            <a:ext cx="16200" cy="6855840"/>
+            <a:ext cx="15840" cy="6855480"/>
           </a:xfrm>
           <a:prstGeom prst="rect">
             <a:avLst/>
@@ -12392,14 +15422,14 @@
       </p:sp>
       <p:sp>
         <p:nvSpPr>
-          <p:cNvPr id="168" name="Rectangle 5"/>
+          <p:cNvPr id="209" name="Rectangle 5"/>
           <p:cNvSpPr/>
           <p:nvPr/>
         </p:nvSpPr>
         <p:spPr>
           <a:xfrm>
             <a:off x="2743200" y="0"/>
-            <a:ext cx="16200" cy="6855840"/>
+            <a:ext cx="15840" cy="6855480"/>
           </a:xfrm>
           <a:prstGeom prst="rect">
             <a:avLst/>
@@ -12452,14 +15482,14 @@
       </p:sp>
       <p:sp>
         <p:nvSpPr>
-          <p:cNvPr id="169" name="Rectangle 6"/>
+          <p:cNvPr id="210" name="Rectangle 6"/>
           <p:cNvSpPr/>
           <p:nvPr/>
         </p:nvSpPr>
         <p:spPr>
           <a:xfrm>
             <a:off x="3657600" y="0"/>
-            <a:ext cx="16200" cy="6855840"/>
+            <a:ext cx="15840" cy="6855480"/>
           </a:xfrm>
           <a:prstGeom prst="rect">
             <a:avLst/>
@@ -12512,14 +15542,14 @@
       </p:sp>
       <p:sp>
         <p:nvSpPr>
-          <p:cNvPr id="170" name="Rectangle 7"/>
+          <p:cNvPr id="211" name="Rectangle 7"/>
           <p:cNvSpPr/>
           <p:nvPr/>
         </p:nvSpPr>
         <p:spPr>
           <a:xfrm>
             <a:off x="4572000" y="0"/>
-            <a:ext cx="16200" cy="6855840"/>
+            <a:ext cx="15840" cy="6855480"/>
           </a:xfrm>
           <a:prstGeom prst="rect">
             <a:avLst/>
@@ -12572,14 +15602,14 @@
       </p:sp>
       <p:sp>
         <p:nvSpPr>
-          <p:cNvPr id="171" name="Rectangle 8"/>
+          <p:cNvPr id="212" name="Rectangle 8"/>
           <p:cNvSpPr/>
           <p:nvPr/>
         </p:nvSpPr>
         <p:spPr>
           <a:xfrm>
             <a:off x="5486400" y="0"/>
-            <a:ext cx="16200" cy="6855840"/>
+            <a:ext cx="15840" cy="6855480"/>
           </a:xfrm>
           <a:prstGeom prst="rect">
             <a:avLst/>
@@ -12632,14 +15662,14 @@
       </p:sp>
       <p:sp>
         <p:nvSpPr>
-          <p:cNvPr id="172" name="Rectangle 9"/>
+          <p:cNvPr id="213" name="Rectangle 9"/>
           <p:cNvSpPr/>
           <p:nvPr/>
         </p:nvSpPr>
         <p:spPr>
           <a:xfrm>
             <a:off x="6400800" y="0"/>
-            <a:ext cx="16200" cy="6855840"/>
+            <a:ext cx="15840" cy="6855480"/>
           </a:xfrm>
           <a:prstGeom prst="rect">
             <a:avLst/>
@@ -12692,14 +15722,14 @@
       </p:sp>
       <p:sp>
         <p:nvSpPr>
-          <p:cNvPr id="173" name="Rectangle 10"/>
+          <p:cNvPr id="214" name="Rectangle 10"/>
           <p:cNvSpPr/>
           <p:nvPr/>
         </p:nvSpPr>
         <p:spPr>
           <a:xfrm>
             <a:off x="7315200" y="0"/>
-            <a:ext cx="16200" cy="6855840"/>
+            <a:ext cx="15840" cy="6855480"/>
           </a:xfrm>
           <a:prstGeom prst="rect">
             <a:avLst/>
@@ -12752,14 +15782,14 @@
       </p:sp>
       <p:sp>
         <p:nvSpPr>
-          <p:cNvPr id="174" name="Rectangle 11"/>
+          <p:cNvPr id="215" name="Rectangle 11"/>
           <p:cNvSpPr/>
           <p:nvPr/>
         </p:nvSpPr>
         <p:spPr>
           <a:xfrm>
             <a:off x="8229600" y="0"/>
-            <a:ext cx="16200" cy="6855840"/>
+            <a:ext cx="15840" cy="6855480"/>
           </a:xfrm>
           <a:prstGeom prst="rect">
             <a:avLst/>
@@ -12812,14 +15842,14 @@
       </p:sp>
       <p:sp>
         <p:nvSpPr>
-          <p:cNvPr id="175" name="Rectangle 12"/>
+          <p:cNvPr id="216" name="Rectangle 12"/>
           <p:cNvSpPr/>
           <p:nvPr/>
         </p:nvSpPr>
         <p:spPr>
           <a:xfrm>
             <a:off x="9144000" y="0"/>
-            <a:ext cx="16200" cy="6855840"/>
+            <a:ext cx="15840" cy="6855480"/>
           </a:xfrm>
           <a:prstGeom prst="rect">
             <a:avLst/>
@@ -12872,14 +15902,14 @@
       </p:sp>
       <p:sp>
         <p:nvSpPr>
-          <p:cNvPr id="176" name="Rectangle 13"/>
+          <p:cNvPr id="217" name="Rectangle 13"/>
           <p:cNvSpPr/>
           <p:nvPr/>
         </p:nvSpPr>
         <p:spPr>
           <a:xfrm>
             <a:off x="10058400" y="0"/>
-            <a:ext cx="16200" cy="6855840"/>
+            <a:ext cx="15840" cy="6855480"/>
           </a:xfrm>
           <a:prstGeom prst="rect">
             <a:avLst/>
@@ -12932,14 +15962,14 @@
       </p:sp>
       <p:sp>
         <p:nvSpPr>
-          <p:cNvPr id="177" name="Rectangle 14"/>
+          <p:cNvPr id="218" name="Rectangle 14"/>
           <p:cNvSpPr/>
           <p:nvPr/>
         </p:nvSpPr>
         <p:spPr>
           <a:xfrm>
             <a:off x="10972800" y="0"/>
-            <a:ext cx="16200" cy="6855840"/>
+            <a:ext cx="15840" cy="6855480"/>
           </a:xfrm>
           <a:prstGeom prst="rect">
             <a:avLst/>
@@ -12992,14 +16022,14 @@
       </p:sp>
       <p:sp>
         <p:nvSpPr>
-          <p:cNvPr id="178" name="Rectangle 15"/>
+          <p:cNvPr id="219" name="Rectangle 15"/>
           <p:cNvSpPr/>
           <p:nvPr/>
         </p:nvSpPr>
         <p:spPr>
           <a:xfrm>
             <a:off x="11887200" y="0"/>
-            <a:ext cx="16200" cy="6855840"/>
+            <a:ext cx="15840" cy="6855480"/>
           </a:xfrm>
           <a:prstGeom prst="rect">
             <a:avLst/>
@@ -13052,14 +16082,14 @@
       </p:sp>
       <p:sp>
         <p:nvSpPr>
-          <p:cNvPr id="179" name="Rectangle 16"/>
+          <p:cNvPr id="220" name="Rectangle 16"/>
           <p:cNvSpPr/>
           <p:nvPr/>
         </p:nvSpPr>
         <p:spPr>
           <a:xfrm>
             <a:off x="0" y="0"/>
-            <a:ext cx="317880" cy="6855840"/>
+            <a:ext cx="317520" cy="6855480"/>
           </a:xfrm>
           <a:prstGeom prst="rect">
             <a:avLst/>
@@ -13112,14 +16142,14 @@
       </p:sp>
       <p:sp>
         <p:nvSpPr>
-          <p:cNvPr id="180" name="Rounded Rectangle 17"/>
+          <p:cNvPr id="221" name="Rounded Rectangle 17"/>
           <p:cNvSpPr/>
           <p:nvPr/>
         </p:nvSpPr>
         <p:spPr>
           <a:xfrm>
             <a:off x="9875520" y="365760"/>
-            <a:ext cx="2009520" cy="500760"/>
+            <a:ext cx="2009160" cy="500400"/>
           </a:xfrm>
           <a:prstGeom prst="roundRect">
             <a:avLst>
@@ -13186,7 +16216,7 @@
       </p:sp>
       <p:sp>
         <p:nvSpPr>
-          <p:cNvPr id="181" name="TextBox 18"/>
+          <p:cNvPr id="222" name="TextBox 18"/>
           <p:cNvSpPr/>
           <p:nvPr/>
         </p:nvSpPr>
@@ -13240,7 +16270,7 @@
       </p:sp>
       <p:sp>
         <p:nvSpPr>
-          <p:cNvPr id="182" name="TextBox 19"/>
+          <p:cNvPr id="223" name="TextBox 19"/>
           <p:cNvSpPr/>
           <p:nvPr/>
         </p:nvSpPr>
@@ -13317,14 +16347,14 @@
       </p:sp>
       <p:sp>
         <p:nvSpPr>
-          <p:cNvPr id="183" name="Rounded Rectangle 20"/>
+          <p:cNvPr id="224" name="Rounded Rectangle 20"/>
           <p:cNvSpPr/>
           <p:nvPr/>
         </p:nvSpPr>
         <p:spPr>
           <a:xfrm>
             <a:off x="987480" y="3182040"/>
-            <a:ext cx="3289680" cy="2741040"/>
+            <a:ext cx="3289320" cy="2740680"/>
           </a:xfrm>
           <a:prstGeom prst="roundRect">
             <a:avLst>
@@ -13379,14 +16409,14 @@
       </p:sp>
       <p:sp>
         <p:nvSpPr>
-          <p:cNvPr id="184" name="Rounded Rectangle 21"/>
+          <p:cNvPr id="225" name="Rounded Rectangle 21"/>
           <p:cNvSpPr/>
           <p:nvPr/>
         </p:nvSpPr>
         <p:spPr>
           <a:xfrm>
             <a:off x="914400" y="3108960"/>
-            <a:ext cx="3289680" cy="3290760"/>
+            <a:ext cx="3289320" cy="3290400"/>
           </a:xfrm>
           <a:prstGeom prst="roundRect">
             <a:avLst>
@@ -13712,14 +16742,14 @@
       </p:sp>
       <p:sp>
         <p:nvSpPr>
-          <p:cNvPr id="185" name="Rounded Rectangle 22"/>
+          <p:cNvPr id="226" name="Rounded Rectangle 22"/>
           <p:cNvSpPr/>
           <p:nvPr/>
         </p:nvSpPr>
         <p:spPr>
           <a:xfrm>
             <a:off x="4507920" y="3182040"/>
-            <a:ext cx="3289680" cy="2741040"/>
+            <a:ext cx="3289320" cy="2740680"/>
           </a:xfrm>
           <a:prstGeom prst="roundRect">
             <a:avLst>
@@ -13774,14 +16804,14 @@
       </p:sp>
       <p:sp>
         <p:nvSpPr>
-          <p:cNvPr id="186" name="Rounded Rectangle 23"/>
+          <p:cNvPr id="227" name="Rounded Rectangle 23"/>
           <p:cNvSpPr/>
           <p:nvPr/>
         </p:nvSpPr>
         <p:spPr>
           <a:xfrm>
             <a:off x="4434840" y="3108960"/>
-            <a:ext cx="3289680" cy="2741040"/>
+            <a:ext cx="3289320" cy="2740680"/>
           </a:xfrm>
           <a:prstGeom prst="roundRect">
             <a:avLst>
@@ -14032,14 +17062,14 @@
       </p:sp>
       <p:sp>
         <p:nvSpPr>
-          <p:cNvPr id="187" name="Rounded Rectangle 24"/>
+          <p:cNvPr id="228" name="Rounded Rectangle 24"/>
           <p:cNvSpPr/>
           <p:nvPr/>
         </p:nvSpPr>
         <p:spPr>
           <a:xfrm>
             <a:off x="8028360" y="3182040"/>
-            <a:ext cx="3289680" cy="2741040"/>
+            <a:ext cx="3289320" cy="2740680"/>
           </a:xfrm>
           <a:prstGeom prst="roundRect">
             <a:avLst>
@@ -14094,14 +17124,14 @@
       </p:sp>
       <p:sp>
         <p:nvSpPr>
-          <p:cNvPr id="188" name="Rounded Rectangle 25"/>
+          <p:cNvPr id="229" name="Rounded Rectangle 25"/>
           <p:cNvSpPr/>
           <p:nvPr/>
         </p:nvSpPr>
         <p:spPr>
           <a:xfrm>
             <a:off x="7955280" y="3108960"/>
-            <a:ext cx="3473640" cy="3290760"/>
+            <a:ext cx="3473280" cy="3290400"/>
           </a:xfrm>
           <a:prstGeom prst="roundRect">
             <a:avLst>
@@ -14454,7 +17484,7 @@
       </p:sp>
       <p:sp>
         <p:nvSpPr>
-          <p:cNvPr id="189" name="TextBox 26"/>
+          <p:cNvPr id="230" name="TextBox 26"/>
           <p:cNvSpPr/>
           <p:nvPr/>
         </p:nvSpPr>
@@ -14538,14 +17568,14 @@
       </p:grpSpPr>
       <p:sp>
         <p:nvSpPr>
-          <p:cNvPr id="190" name="Rectangle 32"/>
+          <p:cNvPr id="231" name="Rectangle 32"/>
           <p:cNvSpPr/>
           <p:nvPr/>
         </p:nvSpPr>
         <p:spPr>
           <a:xfrm>
             <a:off x="0" y="0"/>
-            <a:ext cx="12186720" cy="6855840"/>
+            <a:ext cx="12186360" cy="6855480"/>
           </a:xfrm>
           <a:prstGeom prst="rect">
             <a:avLst/>
@@ -14598,14 +17628,14 @@
       </p:sp>
       <p:sp>
         <p:nvSpPr>
-          <p:cNvPr id="191" name="Rectangle 33"/>
+          <p:cNvPr id="232" name="Rectangle 33"/>
           <p:cNvSpPr/>
           <p:nvPr/>
         </p:nvSpPr>
         <p:spPr>
           <a:xfrm>
             <a:off x="0" y="0"/>
-            <a:ext cx="16200" cy="6855840"/>
+            <a:ext cx="15840" cy="6855480"/>
           </a:xfrm>
           <a:prstGeom prst="rect">
             <a:avLst/>
@@ -14658,14 +17688,14 @@
       </p:sp>
       <p:sp>
         <p:nvSpPr>
-          <p:cNvPr id="192" name="Rectangle 34"/>
+          <p:cNvPr id="233" name="Rectangle 34"/>
           <p:cNvSpPr/>
           <p:nvPr/>
         </p:nvSpPr>
         <p:spPr>
           <a:xfrm>
             <a:off x="914400" y="0"/>
-            <a:ext cx="16200" cy="6855840"/>
+            <a:ext cx="15840" cy="6855480"/>
           </a:xfrm>
           <a:prstGeom prst="rect">
             <a:avLst/>
@@ -14718,14 +17748,14 @@
       </p:sp>
       <p:sp>
         <p:nvSpPr>
-          <p:cNvPr id="193" name="Rectangle 35"/>
+          <p:cNvPr id="234" name="Rectangle 35"/>
           <p:cNvSpPr/>
           <p:nvPr/>
         </p:nvSpPr>
         <p:spPr>
           <a:xfrm>
             <a:off x="1828800" y="0"/>
-            <a:ext cx="16200" cy="6855840"/>
+            <a:ext cx="15840" cy="6855480"/>
           </a:xfrm>
           <a:prstGeom prst="rect">
             <a:avLst/>
@@ -14778,14 +17808,14 @@
       </p:sp>
       <p:sp>
         <p:nvSpPr>
-          <p:cNvPr id="194" name="Rectangle 36"/>
+          <p:cNvPr id="235" name="Rectangle 36"/>
           <p:cNvSpPr/>
           <p:nvPr/>
         </p:nvSpPr>
         <p:spPr>
           <a:xfrm>
             <a:off x="2743200" y="0"/>
-            <a:ext cx="16200" cy="6855840"/>
+            <a:ext cx="15840" cy="6855480"/>
           </a:xfrm>
           <a:prstGeom prst="rect">
             <a:avLst/>
@@ -14838,14 +17868,14 @@
       </p:sp>
       <p:sp>
         <p:nvSpPr>
-          <p:cNvPr id="195" name="Rectangle 37"/>
+          <p:cNvPr id="236" name="Rectangle 37"/>
           <p:cNvSpPr/>
           <p:nvPr/>
         </p:nvSpPr>
         <p:spPr>
           <a:xfrm>
             <a:off x="3657600" y="0"/>
-            <a:ext cx="16200" cy="6855840"/>
+            <a:ext cx="15840" cy="6855480"/>
           </a:xfrm>
           <a:prstGeom prst="rect">
             <a:avLst/>
@@ -14898,14 +17928,14 @@
       </p:sp>
       <p:sp>
         <p:nvSpPr>
-          <p:cNvPr id="196" name="Rectangle 38"/>
+          <p:cNvPr id="237" name="Rectangle 38"/>
           <p:cNvSpPr/>
           <p:nvPr/>
         </p:nvSpPr>
         <p:spPr>
           <a:xfrm>
             <a:off x="4572000" y="0"/>
-            <a:ext cx="16200" cy="6855840"/>
+            <a:ext cx="15840" cy="6855480"/>
           </a:xfrm>
           <a:prstGeom prst="rect">
             <a:avLst/>
@@ -14958,14 +17988,14 @@
       </p:sp>
       <p:sp>
         <p:nvSpPr>
-          <p:cNvPr id="197" name="Rectangle 39"/>
+          <p:cNvPr id="238" name="Rectangle 39"/>
           <p:cNvSpPr/>
           <p:nvPr/>
         </p:nvSpPr>
         <p:spPr>
           <a:xfrm>
             <a:off x="5486400" y="0"/>
-            <a:ext cx="16200" cy="6855840"/>
+            <a:ext cx="15840" cy="6855480"/>
           </a:xfrm>
           <a:prstGeom prst="rect">
             <a:avLst/>
@@ -15018,14 +18048,14 @@
       </p:sp>
       <p:sp>
         <p:nvSpPr>
-          <p:cNvPr id="198" name="Rectangle 40"/>
+          <p:cNvPr id="239" name="Rectangle 40"/>
           <p:cNvSpPr/>
           <p:nvPr/>
         </p:nvSpPr>
         <p:spPr>
           <a:xfrm>
             <a:off x="6400800" y="0"/>
-            <a:ext cx="16200" cy="6855840"/>
+            <a:ext cx="15840" cy="6855480"/>
           </a:xfrm>
           <a:prstGeom prst="rect">
             <a:avLst/>
@@ -15078,14 +18108,14 @@
       </p:sp>
       <p:sp>
         <p:nvSpPr>
-          <p:cNvPr id="199" name="Rectangle 41"/>
+          <p:cNvPr id="240" name="Rectangle 41"/>
           <p:cNvSpPr/>
           <p:nvPr/>
         </p:nvSpPr>
         <p:spPr>
           <a:xfrm>
             <a:off x="7315200" y="0"/>
-            <a:ext cx="16200" cy="6855840"/>
+            <a:ext cx="15840" cy="6855480"/>
           </a:xfrm>
           <a:prstGeom prst="rect">
             <a:avLst/>
@@ -15138,14 +18168,14 @@
       </p:sp>
       <p:sp>
         <p:nvSpPr>
-          <p:cNvPr id="200" name="Rectangle 42"/>
+          <p:cNvPr id="241" name="Rectangle 42"/>
           <p:cNvSpPr/>
           <p:nvPr/>
         </p:nvSpPr>
         <p:spPr>
           <a:xfrm>
             <a:off x="8229600" y="0"/>
-            <a:ext cx="16200" cy="6855840"/>
+            <a:ext cx="15840" cy="6855480"/>
           </a:xfrm>
           <a:prstGeom prst="rect">
             <a:avLst/>
@@ -15198,14 +18228,14 @@
       </p:sp>
       <p:sp>
         <p:nvSpPr>
-          <p:cNvPr id="201" name="Rectangle 43"/>
+          <p:cNvPr id="242" name="Rectangle 43"/>
           <p:cNvSpPr/>
           <p:nvPr/>
         </p:nvSpPr>
         <p:spPr>
           <a:xfrm>
             <a:off x="9144000" y="0"/>
-            <a:ext cx="16200" cy="6855840"/>
+            <a:ext cx="15840" cy="6855480"/>
           </a:xfrm>
           <a:prstGeom prst="rect">
             <a:avLst/>
@@ -15258,14 +18288,14 @@
       </p:sp>
       <p:sp>
         <p:nvSpPr>
-          <p:cNvPr id="202" name="Rectangle 44"/>
+          <p:cNvPr id="243" name="Rectangle 44"/>
           <p:cNvSpPr/>
           <p:nvPr/>
         </p:nvSpPr>
         <p:spPr>
           <a:xfrm>
             <a:off x="10058400" y="0"/>
-            <a:ext cx="16200" cy="6855840"/>
+            <a:ext cx="15840" cy="6855480"/>
           </a:xfrm>
           <a:prstGeom prst="rect">
             <a:avLst/>
@@ -15318,14 +18348,14 @@
       </p:sp>
       <p:sp>
         <p:nvSpPr>
-          <p:cNvPr id="203" name="Rectangle 45"/>
+          <p:cNvPr id="244" name="Rectangle 45"/>
           <p:cNvSpPr/>
           <p:nvPr/>
         </p:nvSpPr>
         <p:spPr>
           <a:xfrm>
             <a:off x="10972800" y="0"/>
-            <a:ext cx="16200" cy="6855840"/>
+            <a:ext cx="15840" cy="6855480"/>
           </a:xfrm>
           <a:prstGeom prst="rect">
             <a:avLst/>
@@ -15378,14 +18408,14 @@
       </p:sp>
       <p:sp>
         <p:nvSpPr>
-          <p:cNvPr id="204" name="Rectangle 46"/>
+          <p:cNvPr id="245" name="Rectangle 46"/>
           <p:cNvSpPr/>
           <p:nvPr/>
         </p:nvSpPr>
         <p:spPr>
           <a:xfrm>
             <a:off x="11887200" y="0"/>
-            <a:ext cx="16200" cy="6855840"/>
+            <a:ext cx="15840" cy="6855480"/>
           </a:xfrm>
           <a:prstGeom prst="rect">
             <a:avLst/>
@@ -15438,14 +18468,14 @@
       </p:sp>
       <p:sp>
         <p:nvSpPr>
-          <p:cNvPr id="205" name="Rectangle 47"/>
+          <p:cNvPr id="246" name="Rectangle 47"/>
           <p:cNvSpPr/>
           <p:nvPr/>
         </p:nvSpPr>
         <p:spPr>
           <a:xfrm>
             <a:off x="0" y="0"/>
-            <a:ext cx="317880" cy="6855840"/>
+            <a:ext cx="317520" cy="6855480"/>
           </a:xfrm>
           <a:prstGeom prst="rect">
             <a:avLst/>
@@ -15498,14 +18528,14 @@
       </p:sp>
       <p:sp>
         <p:nvSpPr>
-          <p:cNvPr id="206" name="Rounded Rectangle 8"/>
+          <p:cNvPr id="247" name="Rounded Rectangle 8"/>
           <p:cNvSpPr/>
           <p:nvPr/>
         </p:nvSpPr>
         <p:spPr>
           <a:xfrm>
             <a:off x="9875520" y="365760"/>
-            <a:ext cx="2009520" cy="500760"/>
+            <a:ext cx="2009160" cy="500400"/>
           </a:xfrm>
           <a:prstGeom prst="roundRect">
             <a:avLst>
@@ -15572,7 +18602,7 @@
       </p:sp>
       <p:sp>
         <p:nvSpPr>
-          <p:cNvPr id="207" name="TextBox 4"/>
+          <p:cNvPr id="248" name="TextBox 4"/>
           <p:cNvSpPr/>
           <p:nvPr/>
         </p:nvSpPr>
@@ -15626,7 +18656,7 @@
       </p:sp>
       <p:sp>
         <p:nvSpPr>
-          <p:cNvPr id="208" name="TextBox 5"/>
+          <p:cNvPr id="249" name="TextBox 5"/>
           <p:cNvSpPr/>
           <p:nvPr/>
         </p:nvSpPr>
@@ -15680,14 +18710,14 @@
       </p:sp>
       <p:sp>
         <p:nvSpPr>
-          <p:cNvPr id="209" name="Rounded Rectangle 9"/>
+          <p:cNvPr id="250" name="Rounded Rectangle 9"/>
           <p:cNvSpPr/>
           <p:nvPr/>
         </p:nvSpPr>
         <p:spPr>
           <a:xfrm>
             <a:off x="987480" y="3182040"/>
-            <a:ext cx="3289680" cy="2741040"/>
+            <a:ext cx="3289320" cy="2740680"/>
           </a:xfrm>
           <a:prstGeom prst="roundRect">
             <a:avLst>
@@ -15742,14 +18772,14 @@
       </p:sp>
       <p:sp>
         <p:nvSpPr>
-          <p:cNvPr id="210" name="Rounded Rectangle 10"/>
+          <p:cNvPr id="251" name="Rounded Rectangle 10"/>
           <p:cNvSpPr/>
           <p:nvPr/>
         </p:nvSpPr>
         <p:spPr>
           <a:xfrm>
             <a:off x="931680" y="2925720"/>
-            <a:ext cx="3182040" cy="3474000"/>
+            <a:ext cx="3181680" cy="3473640"/>
           </a:xfrm>
           <a:prstGeom prst="roundRect">
             <a:avLst>
@@ -15957,14 +18987,14 @@
       </p:sp>
       <p:sp>
         <p:nvSpPr>
-          <p:cNvPr id="211" name="Rounded Rectangle 11"/>
+          <p:cNvPr id="252" name="Rounded Rectangle 11"/>
           <p:cNvSpPr/>
           <p:nvPr/>
         </p:nvSpPr>
         <p:spPr>
           <a:xfrm>
             <a:off x="4507920" y="3182040"/>
-            <a:ext cx="3289680" cy="2741040"/>
+            <a:ext cx="3289320" cy="2740680"/>
           </a:xfrm>
           <a:prstGeom prst="roundRect">
             <a:avLst>
@@ -16019,14 +19049,14 @@
       </p:sp>
       <p:sp>
         <p:nvSpPr>
-          <p:cNvPr id="212" name="Rounded Rectangle 12"/>
+          <p:cNvPr id="253" name="Rounded Rectangle 12"/>
           <p:cNvSpPr/>
           <p:nvPr/>
         </p:nvSpPr>
         <p:spPr>
           <a:xfrm>
             <a:off x="4434840" y="3108960"/>
-            <a:ext cx="3289680" cy="3062160"/>
+            <a:ext cx="3289320" cy="3061800"/>
           </a:xfrm>
           <a:prstGeom prst="roundRect">
             <a:avLst>
@@ -16317,14 +19347,14 @@
       </p:sp>
       <p:sp>
         <p:nvSpPr>
-          <p:cNvPr id="213" name="Rounded Rectangle 13"/>
+          <p:cNvPr id="254" name="Rounded Rectangle 13"/>
           <p:cNvSpPr/>
           <p:nvPr/>
         </p:nvSpPr>
         <p:spPr>
           <a:xfrm>
             <a:off x="8028360" y="3182040"/>
-            <a:ext cx="3289680" cy="2741040"/>
+            <a:ext cx="3289320" cy="2740680"/>
           </a:xfrm>
           <a:prstGeom prst="roundRect">
             <a:avLst>
@@ -16379,14 +19409,14 @@
       </p:sp>
       <p:sp>
         <p:nvSpPr>
-          <p:cNvPr id="214" name="Rounded Rectangle 14"/>
+          <p:cNvPr id="255" name="Rounded Rectangle 14"/>
           <p:cNvSpPr/>
           <p:nvPr/>
         </p:nvSpPr>
         <p:spPr>
           <a:xfrm>
             <a:off x="7955280" y="3108960"/>
-            <a:ext cx="3473640" cy="3290760"/>
+            <a:ext cx="3473280" cy="3290400"/>
           </a:xfrm>
           <a:prstGeom prst="roundRect">
             <a:avLst>
@@ -16726,7 +19756,7 @@
       </p:sp>
       <p:sp>
         <p:nvSpPr>
-          <p:cNvPr id="215" name="TextBox 6"/>
+          <p:cNvPr id="256" name="TextBox 6"/>
           <p:cNvSpPr/>
           <p:nvPr/>
         </p:nvSpPr>
@@ -16810,14 +19840,14 @@
       </p:grpSpPr>
       <p:sp>
         <p:nvSpPr>
-          <p:cNvPr id="216" name="Rectangle 48"/>
+          <p:cNvPr id="257" name="Rectangle 48"/>
           <p:cNvSpPr/>
           <p:nvPr/>
         </p:nvSpPr>
         <p:spPr>
           <a:xfrm>
             <a:off x="0" y="0"/>
-            <a:ext cx="12186720" cy="6855840"/>
+            <a:ext cx="12186360" cy="6855480"/>
           </a:xfrm>
           <a:prstGeom prst="rect">
             <a:avLst/>
@@ -16870,14 +19900,14 @@
       </p:sp>
       <p:sp>
         <p:nvSpPr>
-          <p:cNvPr id="217" name="Rectangle 49"/>
+          <p:cNvPr id="258" name="Rectangle 49"/>
           <p:cNvSpPr/>
           <p:nvPr/>
         </p:nvSpPr>
         <p:spPr>
           <a:xfrm>
             <a:off x="0" y="0"/>
-            <a:ext cx="16200" cy="6855840"/>
+            <a:ext cx="15840" cy="6855480"/>
           </a:xfrm>
           <a:prstGeom prst="rect">
             <a:avLst/>
@@ -16930,14 +19960,14 @@
       </p:sp>
       <p:sp>
         <p:nvSpPr>
-          <p:cNvPr id="218" name="Rectangle 50"/>
+          <p:cNvPr id="259" name="Rectangle 50"/>
           <p:cNvSpPr/>
           <p:nvPr/>
         </p:nvSpPr>
         <p:spPr>
           <a:xfrm>
             <a:off x="914400" y="0"/>
-            <a:ext cx="16200" cy="6855840"/>
+            <a:ext cx="15840" cy="6855480"/>
           </a:xfrm>
           <a:prstGeom prst="rect">
             <a:avLst/>
@@ -16990,14 +20020,14 @@
       </p:sp>
       <p:sp>
         <p:nvSpPr>
-          <p:cNvPr id="219" name="Rectangle 51"/>
+          <p:cNvPr id="260" name="Rectangle 51"/>
           <p:cNvSpPr/>
           <p:nvPr/>
         </p:nvSpPr>
         <p:spPr>
           <a:xfrm>
             <a:off x="1828800" y="0"/>
-            <a:ext cx="16200" cy="6855840"/>
+            <a:ext cx="15840" cy="6855480"/>
           </a:xfrm>
           <a:prstGeom prst="rect">
             <a:avLst/>
@@ -17050,14 +20080,14 @@
       </p:sp>
       <p:sp>
         <p:nvSpPr>
-          <p:cNvPr id="220" name="Rectangle 52"/>
+          <p:cNvPr id="261" name="Rectangle 52"/>
           <p:cNvSpPr/>
           <p:nvPr/>
         </p:nvSpPr>
         <p:spPr>
           <a:xfrm>
             <a:off x="2743200" y="0"/>
-            <a:ext cx="16200" cy="6855840"/>
+            <a:ext cx="15840" cy="6855480"/>
           </a:xfrm>
           <a:prstGeom prst="rect">
             <a:avLst/>
@@ -17110,14 +20140,14 @@
       </p:sp>
       <p:sp>
         <p:nvSpPr>
-          <p:cNvPr id="221" name="Rectangle 53"/>
+          <p:cNvPr id="262" name="Rectangle 53"/>
           <p:cNvSpPr/>
           <p:nvPr/>
         </p:nvSpPr>
         <p:spPr>
           <a:xfrm>
             <a:off x="3657600" y="0"/>
-            <a:ext cx="16200" cy="6855840"/>
+            <a:ext cx="15840" cy="6855480"/>
           </a:xfrm>
           <a:prstGeom prst="rect">
             <a:avLst/>
@@ -17170,14 +20200,14 @@
       </p:sp>
       <p:sp>
         <p:nvSpPr>
-          <p:cNvPr id="222" name="Rectangle 54"/>
+          <p:cNvPr id="263" name="Rectangle 54"/>
           <p:cNvSpPr/>
           <p:nvPr/>
         </p:nvSpPr>
         <p:spPr>
           <a:xfrm>
             <a:off x="4572000" y="0"/>
-            <a:ext cx="16200" cy="6855840"/>
+            <a:ext cx="15840" cy="6855480"/>
           </a:xfrm>
           <a:prstGeom prst="rect">
             <a:avLst/>
@@ -17230,14 +20260,14 @@
       </p:sp>
       <p:sp>
         <p:nvSpPr>
-          <p:cNvPr id="223" name="Rectangle 55"/>
+          <p:cNvPr id="264" name="Rectangle 55"/>
           <p:cNvSpPr/>
           <p:nvPr/>
         </p:nvSpPr>
         <p:spPr>
           <a:xfrm>
             <a:off x="5486400" y="0"/>
-            <a:ext cx="16200" cy="6855840"/>
+            <a:ext cx="15840" cy="6855480"/>
           </a:xfrm>
           <a:prstGeom prst="rect">
             <a:avLst/>
@@ -17290,14 +20320,14 @@
       </p:sp>
       <p:sp>
         <p:nvSpPr>
-          <p:cNvPr id="224" name="Rectangle 56"/>
+          <p:cNvPr id="265" name="Rectangle 56"/>
           <p:cNvSpPr/>
           <p:nvPr/>
         </p:nvSpPr>
         <p:spPr>
           <a:xfrm>
             <a:off x="6400800" y="0"/>
-            <a:ext cx="16200" cy="6855840"/>
+            <a:ext cx="15840" cy="6855480"/>
           </a:xfrm>
           <a:prstGeom prst="rect">
             <a:avLst/>
@@ -17350,14 +20380,14 @@
       </p:sp>
       <p:sp>
         <p:nvSpPr>
-          <p:cNvPr id="225" name="Rectangle 57"/>
+          <p:cNvPr id="266" name="Rectangle 57"/>
           <p:cNvSpPr/>
           <p:nvPr/>
         </p:nvSpPr>
         <p:spPr>
           <a:xfrm>
             <a:off x="7315200" y="0"/>
-            <a:ext cx="16200" cy="6855840"/>
+            <a:ext cx="15840" cy="6855480"/>
           </a:xfrm>
           <a:prstGeom prst="rect">
             <a:avLst/>
@@ -17410,14 +20440,14 @@
       </p:sp>
       <p:sp>
         <p:nvSpPr>
-          <p:cNvPr id="226" name="Rectangle 58"/>
+          <p:cNvPr id="267" name="Rectangle 58"/>
           <p:cNvSpPr/>
           <p:nvPr/>
         </p:nvSpPr>
         <p:spPr>
           <a:xfrm>
             <a:off x="8229600" y="0"/>
-            <a:ext cx="16200" cy="6855840"/>
+            <a:ext cx="15840" cy="6855480"/>
           </a:xfrm>
           <a:prstGeom prst="rect">
             <a:avLst/>
@@ -17470,14 +20500,14 @@
       </p:sp>
       <p:sp>
         <p:nvSpPr>
-          <p:cNvPr id="227" name="Rectangle 59"/>
+          <p:cNvPr id="268" name="Rectangle 59"/>
           <p:cNvSpPr/>
           <p:nvPr/>
         </p:nvSpPr>
         <p:spPr>
           <a:xfrm>
             <a:off x="9144000" y="0"/>
-            <a:ext cx="16200" cy="6855840"/>
+            <a:ext cx="15840" cy="6855480"/>
           </a:xfrm>
           <a:prstGeom prst="rect">
             <a:avLst/>
@@ -17530,14 +20560,14 @@
       </p:sp>
       <p:sp>
         <p:nvSpPr>
-          <p:cNvPr id="228" name="Rectangle 60"/>
+          <p:cNvPr id="269" name="Rectangle 60"/>
           <p:cNvSpPr/>
           <p:nvPr/>
         </p:nvSpPr>
         <p:spPr>
           <a:xfrm>
             <a:off x="10058400" y="0"/>
-            <a:ext cx="16200" cy="6855840"/>
+            <a:ext cx="15840" cy="6855480"/>
           </a:xfrm>
           <a:prstGeom prst="rect">
             <a:avLst/>
@@ -17590,14 +20620,14 @@
       </p:sp>
       <p:sp>
         <p:nvSpPr>
-          <p:cNvPr id="229" name="Rectangle 61"/>
+          <p:cNvPr id="270" name="Rectangle 61"/>
           <p:cNvSpPr/>
           <p:nvPr/>
         </p:nvSpPr>
         <p:spPr>
           <a:xfrm>
             <a:off x="10972800" y="0"/>
-            <a:ext cx="16200" cy="6855840"/>
+            <a:ext cx="15840" cy="6855480"/>
           </a:xfrm>
           <a:prstGeom prst="rect">
             <a:avLst/>
@@ -17650,14 +20680,14 @@
       </p:sp>
       <p:sp>
         <p:nvSpPr>
-          <p:cNvPr id="230" name="Rectangle 62"/>
+          <p:cNvPr id="271" name="Rectangle 62"/>
           <p:cNvSpPr/>
           <p:nvPr/>
         </p:nvSpPr>
         <p:spPr>
           <a:xfrm>
             <a:off x="11887200" y="0"/>
-            <a:ext cx="16200" cy="6855840"/>
+            <a:ext cx="15840" cy="6855480"/>
           </a:xfrm>
           <a:prstGeom prst="rect">
             <a:avLst/>
@@ -17710,14 +20740,14 @@
       </p:sp>
       <p:sp>
         <p:nvSpPr>
-          <p:cNvPr id="231" name="Rectangle 63"/>
+          <p:cNvPr id="272" name="Rectangle 63"/>
           <p:cNvSpPr/>
           <p:nvPr/>
         </p:nvSpPr>
         <p:spPr>
           <a:xfrm>
             <a:off x="0" y="0"/>
-            <a:ext cx="317880" cy="6855840"/>
+            <a:ext cx="317520" cy="6855480"/>
           </a:xfrm>
           <a:prstGeom prst="rect">
             <a:avLst/>
@@ -17770,14 +20800,14 @@
       </p:sp>
       <p:sp>
         <p:nvSpPr>
-          <p:cNvPr id="232" name="Rounded Rectangle 15"/>
+          <p:cNvPr id="273" name="Rounded Rectangle 15"/>
           <p:cNvSpPr/>
           <p:nvPr/>
         </p:nvSpPr>
         <p:spPr>
           <a:xfrm>
             <a:off x="9875520" y="365760"/>
-            <a:ext cx="2009520" cy="500760"/>
+            <a:ext cx="2009160" cy="500400"/>
           </a:xfrm>
           <a:prstGeom prst="roundRect">
             <a:avLst>
@@ -17844,7 +20874,7 @@
       </p:sp>
       <p:sp>
         <p:nvSpPr>
-          <p:cNvPr id="233" name="TextBox 7"/>
+          <p:cNvPr id="274" name="TextBox 7"/>
           <p:cNvSpPr/>
           <p:nvPr/>
         </p:nvSpPr>
@@ -17908,14 +20938,14 @@
       </p:sp>
       <p:sp>
         <p:nvSpPr>
-          <p:cNvPr id="234" name="TextBox 8"/>
+          <p:cNvPr id="275" name="TextBox 8"/>
           <p:cNvSpPr/>
           <p:nvPr/>
         </p:nvSpPr>
         <p:spPr>
           <a:xfrm>
             <a:off x="1870560" y="1846080"/>
-            <a:ext cx="7289640" cy="668520"/>
+            <a:ext cx="7289280" cy="668520"/>
           </a:xfrm>
           <a:prstGeom prst="rect">
             <a:avLst/>
@@ -17985,14 +21015,14 @@
       </p:sp>
       <p:sp>
         <p:nvSpPr>
-          <p:cNvPr id="235" name="Rounded Rectangle 16"/>
+          <p:cNvPr id="276" name="Rounded Rectangle 16"/>
           <p:cNvSpPr/>
           <p:nvPr/>
         </p:nvSpPr>
         <p:spPr>
           <a:xfrm>
             <a:off x="987480" y="3182040"/>
-            <a:ext cx="3289680" cy="2741040"/>
+            <a:ext cx="3289320" cy="2740680"/>
           </a:xfrm>
           <a:prstGeom prst="roundRect">
             <a:avLst>
@@ -18047,14 +21077,14 @@
       </p:sp>
       <p:sp>
         <p:nvSpPr>
-          <p:cNvPr id="236" name="Rounded Rectangle 18"/>
+          <p:cNvPr id="277" name="Rounded Rectangle 18"/>
           <p:cNvSpPr/>
           <p:nvPr/>
         </p:nvSpPr>
         <p:spPr>
           <a:xfrm>
             <a:off x="685800" y="2743200"/>
-            <a:ext cx="3518280" cy="3427920"/>
+            <a:ext cx="3517920" cy="3427560"/>
           </a:xfrm>
           <a:prstGeom prst="roundRect">
             <a:avLst>
@@ -18321,14 +21351,14 @@
       </p:sp>
       <p:sp>
         <p:nvSpPr>
-          <p:cNvPr id="237" name="Rounded Rectangle 19"/>
+          <p:cNvPr id="278" name="Rounded Rectangle 19"/>
           <p:cNvSpPr/>
           <p:nvPr/>
         </p:nvSpPr>
         <p:spPr>
           <a:xfrm>
             <a:off x="4507920" y="3182040"/>
-            <a:ext cx="3289680" cy="2741040"/>
+            <a:ext cx="3289320" cy="2740680"/>
           </a:xfrm>
           <a:prstGeom prst="roundRect">
             <a:avLst>
@@ -18383,14 +21413,14 @@
       </p:sp>
       <p:sp>
         <p:nvSpPr>
-          <p:cNvPr id="238" name="Rounded Rectangle 26"/>
+          <p:cNvPr id="279" name="Rounded Rectangle 26"/>
           <p:cNvSpPr/>
           <p:nvPr/>
         </p:nvSpPr>
         <p:spPr>
           <a:xfrm>
             <a:off x="4343400" y="2743200"/>
-            <a:ext cx="3381120" cy="3656520"/>
+            <a:ext cx="3380760" cy="3656160"/>
           </a:xfrm>
           <a:prstGeom prst="roundRect">
             <a:avLst>
@@ -18889,14 +21919,14 @@
       </p:sp>
       <p:sp>
         <p:nvSpPr>
-          <p:cNvPr id="239" name="Rounded Rectangle 27"/>
+          <p:cNvPr id="280" name="Rounded Rectangle 27"/>
           <p:cNvSpPr/>
           <p:nvPr/>
         </p:nvSpPr>
         <p:spPr>
           <a:xfrm>
             <a:off x="8028360" y="3182040"/>
-            <a:ext cx="3289680" cy="2741040"/>
+            <a:ext cx="3289320" cy="2740680"/>
           </a:xfrm>
           <a:prstGeom prst="roundRect">
             <a:avLst>
@@ -18951,14 +21981,14 @@
       </p:sp>
       <p:sp>
         <p:nvSpPr>
-          <p:cNvPr id="240" name="Rounded Rectangle 28"/>
+          <p:cNvPr id="281" name="Rounded Rectangle 28"/>
           <p:cNvSpPr/>
           <p:nvPr/>
         </p:nvSpPr>
         <p:spPr>
           <a:xfrm>
             <a:off x="7955280" y="2971800"/>
-            <a:ext cx="3702240" cy="3199320"/>
+            <a:ext cx="3701880" cy="3198960"/>
           </a:xfrm>
           <a:prstGeom prst="roundRect">
             <a:avLst>
@@ -19351,7 +22381,7 @@
       </p:sp>
       <p:sp>
         <p:nvSpPr>
-          <p:cNvPr id="241" name="TextBox 9"/>
+          <p:cNvPr id="282" name="TextBox 9"/>
           <p:cNvSpPr/>
           <p:nvPr/>
         </p:nvSpPr>
@@ -19435,14 +22465,14 @@
       </p:grpSpPr>
       <p:sp>
         <p:nvSpPr>
-          <p:cNvPr id="242" name="Rectangle 80"/>
+          <p:cNvPr id="283" name="Rectangle 80"/>
           <p:cNvSpPr/>
           <p:nvPr/>
         </p:nvSpPr>
         <p:spPr>
           <a:xfrm>
             <a:off x="0" y="0"/>
-            <a:ext cx="12187080" cy="6856200"/>
+            <a:ext cx="12186720" cy="6855840"/>
           </a:xfrm>
           <a:prstGeom prst="rect">
             <a:avLst/>
@@ -19495,14 +22525,14 @@
       </p:sp>
       <p:sp>
         <p:nvSpPr>
-          <p:cNvPr id="243" name="Rectangle 81"/>
+          <p:cNvPr id="284" name="Rectangle 81"/>
           <p:cNvSpPr/>
           <p:nvPr/>
         </p:nvSpPr>
         <p:spPr>
           <a:xfrm>
             <a:off x="0" y="0"/>
-            <a:ext cx="16560" cy="6856200"/>
+            <a:ext cx="16200" cy="6855840"/>
           </a:xfrm>
           <a:prstGeom prst="rect">
             <a:avLst/>
@@ -19555,14 +22585,14 @@
       </p:sp>
       <p:sp>
         <p:nvSpPr>
-          <p:cNvPr id="244" name="Rectangle 82"/>
+          <p:cNvPr id="285" name="Rectangle 82"/>
           <p:cNvSpPr/>
           <p:nvPr/>
         </p:nvSpPr>
         <p:spPr>
           <a:xfrm>
             <a:off x="914400" y="0"/>
-            <a:ext cx="16560" cy="6856200"/>
+            <a:ext cx="16200" cy="6855840"/>
           </a:xfrm>
           <a:prstGeom prst="rect">
             <a:avLst/>
@@ -19615,14 +22645,14 @@
       </p:sp>
       <p:sp>
         <p:nvSpPr>
-          <p:cNvPr id="245" name="Rectangle 83"/>
+          <p:cNvPr id="286" name="Rectangle 83"/>
           <p:cNvSpPr/>
           <p:nvPr/>
         </p:nvSpPr>
         <p:spPr>
           <a:xfrm>
             <a:off x="1828800" y="0"/>
-            <a:ext cx="16560" cy="6856200"/>
+            <a:ext cx="16200" cy="6855840"/>
           </a:xfrm>
           <a:prstGeom prst="rect">
             <a:avLst/>
@@ -19675,14 +22705,14 @@
       </p:sp>
       <p:sp>
         <p:nvSpPr>
-          <p:cNvPr id="246" name="Rectangle 84"/>
+          <p:cNvPr id="287" name="Rectangle 84"/>
           <p:cNvSpPr/>
           <p:nvPr/>
         </p:nvSpPr>
         <p:spPr>
           <a:xfrm>
             <a:off x="2743200" y="0"/>
-            <a:ext cx="16560" cy="6856200"/>
+            <a:ext cx="16200" cy="6855840"/>
           </a:xfrm>
           <a:prstGeom prst="rect">
             <a:avLst/>
@@ -19735,14 +22765,14 @@
       </p:sp>
       <p:sp>
         <p:nvSpPr>
-          <p:cNvPr id="247" name="Rectangle 85"/>
+          <p:cNvPr id="288" name="Rectangle 85"/>
           <p:cNvSpPr/>
           <p:nvPr/>
         </p:nvSpPr>
         <p:spPr>
           <a:xfrm>
             <a:off x="3657600" y="0"/>
-            <a:ext cx="16560" cy="6856200"/>
+            <a:ext cx="16200" cy="6855840"/>
           </a:xfrm>
           <a:prstGeom prst="rect">
             <a:avLst/>
@@ -19795,14 +22825,14 @@
       </p:sp>
       <p:sp>
         <p:nvSpPr>
-          <p:cNvPr id="248" name="Rectangle 86"/>
+          <p:cNvPr id="289" name="Rectangle 86"/>
           <p:cNvSpPr/>
           <p:nvPr/>
         </p:nvSpPr>
         <p:spPr>
           <a:xfrm>
             <a:off x="4572000" y="0"/>
-            <a:ext cx="16560" cy="6856200"/>
+            <a:ext cx="16200" cy="6855840"/>
           </a:xfrm>
           <a:prstGeom prst="rect">
             <a:avLst/>
@@ -19855,14 +22885,14 @@
       </p:sp>
       <p:sp>
         <p:nvSpPr>
-          <p:cNvPr id="249" name="Rectangle 87"/>
+          <p:cNvPr id="290" name="Rectangle 87"/>
           <p:cNvSpPr/>
           <p:nvPr/>
         </p:nvSpPr>
         <p:spPr>
           <a:xfrm>
             <a:off x="5486400" y="0"/>
-            <a:ext cx="16560" cy="6856200"/>
+            <a:ext cx="16200" cy="6855840"/>
           </a:xfrm>
           <a:prstGeom prst="rect">
             <a:avLst/>
@@ -19915,14 +22945,14 @@
       </p:sp>
       <p:sp>
         <p:nvSpPr>
-          <p:cNvPr id="250" name="Rectangle 88"/>
+          <p:cNvPr id="291" name="Rectangle 88"/>
           <p:cNvSpPr/>
           <p:nvPr/>
         </p:nvSpPr>
         <p:spPr>
           <a:xfrm>
             <a:off x="6400800" y="0"/>
-            <a:ext cx="16560" cy="6856200"/>
+            <a:ext cx="16200" cy="6855840"/>
           </a:xfrm>
           <a:prstGeom prst="rect">
             <a:avLst/>
@@ -19975,14 +23005,14 @@
       </p:sp>
       <p:sp>
         <p:nvSpPr>
-          <p:cNvPr id="251" name="Rectangle 89"/>
+          <p:cNvPr id="292" name="Rectangle 89"/>
           <p:cNvSpPr/>
           <p:nvPr/>
         </p:nvSpPr>
         <p:spPr>
           <a:xfrm>
             <a:off x="7315200" y="0"/>
-            <a:ext cx="16560" cy="6856200"/>
+            <a:ext cx="16200" cy="6855840"/>
           </a:xfrm>
           <a:prstGeom prst="rect">
             <a:avLst/>
@@ -20035,14 +23065,14 @@
       </p:sp>
       <p:sp>
         <p:nvSpPr>
-          <p:cNvPr id="252" name="Rectangle 90"/>
+          <p:cNvPr id="293" name="Rectangle 90"/>
           <p:cNvSpPr/>
           <p:nvPr/>
         </p:nvSpPr>
         <p:spPr>
           <a:xfrm>
             <a:off x="8229600" y="0"/>
-            <a:ext cx="16560" cy="6856200"/>
+            <a:ext cx="16200" cy="6855840"/>
           </a:xfrm>
           <a:prstGeom prst="rect">
             <a:avLst/>
@@ -20095,14 +23125,14 @@
       </p:sp>
       <p:sp>
         <p:nvSpPr>
-          <p:cNvPr id="253" name="Rectangle 91"/>
+          <p:cNvPr id="294" name="Rectangle 91"/>
           <p:cNvSpPr/>
           <p:nvPr/>
         </p:nvSpPr>
         <p:spPr>
           <a:xfrm>
             <a:off x="9144000" y="0"/>
-            <a:ext cx="16560" cy="6856200"/>
+            <a:ext cx="16200" cy="6855840"/>
           </a:xfrm>
           <a:prstGeom prst="rect">
             <a:avLst/>
@@ -20155,14 +23185,14 @@
       </p:sp>
       <p:sp>
         <p:nvSpPr>
-          <p:cNvPr id="254" name="Rectangle 92"/>
+          <p:cNvPr id="295" name="Rectangle 92"/>
           <p:cNvSpPr/>
           <p:nvPr/>
         </p:nvSpPr>
         <p:spPr>
           <a:xfrm>
             <a:off x="10058400" y="0"/>
-            <a:ext cx="16560" cy="6856200"/>
+            <a:ext cx="16200" cy="6855840"/>
           </a:xfrm>
           <a:prstGeom prst="rect">
             <a:avLst/>
@@ -20215,14 +23245,14 @@
       </p:sp>
       <p:sp>
         <p:nvSpPr>
-          <p:cNvPr id="255" name="Rectangle 93"/>
+          <p:cNvPr id="296" name="Rectangle 93"/>
           <p:cNvSpPr/>
           <p:nvPr/>
         </p:nvSpPr>
         <p:spPr>
           <a:xfrm>
             <a:off x="10972800" y="0"/>
-            <a:ext cx="16560" cy="6856200"/>
+            <a:ext cx="16200" cy="6855840"/>
           </a:xfrm>
           <a:prstGeom prst="rect">
             <a:avLst/>
@@ -20275,14 +23305,14 @@
       </p:sp>
       <p:sp>
         <p:nvSpPr>
-          <p:cNvPr id="256" name="Rectangle 94"/>
+          <p:cNvPr id="297" name="Rectangle 94"/>
           <p:cNvSpPr/>
           <p:nvPr/>
         </p:nvSpPr>
         <p:spPr>
           <a:xfrm>
             <a:off x="11887200" y="0"/>
-            <a:ext cx="16560" cy="6856200"/>
+            <a:ext cx="16200" cy="6855840"/>
           </a:xfrm>
           <a:prstGeom prst="rect">
             <a:avLst/>
@@ -20335,14 +23365,14 @@
       </p:sp>
       <p:sp>
         <p:nvSpPr>
-          <p:cNvPr id="257" name="Rectangle 95"/>
+          <p:cNvPr id="298" name="Rectangle 95"/>
           <p:cNvSpPr/>
           <p:nvPr/>
         </p:nvSpPr>
         <p:spPr>
           <a:xfrm>
             <a:off x="0" y="0"/>
-            <a:ext cx="318240" cy="6856200"/>
+            <a:ext cx="317880" cy="6855840"/>
           </a:xfrm>
           <a:prstGeom prst="rect">
             <a:avLst/>
@@ -20395,14 +23425,14 @@
       </p:sp>
       <p:sp>
         <p:nvSpPr>
-          <p:cNvPr id="258" name="Rounded Rectangle 36"/>
+          <p:cNvPr id="299" name="Rounded Rectangle 36"/>
           <p:cNvSpPr/>
           <p:nvPr/>
         </p:nvSpPr>
         <p:spPr>
           <a:xfrm>
             <a:off x="9875520" y="365760"/>
-            <a:ext cx="2009880" cy="501120"/>
+            <a:ext cx="2009520" cy="500760"/>
           </a:xfrm>
           <a:prstGeom prst="roundRect">
             <a:avLst>
@@ -20469,7 +23499,7 @@
       </p:sp>
       <p:sp>
         <p:nvSpPr>
-          <p:cNvPr id="259" name="TextBox 13"/>
+          <p:cNvPr id="300" name="TextBox 13"/>
           <p:cNvSpPr/>
           <p:nvPr/>
         </p:nvSpPr>
@@ -20523,14 +23553,14 @@
       </p:sp>
       <p:sp>
         <p:nvSpPr>
-          <p:cNvPr id="260" name="TextBox 14"/>
+          <p:cNvPr id="301" name="TextBox 14"/>
           <p:cNvSpPr/>
           <p:nvPr/>
         </p:nvSpPr>
         <p:spPr>
           <a:xfrm>
             <a:off x="2493720" y="2194560"/>
-            <a:ext cx="5983920" cy="668520"/>
+            <a:ext cx="5983560" cy="668520"/>
           </a:xfrm>
           <a:prstGeom prst="rect">
             <a:avLst/>
@@ -20600,14 +23630,14 @@
       </p:sp>
       <p:sp>
         <p:nvSpPr>
-          <p:cNvPr id="261" name="Rounded Rectangle 37"/>
+          <p:cNvPr id="302" name="Rounded Rectangle 37"/>
           <p:cNvSpPr/>
           <p:nvPr/>
         </p:nvSpPr>
         <p:spPr>
           <a:xfrm>
             <a:off x="987480" y="3182040"/>
-            <a:ext cx="3290040" cy="2741400"/>
+            <a:ext cx="3289680" cy="2741040"/>
           </a:xfrm>
           <a:prstGeom prst="roundRect">
             <a:avLst>
@@ -20662,14 +23692,14 @@
       </p:sp>
       <p:sp>
         <p:nvSpPr>
-          <p:cNvPr id="262" name="Rounded Rectangle 38"/>
+          <p:cNvPr id="303" name="Rounded Rectangle 38"/>
           <p:cNvSpPr/>
           <p:nvPr/>
         </p:nvSpPr>
         <p:spPr>
           <a:xfrm>
             <a:off x="685800" y="3108960"/>
-            <a:ext cx="3518640" cy="3291120"/>
+            <a:ext cx="3518280" cy="3290760"/>
           </a:xfrm>
           <a:prstGeom prst="roundRect">
             <a:avLst>
@@ -20976,14 +24006,14 @@
       </p:sp>
       <p:sp>
         <p:nvSpPr>
-          <p:cNvPr id="263" name="Rounded Rectangle 39"/>
+          <p:cNvPr id="304" name="Rounded Rectangle 39"/>
           <p:cNvSpPr/>
           <p:nvPr/>
         </p:nvSpPr>
         <p:spPr>
           <a:xfrm>
             <a:off x="4507920" y="3182040"/>
-            <a:ext cx="3290040" cy="2741400"/>
+            <a:ext cx="3289680" cy="2741040"/>
           </a:xfrm>
           <a:prstGeom prst="roundRect">
             <a:avLst>
@@ -21038,14 +24068,14 @@
       </p:sp>
       <p:sp>
         <p:nvSpPr>
-          <p:cNvPr id="264" name="Rounded Rectangle 40"/>
+          <p:cNvPr id="305" name="Rounded Rectangle 40"/>
           <p:cNvSpPr/>
           <p:nvPr/>
         </p:nvSpPr>
         <p:spPr>
           <a:xfrm>
             <a:off x="4434840" y="3108960"/>
-            <a:ext cx="3290040" cy="2741400"/>
+            <a:ext cx="3289680" cy="2741040"/>
           </a:xfrm>
           <a:prstGeom prst="roundRect">
             <a:avLst>
@@ -21267,14 +24297,14 @@
       </p:sp>
       <p:sp>
         <p:nvSpPr>
-          <p:cNvPr id="265" name="Rounded Rectangle 41"/>
+          <p:cNvPr id="306" name="Rounded Rectangle 41"/>
           <p:cNvSpPr/>
           <p:nvPr/>
         </p:nvSpPr>
         <p:spPr>
           <a:xfrm>
             <a:off x="8028360" y="3182040"/>
-            <a:ext cx="3290040" cy="2741400"/>
+            <a:ext cx="3289680" cy="2741040"/>
           </a:xfrm>
           <a:prstGeom prst="roundRect">
             <a:avLst>
@@ -21329,14 +24359,14 @@
       </p:sp>
       <p:sp>
         <p:nvSpPr>
-          <p:cNvPr id="266" name="Rounded Rectangle 42"/>
+          <p:cNvPr id="307" name="Rounded Rectangle 42"/>
           <p:cNvSpPr/>
           <p:nvPr/>
         </p:nvSpPr>
         <p:spPr>
           <a:xfrm>
             <a:off x="7955280" y="3108960"/>
-            <a:ext cx="3702600" cy="3062520"/>
+            <a:ext cx="3702240" cy="3062160"/>
           </a:xfrm>
           <a:prstGeom prst="roundRect">
             <a:avLst>
@@ -21637,7 +24667,7 @@
       </p:sp>
       <p:sp>
         <p:nvSpPr>
-          <p:cNvPr id="267" name="TextBox 15"/>
+          <p:cNvPr id="308" name="TextBox 15"/>
           <p:cNvSpPr/>
           <p:nvPr/>
         </p:nvSpPr>
@@ -21721,14 +24751,14 @@
       </p:grpSpPr>
       <p:sp>
         <p:nvSpPr>
-          <p:cNvPr id="268" name="Rectangle 64"/>
+          <p:cNvPr id="309" name="Rectangle 64"/>
           <p:cNvSpPr/>
           <p:nvPr/>
         </p:nvSpPr>
         <p:spPr>
           <a:xfrm>
             <a:off x="0" y="0"/>
-            <a:ext cx="12187080" cy="6856200"/>
+            <a:ext cx="12186720" cy="6855840"/>
           </a:xfrm>
           <a:prstGeom prst="rect">
             <a:avLst/>
@@ -21781,14 +24811,14 @@
       </p:sp>
       <p:sp>
         <p:nvSpPr>
-          <p:cNvPr id="269" name="Rectangle 65"/>
+          <p:cNvPr id="310" name="Rectangle 65"/>
           <p:cNvSpPr/>
           <p:nvPr/>
         </p:nvSpPr>
         <p:spPr>
           <a:xfrm>
             <a:off x="0" y="0"/>
-            <a:ext cx="16560" cy="6856200"/>
+            <a:ext cx="16200" cy="6855840"/>
           </a:xfrm>
           <a:prstGeom prst="rect">
             <a:avLst/>
@@ -21841,14 +24871,14 @@
       </p:sp>
       <p:sp>
         <p:nvSpPr>
-          <p:cNvPr id="270" name="Rectangle 66"/>
+          <p:cNvPr id="311" name="Rectangle 66"/>
           <p:cNvSpPr/>
           <p:nvPr/>
         </p:nvSpPr>
         <p:spPr>
           <a:xfrm>
             <a:off x="914400" y="0"/>
-            <a:ext cx="16560" cy="6856200"/>
+            <a:ext cx="16200" cy="6855840"/>
           </a:xfrm>
           <a:prstGeom prst="rect">
             <a:avLst/>
@@ -21901,14 +24931,14 @@
       </p:sp>
       <p:sp>
         <p:nvSpPr>
-          <p:cNvPr id="271" name="Rectangle 67"/>
+          <p:cNvPr id="312" name="Rectangle 67"/>
           <p:cNvSpPr/>
           <p:nvPr/>
         </p:nvSpPr>
         <p:spPr>
           <a:xfrm>
             <a:off x="1828800" y="0"/>
-            <a:ext cx="16560" cy="6856200"/>
+            <a:ext cx="16200" cy="6855840"/>
           </a:xfrm>
           <a:prstGeom prst="rect">
             <a:avLst/>
@@ -21961,14 +24991,14 @@
       </p:sp>
       <p:sp>
         <p:nvSpPr>
-          <p:cNvPr id="272" name="Rectangle 68"/>
+          <p:cNvPr id="313" name="Rectangle 68"/>
           <p:cNvSpPr/>
           <p:nvPr/>
         </p:nvSpPr>
         <p:spPr>
           <a:xfrm>
             <a:off x="2743200" y="0"/>
-            <a:ext cx="16560" cy="6856200"/>
+            <a:ext cx="16200" cy="6855840"/>
           </a:xfrm>
           <a:prstGeom prst="rect">
             <a:avLst/>
@@ -22021,14 +25051,14 @@
       </p:sp>
       <p:sp>
         <p:nvSpPr>
-          <p:cNvPr id="273" name="Rectangle 69"/>
+          <p:cNvPr id="314" name="Rectangle 69"/>
           <p:cNvSpPr/>
           <p:nvPr/>
         </p:nvSpPr>
         <p:spPr>
           <a:xfrm>
             <a:off x="3657600" y="0"/>
-            <a:ext cx="16560" cy="6856200"/>
+            <a:ext cx="16200" cy="6855840"/>
           </a:xfrm>
           <a:prstGeom prst="rect">
             <a:avLst/>
@@ -22081,14 +25111,14 @@
       </p:sp>
       <p:sp>
         <p:nvSpPr>
-          <p:cNvPr id="274" name="Rectangle 70"/>
+          <p:cNvPr id="315" name="Rectangle 70"/>
           <p:cNvSpPr/>
           <p:nvPr/>
         </p:nvSpPr>
         <p:spPr>
           <a:xfrm>
             <a:off x="4572000" y="0"/>
-            <a:ext cx="16560" cy="6856200"/>
+            <a:ext cx="16200" cy="6855840"/>
           </a:xfrm>
           <a:prstGeom prst="rect">
             <a:avLst/>
@@ -22141,14 +25171,14 @@
       </p:sp>
       <p:sp>
         <p:nvSpPr>
-          <p:cNvPr id="275" name="Rectangle 71"/>
+          <p:cNvPr id="316" name="Rectangle 71"/>
           <p:cNvSpPr/>
           <p:nvPr/>
         </p:nvSpPr>
         <p:spPr>
           <a:xfrm>
             <a:off x="5486400" y="0"/>
-            <a:ext cx="16560" cy="6856200"/>
+            <a:ext cx="16200" cy="6855840"/>
           </a:xfrm>
           <a:prstGeom prst="rect">
             <a:avLst/>
@@ -22201,14 +25231,14 @@
       </p:sp>
       <p:sp>
         <p:nvSpPr>
-          <p:cNvPr id="276" name="Rectangle 72"/>
+          <p:cNvPr id="317" name="Rectangle 72"/>
           <p:cNvSpPr/>
           <p:nvPr/>
         </p:nvSpPr>
         <p:spPr>
           <a:xfrm>
             <a:off x="6400800" y="0"/>
-            <a:ext cx="16560" cy="6856200"/>
+            <a:ext cx="16200" cy="6855840"/>
           </a:xfrm>
           <a:prstGeom prst="rect">
             <a:avLst/>
@@ -22261,14 +25291,14 @@
       </p:sp>
       <p:sp>
         <p:nvSpPr>
-          <p:cNvPr id="277" name="Rectangle 73"/>
+          <p:cNvPr id="318" name="Rectangle 73"/>
           <p:cNvSpPr/>
           <p:nvPr/>
         </p:nvSpPr>
         <p:spPr>
           <a:xfrm>
             <a:off x="7315200" y="0"/>
-            <a:ext cx="16560" cy="6856200"/>
+            <a:ext cx="16200" cy="6855840"/>
           </a:xfrm>
           <a:prstGeom prst="rect">
             <a:avLst/>
@@ -22321,14 +25351,14 @@
       </p:sp>
       <p:sp>
         <p:nvSpPr>
-          <p:cNvPr id="278" name="Rectangle 74"/>
+          <p:cNvPr id="319" name="Rectangle 74"/>
           <p:cNvSpPr/>
           <p:nvPr/>
         </p:nvSpPr>
         <p:spPr>
           <a:xfrm>
             <a:off x="8229600" y="0"/>
-            <a:ext cx="16560" cy="6856200"/>
+            <a:ext cx="16200" cy="6855840"/>
           </a:xfrm>
           <a:prstGeom prst="rect">
             <a:avLst/>
@@ -22381,14 +25411,14 @@
       </p:sp>
       <p:sp>
         <p:nvSpPr>
-          <p:cNvPr id="279" name="Rectangle 75"/>
+          <p:cNvPr id="320" name="Rectangle 75"/>
           <p:cNvSpPr/>
           <p:nvPr/>
         </p:nvSpPr>
         <p:spPr>
           <a:xfrm>
             <a:off x="9144000" y="0"/>
-            <a:ext cx="16560" cy="6856200"/>
+            <a:ext cx="16200" cy="6855840"/>
           </a:xfrm>
           <a:prstGeom prst="rect">
             <a:avLst/>
@@ -22441,14 +25471,14 @@
       </p:sp>
       <p:sp>
         <p:nvSpPr>
-          <p:cNvPr id="280" name="Rectangle 76"/>
+          <p:cNvPr id="321" name="Rectangle 76"/>
           <p:cNvSpPr/>
           <p:nvPr/>
         </p:nvSpPr>
         <p:spPr>
           <a:xfrm>
             <a:off x="10058400" y="0"/>
-            <a:ext cx="16560" cy="6856200"/>
+            <a:ext cx="16200" cy="6855840"/>
           </a:xfrm>
           <a:prstGeom prst="rect">
             <a:avLst/>
@@ -22501,14 +25531,14 @@
       </p:sp>
       <p:sp>
         <p:nvSpPr>
-          <p:cNvPr id="281" name="Rectangle 77"/>
+          <p:cNvPr id="322" name="Rectangle 77"/>
           <p:cNvSpPr/>
           <p:nvPr/>
         </p:nvSpPr>
         <p:spPr>
           <a:xfrm>
             <a:off x="10972800" y="0"/>
-            <a:ext cx="16560" cy="6856200"/>
+            <a:ext cx="16200" cy="6855840"/>
           </a:xfrm>
           <a:prstGeom prst="rect">
             <a:avLst/>
@@ -22561,14 +25591,14 @@
       </p:sp>
       <p:sp>
         <p:nvSpPr>
-          <p:cNvPr id="282" name="Rectangle 78"/>
+          <p:cNvPr id="323" name="Rectangle 78"/>
           <p:cNvSpPr/>
           <p:nvPr/>
         </p:nvSpPr>
         <p:spPr>
           <a:xfrm>
             <a:off x="11887200" y="0"/>
-            <a:ext cx="16560" cy="6856200"/>
+            <a:ext cx="16200" cy="6855840"/>
           </a:xfrm>
           <a:prstGeom prst="rect">
             <a:avLst/>
@@ -22621,14 +25651,14 @@
       </p:sp>
       <p:sp>
         <p:nvSpPr>
-          <p:cNvPr id="283" name="Rectangle 79"/>
+          <p:cNvPr id="324" name="Rectangle 79"/>
           <p:cNvSpPr/>
           <p:nvPr/>
         </p:nvSpPr>
         <p:spPr>
           <a:xfrm>
             <a:off x="0" y="0"/>
-            <a:ext cx="318240" cy="6856200"/>
+            <a:ext cx="317880" cy="6855840"/>
           </a:xfrm>
           <a:prstGeom prst="rect">
             <a:avLst/>
@@ -22681,14 +25711,14 @@
       </p:sp>
       <p:sp>
         <p:nvSpPr>
-          <p:cNvPr id="284" name="Rounded Rectangle 29"/>
+          <p:cNvPr id="325" name="Rounded Rectangle 29"/>
           <p:cNvSpPr/>
           <p:nvPr/>
         </p:nvSpPr>
         <p:spPr>
           <a:xfrm>
             <a:off x="9875520" y="365760"/>
-            <a:ext cx="2009880" cy="501120"/>
+            <a:ext cx="2009520" cy="500760"/>
           </a:xfrm>
           <a:prstGeom prst="roundRect">
             <a:avLst>
@@ -22755,7 +25785,7 @@
       </p:sp>
       <p:sp>
         <p:nvSpPr>
-          <p:cNvPr id="285" name="TextBox 10"/>
+          <p:cNvPr id="326" name="TextBox 10"/>
           <p:cNvSpPr/>
           <p:nvPr/>
         </p:nvSpPr>
@@ -22809,7 +25839,7 @@
       </p:sp>
       <p:sp>
         <p:nvSpPr>
-          <p:cNvPr id="286" name="TextBox 11"/>
+          <p:cNvPr id="327" name="TextBox 11"/>
           <p:cNvSpPr/>
           <p:nvPr/>
         </p:nvSpPr>
@@ -22886,14 +25916,14 @@
       </p:sp>
       <p:sp>
         <p:nvSpPr>
-          <p:cNvPr id="287" name="Rounded Rectangle 30"/>
+          <p:cNvPr id="328" name="Rounded Rectangle 30"/>
           <p:cNvSpPr/>
           <p:nvPr/>
         </p:nvSpPr>
         <p:spPr>
           <a:xfrm>
             <a:off x="987480" y="3182040"/>
-            <a:ext cx="3290040" cy="2741400"/>
+            <a:ext cx="3289680" cy="2741040"/>
           </a:xfrm>
           <a:prstGeom prst="roundRect">
             <a:avLst>
@@ -22948,14 +25978,14 @@
       </p:sp>
       <p:sp>
         <p:nvSpPr>
-          <p:cNvPr id="288" name="Rounded Rectangle 31"/>
+          <p:cNvPr id="329" name="Rounded Rectangle 31"/>
           <p:cNvSpPr/>
           <p:nvPr/>
         </p:nvSpPr>
         <p:spPr>
           <a:xfrm>
             <a:off x="457200" y="2971800"/>
-            <a:ext cx="3747240" cy="3428280"/>
+            <a:ext cx="3746880" cy="3427920"/>
           </a:xfrm>
           <a:prstGeom prst="roundRect">
             <a:avLst>
@@ -23222,14 +26252,14 @@
       </p:sp>
       <p:sp>
         <p:nvSpPr>
-          <p:cNvPr id="289" name="Rounded Rectangle 32"/>
+          <p:cNvPr id="330" name="Rounded Rectangle 32"/>
           <p:cNvSpPr/>
           <p:nvPr/>
         </p:nvSpPr>
         <p:spPr>
           <a:xfrm>
             <a:off x="4507920" y="3182040"/>
-            <a:ext cx="3290040" cy="2741400"/>
+            <a:ext cx="3289680" cy="2741040"/>
           </a:xfrm>
           <a:prstGeom prst="roundRect">
             <a:avLst>
@@ -23284,14 +26314,14 @@
       </p:sp>
       <p:sp>
         <p:nvSpPr>
-          <p:cNvPr id="290" name="Rounded Rectangle 33"/>
+          <p:cNvPr id="331" name="Rounded Rectangle 33"/>
           <p:cNvSpPr/>
           <p:nvPr/>
         </p:nvSpPr>
         <p:spPr>
           <a:xfrm>
             <a:off x="4343400" y="2971800"/>
-            <a:ext cx="3428280" cy="3291120"/>
+            <a:ext cx="3427920" cy="3290760"/>
           </a:xfrm>
           <a:prstGeom prst="roundRect">
             <a:avLst>
@@ -23701,14 +26731,14 @@
       </p:sp>
       <p:sp>
         <p:nvSpPr>
-          <p:cNvPr id="291" name="Rounded Rectangle 34"/>
+          <p:cNvPr id="332" name="Rounded Rectangle 34"/>
           <p:cNvSpPr/>
           <p:nvPr/>
         </p:nvSpPr>
         <p:spPr>
           <a:xfrm>
             <a:off x="8028360" y="3182040"/>
-            <a:ext cx="3290040" cy="2741400"/>
+            <a:ext cx="3289680" cy="2741040"/>
           </a:xfrm>
           <a:prstGeom prst="roundRect">
             <a:avLst>
@@ -23763,14 +26793,14 @@
       </p:sp>
       <p:sp>
         <p:nvSpPr>
-          <p:cNvPr id="292" name="Rounded Rectangle 35"/>
+          <p:cNvPr id="333" name="Rounded Rectangle 35"/>
           <p:cNvSpPr/>
           <p:nvPr/>
         </p:nvSpPr>
         <p:spPr>
           <a:xfrm>
             <a:off x="7955280" y="3108960"/>
-            <a:ext cx="3702600" cy="3062520"/>
+            <a:ext cx="3702240" cy="3062160"/>
           </a:xfrm>
           <a:prstGeom prst="roundRect">
             <a:avLst>
@@ -24203,7 +27233,7 @@
       </p:sp>
       <p:sp>
         <p:nvSpPr>
-          <p:cNvPr id="293" name="TextBox 12"/>
+          <p:cNvPr id="334" name="TextBox 12"/>
           <p:cNvSpPr/>
           <p:nvPr/>
         </p:nvSpPr>
@@ -24287,14 +27317,14 @@
       </p:grpSpPr>
       <p:sp>
         <p:nvSpPr>
-          <p:cNvPr id="294" name="Rectangle 96"/>
+          <p:cNvPr id="335" name="Rectangle 96"/>
           <p:cNvSpPr/>
           <p:nvPr/>
         </p:nvSpPr>
         <p:spPr>
           <a:xfrm>
             <a:off x="0" y="0"/>
-            <a:ext cx="12187440" cy="6856560"/>
+            <a:ext cx="12187080" cy="6856200"/>
           </a:xfrm>
           <a:prstGeom prst="rect">
             <a:avLst/>
@@ -24347,14 +27377,14 @@
       </p:sp>
       <p:sp>
         <p:nvSpPr>
-          <p:cNvPr id="295" name="Rectangle 97"/>
+          <p:cNvPr id="336" name="Rectangle 97"/>
           <p:cNvSpPr/>
           <p:nvPr/>
         </p:nvSpPr>
         <p:spPr>
           <a:xfrm>
             <a:off x="0" y="0"/>
-            <a:ext cx="16920" cy="6856560"/>
+            <a:ext cx="16560" cy="6856200"/>
           </a:xfrm>
           <a:prstGeom prst="rect">
             <a:avLst/>
@@ -24407,14 +27437,14 @@
       </p:sp>
       <p:sp>
         <p:nvSpPr>
-          <p:cNvPr id="296" name="Rectangle 98"/>
+          <p:cNvPr id="337" name="Rectangle 98"/>
           <p:cNvSpPr/>
           <p:nvPr/>
         </p:nvSpPr>
         <p:spPr>
           <a:xfrm>
             <a:off x="914400" y="0"/>
-            <a:ext cx="16920" cy="6856560"/>
+            <a:ext cx="16560" cy="6856200"/>
           </a:xfrm>
           <a:prstGeom prst="rect">
             <a:avLst/>
@@ -24467,14 +27497,14 @@
       </p:sp>
       <p:sp>
         <p:nvSpPr>
-          <p:cNvPr id="297" name="Rectangle 99"/>
+          <p:cNvPr id="338" name="Rectangle 99"/>
           <p:cNvSpPr/>
           <p:nvPr/>
         </p:nvSpPr>
         <p:spPr>
           <a:xfrm>
             <a:off x="1828800" y="0"/>
-            <a:ext cx="16920" cy="6856560"/>
+            <a:ext cx="16560" cy="6856200"/>
           </a:xfrm>
           <a:prstGeom prst="rect">
             <a:avLst/>
@@ -24527,14 +27557,14 @@
       </p:sp>
       <p:sp>
         <p:nvSpPr>
-          <p:cNvPr id="298" name="Rectangle 100"/>
+          <p:cNvPr id="339" name="Rectangle 100"/>
           <p:cNvSpPr/>
           <p:nvPr/>
         </p:nvSpPr>
         <p:spPr>
           <a:xfrm>
             <a:off x="2743200" y="0"/>
-            <a:ext cx="16920" cy="6856560"/>
+            <a:ext cx="16560" cy="6856200"/>
           </a:xfrm>
           <a:prstGeom prst="rect">
             <a:avLst/>
@@ -24587,14 +27617,14 @@
       </p:sp>
       <p:sp>
         <p:nvSpPr>
-          <p:cNvPr id="299" name="Rectangle 101"/>
+          <p:cNvPr id="340" name="Rectangle 101"/>
           <p:cNvSpPr/>
           <p:nvPr/>
         </p:nvSpPr>
         <p:spPr>
           <a:xfrm>
             <a:off x="3657600" y="0"/>
-            <a:ext cx="16920" cy="6856560"/>
+            <a:ext cx="16560" cy="6856200"/>
           </a:xfrm>
           <a:prstGeom prst="rect">
             <a:avLst/>
@@ -24647,14 +27677,14 @@
       </p:sp>
       <p:sp>
         <p:nvSpPr>
-          <p:cNvPr id="300" name="Rectangle 102"/>
+          <p:cNvPr id="341" name="Rectangle 102"/>
           <p:cNvSpPr/>
           <p:nvPr/>
         </p:nvSpPr>
         <p:spPr>
           <a:xfrm>
             <a:off x="4572000" y="0"/>
-            <a:ext cx="16920" cy="6856560"/>
+            <a:ext cx="16560" cy="6856200"/>
           </a:xfrm>
           <a:prstGeom prst="rect">
             <a:avLst/>
@@ -24707,14 +27737,14 @@
       </p:sp>
       <p:sp>
         <p:nvSpPr>
-          <p:cNvPr id="301" name="Rectangle 103"/>
+          <p:cNvPr id="342" name="Rectangle 103"/>
           <p:cNvSpPr/>
           <p:nvPr/>
         </p:nvSpPr>
         <p:spPr>
           <a:xfrm>
             <a:off x="5486400" y="0"/>
-            <a:ext cx="16920" cy="6856560"/>
+            <a:ext cx="16560" cy="6856200"/>
           </a:xfrm>
           <a:prstGeom prst="rect">
             <a:avLst/>
@@ -24767,14 +27797,14 @@
       </p:sp>
       <p:sp>
         <p:nvSpPr>
-          <p:cNvPr id="302" name="Rectangle 104"/>
+          <p:cNvPr id="343" name="Rectangle 104"/>
           <p:cNvSpPr/>
           <p:nvPr/>
         </p:nvSpPr>
         <p:spPr>
           <a:xfrm>
             <a:off x="6400800" y="0"/>
-            <a:ext cx="16920" cy="6856560"/>
+            <a:ext cx="16560" cy="6856200"/>
           </a:xfrm>
           <a:prstGeom prst="rect">
             <a:avLst/>
@@ -24827,14 +27857,14 @@
       </p:sp>
       <p:sp>
         <p:nvSpPr>
-          <p:cNvPr id="303" name="Rectangle 105"/>
+          <p:cNvPr id="344" name="Rectangle 105"/>
           <p:cNvSpPr/>
           <p:nvPr/>
         </p:nvSpPr>
         <p:spPr>
           <a:xfrm>
             <a:off x="7315200" y="0"/>
-            <a:ext cx="16920" cy="6856560"/>
+            <a:ext cx="16560" cy="6856200"/>
           </a:xfrm>
           <a:prstGeom prst="rect">
             <a:avLst/>
@@ -24887,14 +27917,14 @@
       </p:sp>
       <p:sp>
         <p:nvSpPr>
-          <p:cNvPr id="304" name="Rectangle 106"/>
+          <p:cNvPr id="345" name="Rectangle 106"/>
           <p:cNvSpPr/>
           <p:nvPr/>
         </p:nvSpPr>
         <p:spPr>
           <a:xfrm>
             <a:off x="8229600" y="0"/>
-            <a:ext cx="16920" cy="6856560"/>
+            <a:ext cx="16560" cy="6856200"/>
           </a:xfrm>
           <a:prstGeom prst="rect">
             <a:avLst/>
@@ -24947,14 +27977,14 @@
       </p:sp>
       <p:sp>
         <p:nvSpPr>
-          <p:cNvPr id="305" name="Rectangle 107"/>
+          <p:cNvPr id="346" name="Rectangle 107"/>
           <p:cNvSpPr/>
           <p:nvPr/>
         </p:nvSpPr>
         <p:spPr>
           <a:xfrm>
             <a:off x="9144000" y="0"/>
-            <a:ext cx="16920" cy="6856560"/>
+            <a:ext cx="16560" cy="6856200"/>
           </a:xfrm>
           <a:prstGeom prst="rect">
             <a:avLst/>
@@ -25007,14 +28037,14 @@
       </p:sp>
       <p:sp>
         <p:nvSpPr>
-          <p:cNvPr id="306" name="Rectangle 108"/>
+          <p:cNvPr id="347" name="Rectangle 108"/>
           <p:cNvSpPr/>
           <p:nvPr/>
         </p:nvSpPr>
         <p:spPr>
           <a:xfrm>
             <a:off x="10058400" y="0"/>
-            <a:ext cx="16920" cy="6856560"/>
+            <a:ext cx="16560" cy="6856200"/>
           </a:xfrm>
           <a:prstGeom prst="rect">
             <a:avLst/>
@@ -25067,14 +28097,14 @@
       </p:sp>
       <p:sp>
         <p:nvSpPr>
-          <p:cNvPr id="307" name="Rectangle 109"/>
+          <p:cNvPr id="348" name="Rectangle 109"/>
           <p:cNvSpPr/>
           <p:nvPr/>
         </p:nvSpPr>
         <p:spPr>
           <a:xfrm>
             <a:off x="10972800" y="0"/>
-            <a:ext cx="16920" cy="6856560"/>
+            <a:ext cx="16560" cy="6856200"/>
           </a:xfrm>
           <a:prstGeom prst="rect">
             <a:avLst/>
@@ -25127,14 +28157,14 @@
       </p:sp>
       <p:sp>
         <p:nvSpPr>
-          <p:cNvPr id="308" name="Rectangle 110"/>
+          <p:cNvPr id="349" name="Rectangle 110"/>
           <p:cNvSpPr/>
           <p:nvPr/>
         </p:nvSpPr>
         <p:spPr>
           <a:xfrm>
             <a:off x="11887200" y="0"/>
-            <a:ext cx="16920" cy="6856560"/>
+            <a:ext cx="16560" cy="6856200"/>
           </a:xfrm>
           <a:prstGeom prst="rect">
             <a:avLst/>
@@ -25187,14 +28217,14 @@
       </p:sp>
       <p:sp>
         <p:nvSpPr>
-          <p:cNvPr id="309" name="Rectangle 111"/>
+          <p:cNvPr id="350" name="Rectangle 111"/>
           <p:cNvSpPr/>
           <p:nvPr/>
         </p:nvSpPr>
         <p:spPr>
           <a:xfrm>
             <a:off x="0" y="0"/>
-            <a:ext cx="318600" cy="6856560"/>
+            <a:ext cx="318240" cy="6856200"/>
           </a:xfrm>
           <a:prstGeom prst="rect">
             <a:avLst/>
@@ -25247,14 +28277,14 @@
       </p:sp>
       <p:sp>
         <p:nvSpPr>
-          <p:cNvPr id="310" name="Rounded Rectangle 43"/>
+          <p:cNvPr id="351" name="Rounded Rectangle 43"/>
           <p:cNvSpPr/>
           <p:nvPr/>
         </p:nvSpPr>
         <p:spPr>
           <a:xfrm>
             <a:off x="9875520" y="365760"/>
-            <a:ext cx="2010240" cy="501480"/>
+            <a:ext cx="2009880" cy="501120"/>
           </a:xfrm>
           <a:prstGeom prst="roundRect">
             <a:avLst>
@@ -25321,7 +28351,7 @@
       </p:sp>
       <p:sp>
         <p:nvSpPr>
-          <p:cNvPr id="311" name="TextBox 16"/>
+          <p:cNvPr id="352" name="TextBox 16"/>
           <p:cNvSpPr/>
           <p:nvPr/>
         </p:nvSpPr>
@@ -25375,14 +28405,14 @@
       </p:sp>
       <p:sp>
         <p:nvSpPr>
-          <p:cNvPr id="312" name="TextBox 17"/>
+          <p:cNvPr id="353" name="TextBox 17"/>
           <p:cNvSpPr/>
           <p:nvPr/>
         </p:nvSpPr>
         <p:spPr>
           <a:xfrm>
             <a:off x="2305080" y="1826640"/>
-            <a:ext cx="6505560" cy="668520"/>
+            <a:ext cx="6505200" cy="668520"/>
           </a:xfrm>
           <a:prstGeom prst="rect">
             <a:avLst/>
@@ -25452,14 +28482,14 @@
       </p:sp>
       <p:sp>
         <p:nvSpPr>
-          <p:cNvPr id="313" name="Rounded Rectangle 44"/>
+          <p:cNvPr id="354" name="Rounded Rectangle 44"/>
           <p:cNvSpPr/>
           <p:nvPr/>
         </p:nvSpPr>
         <p:spPr>
           <a:xfrm>
             <a:off x="987480" y="3182040"/>
-            <a:ext cx="3290400" cy="2741760"/>
+            <a:ext cx="3290040" cy="2741400"/>
           </a:xfrm>
           <a:prstGeom prst="roundRect">
             <a:avLst>
@@ -25514,14 +28544,14 @@
       </p:sp>
       <p:sp>
         <p:nvSpPr>
-          <p:cNvPr id="314" name="Rounded Rectangle 45"/>
+          <p:cNvPr id="355" name="Rounded Rectangle 45"/>
           <p:cNvSpPr/>
           <p:nvPr/>
         </p:nvSpPr>
         <p:spPr>
           <a:xfrm>
             <a:off x="475560" y="2514600"/>
-            <a:ext cx="3729240" cy="3885840"/>
+            <a:ext cx="3728880" cy="3885480"/>
           </a:xfrm>
           <a:prstGeom prst="roundRect">
             <a:avLst>
@@ -25847,14 +28877,14 @@
       </p:sp>
       <p:sp>
         <p:nvSpPr>
-          <p:cNvPr id="315" name="Rounded Rectangle 46"/>
+          <p:cNvPr id="356" name="Rounded Rectangle 46"/>
           <p:cNvSpPr/>
           <p:nvPr/>
         </p:nvSpPr>
         <p:spPr>
           <a:xfrm>
             <a:off x="4507920" y="3182040"/>
-            <a:ext cx="3290400" cy="2741760"/>
+            <a:ext cx="3290040" cy="2741400"/>
           </a:xfrm>
           <a:prstGeom prst="roundRect">
             <a:avLst>
@@ -25909,14 +28939,14 @@
       </p:sp>
       <p:sp>
         <p:nvSpPr>
-          <p:cNvPr id="316" name="Rounded Rectangle 47"/>
+          <p:cNvPr id="357" name="Rounded Rectangle 47"/>
           <p:cNvSpPr/>
           <p:nvPr/>
         </p:nvSpPr>
         <p:spPr>
           <a:xfrm>
             <a:off x="4434840" y="3108960"/>
-            <a:ext cx="3290400" cy="2741760"/>
+            <a:ext cx="3290040" cy="2741400"/>
           </a:xfrm>
           <a:prstGeom prst="roundRect">
             <a:avLst>
@@ -26171,14 +29201,14 @@
       </p:sp>
       <p:sp>
         <p:nvSpPr>
-          <p:cNvPr id="317" name="Rounded Rectangle 48"/>
+          <p:cNvPr id="358" name="Rounded Rectangle 48"/>
           <p:cNvSpPr/>
           <p:nvPr/>
         </p:nvSpPr>
         <p:spPr>
           <a:xfrm>
             <a:off x="8028360" y="3182040"/>
-            <a:ext cx="3290400" cy="2741760"/>
+            <a:ext cx="3290040" cy="2741400"/>
           </a:xfrm>
           <a:prstGeom prst="roundRect">
             <a:avLst>
@@ -26233,14 +29263,14 @@
       </p:sp>
       <p:sp>
         <p:nvSpPr>
-          <p:cNvPr id="318" name="Rounded Rectangle 49"/>
+          <p:cNvPr id="359" name="Rounded Rectangle 49"/>
           <p:cNvSpPr/>
           <p:nvPr/>
         </p:nvSpPr>
         <p:spPr>
           <a:xfrm>
             <a:off x="7955280" y="2514600"/>
-            <a:ext cx="3702960" cy="3409200"/>
+            <a:ext cx="3702600" cy="3408840"/>
           </a:xfrm>
           <a:prstGeom prst="roundRect">
             <a:avLst>
@@ -26607,14 +29637,14 @@
       </p:sp>
       <p:sp>
         <p:nvSpPr>
-          <p:cNvPr id="319" name="TextBox 20"/>
+          <p:cNvPr id="360" name="TextBox 20"/>
           <p:cNvSpPr/>
           <p:nvPr/>
         </p:nvSpPr>
         <p:spPr>
           <a:xfrm>
             <a:off x="4600080" y="6446520"/>
-            <a:ext cx="3051360" cy="363960"/>
+            <a:ext cx="3051000" cy="363960"/>
           </a:xfrm>
           <a:prstGeom prst="rect">
             <a:avLst/>
@@ -26691,14 +29721,14 @@
       </p:grpSpPr>
       <p:sp>
         <p:nvSpPr>
-          <p:cNvPr id="320" name="Rectangle 112"/>
+          <p:cNvPr id="361" name="Rectangle 112"/>
           <p:cNvSpPr/>
           <p:nvPr/>
         </p:nvSpPr>
         <p:spPr>
           <a:xfrm>
             <a:off x="0" y="0"/>
-            <a:ext cx="12187440" cy="6856560"/>
+            <a:ext cx="12187080" cy="6856200"/>
           </a:xfrm>
           <a:prstGeom prst="rect">
             <a:avLst/>
@@ -26751,14 +29781,14 @@
       </p:sp>
       <p:sp>
         <p:nvSpPr>
-          <p:cNvPr id="321" name="Rectangle 113"/>
+          <p:cNvPr id="362" name="Rectangle 113"/>
           <p:cNvSpPr/>
           <p:nvPr/>
         </p:nvSpPr>
         <p:spPr>
           <a:xfrm>
             <a:off x="0" y="0"/>
-            <a:ext cx="16920" cy="6856560"/>
+            <a:ext cx="16560" cy="6856200"/>
           </a:xfrm>
           <a:prstGeom prst="rect">
             <a:avLst/>
@@ -26811,14 +29841,14 @@
       </p:sp>
       <p:sp>
         <p:nvSpPr>
-          <p:cNvPr id="322" name="Rectangle 114"/>
+          <p:cNvPr id="363" name="Rectangle 114"/>
           <p:cNvSpPr/>
           <p:nvPr/>
         </p:nvSpPr>
         <p:spPr>
           <a:xfrm>
             <a:off x="914400" y="0"/>
-            <a:ext cx="16920" cy="6856560"/>
+            <a:ext cx="16560" cy="6856200"/>
           </a:xfrm>
           <a:prstGeom prst="rect">
             <a:avLst/>
@@ -26871,14 +29901,14 @@
       </p:sp>
       <p:sp>
         <p:nvSpPr>
-          <p:cNvPr id="323" name="Rectangle 115"/>
+          <p:cNvPr id="364" name="Rectangle 115"/>
           <p:cNvSpPr/>
           <p:nvPr/>
         </p:nvSpPr>
         <p:spPr>
           <a:xfrm>
             <a:off x="1828800" y="0"/>
-            <a:ext cx="16920" cy="6856560"/>
+            <a:ext cx="16560" cy="6856200"/>
           </a:xfrm>
           <a:prstGeom prst="rect">
             <a:avLst/>
@@ -26931,14 +29961,14 @@
       </p:sp>
       <p:sp>
         <p:nvSpPr>
-          <p:cNvPr id="324" name="Rectangle 116"/>
+          <p:cNvPr id="365" name="Rectangle 116"/>
           <p:cNvSpPr/>
           <p:nvPr/>
         </p:nvSpPr>
         <p:spPr>
           <a:xfrm>
             <a:off x="2743200" y="0"/>
-            <a:ext cx="16920" cy="6856560"/>
+            <a:ext cx="16560" cy="6856200"/>
           </a:xfrm>
           <a:prstGeom prst="rect">
             <a:avLst/>
@@ -26991,14 +30021,14 @@
       </p:sp>
       <p:sp>
         <p:nvSpPr>
-          <p:cNvPr id="325" name="Rectangle 117"/>
+          <p:cNvPr id="366" name="Rectangle 117"/>
           <p:cNvSpPr/>
           <p:nvPr/>
         </p:nvSpPr>
         <p:spPr>
           <a:xfrm>
             <a:off x="3657600" y="0"/>
-            <a:ext cx="16920" cy="6856560"/>
+            <a:ext cx="16560" cy="6856200"/>
           </a:xfrm>
           <a:prstGeom prst="rect">
             <a:avLst/>
@@ -27051,14 +30081,14 @@
       </p:sp>
       <p:sp>
         <p:nvSpPr>
-          <p:cNvPr id="326" name="Rectangle 118"/>
+          <p:cNvPr id="367" name="Rectangle 118"/>
           <p:cNvSpPr/>
           <p:nvPr/>
         </p:nvSpPr>
         <p:spPr>
           <a:xfrm>
             <a:off x="4572000" y="0"/>
-            <a:ext cx="16920" cy="6856560"/>
+            <a:ext cx="16560" cy="6856200"/>
           </a:xfrm>
           <a:prstGeom prst="rect">
             <a:avLst/>
@@ -27111,14 +30141,14 @@
       </p:sp>
       <p:sp>
         <p:nvSpPr>
-          <p:cNvPr id="327" name="Rectangle 119"/>
+          <p:cNvPr id="368" name="Rectangle 119"/>
           <p:cNvSpPr/>
           <p:nvPr/>
         </p:nvSpPr>
         <p:spPr>
           <a:xfrm>
             <a:off x="5486400" y="0"/>
-            <a:ext cx="16920" cy="6856560"/>
+            <a:ext cx="16560" cy="6856200"/>
           </a:xfrm>
           <a:prstGeom prst="rect">
             <a:avLst/>
@@ -27171,14 +30201,14 @@
       </p:sp>
       <p:sp>
         <p:nvSpPr>
-          <p:cNvPr id="328" name="Rectangle 120"/>
+          <p:cNvPr id="369" name="Rectangle 120"/>
           <p:cNvSpPr/>
           <p:nvPr/>
         </p:nvSpPr>
         <p:spPr>
           <a:xfrm>
             <a:off x="6400800" y="0"/>
-            <a:ext cx="16920" cy="6856560"/>
+            <a:ext cx="16560" cy="6856200"/>
           </a:xfrm>
           <a:prstGeom prst="rect">
             <a:avLst/>
@@ -27231,14 +30261,14 @@
       </p:sp>
       <p:sp>
         <p:nvSpPr>
-          <p:cNvPr id="329" name="Rectangle 121"/>
+          <p:cNvPr id="370" name="Rectangle 121"/>
           <p:cNvSpPr/>
           <p:nvPr/>
         </p:nvSpPr>
         <p:spPr>
           <a:xfrm>
             <a:off x="7315200" y="0"/>
-            <a:ext cx="16920" cy="6856560"/>
+            <a:ext cx="16560" cy="6856200"/>
           </a:xfrm>
           <a:prstGeom prst="rect">
             <a:avLst/>
@@ -27291,14 +30321,14 @@
       </p:sp>
       <p:sp>
         <p:nvSpPr>
-          <p:cNvPr id="330" name="Rectangle 122"/>
+          <p:cNvPr id="371" name="Rectangle 122"/>
           <p:cNvSpPr/>
           <p:nvPr/>
         </p:nvSpPr>
         <p:spPr>
           <a:xfrm>
             <a:off x="8229600" y="0"/>
-            <a:ext cx="16920" cy="6856560"/>
+            <a:ext cx="16560" cy="6856200"/>
           </a:xfrm>
           <a:prstGeom prst="rect">
             <a:avLst/>
@@ -27351,14 +30381,14 @@
       </p:sp>
       <p:sp>
         <p:nvSpPr>
-          <p:cNvPr id="331" name="Rectangle 123"/>
+          <p:cNvPr id="372" name="Rectangle 123"/>
           <p:cNvSpPr/>
           <p:nvPr/>
         </p:nvSpPr>
         <p:spPr>
           <a:xfrm>
             <a:off x="9144000" y="0"/>
-            <a:ext cx="16920" cy="6856560"/>
+            <a:ext cx="16560" cy="6856200"/>
           </a:xfrm>
           <a:prstGeom prst="rect">
             <a:avLst/>
@@ -27411,14 +30441,14 @@
       </p:sp>
       <p:sp>
         <p:nvSpPr>
-          <p:cNvPr id="332" name="Rectangle 124"/>
+          <p:cNvPr id="373" name="Rectangle 124"/>
           <p:cNvSpPr/>
           <p:nvPr/>
         </p:nvSpPr>
         <p:spPr>
           <a:xfrm>
             <a:off x="10058400" y="0"/>
-            <a:ext cx="16920" cy="6856560"/>
+            <a:ext cx="16560" cy="6856200"/>
           </a:xfrm>
           <a:prstGeom prst="rect">
             <a:avLst/>
@@ -27471,14 +30501,14 @@
       </p:sp>
       <p:sp>
         <p:nvSpPr>
-          <p:cNvPr id="333" name="Rectangle 125"/>
+          <p:cNvPr id="374" name="Rectangle 125"/>
           <p:cNvSpPr/>
           <p:nvPr/>
         </p:nvSpPr>
         <p:spPr>
           <a:xfrm>
             <a:off x="10972800" y="0"/>
-            <a:ext cx="16920" cy="6856560"/>
+            <a:ext cx="16560" cy="6856200"/>
           </a:xfrm>
           <a:prstGeom prst="rect">
             <a:avLst/>
@@ -27531,14 +30561,14 @@
       </p:sp>
       <p:sp>
         <p:nvSpPr>
-          <p:cNvPr id="334" name="Rectangle 126"/>
+          <p:cNvPr id="375" name="Rectangle 126"/>
           <p:cNvSpPr/>
           <p:nvPr/>
         </p:nvSpPr>
         <p:spPr>
           <a:xfrm>
             <a:off x="11887200" y="0"/>
-            <a:ext cx="16920" cy="6856560"/>
+            <a:ext cx="16560" cy="6856200"/>
           </a:xfrm>
           <a:prstGeom prst="rect">
             <a:avLst/>
@@ -27591,14 +30621,14 @@
       </p:sp>
       <p:sp>
         <p:nvSpPr>
-          <p:cNvPr id="335" name="Rectangle 127"/>
+          <p:cNvPr id="376" name="Rectangle 127"/>
           <p:cNvSpPr/>
           <p:nvPr/>
         </p:nvSpPr>
         <p:spPr>
           <a:xfrm>
             <a:off x="0" y="0"/>
-            <a:ext cx="318600" cy="6856560"/>
+            <a:ext cx="318240" cy="6856200"/>
           </a:xfrm>
           <a:prstGeom prst="rect">
             <a:avLst/>
@@ -27651,14 +30681,14 @@
       </p:sp>
       <p:sp>
         <p:nvSpPr>
-          <p:cNvPr id="336" name="Rounded Rectangle 50"/>
+          <p:cNvPr id="377" name="Rounded Rectangle 50"/>
           <p:cNvSpPr/>
           <p:nvPr/>
         </p:nvSpPr>
         <p:spPr>
           <a:xfrm>
             <a:off x="9875520" y="365760"/>
-            <a:ext cx="2010240" cy="501480"/>
+            <a:ext cx="2009880" cy="501120"/>
           </a:xfrm>
           <a:prstGeom prst="roundRect">
             <a:avLst>
@@ -27725,7 +30755,7 @@
       </p:sp>
       <p:sp>
         <p:nvSpPr>
-          <p:cNvPr id="337" name="TextBox 21"/>
+          <p:cNvPr id="378" name="TextBox 21"/>
           <p:cNvSpPr/>
           <p:nvPr/>
         </p:nvSpPr>
@@ -27779,14 +30809,14 @@
       </p:sp>
       <p:sp>
         <p:nvSpPr>
-          <p:cNvPr id="338" name="TextBox 22"/>
+          <p:cNvPr id="379" name="TextBox 22"/>
           <p:cNvSpPr/>
           <p:nvPr/>
         </p:nvSpPr>
         <p:spPr>
           <a:xfrm>
             <a:off x="2057400" y="2074680"/>
-            <a:ext cx="6872760" cy="668520"/>
+            <a:ext cx="6872400" cy="668520"/>
           </a:xfrm>
           <a:prstGeom prst="rect">
             <a:avLst/>
@@ -27856,14 +30886,14 @@
       </p:sp>
       <p:sp>
         <p:nvSpPr>
-          <p:cNvPr id="339" name="Rounded Rectangle 51"/>
+          <p:cNvPr id="380" name="Rounded Rectangle 51"/>
           <p:cNvSpPr/>
           <p:nvPr/>
         </p:nvSpPr>
         <p:spPr>
           <a:xfrm>
             <a:off x="987480" y="3182040"/>
-            <a:ext cx="3290400" cy="2741760"/>
+            <a:ext cx="3290040" cy="2741400"/>
           </a:xfrm>
           <a:prstGeom prst="roundRect">
             <a:avLst>
@@ -27918,14 +30948,14 @@
       </p:sp>
       <p:sp>
         <p:nvSpPr>
-          <p:cNvPr id="340" name="Rounded Rectangle 52"/>
+          <p:cNvPr id="381" name="Rounded Rectangle 52"/>
           <p:cNvSpPr/>
           <p:nvPr/>
         </p:nvSpPr>
         <p:spPr>
           <a:xfrm>
             <a:off x="685800" y="2971800"/>
-            <a:ext cx="3519000" cy="3200040"/>
+            <a:ext cx="3518640" cy="3199680"/>
           </a:xfrm>
           <a:prstGeom prst="roundRect">
             <a:avLst>
@@ -28192,14 +31222,14 @@
       </p:sp>
       <p:sp>
         <p:nvSpPr>
-          <p:cNvPr id="341" name="Rounded Rectangle 53"/>
+          <p:cNvPr id="382" name="Rounded Rectangle 53"/>
           <p:cNvSpPr/>
           <p:nvPr/>
         </p:nvSpPr>
         <p:spPr>
           <a:xfrm>
             <a:off x="4507920" y="3182040"/>
-            <a:ext cx="3290400" cy="2741760"/>
+            <a:ext cx="3290040" cy="2741400"/>
           </a:xfrm>
           <a:prstGeom prst="roundRect">
             <a:avLst>
@@ -28254,14 +31284,14 @@
       </p:sp>
       <p:sp>
         <p:nvSpPr>
-          <p:cNvPr id="342" name="Rounded Rectangle 54"/>
+          <p:cNvPr id="383" name="Rounded Rectangle 54"/>
           <p:cNvSpPr/>
           <p:nvPr/>
         </p:nvSpPr>
         <p:spPr>
           <a:xfrm>
             <a:off x="4434840" y="3108960"/>
-            <a:ext cx="3290400" cy="2741760"/>
+            <a:ext cx="3290040" cy="2741400"/>
           </a:xfrm>
           <a:prstGeom prst="roundRect">
             <a:avLst>
@@ -28595,14 +31625,14 @@
       </p:sp>
       <p:sp>
         <p:nvSpPr>
-          <p:cNvPr id="343" name="Rounded Rectangle 55"/>
+          <p:cNvPr id="384" name="Rounded Rectangle 55"/>
           <p:cNvSpPr/>
           <p:nvPr/>
         </p:nvSpPr>
         <p:spPr>
           <a:xfrm>
             <a:off x="8028360" y="3182040"/>
-            <a:ext cx="3290400" cy="2741760"/>
+            <a:ext cx="3290040" cy="2741400"/>
           </a:xfrm>
           <a:prstGeom prst="roundRect">
             <a:avLst>
@@ -28657,14 +31687,14 @@
       </p:sp>
       <p:sp>
         <p:nvSpPr>
-          <p:cNvPr id="344" name="Rounded Rectangle 56"/>
+          <p:cNvPr id="385" name="Rounded Rectangle 56"/>
           <p:cNvSpPr/>
           <p:nvPr/>
         </p:nvSpPr>
         <p:spPr>
           <a:xfrm>
             <a:off x="7955280" y="2971800"/>
-            <a:ext cx="3474360" cy="2971440"/>
+            <a:ext cx="3474000" cy="2971080"/>
           </a:xfrm>
           <a:prstGeom prst="roundRect">
             <a:avLst>
@@ -28985,14 +32015,2356 @@
       </p:sp>
       <p:sp>
         <p:nvSpPr>
-          <p:cNvPr id="345" name="TextBox 23"/>
+          <p:cNvPr id="386" name="TextBox 23"/>
           <p:cNvSpPr/>
           <p:nvPr/>
         </p:nvSpPr>
         <p:spPr>
           <a:xfrm>
             <a:off x="4600080" y="6446520"/>
-            <a:ext cx="3051360" cy="363960"/>
+            <a:ext cx="3051000" cy="363960"/>
+          </a:xfrm>
+          <a:prstGeom prst="rect">
+            <a:avLst/>
+          </a:prstGeom>
+          <a:noFill/>
+          <a:ln w="0">
+            <a:noFill/>
+          </a:ln>
+        </p:spPr>
+        <p:style>
+          <a:lnRef idx="0"/>
+          <a:fillRef idx="0"/>
+          <a:effectRef idx="0"/>
+          <a:fontRef idx="minor"/>
+        </p:style>
+        <p:txBody>
+          <a:bodyPr wrap="none" lIns="90000" rIns="90000" tIns="45000" bIns="45000" anchor="t">
+            <a:spAutoFit/>
+          </a:bodyPr>
+          <a:p>
+            <a:pPr>
+              <a:lnSpc>
+                <a:spcPct val="100000"/>
+              </a:lnSpc>
+            </a:pPr>
+            <a:r>
+              <a:rPr b="0" lang="en-US" sz="1800" spc="-1" strike="noStrike">
+                <a:solidFill>
+                  <a:srgbClr val="000000"/>
+                </a:solidFill>
+                <a:latin typeface="Calibri"/>
+                <a:ea typeface="DejaVu Sans"/>
+              </a:rPr>
+              <a:t>Java • Ultra Premium Template</a:t>
+            </a:r>
+            <a:endParaRPr b="0" lang="en-US" sz="1800" spc="-1" strike="noStrike">
+              <a:solidFill>
+                <a:srgbClr val="000000"/>
+              </a:solidFill>
+              <a:latin typeface="Arial"/>
+            </a:endParaRPr>
+          </a:p>
+        </p:txBody>
+      </p:sp>
+    </p:spTree>
+  </p:cSld>
+  <mc:AlternateContent>
+    <mc:Choice Requires="p14">
+      <p:transition spd="slow" p14:dur="2000"/>
+    </mc:Choice>
+    <mc:Fallback>
+      <p:transition spd="slow"/>
+    </mc:Fallback>
+  </mc:AlternateContent>
+</p:sld>
+</file>
+
+<file path=ppt/slides/slide8.xml><?xml version="1.0" encoding="utf-8"?>
+<p:sld xmlns:a="http://schemas.openxmlformats.org/drawingml/2006/main" xmlns:p="http://schemas.openxmlformats.org/presentationml/2006/main" xmlns:r="http://schemas.openxmlformats.org/officeDocument/2006/relationships" xmlns:p14="http://schemas.microsoft.com/office/powerpoint/2010/main" xmlns:p15="http://schemas.microsoft.com/office/powerpoint/2012/main" xmlns:mc="http://schemas.openxmlformats.org/markup-compatibility/2006">
+  <p:cSld>
+    <p:spTree>
+      <p:nvGrpSpPr>
+        <p:cNvPr id="1" name=""/>
+        <p:cNvGrpSpPr/>
+        <p:nvPr/>
+      </p:nvGrpSpPr>
+      <p:grpSpPr>
+        <a:xfrm>
+          <a:off x="0" y="0"/>
+          <a:ext cx="0" cy="0"/>
+          <a:chOff x="0" y="0"/>
+          <a:chExt cx="0" cy="0"/>
+        </a:xfrm>
+      </p:grpSpPr>
+      <p:sp>
+        <p:nvSpPr>
+          <p:cNvPr id="387" name="Rectangle 128"/>
+          <p:cNvSpPr/>
+          <p:nvPr/>
+        </p:nvSpPr>
+        <p:spPr>
+          <a:xfrm>
+            <a:off x="0" y="0"/>
+            <a:ext cx="12187800" cy="6856920"/>
+          </a:xfrm>
+          <a:prstGeom prst="rect">
+            <a:avLst/>
+          </a:prstGeom>
+          <a:solidFill>
+            <a:srgbClr val="0b0b0d"/>
+          </a:solidFill>
+          <a:ln>
+            <a:noFill/>
+          </a:ln>
+          <a:effectLst>
+            <a:outerShdw blurRad="39960" dir="5400000" dist="23040" rotWithShape="0">
+              <a:srgbClr val="000000">
+                <a:alpha val="35000"/>
+              </a:srgbClr>
+            </a:outerShdw>
+          </a:effectLst>
+        </p:spPr>
+        <p:style>
+          <a:lnRef idx="1">
+            <a:schemeClr val="accent1"/>
+          </a:lnRef>
+          <a:fillRef idx="3">
+            <a:schemeClr val="accent1"/>
+          </a:fillRef>
+          <a:effectRef idx="2">
+            <a:schemeClr val="accent1"/>
+          </a:effectRef>
+          <a:fontRef idx="minor"/>
+        </p:style>
+        <p:txBody>
+          <a:bodyPr lIns="90000" rIns="90000" tIns="45000" bIns="45000" anchor="ctr">
+            <a:noAutofit/>
+          </a:bodyPr>
+          <a:p>
+            <a:endParaRPr b="0" lang="en-US" sz="1800" spc="-1" strike="noStrike">
+              <a:solidFill>
+                <a:schemeClr val="lt1"/>
+              </a:solidFill>
+              <a:latin typeface="Calibri"/>
+              <a:ea typeface="DejaVu Sans"/>
+            </a:endParaRPr>
+          </a:p>
+        </p:txBody>
+      </p:sp>
+      <p:sp>
+        <p:nvSpPr>
+          <p:cNvPr id="388" name="Rectangle 129"/>
+          <p:cNvSpPr/>
+          <p:nvPr/>
+        </p:nvSpPr>
+        <p:spPr>
+          <a:xfrm>
+            <a:off x="0" y="0"/>
+            <a:ext cx="17280" cy="6856920"/>
+          </a:xfrm>
+          <a:prstGeom prst="rect">
+            <a:avLst/>
+          </a:prstGeom>
+          <a:solidFill>
+            <a:srgbClr val="121216"/>
+          </a:solidFill>
+          <a:ln>
+            <a:noFill/>
+          </a:ln>
+          <a:effectLst>
+            <a:outerShdw blurRad="39960" dir="5400000" dist="23040" rotWithShape="0">
+              <a:srgbClr val="000000">
+                <a:alpha val="35000"/>
+              </a:srgbClr>
+            </a:outerShdw>
+          </a:effectLst>
+        </p:spPr>
+        <p:style>
+          <a:lnRef idx="1">
+            <a:schemeClr val="accent1"/>
+          </a:lnRef>
+          <a:fillRef idx="3">
+            <a:schemeClr val="accent1"/>
+          </a:fillRef>
+          <a:effectRef idx="2">
+            <a:schemeClr val="accent1"/>
+          </a:effectRef>
+          <a:fontRef idx="minor"/>
+        </p:style>
+        <p:txBody>
+          <a:bodyPr lIns="90000" rIns="90000" tIns="45000" bIns="45000" anchor="ctr">
+            <a:noAutofit/>
+          </a:bodyPr>
+          <a:p>
+            <a:endParaRPr b="0" lang="en-US" sz="1800" spc="-1" strike="noStrike">
+              <a:solidFill>
+                <a:schemeClr val="lt1"/>
+              </a:solidFill>
+              <a:latin typeface="Calibri"/>
+              <a:ea typeface="DejaVu Sans"/>
+            </a:endParaRPr>
+          </a:p>
+        </p:txBody>
+      </p:sp>
+      <p:sp>
+        <p:nvSpPr>
+          <p:cNvPr id="389" name="Rectangle 130"/>
+          <p:cNvSpPr/>
+          <p:nvPr/>
+        </p:nvSpPr>
+        <p:spPr>
+          <a:xfrm>
+            <a:off x="914400" y="0"/>
+            <a:ext cx="17280" cy="6856920"/>
+          </a:xfrm>
+          <a:prstGeom prst="rect">
+            <a:avLst/>
+          </a:prstGeom>
+          <a:solidFill>
+            <a:srgbClr val="121216"/>
+          </a:solidFill>
+          <a:ln>
+            <a:noFill/>
+          </a:ln>
+          <a:effectLst>
+            <a:outerShdw blurRad="39960" dir="5400000" dist="23040" rotWithShape="0">
+              <a:srgbClr val="000000">
+                <a:alpha val="35000"/>
+              </a:srgbClr>
+            </a:outerShdw>
+          </a:effectLst>
+        </p:spPr>
+        <p:style>
+          <a:lnRef idx="1">
+            <a:schemeClr val="accent1"/>
+          </a:lnRef>
+          <a:fillRef idx="3">
+            <a:schemeClr val="accent1"/>
+          </a:fillRef>
+          <a:effectRef idx="2">
+            <a:schemeClr val="accent1"/>
+          </a:effectRef>
+          <a:fontRef idx="minor"/>
+        </p:style>
+        <p:txBody>
+          <a:bodyPr lIns="90000" rIns="90000" tIns="45000" bIns="45000" anchor="ctr">
+            <a:noAutofit/>
+          </a:bodyPr>
+          <a:p>
+            <a:endParaRPr b="0" lang="en-US" sz="1800" spc="-1" strike="noStrike">
+              <a:solidFill>
+                <a:schemeClr val="lt1"/>
+              </a:solidFill>
+              <a:latin typeface="Calibri"/>
+              <a:ea typeface="DejaVu Sans"/>
+            </a:endParaRPr>
+          </a:p>
+        </p:txBody>
+      </p:sp>
+      <p:sp>
+        <p:nvSpPr>
+          <p:cNvPr id="390" name="Rectangle 131"/>
+          <p:cNvSpPr/>
+          <p:nvPr/>
+        </p:nvSpPr>
+        <p:spPr>
+          <a:xfrm>
+            <a:off x="1828800" y="0"/>
+            <a:ext cx="17280" cy="6856920"/>
+          </a:xfrm>
+          <a:prstGeom prst="rect">
+            <a:avLst/>
+          </a:prstGeom>
+          <a:solidFill>
+            <a:srgbClr val="121216"/>
+          </a:solidFill>
+          <a:ln>
+            <a:noFill/>
+          </a:ln>
+          <a:effectLst>
+            <a:outerShdw blurRad="39960" dir="5400000" dist="23040" rotWithShape="0">
+              <a:srgbClr val="000000">
+                <a:alpha val="35000"/>
+              </a:srgbClr>
+            </a:outerShdw>
+          </a:effectLst>
+        </p:spPr>
+        <p:style>
+          <a:lnRef idx="1">
+            <a:schemeClr val="accent1"/>
+          </a:lnRef>
+          <a:fillRef idx="3">
+            <a:schemeClr val="accent1"/>
+          </a:fillRef>
+          <a:effectRef idx="2">
+            <a:schemeClr val="accent1"/>
+          </a:effectRef>
+          <a:fontRef idx="minor"/>
+        </p:style>
+        <p:txBody>
+          <a:bodyPr lIns="90000" rIns="90000" tIns="45000" bIns="45000" anchor="ctr">
+            <a:noAutofit/>
+          </a:bodyPr>
+          <a:p>
+            <a:endParaRPr b="0" lang="en-US" sz="1800" spc="-1" strike="noStrike">
+              <a:solidFill>
+                <a:schemeClr val="lt1"/>
+              </a:solidFill>
+              <a:latin typeface="Calibri"/>
+              <a:ea typeface="DejaVu Sans"/>
+            </a:endParaRPr>
+          </a:p>
+        </p:txBody>
+      </p:sp>
+      <p:sp>
+        <p:nvSpPr>
+          <p:cNvPr id="391" name="Rectangle 132"/>
+          <p:cNvSpPr/>
+          <p:nvPr/>
+        </p:nvSpPr>
+        <p:spPr>
+          <a:xfrm>
+            <a:off x="2743200" y="0"/>
+            <a:ext cx="17280" cy="6856920"/>
+          </a:xfrm>
+          <a:prstGeom prst="rect">
+            <a:avLst/>
+          </a:prstGeom>
+          <a:solidFill>
+            <a:srgbClr val="121216"/>
+          </a:solidFill>
+          <a:ln>
+            <a:noFill/>
+          </a:ln>
+          <a:effectLst>
+            <a:outerShdw blurRad="39960" dir="5400000" dist="23040" rotWithShape="0">
+              <a:srgbClr val="000000">
+                <a:alpha val="35000"/>
+              </a:srgbClr>
+            </a:outerShdw>
+          </a:effectLst>
+        </p:spPr>
+        <p:style>
+          <a:lnRef idx="1">
+            <a:schemeClr val="accent1"/>
+          </a:lnRef>
+          <a:fillRef idx="3">
+            <a:schemeClr val="accent1"/>
+          </a:fillRef>
+          <a:effectRef idx="2">
+            <a:schemeClr val="accent1"/>
+          </a:effectRef>
+          <a:fontRef idx="minor"/>
+        </p:style>
+        <p:txBody>
+          <a:bodyPr lIns="90000" rIns="90000" tIns="45000" bIns="45000" anchor="ctr">
+            <a:noAutofit/>
+          </a:bodyPr>
+          <a:p>
+            <a:endParaRPr b="0" lang="en-US" sz="1800" spc="-1" strike="noStrike">
+              <a:solidFill>
+                <a:schemeClr val="lt1"/>
+              </a:solidFill>
+              <a:latin typeface="Calibri"/>
+              <a:ea typeface="DejaVu Sans"/>
+            </a:endParaRPr>
+          </a:p>
+        </p:txBody>
+      </p:sp>
+      <p:sp>
+        <p:nvSpPr>
+          <p:cNvPr id="392" name="Rectangle 133"/>
+          <p:cNvSpPr/>
+          <p:nvPr/>
+        </p:nvSpPr>
+        <p:spPr>
+          <a:xfrm>
+            <a:off x="3657600" y="0"/>
+            <a:ext cx="17280" cy="6856920"/>
+          </a:xfrm>
+          <a:prstGeom prst="rect">
+            <a:avLst/>
+          </a:prstGeom>
+          <a:solidFill>
+            <a:srgbClr val="121216"/>
+          </a:solidFill>
+          <a:ln>
+            <a:noFill/>
+          </a:ln>
+          <a:effectLst>
+            <a:outerShdw blurRad="39960" dir="5400000" dist="23040" rotWithShape="0">
+              <a:srgbClr val="000000">
+                <a:alpha val="35000"/>
+              </a:srgbClr>
+            </a:outerShdw>
+          </a:effectLst>
+        </p:spPr>
+        <p:style>
+          <a:lnRef idx="1">
+            <a:schemeClr val="accent1"/>
+          </a:lnRef>
+          <a:fillRef idx="3">
+            <a:schemeClr val="accent1"/>
+          </a:fillRef>
+          <a:effectRef idx="2">
+            <a:schemeClr val="accent1"/>
+          </a:effectRef>
+          <a:fontRef idx="minor"/>
+        </p:style>
+        <p:txBody>
+          <a:bodyPr lIns="90000" rIns="90000" tIns="45000" bIns="45000" anchor="ctr">
+            <a:noAutofit/>
+          </a:bodyPr>
+          <a:p>
+            <a:endParaRPr b="0" lang="en-US" sz="1800" spc="-1" strike="noStrike">
+              <a:solidFill>
+                <a:schemeClr val="lt1"/>
+              </a:solidFill>
+              <a:latin typeface="Calibri"/>
+              <a:ea typeface="DejaVu Sans"/>
+            </a:endParaRPr>
+          </a:p>
+        </p:txBody>
+      </p:sp>
+      <p:sp>
+        <p:nvSpPr>
+          <p:cNvPr id="393" name="Rectangle 134"/>
+          <p:cNvSpPr/>
+          <p:nvPr/>
+        </p:nvSpPr>
+        <p:spPr>
+          <a:xfrm>
+            <a:off x="4572000" y="0"/>
+            <a:ext cx="17280" cy="6856920"/>
+          </a:xfrm>
+          <a:prstGeom prst="rect">
+            <a:avLst/>
+          </a:prstGeom>
+          <a:solidFill>
+            <a:srgbClr val="121216"/>
+          </a:solidFill>
+          <a:ln>
+            <a:noFill/>
+          </a:ln>
+          <a:effectLst>
+            <a:outerShdw blurRad="39960" dir="5400000" dist="23040" rotWithShape="0">
+              <a:srgbClr val="000000">
+                <a:alpha val="35000"/>
+              </a:srgbClr>
+            </a:outerShdw>
+          </a:effectLst>
+        </p:spPr>
+        <p:style>
+          <a:lnRef idx="1">
+            <a:schemeClr val="accent1"/>
+          </a:lnRef>
+          <a:fillRef idx="3">
+            <a:schemeClr val="accent1"/>
+          </a:fillRef>
+          <a:effectRef idx="2">
+            <a:schemeClr val="accent1"/>
+          </a:effectRef>
+          <a:fontRef idx="minor"/>
+        </p:style>
+        <p:txBody>
+          <a:bodyPr lIns="90000" rIns="90000" tIns="45000" bIns="45000" anchor="ctr">
+            <a:noAutofit/>
+          </a:bodyPr>
+          <a:p>
+            <a:endParaRPr b="0" lang="en-US" sz="1800" spc="-1" strike="noStrike">
+              <a:solidFill>
+                <a:schemeClr val="lt1"/>
+              </a:solidFill>
+              <a:latin typeface="Calibri"/>
+              <a:ea typeface="DejaVu Sans"/>
+            </a:endParaRPr>
+          </a:p>
+        </p:txBody>
+      </p:sp>
+      <p:sp>
+        <p:nvSpPr>
+          <p:cNvPr id="394" name="Rectangle 135"/>
+          <p:cNvSpPr/>
+          <p:nvPr/>
+        </p:nvSpPr>
+        <p:spPr>
+          <a:xfrm>
+            <a:off x="5486400" y="0"/>
+            <a:ext cx="17280" cy="6856920"/>
+          </a:xfrm>
+          <a:prstGeom prst="rect">
+            <a:avLst/>
+          </a:prstGeom>
+          <a:solidFill>
+            <a:srgbClr val="121216"/>
+          </a:solidFill>
+          <a:ln>
+            <a:noFill/>
+          </a:ln>
+          <a:effectLst>
+            <a:outerShdw blurRad="39960" dir="5400000" dist="23040" rotWithShape="0">
+              <a:srgbClr val="000000">
+                <a:alpha val="35000"/>
+              </a:srgbClr>
+            </a:outerShdw>
+          </a:effectLst>
+        </p:spPr>
+        <p:style>
+          <a:lnRef idx="1">
+            <a:schemeClr val="accent1"/>
+          </a:lnRef>
+          <a:fillRef idx="3">
+            <a:schemeClr val="accent1"/>
+          </a:fillRef>
+          <a:effectRef idx="2">
+            <a:schemeClr val="accent1"/>
+          </a:effectRef>
+          <a:fontRef idx="minor"/>
+        </p:style>
+        <p:txBody>
+          <a:bodyPr lIns="90000" rIns="90000" tIns="45000" bIns="45000" anchor="ctr">
+            <a:noAutofit/>
+          </a:bodyPr>
+          <a:p>
+            <a:endParaRPr b="0" lang="en-US" sz="1800" spc="-1" strike="noStrike">
+              <a:solidFill>
+                <a:schemeClr val="lt1"/>
+              </a:solidFill>
+              <a:latin typeface="Calibri"/>
+              <a:ea typeface="DejaVu Sans"/>
+            </a:endParaRPr>
+          </a:p>
+        </p:txBody>
+      </p:sp>
+      <p:sp>
+        <p:nvSpPr>
+          <p:cNvPr id="395" name="Rectangle 136"/>
+          <p:cNvSpPr/>
+          <p:nvPr/>
+        </p:nvSpPr>
+        <p:spPr>
+          <a:xfrm>
+            <a:off x="6400800" y="0"/>
+            <a:ext cx="17280" cy="6856920"/>
+          </a:xfrm>
+          <a:prstGeom prst="rect">
+            <a:avLst/>
+          </a:prstGeom>
+          <a:solidFill>
+            <a:srgbClr val="121216"/>
+          </a:solidFill>
+          <a:ln>
+            <a:noFill/>
+          </a:ln>
+          <a:effectLst>
+            <a:outerShdw blurRad="39960" dir="5400000" dist="23040" rotWithShape="0">
+              <a:srgbClr val="000000">
+                <a:alpha val="35000"/>
+              </a:srgbClr>
+            </a:outerShdw>
+          </a:effectLst>
+        </p:spPr>
+        <p:style>
+          <a:lnRef idx="1">
+            <a:schemeClr val="accent1"/>
+          </a:lnRef>
+          <a:fillRef idx="3">
+            <a:schemeClr val="accent1"/>
+          </a:fillRef>
+          <a:effectRef idx="2">
+            <a:schemeClr val="accent1"/>
+          </a:effectRef>
+          <a:fontRef idx="minor"/>
+        </p:style>
+        <p:txBody>
+          <a:bodyPr lIns="90000" rIns="90000" tIns="45000" bIns="45000" anchor="ctr">
+            <a:noAutofit/>
+          </a:bodyPr>
+          <a:p>
+            <a:endParaRPr b="0" lang="en-US" sz="1800" spc="-1" strike="noStrike">
+              <a:solidFill>
+                <a:schemeClr val="lt1"/>
+              </a:solidFill>
+              <a:latin typeface="Calibri"/>
+              <a:ea typeface="DejaVu Sans"/>
+            </a:endParaRPr>
+          </a:p>
+        </p:txBody>
+      </p:sp>
+      <p:sp>
+        <p:nvSpPr>
+          <p:cNvPr id="396" name="Rectangle 137"/>
+          <p:cNvSpPr/>
+          <p:nvPr/>
+        </p:nvSpPr>
+        <p:spPr>
+          <a:xfrm>
+            <a:off x="7315200" y="0"/>
+            <a:ext cx="17280" cy="6856920"/>
+          </a:xfrm>
+          <a:prstGeom prst="rect">
+            <a:avLst/>
+          </a:prstGeom>
+          <a:solidFill>
+            <a:srgbClr val="121216"/>
+          </a:solidFill>
+          <a:ln>
+            <a:noFill/>
+          </a:ln>
+          <a:effectLst>
+            <a:outerShdw blurRad="39960" dir="5400000" dist="23040" rotWithShape="0">
+              <a:srgbClr val="000000">
+                <a:alpha val="35000"/>
+              </a:srgbClr>
+            </a:outerShdw>
+          </a:effectLst>
+        </p:spPr>
+        <p:style>
+          <a:lnRef idx="1">
+            <a:schemeClr val="accent1"/>
+          </a:lnRef>
+          <a:fillRef idx="3">
+            <a:schemeClr val="accent1"/>
+          </a:fillRef>
+          <a:effectRef idx="2">
+            <a:schemeClr val="accent1"/>
+          </a:effectRef>
+          <a:fontRef idx="minor"/>
+        </p:style>
+        <p:txBody>
+          <a:bodyPr lIns="90000" rIns="90000" tIns="45000" bIns="45000" anchor="ctr">
+            <a:noAutofit/>
+          </a:bodyPr>
+          <a:p>
+            <a:endParaRPr b="0" lang="en-US" sz="1800" spc="-1" strike="noStrike">
+              <a:solidFill>
+                <a:schemeClr val="lt1"/>
+              </a:solidFill>
+              <a:latin typeface="Calibri"/>
+              <a:ea typeface="DejaVu Sans"/>
+            </a:endParaRPr>
+          </a:p>
+        </p:txBody>
+      </p:sp>
+      <p:sp>
+        <p:nvSpPr>
+          <p:cNvPr id="397" name="Rectangle 138"/>
+          <p:cNvSpPr/>
+          <p:nvPr/>
+        </p:nvSpPr>
+        <p:spPr>
+          <a:xfrm>
+            <a:off x="8229600" y="0"/>
+            <a:ext cx="17280" cy="6856920"/>
+          </a:xfrm>
+          <a:prstGeom prst="rect">
+            <a:avLst/>
+          </a:prstGeom>
+          <a:solidFill>
+            <a:srgbClr val="121216"/>
+          </a:solidFill>
+          <a:ln>
+            <a:noFill/>
+          </a:ln>
+          <a:effectLst>
+            <a:outerShdw blurRad="39960" dir="5400000" dist="23040" rotWithShape="0">
+              <a:srgbClr val="000000">
+                <a:alpha val="35000"/>
+              </a:srgbClr>
+            </a:outerShdw>
+          </a:effectLst>
+        </p:spPr>
+        <p:style>
+          <a:lnRef idx="1">
+            <a:schemeClr val="accent1"/>
+          </a:lnRef>
+          <a:fillRef idx="3">
+            <a:schemeClr val="accent1"/>
+          </a:fillRef>
+          <a:effectRef idx="2">
+            <a:schemeClr val="accent1"/>
+          </a:effectRef>
+          <a:fontRef idx="minor"/>
+        </p:style>
+        <p:txBody>
+          <a:bodyPr lIns="90000" rIns="90000" tIns="45000" bIns="45000" anchor="ctr">
+            <a:noAutofit/>
+          </a:bodyPr>
+          <a:p>
+            <a:endParaRPr b="0" lang="en-US" sz="1800" spc="-1" strike="noStrike">
+              <a:solidFill>
+                <a:schemeClr val="lt1"/>
+              </a:solidFill>
+              <a:latin typeface="Calibri"/>
+              <a:ea typeface="DejaVu Sans"/>
+            </a:endParaRPr>
+          </a:p>
+        </p:txBody>
+      </p:sp>
+      <p:sp>
+        <p:nvSpPr>
+          <p:cNvPr id="398" name="Rectangle 139"/>
+          <p:cNvSpPr/>
+          <p:nvPr/>
+        </p:nvSpPr>
+        <p:spPr>
+          <a:xfrm>
+            <a:off x="9144000" y="0"/>
+            <a:ext cx="17280" cy="6856920"/>
+          </a:xfrm>
+          <a:prstGeom prst="rect">
+            <a:avLst/>
+          </a:prstGeom>
+          <a:solidFill>
+            <a:srgbClr val="121216"/>
+          </a:solidFill>
+          <a:ln>
+            <a:noFill/>
+          </a:ln>
+          <a:effectLst>
+            <a:outerShdw blurRad="39960" dir="5400000" dist="23040" rotWithShape="0">
+              <a:srgbClr val="000000">
+                <a:alpha val="35000"/>
+              </a:srgbClr>
+            </a:outerShdw>
+          </a:effectLst>
+        </p:spPr>
+        <p:style>
+          <a:lnRef idx="1">
+            <a:schemeClr val="accent1"/>
+          </a:lnRef>
+          <a:fillRef idx="3">
+            <a:schemeClr val="accent1"/>
+          </a:fillRef>
+          <a:effectRef idx="2">
+            <a:schemeClr val="accent1"/>
+          </a:effectRef>
+          <a:fontRef idx="minor"/>
+        </p:style>
+        <p:txBody>
+          <a:bodyPr lIns="90000" rIns="90000" tIns="45000" bIns="45000" anchor="ctr">
+            <a:noAutofit/>
+          </a:bodyPr>
+          <a:p>
+            <a:endParaRPr b="0" lang="en-US" sz="1800" spc="-1" strike="noStrike">
+              <a:solidFill>
+                <a:schemeClr val="lt1"/>
+              </a:solidFill>
+              <a:latin typeface="Calibri"/>
+              <a:ea typeface="DejaVu Sans"/>
+            </a:endParaRPr>
+          </a:p>
+        </p:txBody>
+      </p:sp>
+      <p:sp>
+        <p:nvSpPr>
+          <p:cNvPr id="399" name="Rectangle 140"/>
+          <p:cNvSpPr/>
+          <p:nvPr/>
+        </p:nvSpPr>
+        <p:spPr>
+          <a:xfrm>
+            <a:off x="10058400" y="0"/>
+            <a:ext cx="17280" cy="6856920"/>
+          </a:xfrm>
+          <a:prstGeom prst="rect">
+            <a:avLst/>
+          </a:prstGeom>
+          <a:solidFill>
+            <a:srgbClr val="121216"/>
+          </a:solidFill>
+          <a:ln>
+            <a:noFill/>
+          </a:ln>
+          <a:effectLst>
+            <a:outerShdw blurRad="39960" dir="5400000" dist="23040" rotWithShape="0">
+              <a:srgbClr val="000000">
+                <a:alpha val="35000"/>
+              </a:srgbClr>
+            </a:outerShdw>
+          </a:effectLst>
+        </p:spPr>
+        <p:style>
+          <a:lnRef idx="1">
+            <a:schemeClr val="accent1"/>
+          </a:lnRef>
+          <a:fillRef idx="3">
+            <a:schemeClr val="accent1"/>
+          </a:fillRef>
+          <a:effectRef idx="2">
+            <a:schemeClr val="accent1"/>
+          </a:effectRef>
+          <a:fontRef idx="minor"/>
+        </p:style>
+        <p:txBody>
+          <a:bodyPr lIns="90000" rIns="90000" tIns="45000" bIns="45000" anchor="ctr">
+            <a:noAutofit/>
+          </a:bodyPr>
+          <a:p>
+            <a:endParaRPr b="0" lang="en-US" sz="1800" spc="-1" strike="noStrike">
+              <a:solidFill>
+                <a:schemeClr val="lt1"/>
+              </a:solidFill>
+              <a:latin typeface="Calibri"/>
+              <a:ea typeface="DejaVu Sans"/>
+            </a:endParaRPr>
+          </a:p>
+        </p:txBody>
+      </p:sp>
+      <p:sp>
+        <p:nvSpPr>
+          <p:cNvPr id="400" name="Rectangle 141"/>
+          <p:cNvSpPr/>
+          <p:nvPr/>
+        </p:nvSpPr>
+        <p:spPr>
+          <a:xfrm>
+            <a:off x="10972800" y="0"/>
+            <a:ext cx="17280" cy="6856920"/>
+          </a:xfrm>
+          <a:prstGeom prst="rect">
+            <a:avLst/>
+          </a:prstGeom>
+          <a:solidFill>
+            <a:srgbClr val="121216"/>
+          </a:solidFill>
+          <a:ln>
+            <a:noFill/>
+          </a:ln>
+          <a:effectLst>
+            <a:outerShdw blurRad="39960" dir="5400000" dist="23040" rotWithShape="0">
+              <a:srgbClr val="000000">
+                <a:alpha val="35000"/>
+              </a:srgbClr>
+            </a:outerShdw>
+          </a:effectLst>
+        </p:spPr>
+        <p:style>
+          <a:lnRef idx="1">
+            <a:schemeClr val="accent1"/>
+          </a:lnRef>
+          <a:fillRef idx="3">
+            <a:schemeClr val="accent1"/>
+          </a:fillRef>
+          <a:effectRef idx="2">
+            <a:schemeClr val="accent1"/>
+          </a:effectRef>
+          <a:fontRef idx="minor"/>
+        </p:style>
+        <p:txBody>
+          <a:bodyPr lIns="90000" rIns="90000" tIns="45000" bIns="45000" anchor="ctr">
+            <a:noAutofit/>
+          </a:bodyPr>
+          <a:p>
+            <a:endParaRPr b="0" lang="en-US" sz="1800" spc="-1" strike="noStrike">
+              <a:solidFill>
+                <a:schemeClr val="lt1"/>
+              </a:solidFill>
+              <a:latin typeface="Calibri"/>
+              <a:ea typeface="DejaVu Sans"/>
+            </a:endParaRPr>
+          </a:p>
+        </p:txBody>
+      </p:sp>
+      <p:sp>
+        <p:nvSpPr>
+          <p:cNvPr id="401" name="Rectangle 142"/>
+          <p:cNvSpPr/>
+          <p:nvPr/>
+        </p:nvSpPr>
+        <p:spPr>
+          <a:xfrm>
+            <a:off x="11887200" y="0"/>
+            <a:ext cx="17280" cy="6856920"/>
+          </a:xfrm>
+          <a:prstGeom prst="rect">
+            <a:avLst/>
+          </a:prstGeom>
+          <a:solidFill>
+            <a:srgbClr val="121216"/>
+          </a:solidFill>
+          <a:ln>
+            <a:noFill/>
+          </a:ln>
+          <a:effectLst>
+            <a:outerShdw blurRad="39960" dir="5400000" dist="23040" rotWithShape="0">
+              <a:srgbClr val="000000">
+                <a:alpha val="35000"/>
+              </a:srgbClr>
+            </a:outerShdw>
+          </a:effectLst>
+        </p:spPr>
+        <p:style>
+          <a:lnRef idx="1">
+            <a:schemeClr val="accent1"/>
+          </a:lnRef>
+          <a:fillRef idx="3">
+            <a:schemeClr val="accent1"/>
+          </a:fillRef>
+          <a:effectRef idx="2">
+            <a:schemeClr val="accent1"/>
+          </a:effectRef>
+          <a:fontRef idx="minor"/>
+        </p:style>
+        <p:txBody>
+          <a:bodyPr lIns="90000" rIns="90000" tIns="45000" bIns="45000" anchor="ctr">
+            <a:noAutofit/>
+          </a:bodyPr>
+          <a:p>
+            <a:endParaRPr b="0" lang="en-US" sz="1800" spc="-1" strike="noStrike">
+              <a:solidFill>
+                <a:schemeClr val="lt1"/>
+              </a:solidFill>
+              <a:latin typeface="Calibri"/>
+              <a:ea typeface="DejaVu Sans"/>
+            </a:endParaRPr>
+          </a:p>
+        </p:txBody>
+      </p:sp>
+      <p:sp>
+        <p:nvSpPr>
+          <p:cNvPr id="402" name="Rectangle 143"/>
+          <p:cNvSpPr/>
+          <p:nvPr/>
+        </p:nvSpPr>
+        <p:spPr>
+          <a:xfrm>
+            <a:off x="0" y="0"/>
+            <a:ext cx="318960" cy="6856920"/>
+          </a:xfrm>
+          <a:prstGeom prst="rect">
+            <a:avLst/>
+          </a:prstGeom>
+          <a:solidFill>
+            <a:srgbClr val="ff8c00"/>
+          </a:solidFill>
+          <a:ln>
+            <a:noFill/>
+          </a:ln>
+          <a:effectLst>
+            <a:outerShdw blurRad="39960" dir="5400000" dist="23040" rotWithShape="0">
+              <a:srgbClr val="000000">
+                <a:alpha val="35000"/>
+              </a:srgbClr>
+            </a:outerShdw>
+          </a:effectLst>
+        </p:spPr>
+        <p:style>
+          <a:lnRef idx="1">
+            <a:schemeClr val="accent1"/>
+          </a:lnRef>
+          <a:fillRef idx="3">
+            <a:schemeClr val="accent1"/>
+          </a:fillRef>
+          <a:effectRef idx="2">
+            <a:schemeClr val="accent1"/>
+          </a:effectRef>
+          <a:fontRef idx="minor"/>
+        </p:style>
+        <p:txBody>
+          <a:bodyPr lIns="90000" rIns="90000" tIns="45000" bIns="45000" anchor="ctr">
+            <a:noAutofit/>
+          </a:bodyPr>
+          <a:p>
+            <a:endParaRPr b="0" lang="en-US" sz="1800" spc="-1" strike="noStrike">
+              <a:solidFill>
+                <a:schemeClr val="lt1"/>
+              </a:solidFill>
+              <a:latin typeface="Calibri"/>
+              <a:ea typeface="DejaVu Sans"/>
+            </a:endParaRPr>
+          </a:p>
+        </p:txBody>
+      </p:sp>
+      <p:sp>
+        <p:nvSpPr>
+          <p:cNvPr id="403" name="Rounded Rectangle 57"/>
+          <p:cNvSpPr/>
+          <p:nvPr/>
+        </p:nvSpPr>
+        <p:spPr>
+          <a:xfrm>
+            <a:off x="9875520" y="365760"/>
+            <a:ext cx="2010600" cy="501840"/>
+          </a:xfrm>
+          <a:prstGeom prst="roundRect">
+            <a:avLst>
+              <a:gd name="adj" fmla="val 16667"/>
+            </a:avLst>
+          </a:prstGeom>
+          <a:solidFill>
+            <a:srgbClr val="1e1e24"/>
+          </a:solidFill>
+          <a:ln>
+            <a:solidFill>
+              <a:srgbClr val="ff8c00"/>
+            </a:solidFill>
+            <a:round/>
+          </a:ln>
+          <a:effectLst>
+            <a:outerShdw blurRad="39960" dir="5400000" dist="23040" rotWithShape="0">
+              <a:srgbClr val="000000">
+                <a:alpha val="35000"/>
+              </a:srgbClr>
+            </a:outerShdw>
+          </a:effectLst>
+        </p:spPr>
+        <p:style>
+          <a:lnRef idx="1">
+            <a:schemeClr val="accent1"/>
+          </a:lnRef>
+          <a:fillRef idx="3">
+            <a:schemeClr val="accent1"/>
+          </a:fillRef>
+          <a:effectRef idx="2">
+            <a:schemeClr val="accent1"/>
+          </a:effectRef>
+          <a:fontRef idx="minor"/>
+        </p:style>
+        <p:txBody>
+          <a:bodyPr lIns="90000" rIns="90000" tIns="45000" bIns="45000" anchor="ctr">
+            <a:noAutofit/>
+          </a:bodyPr>
+          <a:p>
+            <a:pPr algn="ctr">
+              <a:lnSpc>
+                <a:spcPct val="100000"/>
+              </a:lnSpc>
+            </a:pPr>
+            <a:r>
+              <a:rPr b="1" lang="en-US" sz="1400" spc="-1" strike="noStrike">
+                <a:solidFill>
+                  <a:srgbClr val="ffb45a"/>
+                </a:solidFill>
+                <a:latin typeface="Calibri"/>
+                <a:ea typeface="DejaVu Sans"/>
+              </a:rPr>
+              <a:t>JAVA CORE</a:t>
+            </a:r>
+            <a:endParaRPr b="0" lang="en-US" sz="1400" spc="-1" strike="noStrike">
+              <a:solidFill>
+                <a:srgbClr val="ffffff"/>
+              </a:solidFill>
+              <a:latin typeface="Arial"/>
+            </a:endParaRPr>
+          </a:p>
+        </p:txBody>
+      </p:sp>
+      <p:sp>
+        <p:nvSpPr>
+          <p:cNvPr id="404" name="TextBox 24"/>
+          <p:cNvSpPr/>
+          <p:nvPr/>
+        </p:nvSpPr>
+        <p:spPr>
+          <a:xfrm>
+            <a:off x="2999160" y="1005840"/>
+            <a:ext cx="4975560" cy="820800"/>
+          </a:xfrm>
+          <a:prstGeom prst="rect">
+            <a:avLst/>
+          </a:prstGeom>
+          <a:noFill/>
+          <a:ln w="0">
+            <a:noFill/>
+          </a:ln>
+        </p:spPr>
+        <p:style>
+          <a:lnRef idx="0"/>
+          <a:fillRef idx="0"/>
+          <a:effectRef idx="0"/>
+          <a:fontRef idx="minor"/>
+        </p:style>
+        <p:txBody>
+          <a:bodyPr wrap="none" lIns="90000" rIns="90000" tIns="45000" bIns="45000" anchor="t">
+            <a:spAutoFit/>
+          </a:bodyPr>
+          <a:p>
+            <a:pPr>
+              <a:lnSpc>
+                <a:spcPct val="100000"/>
+              </a:lnSpc>
+            </a:pPr>
+            <a:r>
+              <a:rPr b="1" lang="en-US" sz="4800" spc="-1" strike="noStrike">
+                <a:solidFill>
+                  <a:srgbClr val="f5f5f5"/>
+                </a:solidFill>
+                <a:latin typeface="Calibri"/>
+                <a:ea typeface="DejaVu Sans"/>
+              </a:rPr>
+              <a:t>WRAPPER CLASSES</a:t>
+            </a:r>
+            <a:endParaRPr b="0" lang="en-US" sz="4800" spc="-1" strike="noStrike">
+              <a:solidFill>
+                <a:srgbClr val="000000"/>
+              </a:solidFill>
+              <a:latin typeface="Arial"/>
+            </a:endParaRPr>
+          </a:p>
+        </p:txBody>
+      </p:sp>
+      <p:sp>
+        <p:nvSpPr>
+          <p:cNvPr id="405" name="TextBox 25"/>
+          <p:cNvSpPr/>
+          <p:nvPr/>
+        </p:nvSpPr>
+        <p:spPr>
+          <a:xfrm>
+            <a:off x="1873440" y="2194560"/>
+            <a:ext cx="7225200" cy="379080"/>
+          </a:xfrm>
+          <a:prstGeom prst="rect">
+            <a:avLst/>
+          </a:prstGeom>
+          <a:noFill/>
+          <a:ln w="0">
+            <a:noFill/>
+          </a:ln>
+        </p:spPr>
+        <p:style>
+          <a:lnRef idx="0"/>
+          <a:fillRef idx="0"/>
+          <a:effectRef idx="0"/>
+          <a:fontRef idx="minor"/>
+        </p:style>
+        <p:txBody>
+          <a:bodyPr wrap="none" lIns="90000" rIns="90000" tIns="45000" bIns="45000" anchor="t">
+            <a:spAutoFit/>
+          </a:bodyPr>
+          <a:p>
+            <a:pPr>
+              <a:lnSpc>
+                <a:spcPct val="100000"/>
+              </a:lnSpc>
+            </a:pPr>
+            <a:r>
+              <a:rPr b="0" lang="en-US" sz="1900" spc="-1" strike="noStrike">
+                <a:solidFill>
+                  <a:srgbClr val="aaaaaa"/>
+                </a:solidFill>
+                <a:latin typeface="Calibri"/>
+                <a:ea typeface="DejaVu Sans"/>
+              </a:rPr>
+              <a:t>Wrapper classes allow primitive data types to be used as objects in Java.</a:t>
+            </a:r>
+            <a:endParaRPr b="0" lang="en-US" sz="1900" spc="-1" strike="noStrike">
+              <a:solidFill>
+                <a:srgbClr val="000000"/>
+              </a:solidFill>
+              <a:latin typeface="Arial"/>
+            </a:endParaRPr>
+          </a:p>
+        </p:txBody>
+      </p:sp>
+      <p:sp>
+        <p:nvSpPr>
+          <p:cNvPr id="406" name="Rounded Rectangle 58"/>
+          <p:cNvSpPr/>
+          <p:nvPr/>
+        </p:nvSpPr>
+        <p:spPr>
+          <a:xfrm>
+            <a:off x="987480" y="3182040"/>
+            <a:ext cx="3290760" cy="2742120"/>
+          </a:xfrm>
+          <a:prstGeom prst="roundRect">
+            <a:avLst>
+              <a:gd name="adj" fmla="val 16667"/>
+            </a:avLst>
+          </a:prstGeom>
+          <a:solidFill>
+            <a:srgbClr val="08080a"/>
+          </a:solidFill>
+          <a:ln>
+            <a:noFill/>
+          </a:ln>
+          <a:effectLst>
+            <a:outerShdw blurRad="39960" dir="5400000" dist="23040" rotWithShape="0">
+              <a:srgbClr val="000000">
+                <a:alpha val="35000"/>
+              </a:srgbClr>
+            </a:outerShdw>
+          </a:effectLst>
+        </p:spPr>
+        <p:style>
+          <a:lnRef idx="1">
+            <a:schemeClr val="accent1"/>
+          </a:lnRef>
+          <a:fillRef idx="3">
+            <a:schemeClr val="accent1"/>
+          </a:fillRef>
+          <a:effectRef idx="2">
+            <a:schemeClr val="accent1"/>
+          </a:effectRef>
+          <a:fontRef idx="minor"/>
+        </p:style>
+        <p:txBody>
+          <a:bodyPr lIns="90000" rIns="90000" tIns="45000" bIns="45000" anchor="ctr">
+            <a:noAutofit/>
+          </a:bodyPr>
+          <a:p>
+            <a:endParaRPr b="0" lang="en-US" sz="1800" spc="-1" strike="noStrike">
+              <a:solidFill>
+                <a:schemeClr val="lt1"/>
+              </a:solidFill>
+              <a:latin typeface="Calibri"/>
+              <a:ea typeface="DejaVu Sans"/>
+            </a:endParaRPr>
+          </a:p>
+        </p:txBody>
+      </p:sp>
+      <p:sp>
+        <p:nvSpPr>
+          <p:cNvPr id="407" name="Rounded Rectangle 59"/>
+          <p:cNvSpPr/>
+          <p:nvPr/>
+        </p:nvSpPr>
+        <p:spPr>
+          <a:xfrm>
+            <a:off x="685800" y="3108960"/>
+            <a:ext cx="3519360" cy="3291840"/>
+          </a:xfrm>
+          <a:prstGeom prst="roundRect">
+            <a:avLst>
+              <a:gd name="adj" fmla="val 16667"/>
+            </a:avLst>
+          </a:prstGeom>
+          <a:solidFill>
+            <a:srgbClr val="16161c"/>
+          </a:solidFill>
+          <a:ln>
+            <a:solidFill>
+              <a:srgbClr val="464655"/>
+            </a:solidFill>
+            <a:round/>
+          </a:ln>
+          <a:effectLst>
+            <a:outerShdw blurRad="39960" dir="5400000" dist="23040" rotWithShape="0">
+              <a:srgbClr val="000000">
+                <a:alpha val="35000"/>
+              </a:srgbClr>
+            </a:outerShdw>
+          </a:effectLst>
+        </p:spPr>
+        <p:style>
+          <a:lnRef idx="1">
+            <a:schemeClr val="accent1"/>
+          </a:lnRef>
+          <a:fillRef idx="3">
+            <a:schemeClr val="accent1"/>
+          </a:fillRef>
+          <a:effectRef idx="2">
+            <a:schemeClr val="accent1"/>
+          </a:effectRef>
+          <a:fontRef idx="minor"/>
+        </p:style>
+        <p:txBody>
+          <a:bodyPr lIns="90000" rIns="90000" tIns="45000" bIns="45000" anchor="ctr">
+            <a:noAutofit/>
+          </a:bodyPr>
+          <a:p>
+            <a:pPr>
+              <a:lnSpc>
+                <a:spcPct val="100000"/>
+              </a:lnSpc>
+            </a:pPr>
+            <a:r>
+              <a:rPr b="0" lang="en-US" sz="1400" spc="-1" strike="noStrike">
+                <a:solidFill>
+                  <a:schemeClr val="lt1"/>
+                </a:solidFill>
+                <a:latin typeface="Calibri"/>
+                <a:ea typeface="DejaVu Sans"/>
+              </a:rPr>
+              <a:t>Wrapper classes convert primitive values into objects.</a:t>
+            </a:r>
+            <a:endParaRPr b="0" lang="en-US" sz="1400" spc="-1" strike="noStrike">
+              <a:solidFill>
+                <a:srgbClr val="ffffff"/>
+              </a:solidFill>
+              <a:latin typeface="Arial"/>
+            </a:endParaRPr>
+          </a:p>
+          <a:p>
+            <a:pPr>
+              <a:lnSpc>
+                <a:spcPct val="100000"/>
+              </a:lnSpc>
+            </a:pPr>
+            <a:r>
+              <a:rPr b="0" lang="en-US" sz="1400" spc="-1" strike="noStrike">
+                <a:solidFill>
+                  <a:schemeClr val="lt1"/>
+                </a:solidFill>
+                <a:latin typeface="Calibri"/>
+                <a:ea typeface="DejaVu Sans"/>
+              </a:rPr>
+              <a:t>They are commonly used in collections and object-based operations.</a:t>
+            </a:r>
+            <a:endParaRPr b="0" lang="en-US" sz="1400" spc="-1" strike="noStrike">
+              <a:solidFill>
+                <a:srgbClr val="ffffff"/>
+              </a:solidFill>
+              <a:latin typeface="Arial"/>
+            </a:endParaRPr>
+          </a:p>
+          <a:p>
+            <a:pPr>
+              <a:lnSpc>
+                <a:spcPct val="100000"/>
+              </a:lnSpc>
+            </a:pPr>
+            <a:endParaRPr b="0" lang="en-US" sz="1400" spc="-1" strike="noStrike">
+              <a:solidFill>
+                <a:srgbClr val="ffffff"/>
+              </a:solidFill>
+              <a:latin typeface="Arial"/>
+            </a:endParaRPr>
+          </a:p>
+          <a:p>
+            <a:pPr>
+              <a:lnSpc>
+                <a:spcPct val="100000"/>
+              </a:lnSpc>
+            </a:pPr>
+            <a:r>
+              <a:rPr b="1" lang="en-US" sz="1400" spc="-1" strike="noStrike">
+                <a:solidFill>
+                  <a:schemeClr val="lt1"/>
+                </a:solidFill>
+                <a:latin typeface="Calibri"/>
+                <a:ea typeface="DejaVu Sans"/>
+              </a:rPr>
+              <a:t>Primitive</a:t>
+            </a:r>
+            <a:r>
+              <a:rPr b="0" lang="en-US" sz="1400" spc="-1" strike="noStrike">
+                <a:solidFill>
+                  <a:schemeClr val="lt1"/>
+                </a:solidFill>
+                <a:latin typeface="Calibri"/>
+                <a:ea typeface="DejaVu Sans"/>
+              </a:rPr>
+              <a:t> → Wrapper examples</a:t>
+            </a:r>
+            <a:endParaRPr b="0" lang="en-US" sz="1400" spc="-1" strike="noStrike">
+              <a:solidFill>
+                <a:srgbClr val="ffffff"/>
+              </a:solidFill>
+              <a:latin typeface="Arial"/>
+            </a:endParaRPr>
+          </a:p>
+          <a:p>
+            <a:pPr>
+              <a:lnSpc>
+                <a:spcPct val="100000"/>
+              </a:lnSpc>
+            </a:pPr>
+            <a:endParaRPr b="0" lang="en-US" sz="1400" spc="-1" strike="noStrike">
+              <a:solidFill>
+                <a:srgbClr val="ffffff"/>
+              </a:solidFill>
+              <a:latin typeface="Arial"/>
+            </a:endParaRPr>
+          </a:p>
+          <a:p>
+            <a:pPr>
+              <a:lnSpc>
+                <a:spcPct val="100000"/>
+              </a:lnSpc>
+            </a:pPr>
+            <a:r>
+              <a:rPr b="1" lang="en-US" sz="1400" spc="-1" strike="noStrike">
+                <a:solidFill>
+                  <a:schemeClr val="lt1"/>
+                </a:solidFill>
+                <a:latin typeface="Calibri"/>
+                <a:ea typeface="DejaVu Sans"/>
+              </a:rPr>
+              <a:t>int</a:t>
+            </a:r>
+            <a:r>
+              <a:rPr b="0" lang="en-US" sz="1400" spc="-1" strike="noStrike">
+                <a:solidFill>
+                  <a:schemeClr val="lt1"/>
+                </a:solidFill>
+                <a:latin typeface="Calibri"/>
+                <a:ea typeface="DejaVu Sans"/>
+              </a:rPr>
+              <a:t> → Integer</a:t>
+            </a:r>
+            <a:endParaRPr b="0" lang="en-US" sz="1400" spc="-1" strike="noStrike">
+              <a:solidFill>
+                <a:srgbClr val="ffffff"/>
+              </a:solidFill>
+              <a:latin typeface="Arial"/>
+            </a:endParaRPr>
+          </a:p>
+          <a:p>
+            <a:pPr>
+              <a:lnSpc>
+                <a:spcPct val="100000"/>
+              </a:lnSpc>
+            </a:pPr>
+            <a:r>
+              <a:rPr b="1" lang="en-US" sz="1400" spc="-1" strike="noStrike">
+                <a:solidFill>
+                  <a:schemeClr val="lt1"/>
+                </a:solidFill>
+                <a:latin typeface="Calibri"/>
+                <a:ea typeface="DejaVu Sans"/>
+              </a:rPr>
+              <a:t>double</a:t>
+            </a:r>
+            <a:r>
+              <a:rPr b="0" lang="en-US" sz="1400" spc="-1" strike="noStrike">
+                <a:solidFill>
+                  <a:schemeClr val="lt1"/>
+                </a:solidFill>
+                <a:latin typeface="Calibri"/>
+                <a:ea typeface="DejaVu Sans"/>
+              </a:rPr>
+              <a:t> → Double</a:t>
+            </a:r>
+            <a:endParaRPr b="0" lang="en-US" sz="1400" spc="-1" strike="noStrike">
+              <a:solidFill>
+                <a:srgbClr val="ffffff"/>
+              </a:solidFill>
+              <a:latin typeface="Arial"/>
+            </a:endParaRPr>
+          </a:p>
+          <a:p>
+            <a:pPr>
+              <a:lnSpc>
+                <a:spcPct val="100000"/>
+              </a:lnSpc>
+            </a:pPr>
+            <a:r>
+              <a:rPr b="1" lang="en-US" sz="1400" spc="-1" strike="noStrike">
+                <a:solidFill>
+                  <a:schemeClr val="lt1"/>
+                </a:solidFill>
+                <a:latin typeface="Calibri"/>
+                <a:ea typeface="DejaVu Sans"/>
+              </a:rPr>
+              <a:t>char</a:t>
+            </a:r>
+            <a:r>
+              <a:rPr b="0" lang="en-US" sz="1400" spc="-1" strike="noStrike">
+                <a:solidFill>
+                  <a:schemeClr val="lt1"/>
+                </a:solidFill>
+                <a:latin typeface="Calibri"/>
+                <a:ea typeface="DejaVu Sans"/>
+              </a:rPr>
+              <a:t> → Character</a:t>
+            </a:r>
+            <a:endParaRPr b="0" lang="en-US" sz="1400" spc="-1" strike="noStrike">
+              <a:solidFill>
+                <a:srgbClr val="ffffff"/>
+              </a:solidFill>
+              <a:latin typeface="Arial"/>
+            </a:endParaRPr>
+          </a:p>
+          <a:p>
+            <a:pPr>
+              <a:lnSpc>
+                <a:spcPct val="100000"/>
+              </a:lnSpc>
+            </a:pPr>
+            <a:r>
+              <a:rPr b="1" lang="en-US" sz="1400" spc="-1" strike="noStrike">
+                <a:solidFill>
+                  <a:schemeClr val="lt1"/>
+                </a:solidFill>
+                <a:latin typeface="Calibri"/>
+                <a:ea typeface="DejaVu Sans"/>
+              </a:rPr>
+              <a:t>boolean</a:t>
+            </a:r>
+            <a:r>
+              <a:rPr b="0" lang="en-US" sz="1400" spc="-1" strike="noStrike">
+                <a:solidFill>
+                  <a:schemeClr val="lt1"/>
+                </a:solidFill>
+                <a:latin typeface="Calibri"/>
+                <a:ea typeface="DejaVu Sans"/>
+              </a:rPr>
+              <a:t> → Boolean</a:t>
+            </a:r>
+            <a:endParaRPr b="0" lang="en-US" sz="1400" spc="-1" strike="noStrike">
+              <a:solidFill>
+                <a:srgbClr val="ffffff"/>
+              </a:solidFill>
+              <a:latin typeface="Arial"/>
+            </a:endParaRPr>
+          </a:p>
+          <a:p>
+            <a:pPr>
+              <a:lnSpc>
+                <a:spcPct val="100000"/>
+              </a:lnSpc>
+            </a:pPr>
+            <a:endParaRPr b="0" lang="en-US" sz="1400" spc="-1" strike="noStrike">
+              <a:solidFill>
+                <a:srgbClr val="ffffff"/>
+              </a:solidFill>
+              <a:latin typeface="Arial"/>
+            </a:endParaRPr>
+          </a:p>
+          <a:p>
+            <a:pPr>
+              <a:lnSpc>
+                <a:spcPct val="100000"/>
+              </a:lnSpc>
+            </a:pPr>
+            <a:r>
+              <a:rPr b="1" lang="en-US" sz="1400" spc="-1" strike="noStrike">
+                <a:solidFill>
+                  <a:schemeClr val="lt1"/>
+                </a:solidFill>
+                <a:latin typeface="Calibri"/>
+                <a:ea typeface="DejaVu Sans"/>
+              </a:rPr>
+              <a:t>Wrapper classes</a:t>
+            </a:r>
+            <a:r>
+              <a:rPr b="0" lang="en-US" sz="1400" spc="-1" strike="noStrike">
+                <a:solidFill>
+                  <a:schemeClr val="lt1"/>
+                </a:solidFill>
+                <a:latin typeface="Calibri"/>
+                <a:ea typeface="DejaVu Sans"/>
+              </a:rPr>
+              <a:t> provide useful methods for conversion and data handling.</a:t>
+            </a:r>
+            <a:endParaRPr b="0" lang="en-US" sz="1400" spc="-1" strike="noStrike">
+              <a:solidFill>
+                <a:srgbClr val="ffffff"/>
+              </a:solidFill>
+              <a:latin typeface="Arial"/>
+            </a:endParaRPr>
+          </a:p>
+        </p:txBody>
+      </p:sp>
+      <p:sp>
+        <p:nvSpPr>
+          <p:cNvPr id="408" name="Rounded Rectangle 60"/>
+          <p:cNvSpPr/>
+          <p:nvPr/>
+        </p:nvSpPr>
+        <p:spPr>
+          <a:xfrm>
+            <a:off x="4507920" y="3182040"/>
+            <a:ext cx="3290760" cy="2742120"/>
+          </a:xfrm>
+          <a:prstGeom prst="roundRect">
+            <a:avLst>
+              <a:gd name="adj" fmla="val 16667"/>
+            </a:avLst>
+          </a:prstGeom>
+          <a:solidFill>
+            <a:srgbClr val="08080a"/>
+          </a:solidFill>
+          <a:ln>
+            <a:noFill/>
+          </a:ln>
+          <a:effectLst>
+            <a:outerShdw blurRad="39960" dir="5400000" dist="23040" rotWithShape="0">
+              <a:srgbClr val="000000">
+                <a:alpha val="35000"/>
+              </a:srgbClr>
+            </a:outerShdw>
+          </a:effectLst>
+        </p:spPr>
+        <p:style>
+          <a:lnRef idx="1">
+            <a:schemeClr val="accent1"/>
+          </a:lnRef>
+          <a:fillRef idx="3">
+            <a:schemeClr val="accent1"/>
+          </a:fillRef>
+          <a:effectRef idx="2">
+            <a:schemeClr val="accent1"/>
+          </a:effectRef>
+          <a:fontRef idx="minor"/>
+        </p:style>
+        <p:txBody>
+          <a:bodyPr lIns="90000" rIns="90000" tIns="45000" bIns="45000" anchor="ctr">
+            <a:noAutofit/>
+          </a:bodyPr>
+          <a:p>
+            <a:endParaRPr b="0" lang="en-US" sz="1800" spc="-1" strike="noStrike">
+              <a:solidFill>
+                <a:schemeClr val="lt1"/>
+              </a:solidFill>
+              <a:latin typeface="Calibri"/>
+              <a:ea typeface="DejaVu Sans"/>
+            </a:endParaRPr>
+          </a:p>
+        </p:txBody>
+      </p:sp>
+      <p:sp>
+        <p:nvSpPr>
+          <p:cNvPr id="409" name="Rounded Rectangle 61"/>
+          <p:cNvSpPr/>
+          <p:nvPr/>
+        </p:nvSpPr>
+        <p:spPr>
+          <a:xfrm>
+            <a:off x="4434840" y="3108960"/>
+            <a:ext cx="3290760" cy="2742120"/>
+          </a:xfrm>
+          <a:prstGeom prst="roundRect">
+            <a:avLst>
+              <a:gd name="adj" fmla="val 16667"/>
+            </a:avLst>
+          </a:prstGeom>
+          <a:solidFill>
+            <a:srgbClr val="16161c"/>
+          </a:solidFill>
+          <a:ln>
+            <a:solidFill>
+              <a:srgbClr val="464655"/>
+            </a:solidFill>
+            <a:round/>
+          </a:ln>
+          <a:effectLst>
+            <a:outerShdw blurRad="39960" dir="5400000" dist="23040" rotWithShape="0">
+              <a:srgbClr val="000000">
+                <a:alpha val="35000"/>
+              </a:srgbClr>
+            </a:outerShdw>
+          </a:effectLst>
+        </p:spPr>
+        <p:style>
+          <a:lnRef idx="1">
+            <a:schemeClr val="accent1"/>
+          </a:lnRef>
+          <a:fillRef idx="3">
+            <a:schemeClr val="accent1"/>
+          </a:fillRef>
+          <a:effectRef idx="2">
+            <a:schemeClr val="accent1"/>
+          </a:effectRef>
+          <a:fontRef idx="minor"/>
+        </p:style>
+        <p:txBody>
+          <a:bodyPr lIns="90000" rIns="90000" tIns="45000" bIns="45000" anchor="ctr">
+            <a:noAutofit/>
+          </a:bodyPr>
+          <a:p>
+            <a:pPr>
+              <a:lnSpc>
+                <a:spcPct val="100000"/>
+              </a:lnSpc>
+            </a:pPr>
+            <a:r>
+              <a:rPr b="0" lang="en-US" sz="1300" spc="-1" strike="noStrike">
+                <a:solidFill>
+                  <a:schemeClr val="lt1"/>
+                </a:solidFill>
+                <a:latin typeface="Calibri"/>
+                <a:ea typeface="DejaVu Sans"/>
+              </a:rPr>
+              <a:t>Primitive Value</a:t>
+            </a:r>
+            <a:endParaRPr b="0" lang="en-US" sz="1300" spc="-1" strike="noStrike">
+              <a:solidFill>
+                <a:srgbClr val="ffffff"/>
+              </a:solidFill>
+              <a:latin typeface="Arial"/>
+            </a:endParaRPr>
+          </a:p>
+          <a:p>
+            <a:pPr>
+              <a:lnSpc>
+                <a:spcPct val="100000"/>
+              </a:lnSpc>
+            </a:pPr>
+            <a:r>
+              <a:rPr b="0" lang="en-US" sz="1300" spc="-1" strike="noStrike">
+                <a:solidFill>
+                  <a:schemeClr val="lt1"/>
+                </a:solidFill>
+                <a:latin typeface="Calibri"/>
+                <a:ea typeface="DejaVu Sans"/>
+              </a:rPr>
+              <a:t>↓</a:t>
+            </a:r>
+            <a:endParaRPr b="0" lang="en-US" sz="1300" spc="-1" strike="noStrike">
+              <a:solidFill>
+                <a:srgbClr val="ffffff"/>
+              </a:solidFill>
+              <a:latin typeface="Arial"/>
+            </a:endParaRPr>
+          </a:p>
+          <a:p>
+            <a:pPr>
+              <a:lnSpc>
+                <a:spcPct val="100000"/>
+              </a:lnSpc>
+            </a:pPr>
+            <a:r>
+              <a:rPr b="0" lang="en-US" sz="1300" spc="-1" strike="noStrike">
+                <a:solidFill>
+                  <a:schemeClr val="lt1"/>
+                </a:solidFill>
+                <a:latin typeface="Calibri"/>
+                <a:ea typeface="DejaVu Sans"/>
+              </a:rPr>
+              <a:t>Wrapper Class Conversion</a:t>
+            </a:r>
+            <a:endParaRPr b="0" lang="en-US" sz="1300" spc="-1" strike="noStrike">
+              <a:solidFill>
+                <a:srgbClr val="ffffff"/>
+              </a:solidFill>
+              <a:latin typeface="Arial"/>
+            </a:endParaRPr>
+          </a:p>
+          <a:p>
+            <a:pPr>
+              <a:lnSpc>
+                <a:spcPct val="100000"/>
+              </a:lnSpc>
+            </a:pPr>
+            <a:r>
+              <a:rPr b="0" lang="en-US" sz="1300" spc="-1" strike="noStrike">
+                <a:solidFill>
+                  <a:schemeClr val="lt1"/>
+                </a:solidFill>
+                <a:latin typeface="Calibri"/>
+                <a:ea typeface="DejaVu Sans"/>
+              </a:rPr>
+              <a:t>↓</a:t>
+            </a:r>
+            <a:endParaRPr b="0" lang="en-US" sz="1300" spc="-1" strike="noStrike">
+              <a:solidFill>
+                <a:srgbClr val="ffffff"/>
+              </a:solidFill>
+              <a:latin typeface="Arial"/>
+            </a:endParaRPr>
+          </a:p>
+          <a:p>
+            <a:pPr>
+              <a:lnSpc>
+                <a:spcPct val="100000"/>
+              </a:lnSpc>
+            </a:pPr>
+            <a:r>
+              <a:rPr b="0" lang="en-US" sz="1300" spc="-1" strike="noStrike">
+                <a:solidFill>
+                  <a:schemeClr val="lt1"/>
+                </a:solidFill>
+                <a:latin typeface="Calibri"/>
+                <a:ea typeface="DejaVu Sans"/>
+              </a:rPr>
+              <a:t>Object Representation</a:t>
+            </a:r>
+            <a:endParaRPr b="0" lang="en-US" sz="1300" spc="-1" strike="noStrike">
+              <a:solidFill>
+                <a:srgbClr val="ffffff"/>
+              </a:solidFill>
+              <a:latin typeface="Arial"/>
+            </a:endParaRPr>
+          </a:p>
+          <a:p>
+            <a:pPr>
+              <a:lnSpc>
+                <a:spcPct val="100000"/>
+              </a:lnSpc>
+            </a:pPr>
+            <a:r>
+              <a:rPr b="0" lang="en-US" sz="1300" spc="-1" strike="noStrike">
+                <a:solidFill>
+                  <a:schemeClr val="lt1"/>
+                </a:solidFill>
+                <a:latin typeface="Calibri"/>
+                <a:ea typeface="DejaVu Sans"/>
+              </a:rPr>
+              <a:t>↓</a:t>
+            </a:r>
+            <a:endParaRPr b="0" lang="en-US" sz="1300" spc="-1" strike="noStrike">
+              <a:solidFill>
+                <a:srgbClr val="ffffff"/>
+              </a:solidFill>
+              <a:latin typeface="Arial"/>
+            </a:endParaRPr>
+          </a:p>
+          <a:p>
+            <a:pPr>
+              <a:lnSpc>
+                <a:spcPct val="100000"/>
+              </a:lnSpc>
+            </a:pPr>
+            <a:r>
+              <a:rPr b="0" lang="en-US" sz="1300" spc="-1" strike="noStrike">
+                <a:solidFill>
+                  <a:schemeClr val="lt1"/>
+                </a:solidFill>
+                <a:latin typeface="Calibri"/>
+                <a:ea typeface="DejaVu Sans"/>
+              </a:rPr>
+              <a:t>Use in Collections / Methods</a:t>
+            </a:r>
+            <a:endParaRPr b="0" lang="en-US" sz="1300" spc="-1" strike="noStrike">
+              <a:solidFill>
+                <a:srgbClr val="ffffff"/>
+              </a:solidFill>
+              <a:latin typeface="Arial"/>
+            </a:endParaRPr>
+          </a:p>
+          <a:p>
+            <a:pPr>
+              <a:lnSpc>
+                <a:spcPct val="100000"/>
+              </a:lnSpc>
+            </a:pPr>
+            <a:endParaRPr b="0" lang="en-US" sz="1300" spc="-1" strike="noStrike">
+              <a:solidFill>
+                <a:srgbClr val="ffffff"/>
+              </a:solidFill>
+              <a:latin typeface="Arial"/>
+            </a:endParaRPr>
+          </a:p>
+          <a:p>
+            <a:pPr>
+              <a:lnSpc>
+                <a:spcPct val="100000"/>
+              </a:lnSpc>
+            </a:pPr>
+            <a:r>
+              <a:rPr b="0" lang="en-US" sz="1300" spc="-1" strike="noStrike">
+                <a:solidFill>
+                  <a:schemeClr val="lt1"/>
+                </a:solidFill>
+                <a:latin typeface="Calibri"/>
+                <a:ea typeface="DejaVu Sans"/>
+              </a:rPr>
+              <a:t>Examples</a:t>
+            </a:r>
+            <a:endParaRPr b="0" lang="en-US" sz="1300" spc="-1" strike="noStrike">
+              <a:solidFill>
+                <a:srgbClr val="ffffff"/>
+              </a:solidFill>
+              <a:latin typeface="Arial"/>
+            </a:endParaRPr>
+          </a:p>
+          <a:p>
+            <a:pPr>
+              <a:lnSpc>
+                <a:spcPct val="100000"/>
+              </a:lnSpc>
+            </a:pPr>
+            <a:endParaRPr b="0" lang="en-US" sz="1300" spc="-1" strike="noStrike">
+              <a:solidFill>
+                <a:srgbClr val="ffffff"/>
+              </a:solidFill>
+              <a:latin typeface="Arial"/>
+            </a:endParaRPr>
+          </a:p>
+          <a:p>
+            <a:pPr>
+              <a:lnSpc>
+                <a:spcPct val="100000"/>
+              </a:lnSpc>
+            </a:pPr>
+            <a:r>
+              <a:rPr b="0" lang="en-US" sz="1300" spc="-1" strike="noStrike">
+                <a:solidFill>
+                  <a:schemeClr val="lt1"/>
+                </a:solidFill>
+                <a:latin typeface="Calibri"/>
+                <a:ea typeface="DejaVu Sans"/>
+              </a:rPr>
+              <a:t>int → Integer</a:t>
+            </a:r>
+            <a:endParaRPr b="0" lang="en-US" sz="1300" spc="-1" strike="noStrike">
+              <a:solidFill>
+                <a:srgbClr val="ffffff"/>
+              </a:solidFill>
+              <a:latin typeface="Arial"/>
+            </a:endParaRPr>
+          </a:p>
+          <a:p>
+            <a:pPr>
+              <a:lnSpc>
+                <a:spcPct val="100000"/>
+              </a:lnSpc>
+            </a:pPr>
+            <a:r>
+              <a:rPr b="0" lang="en-US" sz="1300" spc="-1" strike="noStrike">
+                <a:solidFill>
+                  <a:schemeClr val="lt1"/>
+                </a:solidFill>
+                <a:latin typeface="Calibri"/>
+                <a:ea typeface="DejaVu Sans"/>
+              </a:rPr>
+              <a:t>double → Double</a:t>
+            </a:r>
+            <a:endParaRPr b="0" lang="en-US" sz="1300" spc="-1" strike="noStrike">
+              <a:solidFill>
+                <a:srgbClr val="ffffff"/>
+              </a:solidFill>
+              <a:latin typeface="Arial"/>
+            </a:endParaRPr>
+          </a:p>
+          <a:p>
+            <a:pPr>
+              <a:lnSpc>
+                <a:spcPct val="100000"/>
+              </a:lnSpc>
+            </a:pPr>
+            <a:r>
+              <a:rPr b="0" lang="en-US" sz="1300" spc="-1" strike="noStrike">
+                <a:solidFill>
+                  <a:schemeClr val="lt1"/>
+                </a:solidFill>
+                <a:latin typeface="Calibri"/>
+                <a:ea typeface="DejaVu Sans"/>
+              </a:rPr>
+              <a:t>boolean → Boolean</a:t>
+            </a:r>
+            <a:endParaRPr b="0" lang="en-US" sz="1300" spc="-1" strike="noStrike">
+              <a:solidFill>
+                <a:srgbClr val="ffffff"/>
+              </a:solidFill>
+              <a:latin typeface="Arial"/>
+            </a:endParaRPr>
+          </a:p>
+        </p:txBody>
+      </p:sp>
+      <p:sp>
+        <p:nvSpPr>
+          <p:cNvPr id="410" name="Rounded Rectangle 62"/>
+          <p:cNvSpPr/>
+          <p:nvPr/>
+        </p:nvSpPr>
+        <p:spPr>
+          <a:xfrm>
+            <a:off x="8028360" y="3182040"/>
+            <a:ext cx="3290760" cy="2742120"/>
+          </a:xfrm>
+          <a:prstGeom prst="roundRect">
+            <a:avLst>
+              <a:gd name="adj" fmla="val 16667"/>
+            </a:avLst>
+          </a:prstGeom>
+          <a:solidFill>
+            <a:srgbClr val="08080a"/>
+          </a:solidFill>
+          <a:ln>
+            <a:noFill/>
+          </a:ln>
+          <a:effectLst>
+            <a:outerShdw blurRad="39960" dir="5400000" dist="23040" rotWithShape="0">
+              <a:srgbClr val="000000">
+                <a:alpha val="35000"/>
+              </a:srgbClr>
+            </a:outerShdw>
+          </a:effectLst>
+        </p:spPr>
+        <p:style>
+          <a:lnRef idx="1">
+            <a:schemeClr val="accent1"/>
+          </a:lnRef>
+          <a:fillRef idx="3">
+            <a:schemeClr val="accent1"/>
+          </a:fillRef>
+          <a:effectRef idx="2">
+            <a:schemeClr val="accent1"/>
+          </a:effectRef>
+          <a:fontRef idx="minor"/>
+        </p:style>
+        <p:txBody>
+          <a:bodyPr lIns="90000" rIns="90000" tIns="45000" bIns="45000" anchor="ctr">
+            <a:noAutofit/>
+          </a:bodyPr>
+          <a:p>
+            <a:endParaRPr b="0" lang="en-US" sz="1800" spc="-1" strike="noStrike">
+              <a:solidFill>
+                <a:schemeClr val="lt1"/>
+              </a:solidFill>
+              <a:latin typeface="Calibri"/>
+              <a:ea typeface="DejaVu Sans"/>
+            </a:endParaRPr>
+          </a:p>
+        </p:txBody>
+      </p:sp>
+      <p:sp>
+        <p:nvSpPr>
+          <p:cNvPr id="411" name="Rounded Rectangle 63"/>
+          <p:cNvSpPr/>
+          <p:nvPr/>
+        </p:nvSpPr>
+        <p:spPr>
+          <a:xfrm>
+            <a:off x="7955280" y="3108960"/>
+            <a:ext cx="3474720" cy="3291840"/>
+          </a:xfrm>
+          <a:prstGeom prst="roundRect">
+            <a:avLst>
+              <a:gd name="adj" fmla="val 16667"/>
+            </a:avLst>
+          </a:prstGeom>
+          <a:solidFill>
+            <a:srgbClr val="16161c"/>
+          </a:solidFill>
+          <a:ln>
+            <a:solidFill>
+              <a:srgbClr val="464655"/>
+            </a:solidFill>
+            <a:round/>
+          </a:ln>
+          <a:effectLst>
+            <a:outerShdw blurRad="39960" dir="5400000" dist="23040" rotWithShape="0">
+              <a:srgbClr val="000000">
+                <a:alpha val="35000"/>
+              </a:srgbClr>
+            </a:outerShdw>
+          </a:effectLst>
+        </p:spPr>
+        <p:style>
+          <a:lnRef idx="1">
+            <a:schemeClr val="accent1"/>
+          </a:lnRef>
+          <a:fillRef idx="3">
+            <a:schemeClr val="accent1"/>
+          </a:fillRef>
+          <a:effectRef idx="2">
+            <a:schemeClr val="accent1"/>
+          </a:effectRef>
+          <a:fontRef idx="minor"/>
+        </p:style>
+        <p:txBody>
+          <a:bodyPr lIns="90000" rIns="90000" tIns="45000" bIns="45000" anchor="ctr">
+            <a:noAutofit/>
+          </a:bodyPr>
+          <a:p>
+            <a:pPr algn="ctr">
+              <a:lnSpc>
+                <a:spcPct val="100000"/>
+              </a:lnSpc>
+            </a:pPr>
+            <a:r>
+              <a:rPr b="0" lang="en-US" sz="1300" spc="-1" strike="noStrike">
+                <a:solidFill>
+                  <a:srgbClr val="78ffc8"/>
+                </a:solidFill>
+                <a:latin typeface="Consolas"/>
+                <a:ea typeface="DejaVu Sans"/>
+              </a:rPr>
+              <a:t>public class WrapperExample {</a:t>
+            </a:r>
+            <a:endParaRPr b="0" lang="en-US" sz="1300" spc="-1" strike="noStrike">
+              <a:solidFill>
+                <a:srgbClr val="ffffff"/>
+              </a:solidFill>
+              <a:latin typeface="Arial"/>
+            </a:endParaRPr>
+          </a:p>
+          <a:p>
+            <a:pPr algn="ctr">
+              <a:lnSpc>
+                <a:spcPct val="100000"/>
+              </a:lnSpc>
+            </a:pPr>
+            <a:r>
+              <a:rPr b="0" lang="en-US" sz="1300" spc="-1" strike="noStrike">
+                <a:solidFill>
+                  <a:srgbClr val="78ffc8"/>
+                </a:solidFill>
+                <a:latin typeface="Consolas"/>
+                <a:ea typeface="DejaVu Sans"/>
+              </a:rPr>
+              <a:t>    </a:t>
+            </a:r>
+            <a:r>
+              <a:rPr b="0" lang="en-US" sz="1300" spc="-1" strike="noStrike">
+                <a:solidFill>
+                  <a:srgbClr val="78ffc8"/>
+                </a:solidFill>
+                <a:latin typeface="Consolas"/>
+                <a:ea typeface="DejaVu Sans"/>
+              </a:rPr>
+              <a:t>public static void main(String[] args) {</a:t>
+            </a:r>
+            <a:endParaRPr b="0" lang="en-US" sz="1300" spc="-1" strike="noStrike">
+              <a:solidFill>
+                <a:srgbClr val="ffffff"/>
+              </a:solidFill>
+              <a:latin typeface="Arial"/>
+            </a:endParaRPr>
+          </a:p>
+          <a:p>
+            <a:pPr algn="ctr">
+              <a:lnSpc>
+                <a:spcPct val="100000"/>
+              </a:lnSpc>
+            </a:pPr>
+            <a:r>
+              <a:rPr b="0" lang="en-US" sz="1300" spc="-1" strike="noStrike">
+                <a:solidFill>
+                  <a:srgbClr val="78ffc8"/>
+                </a:solidFill>
+                <a:latin typeface="Consolas"/>
+                <a:ea typeface="DejaVu Sans"/>
+              </a:rPr>
+              <a:t>        </a:t>
+            </a:r>
+            <a:r>
+              <a:rPr b="0" lang="en-US" sz="1300" spc="-1" strike="noStrike">
+                <a:solidFill>
+                  <a:srgbClr val="78ffc8"/>
+                </a:solidFill>
+                <a:latin typeface="Consolas"/>
+                <a:ea typeface="DejaVu Sans"/>
+              </a:rPr>
+              <a:t>int number = 10;</a:t>
+            </a:r>
+            <a:endParaRPr b="0" lang="en-US" sz="1300" spc="-1" strike="noStrike">
+              <a:solidFill>
+                <a:srgbClr val="ffffff"/>
+              </a:solidFill>
+              <a:latin typeface="Arial"/>
+            </a:endParaRPr>
+          </a:p>
+          <a:p>
+            <a:pPr algn="ctr">
+              <a:lnSpc>
+                <a:spcPct val="100000"/>
+              </a:lnSpc>
+            </a:pPr>
+            <a:r>
+              <a:rPr b="0" lang="en-US" sz="1300" spc="-1" strike="noStrike">
+                <a:solidFill>
+                  <a:srgbClr val="78ffc8"/>
+                </a:solidFill>
+                <a:latin typeface="Consolas"/>
+                <a:ea typeface="DejaVu Sans"/>
+              </a:rPr>
+              <a:t>        </a:t>
+            </a:r>
+            <a:r>
+              <a:rPr b="0" lang="en-US" sz="1300" spc="-1" strike="noStrike">
+                <a:solidFill>
+                  <a:srgbClr val="78ffc8"/>
+                </a:solidFill>
+                <a:latin typeface="Consolas"/>
+                <a:ea typeface="DejaVu Sans"/>
+              </a:rPr>
+              <a:t>Integer wrapperNumber = number;   // autoboxing</a:t>
+            </a:r>
+            <a:endParaRPr b="0" lang="en-US" sz="1300" spc="-1" strike="noStrike">
+              <a:solidFill>
+                <a:srgbClr val="ffffff"/>
+              </a:solidFill>
+              <a:latin typeface="Arial"/>
+            </a:endParaRPr>
+          </a:p>
+          <a:p>
+            <a:pPr algn="ctr">
+              <a:lnSpc>
+                <a:spcPct val="100000"/>
+              </a:lnSpc>
+            </a:pPr>
+            <a:r>
+              <a:rPr b="0" lang="en-US" sz="1300" spc="-1" strike="noStrike">
+                <a:solidFill>
+                  <a:srgbClr val="78ffc8"/>
+                </a:solidFill>
+                <a:latin typeface="Consolas"/>
+                <a:ea typeface="DejaVu Sans"/>
+              </a:rPr>
+              <a:t>        </a:t>
+            </a:r>
+            <a:r>
+              <a:rPr b="0" lang="en-US" sz="1300" spc="-1" strike="noStrike">
+                <a:solidFill>
+                  <a:srgbClr val="78ffc8"/>
+                </a:solidFill>
+                <a:latin typeface="Consolas"/>
+                <a:ea typeface="DejaVu Sans"/>
+              </a:rPr>
+              <a:t>double price = 19.99;</a:t>
+            </a:r>
+            <a:endParaRPr b="0" lang="en-US" sz="1300" spc="-1" strike="noStrike">
+              <a:solidFill>
+                <a:srgbClr val="ffffff"/>
+              </a:solidFill>
+              <a:latin typeface="Arial"/>
+            </a:endParaRPr>
+          </a:p>
+          <a:p>
+            <a:pPr algn="ctr">
+              <a:lnSpc>
+                <a:spcPct val="100000"/>
+              </a:lnSpc>
+            </a:pPr>
+            <a:r>
+              <a:rPr b="0" lang="en-US" sz="1300" spc="-1" strike="noStrike">
+                <a:solidFill>
+                  <a:srgbClr val="78ffc8"/>
+                </a:solidFill>
+                <a:latin typeface="Consolas"/>
+                <a:ea typeface="DejaVu Sans"/>
+              </a:rPr>
+              <a:t>        </a:t>
+            </a:r>
+            <a:r>
+              <a:rPr b="0" lang="en-US" sz="1300" spc="-1" strike="noStrike">
+                <a:solidFill>
+                  <a:srgbClr val="78ffc8"/>
+                </a:solidFill>
+                <a:latin typeface="Consolas"/>
+                <a:ea typeface="DejaVu Sans"/>
+              </a:rPr>
+              <a:t>Double wrapperPrice = price;</a:t>
+            </a:r>
+            <a:endParaRPr b="0" lang="en-US" sz="1300" spc="-1" strike="noStrike">
+              <a:solidFill>
+                <a:srgbClr val="ffffff"/>
+              </a:solidFill>
+              <a:latin typeface="Arial"/>
+            </a:endParaRPr>
+          </a:p>
+          <a:p>
+            <a:pPr algn="ctr">
+              <a:lnSpc>
+                <a:spcPct val="100000"/>
+              </a:lnSpc>
+            </a:pPr>
+            <a:r>
+              <a:rPr b="0" lang="en-US" sz="1300" spc="-1" strike="noStrike">
+                <a:solidFill>
+                  <a:srgbClr val="78ffc8"/>
+                </a:solidFill>
+                <a:latin typeface="Consolas"/>
+                <a:ea typeface="DejaVu Sans"/>
+              </a:rPr>
+              <a:t>        </a:t>
+            </a:r>
+            <a:r>
+              <a:rPr b="0" lang="en-US" sz="1300" spc="-1" strike="noStrike">
+                <a:solidFill>
+                  <a:srgbClr val="78ffc8"/>
+                </a:solidFill>
+                <a:latin typeface="Consolas"/>
+                <a:ea typeface="DejaVu Sans"/>
+              </a:rPr>
+              <a:t>System.out.println(wrapperNumber);</a:t>
+            </a:r>
+            <a:endParaRPr b="0" lang="en-US" sz="1300" spc="-1" strike="noStrike">
+              <a:solidFill>
+                <a:srgbClr val="ffffff"/>
+              </a:solidFill>
+              <a:latin typeface="Arial"/>
+            </a:endParaRPr>
+          </a:p>
+          <a:p>
+            <a:pPr algn="ctr">
+              <a:lnSpc>
+                <a:spcPct val="100000"/>
+              </a:lnSpc>
+            </a:pPr>
+            <a:r>
+              <a:rPr b="0" lang="en-US" sz="1300" spc="-1" strike="noStrike">
+                <a:solidFill>
+                  <a:srgbClr val="78ffc8"/>
+                </a:solidFill>
+                <a:latin typeface="Consolas"/>
+                <a:ea typeface="DejaVu Sans"/>
+              </a:rPr>
+              <a:t>        </a:t>
+            </a:r>
+            <a:r>
+              <a:rPr b="0" lang="en-US" sz="1300" spc="-1" strike="noStrike">
+                <a:solidFill>
+                  <a:srgbClr val="78ffc8"/>
+                </a:solidFill>
+                <a:latin typeface="Consolas"/>
+                <a:ea typeface="DejaVu Sans"/>
+              </a:rPr>
+              <a:t>System.out.println(wrapperPrice);</a:t>
+            </a:r>
+            <a:endParaRPr b="0" lang="en-US" sz="1300" spc="-1" strike="noStrike">
+              <a:solidFill>
+                <a:srgbClr val="ffffff"/>
+              </a:solidFill>
+              <a:latin typeface="Arial"/>
+            </a:endParaRPr>
+          </a:p>
+          <a:p>
+            <a:pPr algn="ctr">
+              <a:lnSpc>
+                <a:spcPct val="100000"/>
+              </a:lnSpc>
+            </a:pPr>
+            <a:r>
+              <a:rPr b="0" lang="en-US" sz="1300" spc="-1" strike="noStrike">
+                <a:solidFill>
+                  <a:srgbClr val="78ffc8"/>
+                </a:solidFill>
+                <a:latin typeface="Consolas"/>
+                <a:ea typeface="DejaVu Sans"/>
+              </a:rPr>
+              <a:t>    </a:t>
+            </a:r>
+            <a:r>
+              <a:rPr b="0" lang="en-US" sz="1300" spc="-1" strike="noStrike">
+                <a:solidFill>
+                  <a:srgbClr val="78ffc8"/>
+                </a:solidFill>
+                <a:latin typeface="Consolas"/>
+                <a:ea typeface="DejaVu Sans"/>
+              </a:rPr>
+              <a:t>}</a:t>
+            </a:r>
+            <a:endParaRPr b="0" lang="en-US" sz="1300" spc="-1" strike="noStrike">
+              <a:solidFill>
+                <a:srgbClr val="ffffff"/>
+              </a:solidFill>
+              <a:latin typeface="Arial"/>
+            </a:endParaRPr>
+          </a:p>
+          <a:p>
+            <a:pPr algn="ctr">
+              <a:lnSpc>
+                <a:spcPct val="100000"/>
+              </a:lnSpc>
+            </a:pPr>
+            <a:r>
+              <a:rPr b="0" lang="en-US" sz="1300" spc="-1" strike="noStrike">
+                <a:solidFill>
+                  <a:srgbClr val="78ffc8"/>
+                </a:solidFill>
+                <a:latin typeface="Consolas"/>
+                <a:ea typeface="DejaVu Sans"/>
+              </a:rPr>
+              <a:t>}</a:t>
+            </a:r>
+            <a:endParaRPr b="0" lang="en-US" sz="1300" spc="-1" strike="noStrike">
+              <a:solidFill>
+                <a:srgbClr val="ffffff"/>
+              </a:solidFill>
+              <a:latin typeface="Arial"/>
+            </a:endParaRPr>
+          </a:p>
+        </p:txBody>
+      </p:sp>
+      <p:sp>
+        <p:nvSpPr>
+          <p:cNvPr id="412" name="TextBox 27"/>
+          <p:cNvSpPr/>
+          <p:nvPr/>
+        </p:nvSpPr>
+        <p:spPr>
+          <a:xfrm>
+            <a:off x="4600080" y="6446520"/>
+            <a:ext cx="3051720" cy="363960"/>
           </a:xfrm>
           <a:prstGeom prst="rect">
             <a:avLst/>
@@ -29952,4 +35324,230 @@
     </a:fmtScheme>
   </a:themeElements>
 </a:theme>
+</file>
+
+<file path=ppt/theme/theme5.xml><?xml version="1.0" encoding="utf-8"?>
+<a:theme xmlns:a="http://schemas.openxmlformats.org/drawingml/2006/main" name="Office Theme">
+  <a:themeElements>
+    <a:clrScheme name="Office">
+      <a:dk1>
+        <a:sysClr val="windowText" lastClr="000000"/>
+      </a:dk1>
+      <a:lt1>
+        <a:sysClr val="window" lastClr="FFFFFF"/>
+      </a:lt1>
+      <a:dk2>
+        <a:srgbClr val="1f497d"/>
+      </a:dk2>
+      <a:lt2>
+        <a:srgbClr val="eeece1"/>
+      </a:lt2>
+      <a:accent1>
+        <a:srgbClr val="4f81bd"/>
+      </a:accent1>
+      <a:accent2>
+        <a:srgbClr val="c0504d"/>
+      </a:accent2>
+      <a:accent3>
+        <a:srgbClr val="9bbb59"/>
+      </a:accent3>
+      <a:accent4>
+        <a:srgbClr val="8064a2"/>
+      </a:accent4>
+      <a:accent5>
+        <a:srgbClr val="4bacc6"/>
+      </a:accent5>
+      <a:accent6>
+        <a:srgbClr val="f79646"/>
+      </a:accent6>
+      <a:hlink>
+        <a:srgbClr val="0000ff"/>
+      </a:hlink>
+      <a:folHlink>
+        <a:srgbClr val="800080"/>
+      </a:folHlink>
+    </a:clrScheme>
+    <a:fontScheme name="Office">
+      <a:majorFont>
+        <a:latin typeface="Arial"/>
+        <a:ea typeface="DejaVu Sans"/>
+        <a:cs typeface="DejaVu Sans"/>
+      </a:majorFont>
+      <a:minorFont>
+        <a:latin typeface="Arial"/>
+        <a:ea typeface="DejaVu Sans"/>
+        <a:cs typeface="DejaVu Sans"/>
+      </a:minorFont>
+    </a:fontScheme>
+    <a:fmtScheme name="Office">
+      <a:fillStyleLst>
+        <a:solidFill>
+          <a:schemeClr val="phClr"/>
+        </a:solidFill>
+        <a:gradFill rotWithShape="1">
+          <a:gsLst>
+            <a:gs pos="0">
+              <a:schemeClr val="phClr">
+                <a:tint val="50000"/>
+                <a:satMod val="300000"/>
+              </a:schemeClr>
+            </a:gs>
+            <a:gs pos="35000">
+              <a:schemeClr val="phClr">
+                <a:tint val="37000"/>
+                <a:satMod val="300000"/>
+              </a:schemeClr>
+            </a:gs>
+            <a:gs pos="100000">
+              <a:schemeClr val="phClr">
+                <a:tint val="15000"/>
+                <a:satMod val="350000"/>
+              </a:schemeClr>
+            </a:gs>
+          </a:gsLst>
+          <a:lin ang="16200000" scaled="1"/>
+        </a:gradFill>
+        <a:gradFill rotWithShape="1">
+          <a:gsLst>
+            <a:gs pos="0">
+              <a:schemeClr val="phClr">
+                <a:shade val="51000"/>
+                <a:satMod val="130000"/>
+              </a:schemeClr>
+            </a:gs>
+            <a:gs pos="80000">
+              <a:schemeClr val="phClr">
+                <a:shade val="93000"/>
+                <a:satMod val="130000"/>
+              </a:schemeClr>
+            </a:gs>
+            <a:gs pos="100000">
+              <a:schemeClr val="phClr">
+                <a:shade val="94000"/>
+                <a:satMod val="135000"/>
+              </a:schemeClr>
+            </a:gs>
+          </a:gsLst>
+          <a:lin ang="16200000" scaled="0"/>
+        </a:gradFill>
+      </a:fillStyleLst>
+      <a:lnStyleLst>
+        <a:ln w="9525" cap="flat" cmpd="sng" algn="ctr">
+          <a:solidFill>
+            <a:schemeClr val="phClr">
+              <a:shade val="95000"/>
+              <a:satMod val="105000"/>
+            </a:schemeClr>
+          </a:solidFill>
+          <a:prstDash val="solid"/>
+          <a:miter/>
+        </a:ln>
+        <a:ln w="25400" cap="flat" cmpd="sng" algn="ctr">
+          <a:solidFill>
+            <a:schemeClr val="phClr"/>
+          </a:solidFill>
+          <a:prstDash val="solid"/>
+          <a:miter/>
+        </a:ln>
+        <a:ln w="38100" cap="flat" cmpd="sng" algn="ctr">
+          <a:solidFill>
+            <a:schemeClr val="phClr"/>
+          </a:solidFill>
+          <a:prstDash val="solid"/>
+          <a:miter/>
+        </a:ln>
+      </a:lnStyleLst>
+      <a:effectStyleLst>
+        <a:effectStyle>
+          <a:effectLst>
+            <a:outerShdw blurRad="40000" dist="20000" dir="5400000" rotWithShape="0">
+              <a:srgbClr val="000000">
+                <a:alpha val="38000"/>
+              </a:srgbClr>
+            </a:outerShdw>
+          </a:effectLst>
+        </a:effectStyle>
+        <a:effectStyle>
+          <a:effectLst>
+            <a:outerShdw blurRad="40000" dist="23000" dir="5400000" rotWithShape="0">
+              <a:srgbClr val="000000">
+                <a:alpha val="35000"/>
+              </a:srgbClr>
+            </a:outerShdw>
+          </a:effectLst>
+        </a:effectStyle>
+        <a:effectStyle>
+          <a:effectLst>
+            <a:outerShdw blurRad="40000" dist="23000" dir="5400000" rotWithShape="0">
+              <a:srgbClr val="000000">
+                <a:alpha val="35000"/>
+              </a:srgbClr>
+            </a:outerShdw>
+          </a:effectLst>
+          <a:scene3d>
+            <a:camera prst="orthographicFront">
+              <a:rot lat="0" lon="0" rev="0"/>
+            </a:camera>
+            <a:lightRig rig="threePt" dir="t">
+              <a:rot lat="0" lon="0" rev="1200000"/>
+            </a:lightRig>
+          </a:scene3d>
+          <a:sp3d>
+            <a:bevelT w="63500" h="25400"/>
+          </a:sp3d>
+        </a:effectStyle>
+      </a:effectStyleLst>
+      <a:bgFillStyleLst>
+        <a:solidFill>
+          <a:schemeClr val="phClr"/>
+        </a:solidFill>
+        <a:gradFill rotWithShape="1">
+          <a:gsLst>
+            <a:gs pos="0">
+              <a:schemeClr val="phClr">
+                <a:tint val="40000"/>
+                <a:satMod val="350000"/>
+              </a:schemeClr>
+            </a:gs>
+            <a:gs pos="40000">
+              <a:schemeClr val="phClr">
+                <a:tint val="45000"/>
+                <a:shade val="99000"/>
+                <a:satMod val="350000"/>
+              </a:schemeClr>
+            </a:gs>
+            <a:gs pos="100000">
+              <a:schemeClr val="phClr">
+                <a:shade val="20000"/>
+                <a:satMod val="255000"/>
+              </a:schemeClr>
+            </a:gs>
+          </a:gsLst>
+          <a:path path="circle">
+            <a:fillToRect l="50000" t="-80000" r="50000" b="180000"/>
+          </a:path>
+        </a:gradFill>
+        <a:gradFill rotWithShape="1">
+          <a:gsLst>
+            <a:gs pos="0">
+              <a:schemeClr val="phClr">
+                <a:tint val="80000"/>
+                <a:satMod val="300000"/>
+              </a:schemeClr>
+            </a:gs>
+            <a:gs pos="100000">
+              <a:schemeClr val="phClr">
+                <a:shade val="30000"/>
+                <a:satMod val="200000"/>
+              </a:schemeClr>
+            </a:gs>
+          </a:gsLst>
+          <a:path path="circle">
+            <a:fillToRect l="50000" t="50000" r="50000" b="50000"/>
+          </a:path>
+        </a:gradFill>
+      </a:bgFillStyleLst>
+    </a:fmtScheme>
+  </a:themeElements>
+</a:theme>
 </file>